--- a/report/slides/related-work-2026-05-27.pptx
+++ b/report/slides/related-work-2026-05-27.pptx
@@ -2,27 +2,27 @@
 <file path=ppt/presentation.xml><?xml version="1.0" encoding="utf-8"?>
 <p:presentation xmlns:p="http://schemas.openxmlformats.org/presentationml/2006/main">
   <p:sldMasterIdLst>
-    <p:sldMasterId xmlns:r="http://schemas.openxmlformats.org/officeDocument/2006/relationships" id="2147483648" r:id="Raaf311ae80ff4aa0"/>
+    <p:sldMasterId xmlns:r="http://schemas.openxmlformats.org/officeDocument/2006/relationships" id="2147483648" r:id="Rc0811dee37754750"/>
   </p:sldMasterIdLst>
   <p:notesMasterIdLst>
-    <p:notesMasterId xmlns:r="http://schemas.openxmlformats.org/officeDocument/2006/relationships" r:id="R6762d4f0368b4acc"/>
+    <p:notesMasterId xmlns:r="http://schemas.openxmlformats.org/officeDocument/2006/relationships" r:id="Rd6cf3a4275fb47b4"/>
   </p:notesMasterIdLst>
   <p:sldIdLst>
-    <p:sldId xmlns:r="http://schemas.openxmlformats.org/officeDocument/2006/relationships" id="256" r:id="Rab55cb08b78d4dc7"/>
-    <p:sldId xmlns:r="http://schemas.openxmlformats.org/officeDocument/2006/relationships" id="257" r:id="R60facf5dcb004c1a"/>
-    <p:sldId xmlns:r="http://schemas.openxmlformats.org/officeDocument/2006/relationships" id="258" r:id="Rc9d004a716664422"/>
-    <p:sldId xmlns:r="http://schemas.openxmlformats.org/officeDocument/2006/relationships" id="259" r:id="R308b759b64ff438f"/>
-    <p:sldId xmlns:r="http://schemas.openxmlformats.org/officeDocument/2006/relationships" id="260" r:id="R7c7f31537cdc403f"/>
-    <p:sldId xmlns:r="http://schemas.openxmlformats.org/officeDocument/2006/relationships" id="261" r:id="R1478ee3cabb14326"/>
-    <p:sldId xmlns:r="http://schemas.openxmlformats.org/officeDocument/2006/relationships" id="262" r:id="R527f0b05ad6b428e"/>
-    <p:sldId xmlns:r="http://schemas.openxmlformats.org/officeDocument/2006/relationships" id="263" r:id="Rf53cbcbc93254c00"/>
-    <p:sldId xmlns:r="http://schemas.openxmlformats.org/officeDocument/2006/relationships" id="264" r:id="R29ca207b57f144f3"/>
-    <p:sldId xmlns:r="http://schemas.openxmlformats.org/officeDocument/2006/relationships" id="265" r:id="Rc7c1ab8e9a724dea"/>
-    <p:sldId xmlns:r="http://schemas.openxmlformats.org/officeDocument/2006/relationships" id="266" r:id="R1b56f304ddda40f5"/>
-    <p:sldId xmlns:r="http://schemas.openxmlformats.org/officeDocument/2006/relationships" id="267" r:id="R24b6d4c6947c464a"/>
-    <p:sldId xmlns:r="http://schemas.openxmlformats.org/officeDocument/2006/relationships" id="268" r:id="R61e90a5619314691"/>
-    <p:sldId xmlns:r="http://schemas.openxmlformats.org/officeDocument/2006/relationships" id="269" r:id="R9ee6379fb3ee4760"/>
-    <p:sldId xmlns:r="http://schemas.openxmlformats.org/officeDocument/2006/relationships" id="270" r:id="R8722b49ef07e4a23"/>
+    <p:sldId xmlns:r="http://schemas.openxmlformats.org/officeDocument/2006/relationships" id="256" r:id="R5eb294cbdc5d47e5"/>
+    <p:sldId xmlns:r="http://schemas.openxmlformats.org/officeDocument/2006/relationships" id="257" r:id="Rf871c63dc96241d1"/>
+    <p:sldId xmlns:r="http://schemas.openxmlformats.org/officeDocument/2006/relationships" id="258" r:id="R6d3f950a772f43ad"/>
+    <p:sldId xmlns:r="http://schemas.openxmlformats.org/officeDocument/2006/relationships" id="259" r:id="R1efb6394359f4876"/>
+    <p:sldId xmlns:r="http://schemas.openxmlformats.org/officeDocument/2006/relationships" id="260" r:id="Rf11b75d79c054f89"/>
+    <p:sldId xmlns:r="http://schemas.openxmlformats.org/officeDocument/2006/relationships" id="261" r:id="R45041aa2de7b431b"/>
+    <p:sldId xmlns:r="http://schemas.openxmlformats.org/officeDocument/2006/relationships" id="262" r:id="Ra907862b47ba465c"/>
+    <p:sldId xmlns:r="http://schemas.openxmlformats.org/officeDocument/2006/relationships" id="263" r:id="Reb01622d46dd4087"/>
+    <p:sldId xmlns:r="http://schemas.openxmlformats.org/officeDocument/2006/relationships" id="264" r:id="Rf904916326e04382"/>
+    <p:sldId xmlns:r="http://schemas.openxmlformats.org/officeDocument/2006/relationships" id="265" r:id="R7d72558ffc534968"/>
+    <p:sldId xmlns:r="http://schemas.openxmlformats.org/officeDocument/2006/relationships" id="266" r:id="Rf6184b43de3d4dff"/>
+    <p:sldId xmlns:r="http://schemas.openxmlformats.org/officeDocument/2006/relationships" id="267" r:id="R9260adeffdeb405e"/>
+    <p:sldId xmlns:r="http://schemas.openxmlformats.org/officeDocument/2006/relationships" id="268" r:id="Rb0ee26c39e5647ee"/>
+    <p:sldId xmlns:r="http://schemas.openxmlformats.org/officeDocument/2006/relationships" id="269" r:id="Rbba43156fa294a0d"/>
+    <p:sldId xmlns:r="http://schemas.openxmlformats.org/officeDocument/2006/relationships" id="270" r:id="R788c46f41b7c4ab1"/>
   </p:sldIdLst>
   <p:sldSz cx="12192000" cy="6858000"/>
   <p:notesSz cx="6858000" cy="9144000"/>
@@ -1493,7 +1493,7 @@
   </p:cSld>
   <p:clrMap bg1="lt1" tx1="dk1" bg2="lt2" tx2="dk2" accent1="accent1" accent2="accent2" accent3="accent3" accent4="accent4" accent5="accent5" accent6="accent6" hlink="hlink" folHlink="folHlink"/>
   <p:sldLayoutIdLst>
-    <p:sldLayoutId xmlns:r="http://schemas.openxmlformats.org/officeDocument/2006/relationships" id="2147483649" r:id="R80991f9436dc41c9"/>
+    <p:sldLayoutId xmlns:r="http://schemas.openxmlformats.org/officeDocument/2006/relationships" id="2147483649" r:id="R0c6aee99cfb64671"/>
   </p:sldLayoutIdLst>
   <p:txStyles>
     <p:titleStyle>
@@ -1792,7 +1792,7 @@
           <p:cNvPr id="1" name="">
             <a:extLst xmlns:a="http://schemas.openxmlformats.org/drawingml/2006/main">
               <a:ext uri="{FF2B5EF4-FFF2-40B4-BE49-F238E27FC236}">
-                <a16:creationId xmlns:a16="http://schemas.microsoft.com/office/drawing/2014/main" id="{5533CB89-16D3-4C52-BE50-FE89134E2557}"/>
+                <a16:creationId xmlns:a16="http://schemas.microsoft.com/office/drawing/2014/main" id="{C9111C5E-0880-42D5-8CD9-D18AC0A5B1B7}"/>
               </a:ext>
             </a:extLst>
           </p:cNvPr>
@@ -1827,7 +1827,7 @@
           <p:cNvPr id="2" name="">
             <a:extLst xmlns:a="http://schemas.openxmlformats.org/drawingml/2006/main">
               <a:ext uri="{FF2B5EF4-FFF2-40B4-BE49-F238E27FC236}">
-                <a16:creationId xmlns:a16="http://schemas.microsoft.com/office/drawing/2014/main" id="{DB32CA1C-E374-4B22-8737-607FC6D87255}"/>
+                <a16:creationId xmlns:a16="http://schemas.microsoft.com/office/drawing/2014/main" id="{8AE27CB3-F5D1-405F-892D-C3E543F492E5}"/>
               </a:ext>
             </a:extLst>
           </p:cNvPr>
@@ -1862,7 +1862,7 @@
           <p:cNvPr id="3" name="">
             <a:extLst xmlns:a="http://schemas.openxmlformats.org/drawingml/2006/main">
               <a:ext uri="{FF2B5EF4-FFF2-40B4-BE49-F238E27FC236}">
-                <a16:creationId xmlns:a16="http://schemas.microsoft.com/office/drawing/2014/main" id="{B0BA6F81-9480-4263-96ED-3C093F25707D}"/>
+                <a16:creationId xmlns:a16="http://schemas.microsoft.com/office/drawing/2014/main" id="{BE9A2E9A-5F9E-449D-BAB5-91405221A293}"/>
               </a:ext>
             </a:extLst>
           </p:cNvPr>
@@ -1899,7 +1899,7 @@
           <p:cNvPr id="4" name="">
             <a:extLst xmlns:a="http://schemas.openxmlformats.org/drawingml/2006/main">
               <a:ext uri="{FF2B5EF4-FFF2-40B4-BE49-F238E27FC236}">
-                <a16:creationId xmlns:a16="http://schemas.microsoft.com/office/drawing/2014/main" id="{CB67C951-B522-4CED-BEB6-E3D2D29289B4}"/>
+                <a16:creationId xmlns:a16="http://schemas.microsoft.com/office/drawing/2014/main" id="{F37A008E-75D1-40C2-8D86-4C14F6F64812}"/>
               </a:ext>
             </a:extLst>
           </p:cNvPr>
@@ -1963,7 +1963,7 @@
           <p:cNvPr id="5" name="">
             <a:extLst xmlns:a="http://schemas.openxmlformats.org/drawingml/2006/main">
               <a:ext uri="{FF2B5EF4-FFF2-40B4-BE49-F238E27FC236}">
-                <a16:creationId xmlns:a16="http://schemas.microsoft.com/office/drawing/2014/main" id="{90B5984A-41E3-40E5-BEDA-7B402E0D790D}"/>
+                <a16:creationId xmlns:a16="http://schemas.microsoft.com/office/drawing/2014/main" id="{7D8AF955-F266-43A3-B500-41A4A3F2EDF3}"/>
               </a:ext>
             </a:extLst>
           </p:cNvPr>
@@ -2000,7 +2000,7 @@
           <p:cNvPr id="6" name="">
             <a:extLst xmlns:a="http://schemas.openxmlformats.org/drawingml/2006/main">
               <a:ext uri="{FF2B5EF4-FFF2-40B4-BE49-F238E27FC236}">
-                <a16:creationId xmlns:a16="http://schemas.microsoft.com/office/drawing/2014/main" id="{01DF53C4-64CB-4838-B36E-7F5506FEA3A8}"/>
+                <a16:creationId xmlns:a16="http://schemas.microsoft.com/office/drawing/2014/main" id="{E0ACF85C-EB5D-43DF-B6C6-50FA3D5199CE}"/>
               </a:ext>
             </a:extLst>
           </p:cNvPr>
@@ -2064,7 +2064,7 @@
           <p:cNvPr id="7" name="">
             <a:extLst xmlns:a="http://schemas.openxmlformats.org/drawingml/2006/main">
               <a:ext uri="{FF2B5EF4-FFF2-40B4-BE49-F238E27FC236}">
-                <a16:creationId xmlns:a16="http://schemas.microsoft.com/office/drawing/2014/main" id="{FB6451CA-9361-4A58-A736-7C8B0CE9A6A4}"/>
+                <a16:creationId xmlns:a16="http://schemas.microsoft.com/office/drawing/2014/main" id="{A5AD2E85-8183-4481-81D2-B5F5D8EF1DA5}"/>
               </a:ext>
             </a:extLst>
           </p:cNvPr>
@@ -2128,7 +2128,7 @@
           <p:cNvPr id="8" name="">
             <a:extLst xmlns:a="http://schemas.openxmlformats.org/drawingml/2006/main">
               <a:ext uri="{FF2B5EF4-FFF2-40B4-BE49-F238E27FC236}">
-                <a16:creationId xmlns:a16="http://schemas.microsoft.com/office/drawing/2014/main" id="{A5D4EB85-DFC7-4A49-A575-969706F4B7D2}"/>
+                <a16:creationId xmlns:a16="http://schemas.microsoft.com/office/drawing/2014/main" id="{03B46862-8174-4471-9375-8004030A2D27}"/>
               </a:ext>
             </a:extLst>
           </p:cNvPr>
@@ -2192,7 +2192,7 @@
           <p:cNvPr id="9" name="">
             <a:extLst xmlns:a="http://schemas.openxmlformats.org/drawingml/2006/main">
               <a:ext uri="{FF2B5EF4-FFF2-40B4-BE49-F238E27FC236}">
-                <a16:creationId xmlns:a16="http://schemas.microsoft.com/office/drawing/2014/main" id="{BDFD3964-0DE3-42E2-A23B-5862DAC73EEB}"/>
+                <a16:creationId xmlns:a16="http://schemas.microsoft.com/office/drawing/2014/main" id="{E0D8AB6E-F96C-48C9-97D1-18AC138E66D7}"/>
               </a:ext>
             </a:extLst>
           </p:cNvPr>
@@ -2225,7 +2225,7 @@
           <p:cNvPr id="10" name="">
             <a:extLst xmlns:a="http://schemas.openxmlformats.org/drawingml/2006/main">
               <a:ext uri="{FF2B5EF4-FFF2-40B4-BE49-F238E27FC236}">
-                <a16:creationId xmlns:a16="http://schemas.microsoft.com/office/drawing/2014/main" id="{3C949062-BE2F-4B89-8AF6-AC3CC83F5014}"/>
+                <a16:creationId xmlns:a16="http://schemas.microsoft.com/office/drawing/2014/main" id="{161CCE96-73E5-4416-9840-7BDAD766C0F2}"/>
               </a:ext>
             </a:extLst>
           </p:cNvPr>
@@ -2289,7 +2289,7 @@
           <p:cNvPr id="11" name="">
             <a:extLst xmlns:a="http://schemas.openxmlformats.org/drawingml/2006/main">
               <a:ext uri="{FF2B5EF4-FFF2-40B4-BE49-F238E27FC236}">
-                <a16:creationId xmlns:a16="http://schemas.microsoft.com/office/drawing/2014/main" id="{278D376D-41CC-49C5-BCAD-6A3A9945BD4A}"/>
+                <a16:creationId xmlns:a16="http://schemas.microsoft.com/office/drawing/2014/main" id="{2999D1AF-A4F6-4E53-A3B5-BDDFE1B80B9D}"/>
               </a:ext>
             </a:extLst>
           </p:cNvPr>
@@ -2353,7 +2353,7 @@
           <p:cNvPr id="12" name="">
             <a:extLst xmlns:a="http://schemas.openxmlformats.org/drawingml/2006/main">
               <a:ext uri="{FF2B5EF4-FFF2-40B4-BE49-F238E27FC236}">
-                <a16:creationId xmlns:a16="http://schemas.microsoft.com/office/drawing/2014/main" id="{E6A13F3F-F834-43B1-B643-4B746D206DAA}"/>
+                <a16:creationId xmlns:a16="http://schemas.microsoft.com/office/drawing/2014/main" id="{32060E45-3B38-4EDF-B391-F0BCD72183A4}"/>
               </a:ext>
             </a:extLst>
           </p:cNvPr>
@@ -2386,7 +2386,7 @@
           <p:cNvPr id="13" name="">
             <a:extLst xmlns:a="http://schemas.openxmlformats.org/drawingml/2006/main">
               <a:ext uri="{FF2B5EF4-FFF2-40B4-BE49-F238E27FC236}">
-                <a16:creationId xmlns:a16="http://schemas.microsoft.com/office/drawing/2014/main" id="{AB94C142-DB49-4BC1-BA62-C5096DD0926A}"/>
+                <a16:creationId xmlns:a16="http://schemas.microsoft.com/office/drawing/2014/main" id="{85BAE5D1-A5AE-4121-B60D-BBE6E7E83442}"/>
               </a:ext>
             </a:extLst>
           </p:cNvPr>
@@ -2450,7 +2450,7 @@
           <p:cNvPr id="14" name="">
             <a:extLst xmlns:a="http://schemas.openxmlformats.org/drawingml/2006/main">
               <a:ext uri="{FF2B5EF4-FFF2-40B4-BE49-F238E27FC236}">
-                <a16:creationId xmlns:a16="http://schemas.microsoft.com/office/drawing/2014/main" id="{DD565593-6D0D-4C77-B582-0392601D19C5}"/>
+                <a16:creationId xmlns:a16="http://schemas.microsoft.com/office/drawing/2014/main" id="{D7FDDCF5-B234-48F4-8EA0-6C7B9878FCB5}"/>
               </a:ext>
             </a:extLst>
           </p:cNvPr>
@@ -2514,7 +2514,7 @@
           <p:cNvPr id="15" name="">
             <a:extLst xmlns:a="http://schemas.openxmlformats.org/drawingml/2006/main">
               <a:ext uri="{FF2B5EF4-FFF2-40B4-BE49-F238E27FC236}">
-                <a16:creationId xmlns:a16="http://schemas.microsoft.com/office/drawing/2014/main" id="{B005DEEE-84CD-403A-9609-48AD2A29A300}"/>
+                <a16:creationId xmlns:a16="http://schemas.microsoft.com/office/drawing/2014/main" id="{F452FE20-5DB0-4512-9DC2-BC68601A33C9}"/>
               </a:ext>
             </a:extLst>
           </p:cNvPr>
@@ -2547,7 +2547,7 @@
           <p:cNvPr id="16" name="">
             <a:extLst xmlns:a="http://schemas.openxmlformats.org/drawingml/2006/main">
               <a:ext uri="{FF2B5EF4-FFF2-40B4-BE49-F238E27FC236}">
-                <a16:creationId xmlns:a16="http://schemas.microsoft.com/office/drawing/2014/main" id="{09F5FC2B-411A-4E05-B244-FB02ACB8DC66}"/>
+                <a16:creationId xmlns:a16="http://schemas.microsoft.com/office/drawing/2014/main" id="{78552DEF-9677-44AF-8F0C-992BEDFC6218}"/>
               </a:ext>
             </a:extLst>
           </p:cNvPr>
@@ -2611,7 +2611,7 @@
           <p:cNvPr id="17" name="">
             <a:extLst xmlns:a="http://schemas.openxmlformats.org/drawingml/2006/main">
               <a:ext uri="{FF2B5EF4-FFF2-40B4-BE49-F238E27FC236}">
-                <a16:creationId xmlns:a16="http://schemas.microsoft.com/office/drawing/2014/main" id="{81474092-9E2D-4D1F-AB9B-A861EB507C04}"/>
+                <a16:creationId xmlns:a16="http://schemas.microsoft.com/office/drawing/2014/main" id="{C07361A5-D31F-4DE6-9B9F-3EDB4F4437C5}"/>
               </a:ext>
             </a:extLst>
           </p:cNvPr>
@@ -2675,7 +2675,7 @@
           <p:cNvPr id="18" name="">
             <a:extLst xmlns:a="http://schemas.openxmlformats.org/drawingml/2006/main">
               <a:ext uri="{FF2B5EF4-FFF2-40B4-BE49-F238E27FC236}">
-                <a16:creationId xmlns:a16="http://schemas.microsoft.com/office/drawing/2014/main" id="{0DF6833A-2504-409E-861F-8AA8B6FD04DD}"/>
+                <a16:creationId xmlns:a16="http://schemas.microsoft.com/office/drawing/2014/main" id="{ACE5C9AD-782E-4B1B-8D87-4AB4C1F20731}"/>
               </a:ext>
             </a:extLst>
           </p:cNvPr>
@@ -2739,7 +2739,7 @@
           <p:cNvPr id="19" name="">
             <a:extLst xmlns:a="http://schemas.openxmlformats.org/drawingml/2006/main">
               <a:ext uri="{FF2B5EF4-FFF2-40B4-BE49-F238E27FC236}">
-                <a16:creationId xmlns:a16="http://schemas.microsoft.com/office/drawing/2014/main" id="{F43065B3-7DA5-41C6-9B9F-B3A497163B1B}"/>
+                <a16:creationId xmlns:a16="http://schemas.microsoft.com/office/drawing/2014/main" id="{632DE866-AD92-412A-8A3B-2772099A253B}"/>
               </a:ext>
             </a:extLst>
           </p:cNvPr>
@@ -2803,7 +2803,7 @@
           <p:cNvPr id="20" name="">
             <a:extLst xmlns:a="http://schemas.openxmlformats.org/drawingml/2006/main">
               <a:ext uri="{FF2B5EF4-FFF2-40B4-BE49-F238E27FC236}">
-                <a16:creationId xmlns:a16="http://schemas.microsoft.com/office/drawing/2014/main" id="{5E224192-2223-4C44-9F35-B3679D941E55}"/>
+                <a16:creationId xmlns:a16="http://schemas.microsoft.com/office/drawing/2014/main" id="{8D0D4779-615D-48DD-8C85-6FF2D84C2F87}"/>
               </a:ext>
             </a:extLst>
           </p:cNvPr>
@@ -2865,7 +2865,7 @@
     </p:spTree>
     <p:extLst>
       <p:ext uri="{BB962C8B-B14F-4D97-AF65-F5344CB8AC3E}">
-        <p14:creationId xmlns:p14="http://schemas.microsoft.com/office/powerpoint/2010/main" val="671540210"/>
+        <p14:creationId xmlns:p14="http://schemas.microsoft.com/office/powerpoint/2010/main" val="966256305"/>
       </p:ext>
     </p:extLst>
   </p:cSld>
@@ -2889,7 +2889,7 @@
           <p:cNvPr id="1" name="">
             <a:extLst xmlns:a="http://schemas.openxmlformats.org/drawingml/2006/main">
               <a:ext uri="{FF2B5EF4-FFF2-40B4-BE49-F238E27FC236}">
-                <a16:creationId xmlns:a16="http://schemas.microsoft.com/office/drawing/2014/main" id="{9CBF50AA-3326-4150-B43D-EE085C3E6A5D}"/>
+                <a16:creationId xmlns:a16="http://schemas.microsoft.com/office/drawing/2014/main" id="{F1267392-1EE0-41CB-880C-69DC3FDCECEE}"/>
               </a:ext>
             </a:extLst>
           </p:cNvPr>
@@ -2924,7 +2924,7 @@
           <p:cNvPr id="2" name="">
             <a:extLst xmlns:a="http://schemas.openxmlformats.org/drawingml/2006/main">
               <a:ext uri="{FF2B5EF4-FFF2-40B4-BE49-F238E27FC236}">
-                <a16:creationId xmlns:a16="http://schemas.microsoft.com/office/drawing/2014/main" id="{E6FC9A10-DDFC-4B5B-B60C-6366370AACBB}"/>
+                <a16:creationId xmlns:a16="http://schemas.microsoft.com/office/drawing/2014/main" id="{3CCBECEA-161E-4ECF-B3B0-2D287F903BE5}"/>
               </a:ext>
             </a:extLst>
           </p:cNvPr>
@@ -2988,7 +2988,7 @@
           <p:cNvPr id="3" name="">
             <a:extLst xmlns:a="http://schemas.openxmlformats.org/drawingml/2006/main">
               <a:ext uri="{FF2B5EF4-FFF2-40B4-BE49-F238E27FC236}">
-                <a16:creationId xmlns:a16="http://schemas.microsoft.com/office/drawing/2014/main" id="{A009099F-B7D1-46F9-8BA9-982A38F8FD74}"/>
+                <a16:creationId xmlns:a16="http://schemas.microsoft.com/office/drawing/2014/main" id="{F4FC0107-8988-4265-B67F-B80529019FB8}"/>
               </a:ext>
             </a:extLst>
           </p:cNvPr>
@@ -3023,7 +3023,7 @@
           <p:cNvPr id="4" name="">
             <a:extLst xmlns:a="http://schemas.openxmlformats.org/drawingml/2006/main">
               <a:ext uri="{FF2B5EF4-FFF2-40B4-BE49-F238E27FC236}">
-                <a16:creationId xmlns:a16="http://schemas.microsoft.com/office/drawing/2014/main" id="{E2A80322-C757-484A-93AE-E21BF84C805E}"/>
+                <a16:creationId xmlns:a16="http://schemas.microsoft.com/office/drawing/2014/main" id="{DE930F37-8C3C-4D38-B8BC-D4A08C9032A6}"/>
               </a:ext>
             </a:extLst>
           </p:cNvPr>
@@ -3087,7 +3087,7 @@
           <p:cNvPr id="5" name="">
             <a:extLst xmlns:a="http://schemas.openxmlformats.org/drawingml/2006/main">
               <a:ext uri="{FF2B5EF4-FFF2-40B4-BE49-F238E27FC236}">
-                <a16:creationId xmlns:a16="http://schemas.microsoft.com/office/drawing/2014/main" id="{D3C772EE-0425-4CF3-B026-C52B918BA242}"/>
+                <a16:creationId xmlns:a16="http://schemas.microsoft.com/office/drawing/2014/main" id="{911CAC35-8261-4A78-8EE1-C646593B56F1}"/>
               </a:ext>
             </a:extLst>
           </p:cNvPr>
@@ -3151,7 +3151,7 @@
           <p:cNvPr id="6" name="">
             <a:extLst xmlns:a="http://schemas.openxmlformats.org/drawingml/2006/main">
               <a:ext uri="{FF2B5EF4-FFF2-40B4-BE49-F238E27FC236}">
-                <a16:creationId xmlns:a16="http://schemas.microsoft.com/office/drawing/2014/main" id="{D98B7598-5237-4A33-A738-9856E640D69E}"/>
+                <a16:creationId xmlns:a16="http://schemas.microsoft.com/office/drawing/2014/main" id="{8A7DF3DE-8118-4231-89E2-D772DFA71F2A}"/>
               </a:ext>
             </a:extLst>
           </p:cNvPr>
@@ -3215,7 +3215,7 @@
           <p:cNvPr id="7" name="">
             <a:extLst xmlns:a="http://schemas.openxmlformats.org/drawingml/2006/main">
               <a:ext uri="{FF2B5EF4-FFF2-40B4-BE49-F238E27FC236}">
-                <a16:creationId xmlns:a16="http://schemas.microsoft.com/office/drawing/2014/main" id="{3FD691F2-BFF3-499A-B057-42A95E4D8F87}"/>
+                <a16:creationId xmlns:a16="http://schemas.microsoft.com/office/drawing/2014/main" id="{2A78D7AE-97A6-470C-B081-FFD67BA6873E}"/>
               </a:ext>
             </a:extLst>
           </p:cNvPr>
@@ -3279,7 +3279,7 @@
           <p:cNvPr id="8" name="">
             <a:extLst xmlns:a="http://schemas.openxmlformats.org/drawingml/2006/main">
               <a:ext uri="{FF2B5EF4-FFF2-40B4-BE49-F238E27FC236}">
-                <a16:creationId xmlns:a16="http://schemas.microsoft.com/office/drawing/2014/main" id="{0B053045-02A4-4420-9364-80F792C22FF9}"/>
+                <a16:creationId xmlns:a16="http://schemas.microsoft.com/office/drawing/2014/main" id="{1F7E73CD-1F33-4AAB-A5E6-0E9265FE0FA9}"/>
               </a:ext>
             </a:extLst>
           </p:cNvPr>
@@ -3314,7 +3314,7 @@
           <p:cNvPr id="9" name="">
             <a:extLst xmlns:a="http://schemas.openxmlformats.org/drawingml/2006/main">
               <a:ext uri="{FF2B5EF4-FFF2-40B4-BE49-F238E27FC236}">
-                <a16:creationId xmlns:a16="http://schemas.microsoft.com/office/drawing/2014/main" id="{BC0CEE49-381D-4C32-BA24-C8556E9696CE}"/>
+                <a16:creationId xmlns:a16="http://schemas.microsoft.com/office/drawing/2014/main" id="{9C772466-5D44-4A43-8024-56410BD3934D}"/>
               </a:ext>
             </a:extLst>
           </p:cNvPr>
@@ -3349,7 +3349,7 @@
           <p:cNvPr id="10" name="">
             <a:extLst xmlns:a="http://schemas.openxmlformats.org/drawingml/2006/main">
               <a:ext uri="{FF2B5EF4-FFF2-40B4-BE49-F238E27FC236}">
-                <a16:creationId xmlns:a16="http://schemas.microsoft.com/office/drawing/2014/main" id="{A2E3E254-E0EC-444C-BE61-0B6F4900AA4A}"/>
+                <a16:creationId xmlns:a16="http://schemas.microsoft.com/office/drawing/2014/main" id="{BAA7CBE7-3916-4140-88B4-E37F501F39F3}"/>
               </a:ext>
             </a:extLst>
           </p:cNvPr>
@@ -3413,7 +3413,7 @@
           <p:cNvPr id="11" name="">
             <a:extLst xmlns:a="http://schemas.openxmlformats.org/drawingml/2006/main">
               <a:ext uri="{FF2B5EF4-FFF2-40B4-BE49-F238E27FC236}">
-                <a16:creationId xmlns:a16="http://schemas.microsoft.com/office/drawing/2014/main" id="{0F200C5F-A07B-4896-8356-70CF9FD2283E}"/>
+                <a16:creationId xmlns:a16="http://schemas.microsoft.com/office/drawing/2014/main" id="{84552A9B-7676-42AD-A07B-F820A5B1E3F3}"/>
               </a:ext>
             </a:extLst>
           </p:cNvPr>
@@ -3477,7 +3477,7 @@
           <p:cNvPr id="12" name="">
             <a:extLst xmlns:a="http://schemas.openxmlformats.org/drawingml/2006/main">
               <a:ext uri="{FF2B5EF4-FFF2-40B4-BE49-F238E27FC236}">
-                <a16:creationId xmlns:a16="http://schemas.microsoft.com/office/drawing/2014/main" id="{6AB20830-91F6-4660-BA11-4AF2A3D427D2}"/>
+                <a16:creationId xmlns:a16="http://schemas.microsoft.com/office/drawing/2014/main" id="{2372F97F-C9C0-4EEF-92C8-E82C4B2A477F}"/>
               </a:ext>
             </a:extLst>
           </p:cNvPr>
@@ -3512,7 +3512,7 @@
           <p:cNvPr id="13" name="">
             <a:extLst xmlns:a="http://schemas.openxmlformats.org/drawingml/2006/main">
               <a:ext uri="{FF2B5EF4-FFF2-40B4-BE49-F238E27FC236}">
-                <a16:creationId xmlns:a16="http://schemas.microsoft.com/office/drawing/2014/main" id="{36247F00-80CC-44DC-94DD-B5F569B79B5B}"/>
+                <a16:creationId xmlns:a16="http://schemas.microsoft.com/office/drawing/2014/main" id="{5E37104F-226E-473C-AEBF-EAE29743587E}"/>
               </a:ext>
             </a:extLst>
           </p:cNvPr>
@@ -3547,7 +3547,7 @@
           <p:cNvPr id="14" name="">
             <a:extLst xmlns:a="http://schemas.openxmlformats.org/drawingml/2006/main">
               <a:ext uri="{FF2B5EF4-FFF2-40B4-BE49-F238E27FC236}">
-                <a16:creationId xmlns:a16="http://schemas.microsoft.com/office/drawing/2014/main" id="{A9F34D34-2647-45D6-AFF5-73917A4B761A}"/>
+                <a16:creationId xmlns:a16="http://schemas.microsoft.com/office/drawing/2014/main" id="{9C3BBBE8-DE09-4388-864C-9768B52A3B5F}"/>
               </a:ext>
             </a:extLst>
           </p:cNvPr>
@@ -3611,7 +3611,7 @@
           <p:cNvPr id="15" name="">
             <a:extLst xmlns:a="http://schemas.openxmlformats.org/drawingml/2006/main">
               <a:ext uri="{FF2B5EF4-FFF2-40B4-BE49-F238E27FC236}">
-                <a16:creationId xmlns:a16="http://schemas.microsoft.com/office/drawing/2014/main" id="{D736B5CF-AF0C-47F0-9770-084E0CEB4BEC}"/>
+                <a16:creationId xmlns:a16="http://schemas.microsoft.com/office/drawing/2014/main" id="{607ED5DE-F6EA-4456-BA51-25AEC416C93E}"/>
               </a:ext>
             </a:extLst>
           </p:cNvPr>
@@ -3675,7 +3675,7 @@
           <p:cNvPr id="16" name="">
             <a:extLst xmlns:a="http://schemas.openxmlformats.org/drawingml/2006/main">
               <a:ext uri="{FF2B5EF4-FFF2-40B4-BE49-F238E27FC236}">
-                <a16:creationId xmlns:a16="http://schemas.microsoft.com/office/drawing/2014/main" id="{A515E73B-D7AF-4E2B-A364-404A2D9DB5D4}"/>
+                <a16:creationId xmlns:a16="http://schemas.microsoft.com/office/drawing/2014/main" id="{E7CA971F-F95C-4D31-A829-9C867D150A30}"/>
               </a:ext>
             </a:extLst>
           </p:cNvPr>
@@ -3710,7 +3710,7 @@
           <p:cNvPr id="17" name="">
             <a:extLst xmlns:a="http://schemas.openxmlformats.org/drawingml/2006/main">
               <a:ext uri="{FF2B5EF4-FFF2-40B4-BE49-F238E27FC236}">
-                <a16:creationId xmlns:a16="http://schemas.microsoft.com/office/drawing/2014/main" id="{470E5ED4-A1C0-44F6-8676-792199AA24AC}"/>
+                <a16:creationId xmlns:a16="http://schemas.microsoft.com/office/drawing/2014/main" id="{FDBC98F4-516B-48E6-B4E5-6CFBBC1D9CC9}"/>
               </a:ext>
             </a:extLst>
           </p:cNvPr>
@@ -3745,7 +3745,7 @@
           <p:cNvPr id="18" name="">
             <a:extLst xmlns:a="http://schemas.openxmlformats.org/drawingml/2006/main">
               <a:ext uri="{FF2B5EF4-FFF2-40B4-BE49-F238E27FC236}">
-                <a16:creationId xmlns:a16="http://schemas.microsoft.com/office/drawing/2014/main" id="{A7B88CC6-C881-4351-B9C6-0EFAD15C69CC}"/>
+                <a16:creationId xmlns:a16="http://schemas.microsoft.com/office/drawing/2014/main" id="{AC8A8334-53B3-40A4-93E9-4F427CE3682D}"/>
               </a:ext>
             </a:extLst>
           </p:cNvPr>
@@ -3778,7 +3778,7 @@
           <p:cNvPr id="19" name="">
             <a:extLst xmlns:a="http://schemas.openxmlformats.org/drawingml/2006/main">
               <a:ext uri="{FF2B5EF4-FFF2-40B4-BE49-F238E27FC236}">
-                <a16:creationId xmlns:a16="http://schemas.microsoft.com/office/drawing/2014/main" id="{7C4B8326-4683-4764-8AC5-466A608F9AA1}"/>
+                <a16:creationId xmlns:a16="http://schemas.microsoft.com/office/drawing/2014/main" id="{68104310-1624-4E83-A46C-FC6A03E54359}"/>
               </a:ext>
             </a:extLst>
           </p:cNvPr>
@@ -3813,7 +3813,7 @@
           <p:cNvPr id="20" name="">
             <a:extLst xmlns:a="http://schemas.openxmlformats.org/drawingml/2006/main">
               <a:ext uri="{FF2B5EF4-FFF2-40B4-BE49-F238E27FC236}">
-                <a16:creationId xmlns:a16="http://schemas.microsoft.com/office/drawing/2014/main" id="{28320916-2646-4B22-8243-15A4764BC21D}"/>
+                <a16:creationId xmlns:a16="http://schemas.microsoft.com/office/drawing/2014/main" id="{61A03B48-4F5E-4B22-B192-C1A9E3367512}"/>
               </a:ext>
             </a:extLst>
           </p:cNvPr>
@@ -3877,7 +3877,7 @@
           <p:cNvPr id="21" name="">
             <a:extLst xmlns:a="http://schemas.openxmlformats.org/drawingml/2006/main">
               <a:ext uri="{FF2B5EF4-FFF2-40B4-BE49-F238E27FC236}">
-                <a16:creationId xmlns:a16="http://schemas.microsoft.com/office/drawing/2014/main" id="{C1AEEE02-8D0E-4E01-A5EF-4B7399D7D727}"/>
+                <a16:creationId xmlns:a16="http://schemas.microsoft.com/office/drawing/2014/main" id="{52BFBD0A-BA2A-48BC-A4A0-4C28E166713F}"/>
               </a:ext>
             </a:extLst>
           </p:cNvPr>
@@ -3941,7 +3941,7 @@
           <p:cNvPr id="22" name="">
             <a:extLst xmlns:a="http://schemas.openxmlformats.org/drawingml/2006/main">
               <a:ext uri="{FF2B5EF4-FFF2-40B4-BE49-F238E27FC236}">
-                <a16:creationId xmlns:a16="http://schemas.microsoft.com/office/drawing/2014/main" id="{9B6FA3FD-03AA-4887-8CCD-707C2B61A5E9}"/>
+                <a16:creationId xmlns:a16="http://schemas.microsoft.com/office/drawing/2014/main" id="{DD4A0A88-F8F5-42CB-B71C-560E88989F33}"/>
               </a:ext>
             </a:extLst>
           </p:cNvPr>
@@ -3974,7 +3974,7 @@
           <p:cNvPr id="23" name="">
             <a:extLst xmlns:a="http://schemas.openxmlformats.org/drawingml/2006/main">
               <a:ext uri="{FF2B5EF4-FFF2-40B4-BE49-F238E27FC236}">
-                <a16:creationId xmlns:a16="http://schemas.microsoft.com/office/drawing/2014/main" id="{2513369D-A7CD-4236-9A04-8A2ADF399406}"/>
+                <a16:creationId xmlns:a16="http://schemas.microsoft.com/office/drawing/2014/main" id="{48EC5542-432E-42A5-A581-2300BF313752}"/>
               </a:ext>
             </a:extLst>
           </p:cNvPr>
@@ -4009,7 +4009,7 @@
           <p:cNvPr id="24" name="">
             <a:extLst xmlns:a="http://schemas.openxmlformats.org/drawingml/2006/main">
               <a:ext uri="{FF2B5EF4-FFF2-40B4-BE49-F238E27FC236}">
-                <a16:creationId xmlns:a16="http://schemas.microsoft.com/office/drawing/2014/main" id="{9809CB44-A291-4EE6-B961-65266D35DDC4}"/>
+                <a16:creationId xmlns:a16="http://schemas.microsoft.com/office/drawing/2014/main" id="{C8109B05-7897-4992-A70A-4235989F6337}"/>
               </a:ext>
             </a:extLst>
           </p:cNvPr>
@@ -4073,7 +4073,7 @@
           <p:cNvPr id="25" name="">
             <a:extLst xmlns:a="http://schemas.openxmlformats.org/drawingml/2006/main">
               <a:ext uri="{FF2B5EF4-FFF2-40B4-BE49-F238E27FC236}">
-                <a16:creationId xmlns:a16="http://schemas.microsoft.com/office/drawing/2014/main" id="{08CB6900-8414-4F2F-85D4-7C0087D284B2}"/>
+                <a16:creationId xmlns:a16="http://schemas.microsoft.com/office/drawing/2014/main" id="{A8512DE7-0551-4A52-8E2E-AAC878296298}"/>
               </a:ext>
             </a:extLst>
           </p:cNvPr>
@@ -4137,7 +4137,7 @@
           <p:cNvPr id="26" name="">
             <a:extLst xmlns:a="http://schemas.openxmlformats.org/drawingml/2006/main">
               <a:ext uri="{FF2B5EF4-FFF2-40B4-BE49-F238E27FC236}">
-                <a16:creationId xmlns:a16="http://schemas.microsoft.com/office/drawing/2014/main" id="{EC0EE432-CB62-4E93-B170-BF27C472E9F0}"/>
+                <a16:creationId xmlns:a16="http://schemas.microsoft.com/office/drawing/2014/main" id="{6BDBBB4D-A49F-4B78-9D33-DA982E2E55F4}"/>
               </a:ext>
             </a:extLst>
           </p:cNvPr>
@@ -4199,7 +4199,7 @@
     </p:spTree>
     <p:extLst>
       <p:ext uri="{BB962C8B-B14F-4D97-AF65-F5344CB8AC3E}">
-        <p14:creationId xmlns:p14="http://schemas.microsoft.com/office/powerpoint/2010/main" val="2049689429"/>
+        <p14:creationId xmlns:p14="http://schemas.microsoft.com/office/powerpoint/2010/main" val="1061634100"/>
       </p:ext>
     </p:extLst>
   </p:cSld>
@@ -4223,7 +4223,7 @@
           <p:cNvPr id="1" name="">
             <a:extLst xmlns:a="http://schemas.openxmlformats.org/drawingml/2006/main">
               <a:ext uri="{FF2B5EF4-FFF2-40B4-BE49-F238E27FC236}">
-                <a16:creationId xmlns:a16="http://schemas.microsoft.com/office/drawing/2014/main" id="{F343D0D4-E96D-402B-90B5-A753D3188F79}"/>
+                <a16:creationId xmlns:a16="http://schemas.microsoft.com/office/drawing/2014/main" id="{42FF9E3E-9250-4FEF-A3B7-D8C84A0B64C5}"/>
               </a:ext>
             </a:extLst>
           </p:cNvPr>
@@ -4258,7 +4258,7 @@
           <p:cNvPr id="2" name="">
             <a:extLst xmlns:a="http://schemas.openxmlformats.org/drawingml/2006/main">
               <a:ext uri="{FF2B5EF4-FFF2-40B4-BE49-F238E27FC236}">
-                <a16:creationId xmlns:a16="http://schemas.microsoft.com/office/drawing/2014/main" id="{D64B1F26-C464-422D-96D3-78417997A0C4}"/>
+                <a16:creationId xmlns:a16="http://schemas.microsoft.com/office/drawing/2014/main" id="{949CCE3D-B6FC-4BE4-9204-DA72EC638BE4}"/>
               </a:ext>
             </a:extLst>
           </p:cNvPr>
@@ -4322,7 +4322,7 @@
           <p:cNvPr id="3" name="">
             <a:extLst xmlns:a="http://schemas.openxmlformats.org/drawingml/2006/main">
               <a:ext uri="{FF2B5EF4-FFF2-40B4-BE49-F238E27FC236}">
-                <a16:creationId xmlns:a16="http://schemas.microsoft.com/office/drawing/2014/main" id="{686A1E62-4A2E-4052-87E2-B95FEC92DD4D}"/>
+                <a16:creationId xmlns:a16="http://schemas.microsoft.com/office/drawing/2014/main" id="{E667E704-4186-4F01-B0DC-83D79AFA8393}"/>
               </a:ext>
             </a:extLst>
           </p:cNvPr>
@@ -4357,7 +4357,7 @@
           <p:cNvPr id="4" name="">
             <a:extLst xmlns:a="http://schemas.openxmlformats.org/drawingml/2006/main">
               <a:ext uri="{FF2B5EF4-FFF2-40B4-BE49-F238E27FC236}">
-                <a16:creationId xmlns:a16="http://schemas.microsoft.com/office/drawing/2014/main" id="{62D8C6F6-EEED-4335-97F3-D7A8D4A62F71}"/>
+                <a16:creationId xmlns:a16="http://schemas.microsoft.com/office/drawing/2014/main" id="{53A3FB03-4B2C-488F-A175-C67FA2B2B992}"/>
               </a:ext>
             </a:extLst>
           </p:cNvPr>
@@ -4421,7 +4421,7 @@
           <p:cNvPr id="5" name="">
             <a:extLst xmlns:a="http://schemas.openxmlformats.org/drawingml/2006/main">
               <a:ext uri="{FF2B5EF4-FFF2-40B4-BE49-F238E27FC236}">
-                <a16:creationId xmlns:a16="http://schemas.microsoft.com/office/drawing/2014/main" id="{A00EC968-CEC1-4EC0-9C76-1D57BDDDBFBB}"/>
+                <a16:creationId xmlns:a16="http://schemas.microsoft.com/office/drawing/2014/main" id="{63650951-29FD-437B-ADF5-4939A7A573F5}"/>
               </a:ext>
             </a:extLst>
           </p:cNvPr>
@@ -4485,7 +4485,7 @@
           <p:cNvPr id="6" name="">
             <a:extLst xmlns:a="http://schemas.openxmlformats.org/drawingml/2006/main">
               <a:ext uri="{FF2B5EF4-FFF2-40B4-BE49-F238E27FC236}">
-                <a16:creationId xmlns:a16="http://schemas.microsoft.com/office/drawing/2014/main" id="{6DD7015C-C6E3-4ADC-ADDB-E62F43DEF2C9}"/>
+                <a16:creationId xmlns:a16="http://schemas.microsoft.com/office/drawing/2014/main" id="{C0B10A84-3218-4D97-8133-C7FB95BC973A}"/>
               </a:ext>
             </a:extLst>
           </p:cNvPr>
@@ -4518,7 +4518,7 @@
           <p:cNvPr id="7" name="">
             <a:extLst xmlns:a="http://schemas.openxmlformats.org/drawingml/2006/main">
               <a:ext uri="{FF2B5EF4-FFF2-40B4-BE49-F238E27FC236}">
-                <a16:creationId xmlns:a16="http://schemas.microsoft.com/office/drawing/2014/main" id="{237DA8B7-9747-4F26-A508-AC1D4A1AD18D}"/>
+                <a16:creationId xmlns:a16="http://schemas.microsoft.com/office/drawing/2014/main" id="{72486432-F2F1-40BE-AEB3-5B28BC660B5E}"/>
               </a:ext>
             </a:extLst>
           </p:cNvPr>
@@ -4553,7 +4553,7 @@
           <p:cNvPr id="8" name="">
             <a:extLst xmlns:a="http://schemas.openxmlformats.org/drawingml/2006/main">
               <a:ext uri="{FF2B5EF4-FFF2-40B4-BE49-F238E27FC236}">
-                <a16:creationId xmlns:a16="http://schemas.microsoft.com/office/drawing/2014/main" id="{737A142E-A5C0-490D-9AA5-80D4CF79CB86}"/>
+                <a16:creationId xmlns:a16="http://schemas.microsoft.com/office/drawing/2014/main" id="{F096D820-D3AE-4FA1-B07C-C80E2B74504F}"/>
               </a:ext>
             </a:extLst>
           </p:cNvPr>
@@ -4617,7 +4617,7 @@
           <p:cNvPr id="9" name="">
             <a:extLst xmlns:a="http://schemas.openxmlformats.org/drawingml/2006/main">
               <a:ext uri="{FF2B5EF4-FFF2-40B4-BE49-F238E27FC236}">
-                <a16:creationId xmlns:a16="http://schemas.microsoft.com/office/drawing/2014/main" id="{387EBD0A-23C3-4DD1-BD06-3CF48EF8FCCD}"/>
+                <a16:creationId xmlns:a16="http://schemas.microsoft.com/office/drawing/2014/main" id="{A18AA0E7-1D50-4478-927B-98590025FC34}"/>
               </a:ext>
             </a:extLst>
           </p:cNvPr>
@@ -4681,7 +4681,7 @@
           <p:cNvPr id="10" name="">
             <a:extLst xmlns:a="http://schemas.openxmlformats.org/drawingml/2006/main">
               <a:ext uri="{FF2B5EF4-FFF2-40B4-BE49-F238E27FC236}">
-                <a16:creationId xmlns:a16="http://schemas.microsoft.com/office/drawing/2014/main" id="{6A681A1A-A78C-4976-BFE7-60BB28400D85}"/>
+                <a16:creationId xmlns:a16="http://schemas.microsoft.com/office/drawing/2014/main" id="{BDA4692A-0D5B-411B-9F1A-145A3179379C}"/>
               </a:ext>
             </a:extLst>
           </p:cNvPr>
@@ -4745,7 +4745,7 @@
           <p:cNvPr id="11" name="">
             <a:extLst xmlns:a="http://schemas.openxmlformats.org/drawingml/2006/main">
               <a:ext uri="{FF2B5EF4-FFF2-40B4-BE49-F238E27FC236}">
-                <a16:creationId xmlns:a16="http://schemas.microsoft.com/office/drawing/2014/main" id="{9D4FE6A7-E730-4AD1-AFEA-5F69D151E9B0}"/>
+                <a16:creationId xmlns:a16="http://schemas.microsoft.com/office/drawing/2014/main" id="{D06987AB-A9B9-4B26-9FC1-A7A7773C92A1}"/>
               </a:ext>
             </a:extLst>
           </p:cNvPr>
@@ -4778,7 +4778,7 @@
           <p:cNvPr id="12" name="">
             <a:extLst xmlns:a="http://schemas.openxmlformats.org/drawingml/2006/main">
               <a:ext uri="{FF2B5EF4-FFF2-40B4-BE49-F238E27FC236}">
-                <a16:creationId xmlns:a16="http://schemas.microsoft.com/office/drawing/2014/main" id="{A8A0DA65-8C99-4C65-AF25-931BEB8B3166}"/>
+                <a16:creationId xmlns:a16="http://schemas.microsoft.com/office/drawing/2014/main" id="{6064EC19-AD70-4098-BE8A-FA14B96884A7}"/>
               </a:ext>
             </a:extLst>
           </p:cNvPr>
@@ -4842,7 +4842,7 @@
           <p:cNvPr id="13" name="">
             <a:extLst xmlns:a="http://schemas.openxmlformats.org/drawingml/2006/main">
               <a:ext uri="{FF2B5EF4-FFF2-40B4-BE49-F238E27FC236}">
-                <a16:creationId xmlns:a16="http://schemas.microsoft.com/office/drawing/2014/main" id="{854E5AB3-1F98-4DC7-82DC-68B1671D012D}"/>
+                <a16:creationId xmlns:a16="http://schemas.microsoft.com/office/drawing/2014/main" id="{B1CFC561-0E88-4044-8D94-8ED9BEE8F620}"/>
               </a:ext>
             </a:extLst>
           </p:cNvPr>
@@ -4875,7 +4875,7 @@
           <p:cNvPr id="14" name="">
             <a:extLst xmlns:a="http://schemas.openxmlformats.org/drawingml/2006/main">
               <a:ext uri="{FF2B5EF4-FFF2-40B4-BE49-F238E27FC236}">
-                <a16:creationId xmlns:a16="http://schemas.microsoft.com/office/drawing/2014/main" id="{0312C82E-4182-4838-A9A2-5EF404FA7794}"/>
+                <a16:creationId xmlns:a16="http://schemas.microsoft.com/office/drawing/2014/main" id="{43AE6D91-1558-4D41-90AF-82A3994A8291}"/>
               </a:ext>
             </a:extLst>
           </p:cNvPr>
@@ -4939,7 +4939,7 @@
           <p:cNvPr id="15" name="">
             <a:extLst xmlns:a="http://schemas.openxmlformats.org/drawingml/2006/main">
               <a:ext uri="{FF2B5EF4-FFF2-40B4-BE49-F238E27FC236}">
-                <a16:creationId xmlns:a16="http://schemas.microsoft.com/office/drawing/2014/main" id="{4E2AD53C-62CA-434F-9273-45E46404CBD3}"/>
+                <a16:creationId xmlns:a16="http://schemas.microsoft.com/office/drawing/2014/main" id="{0715EA40-8C4D-4B85-8790-BF1B687F7FEF}"/>
               </a:ext>
             </a:extLst>
           </p:cNvPr>
@@ -4972,7 +4972,7 @@
           <p:cNvPr id="16" name="">
             <a:extLst xmlns:a="http://schemas.openxmlformats.org/drawingml/2006/main">
               <a:ext uri="{FF2B5EF4-FFF2-40B4-BE49-F238E27FC236}">
-                <a16:creationId xmlns:a16="http://schemas.microsoft.com/office/drawing/2014/main" id="{5EE53294-5D19-4E82-ADF7-4F09F85AF811}"/>
+                <a16:creationId xmlns:a16="http://schemas.microsoft.com/office/drawing/2014/main" id="{8FAD2231-8903-472F-802F-EE6D2011824A}"/>
               </a:ext>
             </a:extLst>
           </p:cNvPr>
@@ -5036,7 +5036,7 @@
           <p:cNvPr id="17" name="">
             <a:extLst xmlns:a="http://schemas.openxmlformats.org/drawingml/2006/main">
               <a:ext uri="{FF2B5EF4-FFF2-40B4-BE49-F238E27FC236}">
-                <a16:creationId xmlns:a16="http://schemas.microsoft.com/office/drawing/2014/main" id="{DB004F5A-9610-415A-B729-D0D026503615}"/>
+                <a16:creationId xmlns:a16="http://schemas.microsoft.com/office/drawing/2014/main" id="{B4E3B929-075D-4C6C-A6E3-2242B08D4BA3}"/>
               </a:ext>
             </a:extLst>
           </p:cNvPr>
@@ -5069,7 +5069,7 @@
           <p:cNvPr id="18" name="">
             <a:extLst xmlns:a="http://schemas.openxmlformats.org/drawingml/2006/main">
               <a:ext uri="{FF2B5EF4-FFF2-40B4-BE49-F238E27FC236}">
-                <a16:creationId xmlns:a16="http://schemas.microsoft.com/office/drawing/2014/main" id="{E13CE604-FA19-4B1A-8E19-81904A542289}"/>
+                <a16:creationId xmlns:a16="http://schemas.microsoft.com/office/drawing/2014/main" id="{FE4EC28C-B126-4ECD-81E0-A13AF0D26653}"/>
               </a:ext>
             </a:extLst>
           </p:cNvPr>
@@ -5133,7 +5133,7 @@
           <p:cNvPr id="19" name="">
             <a:extLst xmlns:a="http://schemas.openxmlformats.org/drawingml/2006/main">
               <a:ext uri="{FF2B5EF4-FFF2-40B4-BE49-F238E27FC236}">
-                <a16:creationId xmlns:a16="http://schemas.microsoft.com/office/drawing/2014/main" id="{EBDAC597-99F1-432E-8019-58C601E5E19B}"/>
+                <a16:creationId xmlns:a16="http://schemas.microsoft.com/office/drawing/2014/main" id="{AD41317F-3BE1-45CE-B684-C255EC987535}"/>
               </a:ext>
             </a:extLst>
           </p:cNvPr>
@@ -5168,7 +5168,7 @@
           <p:cNvPr id="20" name="">
             <a:extLst xmlns:a="http://schemas.openxmlformats.org/drawingml/2006/main">
               <a:ext uri="{FF2B5EF4-FFF2-40B4-BE49-F238E27FC236}">
-                <a16:creationId xmlns:a16="http://schemas.microsoft.com/office/drawing/2014/main" id="{81C1F137-6402-4F94-94C7-C3F73EFE5170}"/>
+                <a16:creationId xmlns:a16="http://schemas.microsoft.com/office/drawing/2014/main" id="{9AE81C07-F6AD-4846-89B6-657ABDC49E64}"/>
               </a:ext>
             </a:extLst>
           </p:cNvPr>
@@ -5203,7 +5203,7 @@
           <p:cNvPr id="21" name="">
             <a:extLst xmlns:a="http://schemas.openxmlformats.org/drawingml/2006/main">
               <a:ext uri="{FF2B5EF4-FFF2-40B4-BE49-F238E27FC236}">
-                <a16:creationId xmlns:a16="http://schemas.microsoft.com/office/drawing/2014/main" id="{58146721-DD56-4690-93A6-399C4BFADBF9}"/>
+                <a16:creationId xmlns:a16="http://schemas.microsoft.com/office/drawing/2014/main" id="{DFBAD6C7-C4BD-42CD-BB64-4EA84EB16C16}"/>
               </a:ext>
             </a:extLst>
           </p:cNvPr>
@@ -5238,7 +5238,7 @@
           <p:cNvPr id="22" name="">
             <a:extLst xmlns:a="http://schemas.openxmlformats.org/drawingml/2006/main">
               <a:ext uri="{FF2B5EF4-FFF2-40B4-BE49-F238E27FC236}">
-                <a16:creationId xmlns:a16="http://schemas.microsoft.com/office/drawing/2014/main" id="{0A83546D-9E64-4D2F-99AC-F6E8CA427A73}"/>
+                <a16:creationId xmlns:a16="http://schemas.microsoft.com/office/drawing/2014/main" id="{08ADC29E-CC0B-4AEA-A605-C6BCB3590A5E}"/>
               </a:ext>
             </a:extLst>
           </p:cNvPr>
@@ -5273,7 +5273,7 @@
           <p:cNvPr id="23" name="">
             <a:extLst xmlns:a="http://schemas.openxmlformats.org/drawingml/2006/main">
               <a:ext uri="{FF2B5EF4-FFF2-40B4-BE49-F238E27FC236}">
-                <a16:creationId xmlns:a16="http://schemas.microsoft.com/office/drawing/2014/main" id="{0A4D27ED-2F58-4C7E-A834-1DAEC1497662}"/>
+                <a16:creationId xmlns:a16="http://schemas.microsoft.com/office/drawing/2014/main" id="{C982EFC3-69EC-4E68-88F7-ACDC3EFA05EB}"/>
               </a:ext>
             </a:extLst>
           </p:cNvPr>
@@ -5337,7 +5337,7 @@
           <p:cNvPr id="24" name="">
             <a:extLst xmlns:a="http://schemas.openxmlformats.org/drawingml/2006/main">
               <a:ext uri="{FF2B5EF4-FFF2-40B4-BE49-F238E27FC236}">
-                <a16:creationId xmlns:a16="http://schemas.microsoft.com/office/drawing/2014/main" id="{0917D16B-55AF-4892-8A8A-6EEE0C3F8BA7}"/>
+                <a16:creationId xmlns:a16="http://schemas.microsoft.com/office/drawing/2014/main" id="{83EBC3A9-C613-4B87-90B4-AEDA933E0A10}"/>
               </a:ext>
             </a:extLst>
           </p:cNvPr>
@@ -5399,7 +5399,7 @@
     </p:spTree>
     <p:extLst>
       <p:ext uri="{BB962C8B-B14F-4D97-AF65-F5344CB8AC3E}">
-        <p14:creationId xmlns:p14="http://schemas.microsoft.com/office/powerpoint/2010/main" val="1875844293"/>
+        <p14:creationId xmlns:p14="http://schemas.microsoft.com/office/powerpoint/2010/main" val="459789638"/>
       </p:ext>
     </p:extLst>
   </p:cSld>
@@ -5423,7 +5423,7 @@
           <p:cNvPr id="1" name="">
             <a:extLst xmlns:a="http://schemas.openxmlformats.org/drawingml/2006/main">
               <a:ext uri="{FF2B5EF4-FFF2-40B4-BE49-F238E27FC236}">
-                <a16:creationId xmlns:a16="http://schemas.microsoft.com/office/drawing/2014/main" id="{EFA4A9BF-4AC2-4B6F-A1BB-C74C124AD04E}"/>
+                <a16:creationId xmlns:a16="http://schemas.microsoft.com/office/drawing/2014/main" id="{FB5ABA0E-5AD1-428B-8511-87D5271E0AAB}"/>
               </a:ext>
             </a:extLst>
           </p:cNvPr>
@@ -5458,7 +5458,7 @@
           <p:cNvPr id="2" name="">
             <a:extLst xmlns:a="http://schemas.openxmlformats.org/drawingml/2006/main">
               <a:ext uri="{FF2B5EF4-FFF2-40B4-BE49-F238E27FC236}">
-                <a16:creationId xmlns:a16="http://schemas.microsoft.com/office/drawing/2014/main" id="{4D3626EF-F76E-41EA-895D-ED8715780BF2}"/>
+                <a16:creationId xmlns:a16="http://schemas.microsoft.com/office/drawing/2014/main" id="{B5D947EE-22C1-427E-A5B1-C7566A1A5F1E}"/>
               </a:ext>
             </a:extLst>
           </p:cNvPr>
@@ -5522,7 +5522,7 @@
           <p:cNvPr id="3" name="">
             <a:extLst xmlns:a="http://schemas.openxmlformats.org/drawingml/2006/main">
               <a:ext uri="{FF2B5EF4-FFF2-40B4-BE49-F238E27FC236}">
-                <a16:creationId xmlns:a16="http://schemas.microsoft.com/office/drawing/2014/main" id="{2D088FB0-83F5-4812-A66B-73D6B4B7A675}"/>
+                <a16:creationId xmlns:a16="http://schemas.microsoft.com/office/drawing/2014/main" id="{941BAFE3-D99B-44C5-8020-B8EDD1B11587}"/>
               </a:ext>
             </a:extLst>
           </p:cNvPr>
@@ -5557,7 +5557,7 @@
           <p:cNvPr id="4" name="">
             <a:extLst xmlns:a="http://schemas.openxmlformats.org/drawingml/2006/main">
               <a:ext uri="{FF2B5EF4-FFF2-40B4-BE49-F238E27FC236}">
-                <a16:creationId xmlns:a16="http://schemas.microsoft.com/office/drawing/2014/main" id="{4D33B290-9EAD-49B2-AD34-3A742BC367A1}"/>
+                <a16:creationId xmlns:a16="http://schemas.microsoft.com/office/drawing/2014/main" id="{551EDE11-BFE0-43D0-9629-0334D16F9C55}"/>
               </a:ext>
             </a:extLst>
           </p:cNvPr>
@@ -5621,7 +5621,7 @@
           <p:cNvPr id="5" name="">
             <a:extLst xmlns:a="http://schemas.openxmlformats.org/drawingml/2006/main">
               <a:ext uri="{FF2B5EF4-FFF2-40B4-BE49-F238E27FC236}">
-                <a16:creationId xmlns:a16="http://schemas.microsoft.com/office/drawing/2014/main" id="{D8CE2DAA-1B87-4AB2-BA75-004210D807C9}"/>
+                <a16:creationId xmlns:a16="http://schemas.microsoft.com/office/drawing/2014/main" id="{A3771ABA-BD36-41BA-8DA5-E69E68F46D45}"/>
               </a:ext>
             </a:extLst>
           </p:cNvPr>
@@ -5685,7 +5685,7 @@
           <p:cNvPr id="6" name="">
             <a:extLst xmlns:a="http://schemas.openxmlformats.org/drawingml/2006/main">
               <a:ext uri="{FF2B5EF4-FFF2-40B4-BE49-F238E27FC236}">
-                <a16:creationId xmlns:a16="http://schemas.microsoft.com/office/drawing/2014/main" id="{7F771B2F-16A8-47E3-BCEC-C38FAD97CC62}"/>
+                <a16:creationId xmlns:a16="http://schemas.microsoft.com/office/drawing/2014/main" id="{571C4EDE-AFF1-4F17-AAD9-EF90B4FE0190}"/>
               </a:ext>
             </a:extLst>
           </p:cNvPr>
@@ -5749,7 +5749,7 @@
           <p:cNvPr id="7" name="">
             <a:extLst xmlns:a="http://schemas.openxmlformats.org/drawingml/2006/main">
               <a:ext uri="{FF2B5EF4-FFF2-40B4-BE49-F238E27FC236}">
-                <a16:creationId xmlns:a16="http://schemas.microsoft.com/office/drawing/2014/main" id="{2FAD5070-CAC4-4402-9805-C13CAAFF42E6}"/>
+                <a16:creationId xmlns:a16="http://schemas.microsoft.com/office/drawing/2014/main" id="{B94025F8-33C1-4CF7-8766-CC212053DAB0}"/>
               </a:ext>
             </a:extLst>
           </p:cNvPr>
@@ -5813,7 +5813,7 @@
           <p:cNvPr id="8" name="">
             <a:extLst xmlns:a="http://schemas.openxmlformats.org/drawingml/2006/main">
               <a:ext uri="{FF2B5EF4-FFF2-40B4-BE49-F238E27FC236}">
-                <a16:creationId xmlns:a16="http://schemas.microsoft.com/office/drawing/2014/main" id="{873550AE-88BC-4FB2-A133-77A2431D81D3}"/>
+                <a16:creationId xmlns:a16="http://schemas.microsoft.com/office/drawing/2014/main" id="{00F7B4B1-C2AF-4720-AB7D-89E17854F78F}"/>
               </a:ext>
             </a:extLst>
           </p:cNvPr>
@@ -5848,7 +5848,7 @@
           <p:cNvPr id="9" name="">
             <a:extLst xmlns:a="http://schemas.openxmlformats.org/drawingml/2006/main">
               <a:ext uri="{FF2B5EF4-FFF2-40B4-BE49-F238E27FC236}">
-                <a16:creationId xmlns:a16="http://schemas.microsoft.com/office/drawing/2014/main" id="{8A81080D-F8B5-424A-892D-275E936D81AD}"/>
+                <a16:creationId xmlns:a16="http://schemas.microsoft.com/office/drawing/2014/main" id="{4107FA7D-E123-4D72-A177-2D6F0F027708}"/>
               </a:ext>
             </a:extLst>
           </p:cNvPr>
@@ -5883,7 +5883,7 @@
           <p:cNvPr id="10" name="">
             <a:extLst xmlns:a="http://schemas.openxmlformats.org/drawingml/2006/main">
               <a:ext uri="{FF2B5EF4-FFF2-40B4-BE49-F238E27FC236}">
-                <a16:creationId xmlns:a16="http://schemas.microsoft.com/office/drawing/2014/main" id="{6EA4E5AF-BC7F-4213-9D68-D7C871E17ABF}"/>
+                <a16:creationId xmlns:a16="http://schemas.microsoft.com/office/drawing/2014/main" id="{9BEC2F16-7462-4CDE-9174-D0BE05B0252D}"/>
               </a:ext>
             </a:extLst>
           </p:cNvPr>
@@ -5947,7 +5947,7 @@
           <p:cNvPr id="11" name="">
             <a:extLst xmlns:a="http://schemas.openxmlformats.org/drawingml/2006/main">
               <a:ext uri="{FF2B5EF4-FFF2-40B4-BE49-F238E27FC236}">
-                <a16:creationId xmlns:a16="http://schemas.microsoft.com/office/drawing/2014/main" id="{9DD4C080-133E-4CBE-AE3D-96D39B253F8D}"/>
+                <a16:creationId xmlns:a16="http://schemas.microsoft.com/office/drawing/2014/main" id="{BB50F10F-E63B-4FC3-A184-DA5CA64366BE}"/>
               </a:ext>
             </a:extLst>
           </p:cNvPr>
@@ -6011,7 +6011,7 @@
           <p:cNvPr id="12" name="">
             <a:extLst xmlns:a="http://schemas.openxmlformats.org/drawingml/2006/main">
               <a:ext uri="{FF2B5EF4-FFF2-40B4-BE49-F238E27FC236}">
-                <a16:creationId xmlns:a16="http://schemas.microsoft.com/office/drawing/2014/main" id="{EADE435E-99CE-4B41-89B8-131CF438EDD2}"/>
+                <a16:creationId xmlns:a16="http://schemas.microsoft.com/office/drawing/2014/main" id="{5490CE42-9856-4DED-9680-16EAD024C522}"/>
               </a:ext>
             </a:extLst>
           </p:cNvPr>
@@ -6046,7 +6046,7 @@
           <p:cNvPr id="13" name="">
             <a:extLst xmlns:a="http://schemas.openxmlformats.org/drawingml/2006/main">
               <a:ext uri="{FF2B5EF4-FFF2-40B4-BE49-F238E27FC236}">
-                <a16:creationId xmlns:a16="http://schemas.microsoft.com/office/drawing/2014/main" id="{5BAF8569-527A-4B01-BEE3-004D47306A50}"/>
+                <a16:creationId xmlns:a16="http://schemas.microsoft.com/office/drawing/2014/main" id="{D8226FFD-9E6B-4F52-B410-82659897E347}"/>
               </a:ext>
             </a:extLst>
           </p:cNvPr>
@@ -6081,7 +6081,7 @@
           <p:cNvPr id="14" name="">
             <a:extLst xmlns:a="http://schemas.openxmlformats.org/drawingml/2006/main">
               <a:ext uri="{FF2B5EF4-FFF2-40B4-BE49-F238E27FC236}">
-                <a16:creationId xmlns:a16="http://schemas.microsoft.com/office/drawing/2014/main" id="{E47A93C1-7355-40B0-B354-EAC8429418A0}"/>
+                <a16:creationId xmlns:a16="http://schemas.microsoft.com/office/drawing/2014/main" id="{B1F371D0-297F-4558-BFC2-51219DCD5D56}"/>
               </a:ext>
             </a:extLst>
           </p:cNvPr>
@@ -6145,7 +6145,7 @@
           <p:cNvPr id="15" name="">
             <a:extLst xmlns:a="http://schemas.openxmlformats.org/drawingml/2006/main">
               <a:ext uri="{FF2B5EF4-FFF2-40B4-BE49-F238E27FC236}">
-                <a16:creationId xmlns:a16="http://schemas.microsoft.com/office/drawing/2014/main" id="{EC49E195-957F-44B2-8B51-2D1648BC939A}"/>
+                <a16:creationId xmlns:a16="http://schemas.microsoft.com/office/drawing/2014/main" id="{12B62D3E-0DB7-4283-985E-521EF7BDADBD}"/>
               </a:ext>
             </a:extLst>
           </p:cNvPr>
@@ -6209,7 +6209,7 @@
           <p:cNvPr id="16" name="">
             <a:extLst xmlns:a="http://schemas.openxmlformats.org/drawingml/2006/main">
               <a:ext uri="{FF2B5EF4-FFF2-40B4-BE49-F238E27FC236}">
-                <a16:creationId xmlns:a16="http://schemas.microsoft.com/office/drawing/2014/main" id="{6562B84F-150D-464B-8179-DE52DCF7B05D}"/>
+                <a16:creationId xmlns:a16="http://schemas.microsoft.com/office/drawing/2014/main" id="{F3622882-53FE-4035-B57A-26944E20B51C}"/>
               </a:ext>
             </a:extLst>
           </p:cNvPr>
@@ -6244,7 +6244,7 @@
           <p:cNvPr id="17" name="">
             <a:extLst xmlns:a="http://schemas.openxmlformats.org/drawingml/2006/main">
               <a:ext uri="{FF2B5EF4-FFF2-40B4-BE49-F238E27FC236}">
-                <a16:creationId xmlns:a16="http://schemas.microsoft.com/office/drawing/2014/main" id="{4FF5CFF2-883E-4ED9-8D6E-2C3B1DB49775}"/>
+                <a16:creationId xmlns:a16="http://schemas.microsoft.com/office/drawing/2014/main" id="{B7CE4B12-B039-470D-8759-0576771EE26A}"/>
               </a:ext>
             </a:extLst>
           </p:cNvPr>
@@ -6279,7 +6279,7 @@
           <p:cNvPr id="18" name="">
             <a:extLst xmlns:a="http://schemas.openxmlformats.org/drawingml/2006/main">
               <a:ext uri="{FF2B5EF4-FFF2-40B4-BE49-F238E27FC236}">
-                <a16:creationId xmlns:a16="http://schemas.microsoft.com/office/drawing/2014/main" id="{7E07DAAD-2B52-44E7-834F-46D593FB70A9}"/>
+                <a16:creationId xmlns:a16="http://schemas.microsoft.com/office/drawing/2014/main" id="{0F9EADA8-C537-4410-9DC9-899BB1DCDBC8}"/>
               </a:ext>
             </a:extLst>
           </p:cNvPr>
@@ -6312,7 +6312,7 @@
           <p:cNvPr id="19" name="">
             <a:extLst xmlns:a="http://schemas.openxmlformats.org/drawingml/2006/main">
               <a:ext uri="{FF2B5EF4-FFF2-40B4-BE49-F238E27FC236}">
-                <a16:creationId xmlns:a16="http://schemas.microsoft.com/office/drawing/2014/main" id="{8CDA5C12-A84D-4984-A622-7E8DB6EFA561}"/>
+                <a16:creationId xmlns:a16="http://schemas.microsoft.com/office/drawing/2014/main" id="{CED4960B-7111-4061-BA8A-6D83D2962804}"/>
               </a:ext>
             </a:extLst>
           </p:cNvPr>
@@ -6347,7 +6347,7 @@
           <p:cNvPr id="20" name="">
             <a:extLst xmlns:a="http://schemas.openxmlformats.org/drawingml/2006/main">
               <a:ext uri="{FF2B5EF4-FFF2-40B4-BE49-F238E27FC236}">
-                <a16:creationId xmlns:a16="http://schemas.microsoft.com/office/drawing/2014/main" id="{CDF24685-7B3E-40CF-BF5B-EE08BE0AB737}"/>
+                <a16:creationId xmlns:a16="http://schemas.microsoft.com/office/drawing/2014/main" id="{E84F3A4C-9195-409A-B5F9-8973294974B9}"/>
               </a:ext>
             </a:extLst>
           </p:cNvPr>
@@ -6411,7 +6411,7 @@
           <p:cNvPr id="21" name="">
             <a:extLst xmlns:a="http://schemas.openxmlformats.org/drawingml/2006/main">
               <a:ext uri="{FF2B5EF4-FFF2-40B4-BE49-F238E27FC236}">
-                <a16:creationId xmlns:a16="http://schemas.microsoft.com/office/drawing/2014/main" id="{20FBE22C-9E57-4A1A-AE4F-4E0C864EB512}"/>
+                <a16:creationId xmlns:a16="http://schemas.microsoft.com/office/drawing/2014/main" id="{8B54DBAC-FF07-4FCC-A024-33DE2B8E5B52}"/>
               </a:ext>
             </a:extLst>
           </p:cNvPr>
@@ -6475,7 +6475,7 @@
           <p:cNvPr id="22" name="">
             <a:extLst xmlns:a="http://schemas.openxmlformats.org/drawingml/2006/main">
               <a:ext uri="{FF2B5EF4-FFF2-40B4-BE49-F238E27FC236}">
-                <a16:creationId xmlns:a16="http://schemas.microsoft.com/office/drawing/2014/main" id="{A2C97B0C-9374-4725-BCFC-A5746661C435}"/>
+                <a16:creationId xmlns:a16="http://schemas.microsoft.com/office/drawing/2014/main" id="{EB7653C5-81B2-4D50-AB46-D70692549AA7}"/>
               </a:ext>
             </a:extLst>
           </p:cNvPr>
@@ -6508,7 +6508,7 @@
           <p:cNvPr id="23" name="">
             <a:extLst xmlns:a="http://schemas.openxmlformats.org/drawingml/2006/main">
               <a:ext uri="{FF2B5EF4-FFF2-40B4-BE49-F238E27FC236}">
-                <a16:creationId xmlns:a16="http://schemas.microsoft.com/office/drawing/2014/main" id="{4FA20768-3A2D-48F1-B503-D32FF9D97B07}"/>
+                <a16:creationId xmlns:a16="http://schemas.microsoft.com/office/drawing/2014/main" id="{000CC1AD-D5E5-4424-B497-4722F5902854}"/>
               </a:ext>
             </a:extLst>
           </p:cNvPr>
@@ -6543,7 +6543,7 @@
           <p:cNvPr id="24" name="">
             <a:extLst xmlns:a="http://schemas.openxmlformats.org/drawingml/2006/main">
               <a:ext uri="{FF2B5EF4-FFF2-40B4-BE49-F238E27FC236}">
-                <a16:creationId xmlns:a16="http://schemas.microsoft.com/office/drawing/2014/main" id="{B0327DCE-620F-4116-9FCC-1ED0F57EAB77}"/>
+                <a16:creationId xmlns:a16="http://schemas.microsoft.com/office/drawing/2014/main" id="{1F8459F6-560C-4BDF-932E-A568C148A433}"/>
               </a:ext>
             </a:extLst>
           </p:cNvPr>
@@ -6607,7 +6607,7 @@
           <p:cNvPr id="25" name="">
             <a:extLst xmlns:a="http://schemas.openxmlformats.org/drawingml/2006/main">
               <a:ext uri="{FF2B5EF4-FFF2-40B4-BE49-F238E27FC236}">
-                <a16:creationId xmlns:a16="http://schemas.microsoft.com/office/drawing/2014/main" id="{E0278005-D465-40EF-B467-1911EBB4FAB6}"/>
+                <a16:creationId xmlns:a16="http://schemas.microsoft.com/office/drawing/2014/main" id="{34BE66D6-806D-49A0-B9C1-CDF367F48D42}"/>
               </a:ext>
             </a:extLst>
           </p:cNvPr>
@@ -6671,7 +6671,7 @@
           <p:cNvPr id="26" name="">
             <a:extLst xmlns:a="http://schemas.openxmlformats.org/drawingml/2006/main">
               <a:ext uri="{FF2B5EF4-FFF2-40B4-BE49-F238E27FC236}">
-                <a16:creationId xmlns:a16="http://schemas.microsoft.com/office/drawing/2014/main" id="{41FEF2D0-7377-46A8-B6FE-9A8DA06FC277}"/>
+                <a16:creationId xmlns:a16="http://schemas.microsoft.com/office/drawing/2014/main" id="{D58CED6C-5F03-449B-A789-86720EBE5317}"/>
               </a:ext>
             </a:extLst>
           </p:cNvPr>
@@ -6733,7 +6733,7 @@
     </p:spTree>
     <p:extLst>
       <p:ext uri="{BB962C8B-B14F-4D97-AF65-F5344CB8AC3E}">
-        <p14:creationId xmlns:p14="http://schemas.microsoft.com/office/powerpoint/2010/main" val="970975320"/>
+        <p14:creationId xmlns:p14="http://schemas.microsoft.com/office/powerpoint/2010/main" val="876817696"/>
       </p:ext>
     </p:extLst>
   </p:cSld>
@@ -6757,7 +6757,7 @@
           <p:cNvPr id="1" name="">
             <a:extLst xmlns:a="http://schemas.openxmlformats.org/drawingml/2006/main">
               <a:ext uri="{FF2B5EF4-FFF2-40B4-BE49-F238E27FC236}">
-                <a16:creationId xmlns:a16="http://schemas.microsoft.com/office/drawing/2014/main" id="{DCB07D5D-D0B3-4715-8E6E-7CA13BD156F9}"/>
+                <a16:creationId xmlns:a16="http://schemas.microsoft.com/office/drawing/2014/main" id="{C4C573C5-9A5F-45F7-85CE-11C2EE7E943D}"/>
               </a:ext>
             </a:extLst>
           </p:cNvPr>
@@ -6792,7 +6792,7 @@
           <p:cNvPr id="2" name="">
             <a:extLst xmlns:a="http://schemas.openxmlformats.org/drawingml/2006/main">
               <a:ext uri="{FF2B5EF4-FFF2-40B4-BE49-F238E27FC236}">
-                <a16:creationId xmlns:a16="http://schemas.microsoft.com/office/drawing/2014/main" id="{E81316CD-07C5-4F48-B20F-E70BEAD81A95}"/>
+                <a16:creationId xmlns:a16="http://schemas.microsoft.com/office/drawing/2014/main" id="{AF122109-1720-49F7-B0DB-517E1359E575}"/>
               </a:ext>
             </a:extLst>
           </p:cNvPr>
@@ -6856,7 +6856,7 @@
           <p:cNvPr id="3" name="">
             <a:extLst xmlns:a="http://schemas.openxmlformats.org/drawingml/2006/main">
               <a:ext uri="{FF2B5EF4-FFF2-40B4-BE49-F238E27FC236}">
-                <a16:creationId xmlns:a16="http://schemas.microsoft.com/office/drawing/2014/main" id="{0C90ADF9-1ED9-41CF-9769-0747E689B1EF}"/>
+                <a16:creationId xmlns:a16="http://schemas.microsoft.com/office/drawing/2014/main" id="{476BED42-5A31-4E90-9443-F6CC0B4B01DF}"/>
               </a:ext>
             </a:extLst>
           </p:cNvPr>
@@ -6891,7 +6891,7 @@
           <p:cNvPr id="4" name="">
             <a:extLst xmlns:a="http://schemas.openxmlformats.org/drawingml/2006/main">
               <a:ext uri="{FF2B5EF4-FFF2-40B4-BE49-F238E27FC236}">
-                <a16:creationId xmlns:a16="http://schemas.microsoft.com/office/drawing/2014/main" id="{F6F4C8B0-40C1-4950-95F6-334C00228091}"/>
+                <a16:creationId xmlns:a16="http://schemas.microsoft.com/office/drawing/2014/main" id="{C70DDF35-0EAB-41C0-9EC9-7EF29325534A}"/>
               </a:ext>
             </a:extLst>
           </p:cNvPr>
@@ -6945,7 +6945,7 @@
                 <a:ea typeface="Aptos Display"/>
                 <a:cs typeface="Aptos Display"/>
               </a:rPr>
-              <a:t>What remains after the literature</a:t>
+              <a:t>What is still missing?</a:t>
             </a:r>
           </a:p>
         </p:txBody>
@@ -6955,7 +6955,7 @@
           <p:cNvPr id="5" name="">
             <a:extLst xmlns:a="http://schemas.openxmlformats.org/drawingml/2006/main">
               <a:ext uri="{FF2B5EF4-FFF2-40B4-BE49-F238E27FC236}">
-                <a16:creationId xmlns:a16="http://schemas.microsoft.com/office/drawing/2014/main" id="{EA96B2B4-5FE3-49E1-B01B-AE47096CD15E}"/>
+                <a16:creationId xmlns:a16="http://schemas.microsoft.com/office/drawing/2014/main" id="{F71EC15A-DEE4-4D69-9FA7-02E2FE84825C}"/>
               </a:ext>
             </a:extLst>
           </p:cNvPr>
@@ -7009,7 +7009,7 @@
                 <a:ea typeface="Aptos"/>
                 <a:cs typeface="Aptos"/>
               </a:rPr>
-              <a:t>The papers solve memory layout, prefix storage, modular reuse, and attention reuse. Scheduling policy remains a practical gap.</a:t>
+              <a:t>They do not answer which prefix-sharing requests should run together under cache pressure.</a:t>
             </a:r>
           </a:p>
         </p:txBody>
@@ -7019,19 +7019,19 @@
           <p:cNvPr id="6" name="">
             <a:extLst xmlns:a="http://schemas.openxmlformats.org/drawingml/2006/main">
               <a:ext uri="{FF2B5EF4-FFF2-40B4-BE49-F238E27FC236}">
-                <a16:creationId xmlns:a16="http://schemas.microsoft.com/office/drawing/2014/main" id="{311884E6-A91E-4E73-987B-6C7AC6402225}"/>
-              </a:ext>
-            </a:extLst>
-          </p:cNvPr>
-          <p:cNvSpPr>
-            <a:spLocks xmlns:a="http://schemas.openxmlformats.org/drawingml/2006/main" noGrp="1"/>
-          </p:cNvSpPr>
-          <p:nvPr/>
-        </p:nvSpPr>
-        <p:spPr>
-          <a:xfrm xmlns:a="http://schemas.openxmlformats.org/drawingml/2006/main">
-            <a:off x="800100" y="2428875"/>
-            <a:ext cx="2152650" cy="1562100"/>
+                <a16:creationId xmlns:a16="http://schemas.microsoft.com/office/drawing/2014/main" id="{1BA8AE48-3A01-4EBF-ADEB-18590D5AF2BA}"/>
+              </a:ext>
+            </a:extLst>
+          </p:cNvPr>
+          <p:cNvSpPr>
+            <a:spLocks xmlns:a="http://schemas.openxmlformats.org/drawingml/2006/main" noGrp="1"/>
+          </p:cNvSpPr>
+          <p:nvPr/>
+        </p:nvSpPr>
+        <p:spPr>
+          <a:xfrm xmlns:a="http://schemas.openxmlformats.org/drawingml/2006/main">
+            <a:off x="781050" y="1866900"/>
+            <a:ext cx="4705350" cy="400050"/>
           </a:xfrm>
           <a:prstGeom xmlns:a="http://schemas.openxmlformats.org/drawingml/2006/main" prst="rect">
             <a:avLst/>
@@ -7039,9 +7039,9 @@
           <a:solidFill xmlns:a="http://schemas.openxmlformats.org/drawingml/2006/main">
             <a:srgbClr val="1C2330"/>
           </a:solidFill>
-          <a:ln xmlns:a="http://schemas.openxmlformats.org/drawingml/2006/main" w="19050">
-            <a:solidFill>
-              <a:srgbClr val="7BD88F"/>
+          <a:ln xmlns:a="http://schemas.openxmlformats.org/drawingml/2006/main" w="9525">
+            <a:solidFill>
+              <a:srgbClr val="394352"/>
             </a:solidFill>
             <a:prstDash val="solid"/>
           </a:ln>
@@ -7052,19 +7052,19 @@
           <p:cNvPr id="7" name="">
             <a:extLst xmlns:a="http://schemas.openxmlformats.org/drawingml/2006/main">
               <a:ext uri="{FF2B5EF4-FFF2-40B4-BE49-F238E27FC236}">
-                <a16:creationId xmlns:a16="http://schemas.microsoft.com/office/drawing/2014/main" id="{A80C281C-E1FA-424D-9F76-607FCECEFED5}"/>
-              </a:ext>
-            </a:extLst>
-          </p:cNvPr>
-          <p:cNvSpPr>
-            <a:spLocks xmlns:a="http://schemas.openxmlformats.org/drawingml/2006/main" noGrp="1"/>
-          </p:cNvSpPr>
-          <p:nvPr/>
-        </p:nvSpPr>
-        <p:spPr>
-          <a:xfrm xmlns:a="http://schemas.openxmlformats.org/drawingml/2006/main">
-            <a:off x="971550" y="2647950"/>
-            <a:ext cx="1809750" cy="266700"/>
+                <a16:creationId xmlns:a16="http://schemas.microsoft.com/office/drawing/2014/main" id="{91531811-49ED-427F-8223-B9AFADD03142}"/>
+              </a:ext>
+            </a:extLst>
+          </p:cNvPr>
+          <p:cNvSpPr>
+            <a:spLocks xmlns:a="http://schemas.openxmlformats.org/drawingml/2006/main" noGrp="1"/>
+          </p:cNvSpPr>
+          <p:nvPr/>
+        </p:nvSpPr>
+        <p:spPr>
+          <a:xfrm xmlns:a="http://schemas.openxmlformats.org/drawingml/2006/main">
+            <a:off x="952500" y="1971675"/>
+            <a:ext cx="4362450" cy="190500"/>
           </a:xfrm>
           <a:prstGeom xmlns:a="http://schemas.openxmlformats.org/drawingml/2006/main" prst="rect">
             <a:avLst/>
@@ -7088,7 +7088,763 @@
           <a:lstStyle xmlns:a="http://schemas.openxmlformats.org/drawingml/2006/main"/>
           <a:p xmlns:a="http://schemas.openxmlformats.org/drawingml/2006/main">
             <a:pPr algn="ctr">
-              <a:defRPr sz="1800" b="1">
+              <a:defRPr sz="1125" b="1">
+                <a:solidFill>
+                  <a:srgbClr val="72A7FF"/>
+                </a:solidFill>
+                <a:latin typeface="Aptos"/>
+                <a:ea typeface="Aptos"/>
+                <a:cs typeface="Aptos"/>
+              </a:defRPr>
+            </a:pPr>
+            <a:r>
+              <a:rPr sz="1125" b="1">
+                <a:solidFill>
+                  <a:srgbClr val="72A7FF"/>
+                </a:solidFill>
+                <a:latin typeface="Aptos"/>
+                <a:ea typeface="Aptos"/>
+                <a:cs typeface="Aptos"/>
+              </a:rPr>
+              <a:t>What related work gives us</a:t>
+            </a:r>
+          </a:p>
+        </p:txBody>
+      </p:sp>
+      <p:sp>
+        <p:nvSpPr>
+          <p:cNvPr id="8" name="">
+            <a:extLst xmlns:a="http://schemas.openxmlformats.org/drawingml/2006/main">
+              <a:ext uri="{FF2B5EF4-FFF2-40B4-BE49-F238E27FC236}">
+                <a16:creationId xmlns:a16="http://schemas.microsoft.com/office/drawing/2014/main" id="{5982DA1A-E9D8-4037-8D05-98D583746EEE}"/>
+              </a:ext>
+            </a:extLst>
+          </p:cNvPr>
+          <p:cNvSpPr>
+            <a:spLocks xmlns:a="http://schemas.openxmlformats.org/drawingml/2006/main" noGrp="1"/>
+          </p:cNvSpPr>
+          <p:nvPr/>
+        </p:nvSpPr>
+        <p:spPr>
+          <a:xfrm xmlns:a="http://schemas.openxmlformats.org/drawingml/2006/main">
+            <a:off x="5638800" y="1866900"/>
+            <a:ext cx="4705350" cy="400050"/>
+          </a:xfrm>
+          <a:prstGeom xmlns:a="http://schemas.openxmlformats.org/drawingml/2006/main" prst="rect">
+            <a:avLst/>
+          </a:prstGeom>
+          <a:solidFill xmlns:a="http://schemas.openxmlformats.org/drawingml/2006/main">
+            <a:srgbClr val="1C2330"/>
+          </a:solidFill>
+          <a:ln xmlns:a="http://schemas.openxmlformats.org/drawingml/2006/main" w="9525">
+            <a:solidFill>
+              <a:srgbClr val="394352"/>
+            </a:solidFill>
+            <a:prstDash val="solid"/>
+          </a:ln>
+        </p:spPr>
+      </p:sp>
+      <p:sp>
+        <p:nvSpPr>
+          <p:cNvPr id="9" name="">
+            <a:extLst xmlns:a="http://schemas.openxmlformats.org/drawingml/2006/main">
+              <a:ext uri="{FF2B5EF4-FFF2-40B4-BE49-F238E27FC236}">
+                <a16:creationId xmlns:a16="http://schemas.microsoft.com/office/drawing/2014/main" id="{356654E2-4CC1-4759-ADD0-F9DC92C8DB0B}"/>
+              </a:ext>
+            </a:extLst>
+          </p:cNvPr>
+          <p:cNvSpPr>
+            <a:spLocks xmlns:a="http://schemas.openxmlformats.org/drawingml/2006/main" noGrp="1"/>
+          </p:cNvSpPr>
+          <p:nvPr/>
+        </p:nvSpPr>
+        <p:spPr>
+          <a:xfrm xmlns:a="http://schemas.openxmlformats.org/drawingml/2006/main">
+            <a:off x="5810250" y="1971675"/>
+            <a:ext cx="4362450" cy="190500"/>
+          </a:xfrm>
+          <a:prstGeom xmlns:a="http://schemas.openxmlformats.org/drawingml/2006/main" prst="rect">
+            <a:avLst/>
+          </a:prstGeom>
+          <a:solidFill xmlns:a="http://schemas.openxmlformats.org/drawingml/2006/main">
+            <a:srgbClr val="000000">
+              <a:alpha val="0"/>
+            </a:srgbClr>
+          </a:solidFill>
+          <a:ln xmlns:a="http://schemas.openxmlformats.org/drawingml/2006/main" w="0">
+            <a:solidFill>
+              <a:srgbClr val="000000">
+                <a:alpha val="0"/>
+              </a:srgbClr>
+            </a:solidFill>
+            <a:prstDash val="solid"/>
+          </a:ln>
+        </p:spPr>
+        <p:txBody>
+          <a:bodyPr xmlns:a="http://schemas.openxmlformats.org/drawingml/2006/main" lIns="0" tIns="0" rIns="0" bIns="0" anchor="t"/>
+          <a:lstStyle xmlns:a="http://schemas.openxmlformats.org/drawingml/2006/main"/>
+          <a:p xmlns:a="http://schemas.openxmlformats.org/drawingml/2006/main">
+            <a:pPr algn="ctr">
+              <a:defRPr sz="1125" b="1">
+                <a:solidFill>
+                  <a:srgbClr val="7BD88F"/>
+                </a:solidFill>
+                <a:latin typeface="Aptos"/>
+                <a:ea typeface="Aptos"/>
+                <a:cs typeface="Aptos"/>
+              </a:defRPr>
+            </a:pPr>
+            <a:r>
+              <a:rPr sz="1125" b="1">
+                <a:solidFill>
+                  <a:srgbClr val="7BD88F"/>
+                </a:solidFill>
+                <a:latin typeface="Aptos"/>
+                <a:ea typeface="Aptos"/>
+                <a:cs typeface="Aptos"/>
+              </a:rPr>
+              <a:t>Question for our capstone</a:t>
+            </a:r>
+          </a:p>
+        </p:txBody>
+      </p:sp>
+      <p:sp>
+        <p:nvSpPr>
+          <p:cNvPr id="10" name="">
+            <a:extLst xmlns:a="http://schemas.openxmlformats.org/drawingml/2006/main">
+              <a:ext uri="{FF2B5EF4-FFF2-40B4-BE49-F238E27FC236}">
+                <a16:creationId xmlns:a16="http://schemas.microsoft.com/office/drawing/2014/main" id="{F2383D67-A01A-4602-A072-53873356D957}"/>
+              </a:ext>
+            </a:extLst>
+          </p:cNvPr>
+          <p:cNvSpPr>
+            <a:spLocks xmlns:a="http://schemas.openxmlformats.org/drawingml/2006/main" noGrp="1"/>
+          </p:cNvSpPr>
+          <p:nvPr/>
+        </p:nvSpPr>
+        <p:spPr>
+          <a:xfrm xmlns:a="http://schemas.openxmlformats.org/drawingml/2006/main">
+            <a:off x="781050" y="2571750"/>
+            <a:ext cx="1524000" cy="228600"/>
+          </a:xfrm>
+          <a:prstGeom xmlns:a="http://schemas.openxmlformats.org/drawingml/2006/main" prst="rect">
+            <a:avLst/>
+          </a:prstGeom>
+          <a:solidFill xmlns:a="http://schemas.openxmlformats.org/drawingml/2006/main">
+            <a:srgbClr val="000000">
+              <a:alpha val="0"/>
+            </a:srgbClr>
+          </a:solidFill>
+          <a:ln xmlns:a="http://schemas.openxmlformats.org/drawingml/2006/main" w="0">
+            <a:solidFill>
+              <a:srgbClr val="000000">
+                <a:alpha val="0"/>
+              </a:srgbClr>
+            </a:solidFill>
+            <a:prstDash val="solid"/>
+          </a:ln>
+        </p:spPr>
+        <p:txBody>
+          <a:bodyPr xmlns:a="http://schemas.openxmlformats.org/drawingml/2006/main" lIns="0" tIns="0" rIns="0" bIns="0" anchor="t"/>
+          <a:lstStyle xmlns:a="http://schemas.openxmlformats.org/drawingml/2006/main"/>
+          <a:p xmlns:a="http://schemas.openxmlformats.org/drawingml/2006/main">
+            <a:pPr algn="l">
+              <a:defRPr sz="1050" b="1">
+                <a:solidFill>
+                  <a:srgbClr val="F2B84B"/>
+                </a:solidFill>
+                <a:latin typeface="Aptos"/>
+                <a:ea typeface="Aptos"/>
+                <a:cs typeface="Aptos"/>
+              </a:defRPr>
+            </a:pPr>
+            <a:r>
+              <a:rPr sz="1050" b="1">
+                <a:solidFill>
+                  <a:srgbClr val="F2B84B"/>
+                </a:solidFill>
+                <a:latin typeface="Aptos"/>
+                <a:ea typeface="Aptos"/>
+                <a:cs typeface="Aptos"/>
+              </a:rPr>
+              <a:t>Cache / storage</a:t>
+            </a:r>
+          </a:p>
+        </p:txBody>
+      </p:sp>
+      <p:sp>
+        <p:nvSpPr>
+          <p:cNvPr id="11" name="">
+            <a:extLst xmlns:a="http://schemas.openxmlformats.org/drawingml/2006/main">
+              <a:ext uri="{FF2B5EF4-FFF2-40B4-BE49-F238E27FC236}">
+                <a16:creationId xmlns:a16="http://schemas.microsoft.com/office/drawing/2014/main" id="{DFDC1D4F-60FE-4358-BB86-CD3AF1B012B2}"/>
+              </a:ext>
+            </a:extLst>
+          </p:cNvPr>
+          <p:cNvSpPr>
+            <a:spLocks xmlns:a="http://schemas.openxmlformats.org/drawingml/2006/main" noGrp="1"/>
+          </p:cNvSpPr>
+          <p:nvPr/>
+        </p:nvSpPr>
+        <p:spPr>
+          <a:xfrm xmlns:a="http://schemas.openxmlformats.org/drawingml/2006/main">
+            <a:off x="781050" y="2381250"/>
+            <a:ext cx="4705350" cy="1066800"/>
+          </a:xfrm>
+          <a:prstGeom xmlns:a="http://schemas.openxmlformats.org/drawingml/2006/main" prst="rect">
+            <a:avLst/>
+          </a:prstGeom>
+          <a:solidFill xmlns:a="http://schemas.openxmlformats.org/drawingml/2006/main">
+            <a:srgbClr val="171D28"/>
+          </a:solidFill>
+          <a:ln xmlns:a="http://schemas.openxmlformats.org/drawingml/2006/main" w="9525">
+            <a:solidFill>
+              <a:srgbClr val="72A7FF"/>
+            </a:solidFill>
+            <a:prstDash val="solid"/>
+          </a:ln>
+        </p:spPr>
+      </p:sp>
+      <p:sp>
+        <p:nvSpPr>
+          <p:cNvPr id="12" name="">
+            <a:extLst xmlns:a="http://schemas.openxmlformats.org/drawingml/2006/main">
+              <a:ext uri="{FF2B5EF4-FFF2-40B4-BE49-F238E27FC236}">
+                <a16:creationId xmlns:a16="http://schemas.microsoft.com/office/drawing/2014/main" id="{28A09590-1473-434F-A8E3-7F591E63F609}"/>
+              </a:ext>
+            </a:extLst>
+          </p:cNvPr>
+          <p:cNvSpPr>
+            <a:spLocks xmlns:a="http://schemas.openxmlformats.org/drawingml/2006/main" noGrp="1"/>
+          </p:cNvSpPr>
+          <p:nvPr/>
+        </p:nvSpPr>
+        <p:spPr>
+          <a:xfrm xmlns:a="http://schemas.openxmlformats.org/drawingml/2006/main">
+            <a:off x="1028700" y="2609850"/>
+            <a:ext cx="4210050" cy="590550"/>
+          </a:xfrm>
+          <a:prstGeom xmlns:a="http://schemas.openxmlformats.org/drawingml/2006/main" prst="rect">
+            <a:avLst/>
+          </a:prstGeom>
+          <a:solidFill xmlns:a="http://schemas.openxmlformats.org/drawingml/2006/main">
+            <a:srgbClr val="000000">
+              <a:alpha val="0"/>
+            </a:srgbClr>
+          </a:solidFill>
+          <a:ln xmlns:a="http://schemas.openxmlformats.org/drawingml/2006/main" w="0">
+            <a:solidFill>
+              <a:srgbClr val="000000">
+                <a:alpha val="0"/>
+              </a:srgbClr>
+            </a:solidFill>
+            <a:prstDash val="solid"/>
+          </a:ln>
+        </p:spPr>
+        <p:txBody>
+          <a:bodyPr xmlns:a="http://schemas.openxmlformats.org/drawingml/2006/main" lIns="0" tIns="0" rIns="0" bIns="0" anchor="t"/>
+          <a:lstStyle xmlns:a="http://schemas.openxmlformats.org/drawingml/2006/main"/>
+          <a:p xmlns:a="http://schemas.openxmlformats.org/drawingml/2006/main">
+            <a:pPr algn="ctr">
+              <a:defRPr sz="1275" b="0">
+                <a:solidFill>
+                  <a:srgbClr val="AEB7C4"/>
+                </a:solidFill>
+                <a:latin typeface="Aptos"/>
+                <a:ea typeface="Aptos"/>
+                <a:cs typeface="Aptos"/>
+              </a:defRPr>
+            </a:pPr>
+            <a:r>
+              <a:rPr sz="1275" b="0">
+                <a:solidFill>
+                  <a:srgbClr val="AEB7C4"/>
+                </a:solidFill>
+                <a:latin typeface="Aptos"/>
+                <a:ea typeface="Aptos"/>
+                <a:cs typeface="Aptos"/>
+              </a:rPr>
+              <a:t>vLLM: paged KV blocks reduce fragmentation</a:t>
+            </a:r>
+          </a:p>
+          <a:p xmlns:a="http://schemas.openxmlformats.org/drawingml/2006/main">
+            <a:pPr algn="ctr">
+              <a:defRPr sz="1275" b="0">
+                <a:solidFill>
+                  <a:srgbClr val="AEB7C4"/>
+                </a:solidFill>
+                <a:latin typeface="Aptos"/>
+                <a:ea typeface="Aptos"/>
+                <a:cs typeface="Aptos"/>
+              </a:defRPr>
+            </a:pPr>
+            <a:r>
+              <a:rPr sz="1275" b="0">
+                <a:solidFill>
+                  <a:srgbClr val="AEB7C4"/>
+                </a:solidFill>
+                <a:latin typeface="Aptos"/>
+                <a:ea typeface="Aptos"/>
+                <a:cs typeface="Aptos"/>
+              </a:rPr>
+              <a:t>SGLang: radix tree stores reusable prefixes</a:t>
+            </a:r>
+          </a:p>
+        </p:txBody>
+      </p:sp>
+      <p:sp>
+        <p:nvSpPr>
+          <p:cNvPr id="13" name="">
+            <a:extLst xmlns:a="http://schemas.openxmlformats.org/drawingml/2006/main">
+              <a:ext uri="{FF2B5EF4-FFF2-40B4-BE49-F238E27FC236}">
+                <a16:creationId xmlns:a16="http://schemas.microsoft.com/office/drawing/2014/main" id="{037E0004-90C4-42DD-A388-A4638EF7CD62}"/>
+              </a:ext>
+            </a:extLst>
+          </p:cNvPr>
+          <p:cNvSpPr>
+            <a:spLocks xmlns:a="http://schemas.openxmlformats.org/drawingml/2006/main" noGrp="1"/>
+          </p:cNvSpPr>
+          <p:nvPr/>
+        </p:nvSpPr>
+        <p:spPr>
+          <a:xfrm xmlns:a="http://schemas.openxmlformats.org/drawingml/2006/main">
+            <a:off x="5638800" y="2381250"/>
+            <a:ext cx="4705350" cy="1066800"/>
+          </a:xfrm>
+          <a:prstGeom xmlns:a="http://schemas.openxmlformats.org/drawingml/2006/main" prst="rect">
+            <a:avLst/>
+          </a:prstGeom>
+          <a:solidFill xmlns:a="http://schemas.openxmlformats.org/drawingml/2006/main">
+            <a:srgbClr val="16251F"/>
+          </a:solidFill>
+          <a:ln xmlns:a="http://schemas.openxmlformats.org/drawingml/2006/main" w="19050">
+            <a:solidFill>
+              <a:srgbClr val="7BD88F"/>
+            </a:solidFill>
+            <a:prstDash val="solid"/>
+          </a:ln>
+        </p:spPr>
+      </p:sp>
+      <p:sp>
+        <p:nvSpPr>
+          <p:cNvPr id="14" name="">
+            <a:extLst xmlns:a="http://schemas.openxmlformats.org/drawingml/2006/main">
+              <a:ext uri="{FF2B5EF4-FFF2-40B4-BE49-F238E27FC236}">
+                <a16:creationId xmlns:a16="http://schemas.microsoft.com/office/drawing/2014/main" id="{01292684-9734-42A5-9750-CE78442B63C8}"/>
+              </a:ext>
+            </a:extLst>
+          </p:cNvPr>
+          <p:cNvSpPr>
+            <a:spLocks xmlns:a="http://schemas.openxmlformats.org/drawingml/2006/main" noGrp="1"/>
+          </p:cNvSpPr>
+          <p:nvPr/>
+        </p:nvSpPr>
+        <p:spPr>
+          <a:xfrm xmlns:a="http://schemas.openxmlformats.org/drawingml/2006/main">
+            <a:off x="5886450" y="2609850"/>
+            <a:ext cx="4210050" cy="590550"/>
+          </a:xfrm>
+          <a:prstGeom xmlns:a="http://schemas.openxmlformats.org/drawingml/2006/main" prst="rect">
+            <a:avLst/>
+          </a:prstGeom>
+          <a:solidFill xmlns:a="http://schemas.openxmlformats.org/drawingml/2006/main">
+            <a:srgbClr val="000000">
+              <a:alpha val="0"/>
+            </a:srgbClr>
+          </a:solidFill>
+          <a:ln xmlns:a="http://schemas.openxmlformats.org/drawingml/2006/main" w="0">
+            <a:solidFill>
+              <a:srgbClr val="000000">
+                <a:alpha val="0"/>
+              </a:srgbClr>
+            </a:solidFill>
+            <a:prstDash val="solid"/>
+          </a:ln>
+        </p:spPr>
+        <p:txBody>
+          <a:bodyPr xmlns:a="http://schemas.openxmlformats.org/drawingml/2006/main" lIns="0" tIns="0" rIns="0" bIns="0" anchor="t"/>
+          <a:lstStyle xmlns:a="http://schemas.openxmlformats.org/drawingml/2006/main"/>
+          <a:p xmlns:a="http://schemas.openxmlformats.org/drawingml/2006/main">
+            <a:pPr algn="ctr">
+              <a:defRPr sz="1350" b="1">
+                <a:solidFill>
+                  <a:srgbClr val="F7F3EA"/>
+                </a:solidFill>
+                <a:latin typeface="Aptos"/>
+                <a:ea typeface="Aptos"/>
+                <a:cs typeface="Aptos"/>
+              </a:defRPr>
+            </a:pPr>
+            <a:r>
+              <a:rPr sz="1350" b="1">
+                <a:solidFill>
+                  <a:srgbClr val="F7F3EA"/>
+                </a:solidFill>
+                <a:latin typeface="Aptos"/>
+                <a:ea typeface="Aptos"/>
+                <a:cs typeface="Aptos"/>
+              </a:rPr>
+              <a:t>Which prefix-sharing requests should be admitted together before useful cache entries are evicted?</a:t>
+            </a:r>
+          </a:p>
+        </p:txBody>
+      </p:sp>
+      <p:sp>
+        <p:nvSpPr>
+          <p:cNvPr id="15" name="">
+            <a:extLst xmlns:a="http://schemas.openxmlformats.org/drawingml/2006/main">
+              <a:ext uri="{FF2B5EF4-FFF2-40B4-BE49-F238E27FC236}">
+                <a16:creationId xmlns:a16="http://schemas.microsoft.com/office/drawing/2014/main" id="{432B8C61-260E-45BC-AACB-6D89E53FFA55}"/>
+              </a:ext>
+            </a:extLst>
+          </p:cNvPr>
+          <p:cNvSpPr>
+            <a:spLocks xmlns:a="http://schemas.openxmlformats.org/drawingml/2006/main" noGrp="1"/>
+          </p:cNvSpPr>
+          <p:nvPr/>
+        </p:nvSpPr>
+        <p:spPr>
+          <a:xfrm xmlns:a="http://schemas.openxmlformats.org/drawingml/2006/main">
+            <a:off x="781050" y="3867150"/>
+            <a:ext cx="1524000" cy="228600"/>
+          </a:xfrm>
+          <a:prstGeom xmlns:a="http://schemas.openxmlformats.org/drawingml/2006/main" prst="rect">
+            <a:avLst/>
+          </a:prstGeom>
+          <a:solidFill xmlns:a="http://schemas.openxmlformats.org/drawingml/2006/main">
+            <a:srgbClr val="000000">
+              <a:alpha val="0"/>
+            </a:srgbClr>
+          </a:solidFill>
+          <a:ln xmlns:a="http://schemas.openxmlformats.org/drawingml/2006/main" w="0">
+            <a:solidFill>
+              <a:srgbClr val="000000">
+                <a:alpha val="0"/>
+              </a:srgbClr>
+            </a:solidFill>
+            <a:prstDash val="solid"/>
+          </a:ln>
+        </p:spPr>
+        <p:txBody>
+          <a:bodyPr xmlns:a="http://schemas.openxmlformats.org/drawingml/2006/main" lIns="0" tIns="0" rIns="0" bIns="0" anchor="t"/>
+          <a:lstStyle xmlns:a="http://schemas.openxmlformats.org/drawingml/2006/main"/>
+          <a:p xmlns:a="http://schemas.openxmlformats.org/drawingml/2006/main">
+            <a:pPr algn="l">
+              <a:defRPr sz="1050" b="1">
+                <a:solidFill>
+                  <a:srgbClr val="F2B84B"/>
+                </a:solidFill>
+                <a:latin typeface="Aptos"/>
+                <a:ea typeface="Aptos"/>
+                <a:cs typeface="Aptos"/>
+              </a:defRPr>
+            </a:pPr>
+            <a:r>
+              <a:rPr sz="1050" b="1">
+                <a:solidFill>
+                  <a:srgbClr val="F2B84B"/>
+                </a:solidFill>
+                <a:latin typeface="Aptos"/>
+                <a:ea typeface="Aptos"/>
+                <a:cs typeface="Aptos"/>
+              </a:rPr>
+              <a:t>Compute / runtime</a:t>
+            </a:r>
+          </a:p>
+        </p:txBody>
+      </p:sp>
+      <p:sp>
+        <p:nvSpPr>
+          <p:cNvPr id="16" name="">
+            <a:extLst xmlns:a="http://schemas.openxmlformats.org/drawingml/2006/main">
+              <a:ext uri="{FF2B5EF4-FFF2-40B4-BE49-F238E27FC236}">
+                <a16:creationId xmlns:a16="http://schemas.microsoft.com/office/drawing/2014/main" id="{CCB9BD11-2267-41BC-8FFA-00E4A1E21FB3}"/>
+              </a:ext>
+            </a:extLst>
+          </p:cNvPr>
+          <p:cNvSpPr>
+            <a:spLocks xmlns:a="http://schemas.openxmlformats.org/drawingml/2006/main" noGrp="1"/>
+          </p:cNvSpPr>
+          <p:nvPr/>
+        </p:nvSpPr>
+        <p:spPr>
+          <a:xfrm xmlns:a="http://schemas.openxmlformats.org/drawingml/2006/main">
+            <a:off x="781050" y="3676650"/>
+            <a:ext cx="4705350" cy="1066800"/>
+          </a:xfrm>
+          <a:prstGeom xmlns:a="http://schemas.openxmlformats.org/drawingml/2006/main" prst="rect">
+            <a:avLst/>
+          </a:prstGeom>
+          <a:solidFill xmlns:a="http://schemas.openxmlformats.org/drawingml/2006/main">
+            <a:srgbClr val="171D28"/>
+          </a:solidFill>
+          <a:ln xmlns:a="http://schemas.openxmlformats.org/drawingml/2006/main" w="9525">
+            <a:solidFill>
+              <a:srgbClr val="72A7FF"/>
+            </a:solidFill>
+            <a:prstDash val="solid"/>
+          </a:ln>
+        </p:spPr>
+      </p:sp>
+      <p:sp>
+        <p:nvSpPr>
+          <p:cNvPr id="17" name="">
+            <a:extLst xmlns:a="http://schemas.openxmlformats.org/drawingml/2006/main">
+              <a:ext uri="{FF2B5EF4-FFF2-40B4-BE49-F238E27FC236}">
+                <a16:creationId xmlns:a16="http://schemas.microsoft.com/office/drawing/2014/main" id="{F3AC8807-CC5A-4E7A-ADEA-70EB08D76393}"/>
+              </a:ext>
+            </a:extLst>
+          </p:cNvPr>
+          <p:cNvSpPr>
+            <a:spLocks xmlns:a="http://schemas.openxmlformats.org/drawingml/2006/main" noGrp="1"/>
+          </p:cNvSpPr>
+          <p:nvPr/>
+        </p:nvSpPr>
+        <p:spPr>
+          <a:xfrm xmlns:a="http://schemas.openxmlformats.org/drawingml/2006/main">
+            <a:off x="1028700" y="3905250"/>
+            <a:ext cx="4210050" cy="590550"/>
+          </a:xfrm>
+          <a:prstGeom xmlns:a="http://schemas.openxmlformats.org/drawingml/2006/main" prst="rect">
+            <a:avLst/>
+          </a:prstGeom>
+          <a:solidFill xmlns:a="http://schemas.openxmlformats.org/drawingml/2006/main">
+            <a:srgbClr val="000000">
+              <a:alpha val="0"/>
+            </a:srgbClr>
+          </a:solidFill>
+          <a:ln xmlns:a="http://schemas.openxmlformats.org/drawingml/2006/main" w="0">
+            <a:solidFill>
+              <a:srgbClr val="000000">
+                <a:alpha val="0"/>
+              </a:srgbClr>
+            </a:solidFill>
+            <a:prstDash val="solid"/>
+          </a:ln>
+        </p:spPr>
+        <p:txBody>
+          <a:bodyPr xmlns:a="http://schemas.openxmlformats.org/drawingml/2006/main" lIns="0" tIns="0" rIns="0" bIns="0" anchor="t"/>
+          <a:lstStyle xmlns:a="http://schemas.openxmlformats.org/drawingml/2006/main"/>
+          <a:p xmlns:a="http://schemas.openxmlformats.org/drawingml/2006/main">
+            <a:pPr algn="ctr">
+              <a:defRPr sz="1275" b="0">
+                <a:solidFill>
+                  <a:srgbClr val="AEB7C4"/>
+                </a:solidFill>
+                <a:latin typeface="Aptos"/>
+                <a:ea typeface="Aptos"/>
+                <a:cs typeface="Aptos"/>
+              </a:defRPr>
+            </a:pPr>
+            <a:r>
+              <a:rPr sz="1275" b="0">
+                <a:solidFill>
+                  <a:srgbClr val="AEB7C4"/>
+                </a:solidFill>
+                <a:latin typeface="Aptos"/>
+                <a:ea typeface="Aptos"/>
+                <a:cs typeface="Aptos"/>
+              </a:rPr>
+              <a:t>PromptCache: precompute explicit prompt modules</a:t>
+            </a:r>
+          </a:p>
+          <a:p xmlns:a="http://schemas.openxmlformats.org/drawingml/2006/main">
+            <a:pPr algn="ctr">
+              <a:defRPr sz="1275" b="0">
+                <a:solidFill>
+                  <a:srgbClr val="AEB7C4"/>
+                </a:solidFill>
+                <a:latin typeface="Aptos"/>
+                <a:ea typeface="Aptos"/>
+                <a:cs typeface="Aptos"/>
+              </a:defRPr>
+            </a:pPr>
+            <a:r>
+              <a:rPr sz="1275" b="0">
+                <a:solidFill>
+                  <a:srgbClr val="AEB7C4"/>
+                </a:solidFill>
+                <a:latin typeface="Aptos"/>
+                <a:ea typeface="Aptos"/>
+                <a:cs typeface="Aptos"/>
+              </a:rPr>
+              <a:t>Hydragen: avoid repeated decode-side prefix reads</a:t>
+            </a:r>
+          </a:p>
+        </p:txBody>
+      </p:sp>
+      <p:sp>
+        <p:nvSpPr>
+          <p:cNvPr id="18" name="">
+            <a:extLst xmlns:a="http://schemas.openxmlformats.org/drawingml/2006/main">
+              <a:ext uri="{FF2B5EF4-FFF2-40B4-BE49-F238E27FC236}">
+                <a16:creationId xmlns:a16="http://schemas.microsoft.com/office/drawing/2014/main" id="{EA232106-1BA7-490C-8AAE-E7695FF6DE4C}"/>
+              </a:ext>
+            </a:extLst>
+          </p:cNvPr>
+          <p:cNvSpPr>
+            <a:spLocks xmlns:a="http://schemas.openxmlformats.org/drawingml/2006/main" noGrp="1"/>
+          </p:cNvSpPr>
+          <p:nvPr/>
+        </p:nvSpPr>
+        <p:spPr>
+          <a:xfrm xmlns:a="http://schemas.openxmlformats.org/drawingml/2006/main">
+            <a:off x="5638800" y="3676650"/>
+            <a:ext cx="4705350" cy="1066800"/>
+          </a:xfrm>
+          <a:prstGeom xmlns:a="http://schemas.openxmlformats.org/drawingml/2006/main" prst="rect">
+            <a:avLst/>
+          </a:prstGeom>
+          <a:solidFill xmlns:a="http://schemas.openxmlformats.org/drawingml/2006/main">
+            <a:srgbClr val="16251F"/>
+          </a:solidFill>
+          <a:ln xmlns:a="http://schemas.openxmlformats.org/drawingml/2006/main" w="19050">
+            <a:solidFill>
+              <a:srgbClr val="7BD88F"/>
+            </a:solidFill>
+            <a:prstDash val="solid"/>
+          </a:ln>
+        </p:spPr>
+      </p:sp>
+      <p:sp>
+        <p:nvSpPr>
+          <p:cNvPr id="19" name="">
+            <a:extLst xmlns:a="http://schemas.openxmlformats.org/drawingml/2006/main">
+              <a:ext uri="{FF2B5EF4-FFF2-40B4-BE49-F238E27FC236}">
+                <a16:creationId xmlns:a16="http://schemas.microsoft.com/office/drawing/2014/main" id="{6833227B-4347-47C4-A146-839A77B3DB03}"/>
+              </a:ext>
+            </a:extLst>
+          </p:cNvPr>
+          <p:cNvSpPr>
+            <a:spLocks xmlns:a="http://schemas.openxmlformats.org/drawingml/2006/main" noGrp="1"/>
+          </p:cNvSpPr>
+          <p:nvPr/>
+        </p:nvSpPr>
+        <p:spPr>
+          <a:xfrm xmlns:a="http://schemas.openxmlformats.org/drawingml/2006/main">
+            <a:off x="5886450" y="3905250"/>
+            <a:ext cx="4210050" cy="590550"/>
+          </a:xfrm>
+          <a:prstGeom xmlns:a="http://schemas.openxmlformats.org/drawingml/2006/main" prst="rect">
+            <a:avLst/>
+          </a:prstGeom>
+          <a:solidFill xmlns:a="http://schemas.openxmlformats.org/drawingml/2006/main">
+            <a:srgbClr val="000000">
+              <a:alpha val="0"/>
+            </a:srgbClr>
+          </a:solidFill>
+          <a:ln xmlns:a="http://schemas.openxmlformats.org/drawingml/2006/main" w="0">
+            <a:solidFill>
+              <a:srgbClr val="000000">
+                <a:alpha val="0"/>
+              </a:srgbClr>
+            </a:solidFill>
+            <a:prstDash val="solid"/>
+          </a:ln>
+        </p:spPr>
+        <p:txBody>
+          <a:bodyPr xmlns:a="http://schemas.openxmlformats.org/drawingml/2006/main" lIns="0" tIns="0" rIns="0" bIns="0" anchor="t"/>
+          <a:lstStyle xmlns:a="http://schemas.openxmlformats.org/drawingml/2006/main"/>
+          <a:p xmlns:a="http://schemas.openxmlformats.org/drawingml/2006/main">
+            <a:pPr algn="ctr">
+              <a:defRPr sz="1350" b="1">
+                <a:solidFill>
+                  <a:srgbClr val="F7F3EA"/>
+                </a:solidFill>
+                <a:latin typeface="Aptos"/>
+                <a:ea typeface="Aptos"/>
+                <a:cs typeface="Aptos"/>
+              </a:defRPr>
+            </a:pPr>
+            <a:r>
+              <a:rPr sz="1350" b="1">
+                <a:solidFill>
+                  <a:srgbClr val="F7F3EA"/>
+                </a:solidFill>
+                <a:latin typeface="Aptos"/>
+                <a:ea typeface="Aptos"/>
+                <a:cs typeface="Aptos"/>
+              </a:rPr>
+              <a:t>Can a lightweight vLLM scheduler expose enough reuse without changing the runtime or writing kernels?</a:t>
+            </a:r>
+          </a:p>
+        </p:txBody>
+      </p:sp>
+      <p:sp>
+        <p:nvSpPr>
+          <p:cNvPr id="20" name="">
+            <a:extLst xmlns:a="http://schemas.openxmlformats.org/drawingml/2006/main">
+              <a:ext uri="{FF2B5EF4-FFF2-40B4-BE49-F238E27FC236}">
+                <a16:creationId xmlns:a16="http://schemas.microsoft.com/office/drawing/2014/main" id="{0E49B0A6-0386-4EF6-84CD-0DF36A24ABFF}"/>
+              </a:ext>
+            </a:extLst>
+          </p:cNvPr>
+          <p:cNvSpPr>
+            <a:spLocks xmlns:a="http://schemas.openxmlformats.org/drawingml/2006/main" noGrp="1"/>
+          </p:cNvSpPr>
+          <p:nvPr/>
+        </p:nvSpPr>
+        <p:spPr>
+          <a:xfrm xmlns:a="http://schemas.openxmlformats.org/drawingml/2006/main">
+            <a:off x="1771650" y="5391150"/>
+            <a:ext cx="8648700" cy="552450"/>
+          </a:xfrm>
+          <a:prstGeom xmlns:a="http://schemas.openxmlformats.org/drawingml/2006/main" prst="rect">
+            <a:avLst/>
+          </a:prstGeom>
+          <a:solidFill xmlns:a="http://schemas.openxmlformats.org/drawingml/2006/main">
+            <a:srgbClr val="241F16"/>
+          </a:solidFill>
+          <a:ln xmlns:a="http://schemas.openxmlformats.org/drawingml/2006/main" w="19050">
+            <a:solidFill>
+              <a:srgbClr val="F2B84B"/>
+            </a:solidFill>
+            <a:prstDash val="solid"/>
+          </a:ln>
+        </p:spPr>
+      </p:sp>
+      <p:sp>
+        <p:nvSpPr>
+          <p:cNvPr id="21" name="">
+            <a:extLst xmlns:a="http://schemas.openxmlformats.org/drawingml/2006/main">
+              <a:ext uri="{FF2B5EF4-FFF2-40B4-BE49-F238E27FC236}">
+                <a16:creationId xmlns:a16="http://schemas.microsoft.com/office/drawing/2014/main" id="{C935AD28-C75C-40F4-9FD4-42910D0C9422}"/>
+              </a:ext>
+            </a:extLst>
+          </p:cNvPr>
+          <p:cNvSpPr>
+            <a:spLocks xmlns:a="http://schemas.openxmlformats.org/drawingml/2006/main" noGrp="1"/>
+          </p:cNvSpPr>
+          <p:nvPr/>
+        </p:nvSpPr>
+        <p:spPr>
+          <a:xfrm xmlns:a="http://schemas.openxmlformats.org/drawingml/2006/main">
+            <a:off x="2152650" y="5562600"/>
+            <a:ext cx="7905750" cy="228600"/>
+          </a:xfrm>
+          <a:prstGeom xmlns:a="http://schemas.openxmlformats.org/drawingml/2006/main" prst="rect">
+            <a:avLst/>
+          </a:prstGeom>
+          <a:solidFill xmlns:a="http://schemas.openxmlformats.org/drawingml/2006/main">
+            <a:srgbClr val="000000">
+              <a:alpha val="0"/>
+            </a:srgbClr>
+          </a:solidFill>
+          <a:ln xmlns:a="http://schemas.openxmlformats.org/drawingml/2006/main" w="0">
+            <a:solidFill>
+              <a:srgbClr val="000000">
+                <a:alpha val="0"/>
+              </a:srgbClr>
+            </a:solidFill>
+            <a:prstDash val="solid"/>
+          </a:ln>
+        </p:spPr>
+        <p:txBody>
+          <a:bodyPr xmlns:a="http://schemas.openxmlformats.org/drawingml/2006/main" lIns="0" tIns="0" rIns="0" bIns="0" anchor="t"/>
+          <a:lstStyle xmlns:a="http://schemas.openxmlformats.org/drawingml/2006/main"/>
+          <a:p xmlns:a="http://schemas.openxmlformats.org/drawingml/2006/main">
+            <a:pPr algn="ctr">
+              <a:defRPr sz="1575" b="1">
                 <a:solidFill>
                   <a:srgbClr val="F7F3EA"/>
                 </a:solidFill>
@@ -7098,7 +7854,7 @@
               </a:defRPr>
             </a:pPr>
             <a:r>
-              <a:rPr sz="1800" b="1">
+              <a:rPr sz="1575" b="1">
                 <a:solidFill>
                   <a:srgbClr val="F7F3EA"/>
                 </a:solidFill>
@@ -7106,661 +7862,17 @@
                 <a:ea typeface="Aptos Display"/>
                 <a:cs typeface="Aptos Display"/>
               </a:rPr>
-              <a:t>vLLM</a:t>
+              <a:t>Synthesis: prefix reuse needs scheduling, not just cache data structures.</a:t>
             </a:r>
           </a:p>
         </p:txBody>
       </p:sp>
       <p:sp>
         <p:nvSpPr>
-          <p:cNvPr id="8" name="">
-            <a:extLst xmlns:a="http://schemas.openxmlformats.org/drawingml/2006/main">
-              <a:ext uri="{FF2B5EF4-FFF2-40B4-BE49-F238E27FC236}">
-                <a16:creationId xmlns:a16="http://schemas.microsoft.com/office/drawing/2014/main" id="{C3452871-5410-4A02-A024-6E765F05E086}"/>
-              </a:ext>
-            </a:extLst>
-          </p:cNvPr>
-          <p:cNvSpPr>
-            <a:spLocks xmlns:a="http://schemas.openxmlformats.org/drawingml/2006/main" noGrp="1"/>
-          </p:cNvSpPr>
-          <p:nvPr/>
-        </p:nvSpPr>
-        <p:spPr>
-          <a:xfrm xmlns:a="http://schemas.openxmlformats.org/drawingml/2006/main">
-            <a:off x="971550" y="3143250"/>
-            <a:ext cx="1809750" cy="514350"/>
-          </a:xfrm>
-          <a:prstGeom xmlns:a="http://schemas.openxmlformats.org/drawingml/2006/main" prst="rect">
-            <a:avLst/>
-          </a:prstGeom>
-          <a:solidFill xmlns:a="http://schemas.openxmlformats.org/drawingml/2006/main">
-            <a:srgbClr val="000000">
-              <a:alpha val="0"/>
-            </a:srgbClr>
-          </a:solidFill>
-          <a:ln xmlns:a="http://schemas.openxmlformats.org/drawingml/2006/main" w="0">
-            <a:solidFill>
-              <a:srgbClr val="000000">
-                <a:alpha val="0"/>
-              </a:srgbClr>
-            </a:solidFill>
-            <a:prstDash val="solid"/>
-          </a:ln>
-        </p:spPr>
-        <p:txBody>
-          <a:bodyPr xmlns:a="http://schemas.openxmlformats.org/drawingml/2006/main" lIns="0" tIns="0" rIns="0" bIns="0" anchor="t"/>
-          <a:lstStyle xmlns:a="http://schemas.openxmlformats.org/drawingml/2006/main"/>
-          <a:p xmlns:a="http://schemas.openxmlformats.org/drawingml/2006/main">
-            <a:pPr algn="ctr">
-              <a:defRPr sz="1200" b="0">
-                <a:solidFill>
-                  <a:srgbClr val="AEB7C4"/>
-                </a:solidFill>
-                <a:latin typeface="Aptos"/>
-                <a:ea typeface="Aptos"/>
-                <a:cs typeface="Aptos"/>
-              </a:defRPr>
-            </a:pPr>
-            <a:r>
-              <a:rPr sz="1200" b="0">
-                <a:solidFill>
-                  <a:srgbClr val="AEB7C4"/>
-                </a:solidFill>
-                <a:latin typeface="Aptos"/>
-                <a:ea typeface="Aptos"/>
-                <a:cs typeface="Aptos"/>
-              </a:rPr>
-              <a:t>Make KV memory less fragmented</a:t>
-            </a:r>
-          </a:p>
-        </p:txBody>
-      </p:sp>
-      <p:sp>
-        <p:nvSpPr>
-          <p:cNvPr id="9" name="">
-            <a:extLst xmlns:a="http://schemas.openxmlformats.org/drawingml/2006/main">
-              <a:ext uri="{FF2B5EF4-FFF2-40B4-BE49-F238E27FC236}">
-                <a16:creationId xmlns:a16="http://schemas.microsoft.com/office/drawing/2014/main" id="{0BE1BF13-E667-49B7-BB4E-5033525C126C}"/>
-              </a:ext>
-            </a:extLst>
-          </p:cNvPr>
-          <p:cNvSpPr>
-            <a:spLocks xmlns:a="http://schemas.openxmlformats.org/drawingml/2006/main" noGrp="1"/>
-          </p:cNvSpPr>
-          <p:nvPr/>
-        </p:nvSpPr>
-        <p:spPr>
-          <a:xfrm xmlns:a="http://schemas.openxmlformats.org/drawingml/2006/main">
-            <a:off x="3448050" y="2428875"/>
-            <a:ext cx="2152650" cy="1562100"/>
-          </a:xfrm>
-          <a:prstGeom xmlns:a="http://schemas.openxmlformats.org/drawingml/2006/main" prst="rect">
-            <a:avLst/>
-          </a:prstGeom>
-          <a:solidFill xmlns:a="http://schemas.openxmlformats.org/drawingml/2006/main">
-            <a:srgbClr val="1C2330"/>
-          </a:solidFill>
-          <a:ln xmlns:a="http://schemas.openxmlformats.org/drawingml/2006/main" w="19050">
-            <a:solidFill>
-              <a:srgbClr val="72A7FF"/>
-            </a:solidFill>
-            <a:prstDash val="solid"/>
-          </a:ln>
-        </p:spPr>
-      </p:sp>
-      <p:sp>
-        <p:nvSpPr>
-          <p:cNvPr id="10" name="">
-            <a:extLst xmlns:a="http://schemas.openxmlformats.org/drawingml/2006/main">
-              <a:ext uri="{FF2B5EF4-FFF2-40B4-BE49-F238E27FC236}">
-                <a16:creationId xmlns:a16="http://schemas.microsoft.com/office/drawing/2014/main" id="{7FEBF2C7-A884-471B-AB9E-AED2B68FF30A}"/>
-              </a:ext>
-            </a:extLst>
-          </p:cNvPr>
-          <p:cNvSpPr>
-            <a:spLocks xmlns:a="http://schemas.openxmlformats.org/drawingml/2006/main" noGrp="1"/>
-          </p:cNvSpPr>
-          <p:nvPr/>
-        </p:nvSpPr>
-        <p:spPr>
-          <a:xfrm xmlns:a="http://schemas.openxmlformats.org/drawingml/2006/main">
-            <a:off x="3619500" y="2647950"/>
-            <a:ext cx="1809750" cy="266700"/>
-          </a:xfrm>
-          <a:prstGeom xmlns:a="http://schemas.openxmlformats.org/drawingml/2006/main" prst="rect">
-            <a:avLst/>
-          </a:prstGeom>
-          <a:solidFill xmlns:a="http://schemas.openxmlformats.org/drawingml/2006/main">
-            <a:srgbClr val="000000">
-              <a:alpha val="0"/>
-            </a:srgbClr>
-          </a:solidFill>
-          <a:ln xmlns:a="http://schemas.openxmlformats.org/drawingml/2006/main" w="0">
-            <a:solidFill>
-              <a:srgbClr val="000000">
-                <a:alpha val="0"/>
-              </a:srgbClr>
-            </a:solidFill>
-            <a:prstDash val="solid"/>
-          </a:ln>
-        </p:spPr>
-        <p:txBody>
-          <a:bodyPr xmlns:a="http://schemas.openxmlformats.org/drawingml/2006/main" lIns="0" tIns="0" rIns="0" bIns="0" anchor="t"/>
-          <a:lstStyle xmlns:a="http://schemas.openxmlformats.org/drawingml/2006/main"/>
-          <a:p xmlns:a="http://schemas.openxmlformats.org/drawingml/2006/main">
-            <a:pPr algn="ctr">
-              <a:defRPr sz="1800" b="1">
-                <a:solidFill>
-                  <a:srgbClr val="F7F3EA"/>
-                </a:solidFill>
-                <a:latin typeface="Aptos Display"/>
-                <a:ea typeface="Aptos Display"/>
-                <a:cs typeface="Aptos Display"/>
-              </a:defRPr>
-            </a:pPr>
-            <a:r>
-              <a:rPr sz="1800" b="1">
-                <a:solidFill>
-                  <a:srgbClr val="F7F3EA"/>
-                </a:solidFill>
-                <a:latin typeface="Aptos Display"/>
-                <a:ea typeface="Aptos Display"/>
-                <a:cs typeface="Aptos Display"/>
-              </a:rPr>
-              <a:t>SGLang</a:t>
-            </a:r>
-          </a:p>
-        </p:txBody>
-      </p:sp>
-      <p:sp>
-        <p:nvSpPr>
-          <p:cNvPr id="11" name="">
-            <a:extLst xmlns:a="http://schemas.openxmlformats.org/drawingml/2006/main">
-              <a:ext uri="{FF2B5EF4-FFF2-40B4-BE49-F238E27FC236}">
-                <a16:creationId xmlns:a16="http://schemas.microsoft.com/office/drawing/2014/main" id="{515FE83F-6DBF-4C7F-986B-AF1BFC596630}"/>
-              </a:ext>
-            </a:extLst>
-          </p:cNvPr>
-          <p:cNvSpPr>
-            <a:spLocks xmlns:a="http://schemas.openxmlformats.org/drawingml/2006/main" noGrp="1"/>
-          </p:cNvSpPr>
-          <p:nvPr/>
-        </p:nvSpPr>
-        <p:spPr>
-          <a:xfrm xmlns:a="http://schemas.openxmlformats.org/drawingml/2006/main">
-            <a:off x="3619500" y="3143250"/>
-            <a:ext cx="1809750" cy="514350"/>
-          </a:xfrm>
-          <a:prstGeom xmlns:a="http://schemas.openxmlformats.org/drawingml/2006/main" prst="rect">
-            <a:avLst/>
-          </a:prstGeom>
-          <a:solidFill xmlns:a="http://schemas.openxmlformats.org/drawingml/2006/main">
-            <a:srgbClr val="000000">
-              <a:alpha val="0"/>
-            </a:srgbClr>
-          </a:solidFill>
-          <a:ln xmlns:a="http://schemas.openxmlformats.org/drawingml/2006/main" w="0">
-            <a:solidFill>
-              <a:srgbClr val="000000">
-                <a:alpha val="0"/>
-              </a:srgbClr>
-            </a:solidFill>
-            <a:prstDash val="solid"/>
-          </a:ln>
-        </p:spPr>
-        <p:txBody>
-          <a:bodyPr xmlns:a="http://schemas.openxmlformats.org/drawingml/2006/main" lIns="0" tIns="0" rIns="0" bIns="0" anchor="t"/>
-          <a:lstStyle xmlns:a="http://schemas.openxmlformats.org/drawingml/2006/main"/>
-          <a:p xmlns:a="http://schemas.openxmlformats.org/drawingml/2006/main">
-            <a:pPr algn="ctr">
-              <a:defRPr sz="1200" b="0">
-                <a:solidFill>
-                  <a:srgbClr val="AEB7C4"/>
-                </a:solidFill>
-                <a:latin typeface="Aptos"/>
-                <a:ea typeface="Aptos"/>
-                <a:cs typeface="Aptos"/>
-              </a:defRPr>
-            </a:pPr>
-            <a:r>
-              <a:rPr sz="1200" b="0">
-                <a:solidFill>
-                  <a:srgbClr val="AEB7C4"/>
-                </a:solidFill>
-                <a:latin typeface="Aptos"/>
-                <a:ea typeface="Aptos"/>
-                <a:cs typeface="Aptos"/>
-              </a:rPr>
-              <a:t>Detect and store shared prefix paths</a:t>
-            </a:r>
-          </a:p>
-        </p:txBody>
-      </p:sp>
-      <p:sp>
-        <p:nvSpPr>
-          <p:cNvPr id="12" name="">
-            <a:extLst xmlns:a="http://schemas.openxmlformats.org/drawingml/2006/main">
-              <a:ext uri="{FF2B5EF4-FFF2-40B4-BE49-F238E27FC236}">
-                <a16:creationId xmlns:a16="http://schemas.microsoft.com/office/drawing/2014/main" id="{EE559A01-DFA4-4858-B147-071E56CBA9C5}"/>
-              </a:ext>
-            </a:extLst>
-          </p:cNvPr>
-          <p:cNvSpPr>
-            <a:spLocks xmlns:a="http://schemas.openxmlformats.org/drawingml/2006/main" noGrp="1"/>
-          </p:cNvSpPr>
-          <p:nvPr/>
-        </p:nvSpPr>
-        <p:spPr>
-          <a:xfrm xmlns:a="http://schemas.openxmlformats.org/drawingml/2006/main">
-            <a:off x="6096000" y="2428875"/>
-            <a:ext cx="2152650" cy="1562100"/>
-          </a:xfrm>
-          <a:prstGeom xmlns:a="http://schemas.openxmlformats.org/drawingml/2006/main" prst="rect">
-            <a:avLst/>
-          </a:prstGeom>
-          <a:solidFill xmlns:a="http://schemas.openxmlformats.org/drawingml/2006/main">
-            <a:srgbClr val="1C2330"/>
-          </a:solidFill>
-          <a:ln xmlns:a="http://schemas.openxmlformats.org/drawingml/2006/main" w="19050">
-            <a:solidFill>
-              <a:srgbClr val="F2B84B"/>
-            </a:solidFill>
-            <a:prstDash val="solid"/>
-          </a:ln>
-        </p:spPr>
-      </p:sp>
-      <p:sp>
-        <p:nvSpPr>
-          <p:cNvPr id="13" name="">
-            <a:extLst xmlns:a="http://schemas.openxmlformats.org/drawingml/2006/main">
-              <a:ext uri="{FF2B5EF4-FFF2-40B4-BE49-F238E27FC236}">
-                <a16:creationId xmlns:a16="http://schemas.microsoft.com/office/drawing/2014/main" id="{C294AA91-5450-40C9-8E12-B67FE964877A}"/>
-              </a:ext>
-            </a:extLst>
-          </p:cNvPr>
-          <p:cNvSpPr>
-            <a:spLocks xmlns:a="http://schemas.openxmlformats.org/drawingml/2006/main" noGrp="1"/>
-          </p:cNvSpPr>
-          <p:nvPr/>
-        </p:nvSpPr>
-        <p:spPr>
-          <a:xfrm xmlns:a="http://schemas.openxmlformats.org/drawingml/2006/main">
-            <a:off x="6267450" y="2647950"/>
-            <a:ext cx="1809750" cy="266700"/>
-          </a:xfrm>
-          <a:prstGeom xmlns:a="http://schemas.openxmlformats.org/drawingml/2006/main" prst="rect">
-            <a:avLst/>
-          </a:prstGeom>
-          <a:solidFill xmlns:a="http://schemas.openxmlformats.org/drawingml/2006/main">
-            <a:srgbClr val="000000">
-              <a:alpha val="0"/>
-            </a:srgbClr>
-          </a:solidFill>
-          <a:ln xmlns:a="http://schemas.openxmlformats.org/drawingml/2006/main" w="0">
-            <a:solidFill>
-              <a:srgbClr val="000000">
-                <a:alpha val="0"/>
-              </a:srgbClr>
-            </a:solidFill>
-            <a:prstDash val="solid"/>
-          </a:ln>
-        </p:spPr>
-        <p:txBody>
-          <a:bodyPr xmlns:a="http://schemas.openxmlformats.org/drawingml/2006/main" lIns="0" tIns="0" rIns="0" bIns="0" anchor="t"/>
-          <a:lstStyle xmlns:a="http://schemas.openxmlformats.org/drawingml/2006/main"/>
-          <a:p xmlns:a="http://schemas.openxmlformats.org/drawingml/2006/main">
-            <a:pPr algn="ctr">
-              <a:defRPr sz="1800" b="1">
-                <a:solidFill>
-                  <a:srgbClr val="F7F3EA"/>
-                </a:solidFill>
-                <a:latin typeface="Aptos Display"/>
-                <a:ea typeface="Aptos Display"/>
-                <a:cs typeface="Aptos Display"/>
-              </a:defRPr>
-            </a:pPr>
-            <a:r>
-              <a:rPr sz="1800" b="1">
-                <a:solidFill>
-                  <a:srgbClr val="F7F3EA"/>
-                </a:solidFill>
-                <a:latin typeface="Aptos Display"/>
-                <a:ea typeface="Aptos Display"/>
-                <a:cs typeface="Aptos Display"/>
-              </a:rPr>
-              <a:t>PromptCache</a:t>
-            </a:r>
-          </a:p>
-        </p:txBody>
-      </p:sp>
-      <p:sp>
-        <p:nvSpPr>
-          <p:cNvPr id="14" name="">
-            <a:extLst xmlns:a="http://schemas.openxmlformats.org/drawingml/2006/main">
-              <a:ext uri="{FF2B5EF4-FFF2-40B4-BE49-F238E27FC236}">
-                <a16:creationId xmlns:a16="http://schemas.microsoft.com/office/drawing/2014/main" id="{03274948-CB7D-4246-B518-697A47D1D2B3}"/>
-              </a:ext>
-            </a:extLst>
-          </p:cNvPr>
-          <p:cNvSpPr>
-            <a:spLocks xmlns:a="http://schemas.openxmlformats.org/drawingml/2006/main" noGrp="1"/>
-          </p:cNvSpPr>
-          <p:nvPr/>
-        </p:nvSpPr>
-        <p:spPr>
-          <a:xfrm xmlns:a="http://schemas.openxmlformats.org/drawingml/2006/main">
-            <a:off x="6267450" y="3143250"/>
-            <a:ext cx="1809750" cy="514350"/>
-          </a:xfrm>
-          <a:prstGeom xmlns:a="http://schemas.openxmlformats.org/drawingml/2006/main" prst="rect">
-            <a:avLst/>
-          </a:prstGeom>
-          <a:solidFill xmlns:a="http://schemas.openxmlformats.org/drawingml/2006/main">
-            <a:srgbClr val="000000">
-              <a:alpha val="0"/>
-            </a:srgbClr>
-          </a:solidFill>
-          <a:ln xmlns:a="http://schemas.openxmlformats.org/drawingml/2006/main" w="0">
-            <a:solidFill>
-              <a:srgbClr val="000000">
-                <a:alpha val="0"/>
-              </a:srgbClr>
-            </a:solidFill>
-            <a:prstDash val="solid"/>
-          </a:ln>
-        </p:spPr>
-        <p:txBody>
-          <a:bodyPr xmlns:a="http://schemas.openxmlformats.org/drawingml/2006/main" lIns="0" tIns="0" rIns="0" bIns="0" anchor="t"/>
-          <a:lstStyle xmlns:a="http://schemas.openxmlformats.org/drawingml/2006/main"/>
-          <a:p xmlns:a="http://schemas.openxmlformats.org/drawingml/2006/main">
-            <a:pPr algn="ctr">
-              <a:defRPr sz="1200" b="0">
-                <a:solidFill>
-                  <a:srgbClr val="AEB7C4"/>
-                </a:solidFill>
-                <a:latin typeface="Aptos"/>
-                <a:ea typeface="Aptos"/>
-                <a:cs typeface="Aptos"/>
-              </a:defRPr>
-            </a:pPr>
-            <a:r>
-              <a:rPr sz="1200" b="0">
-                <a:solidFill>
-                  <a:srgbClr val="AEB7C4"/>
-                </a:solidFill>
-                <a:latin typeface="Aptos"/>
-                <a:ea typeface="Aptos"/>
-                <a:cs typeface="Aptos"/>
-              </a:rPr>
-              <a:t>Precompute reusable prompt modules</a:t>
-            </a:r>
-          </a:p>
-        </p:txBody>
-      </p:sp>
-      <p:sp>
-        <p:nvSpPr>
-          <p:cNvPr id="15" name="">
-            <a:extLst xmlns:a="http://schemas.openxmlformats.org/drawingml/2006/main">
-              <a:ext uri="{FF2B5EF4-FFF2-40B4-BE49-F238E27FC236}">
-                <a16:creationId xmlns:a16="http://schemas.microsoft.com/office/drawing/2014/main" id="{C115C65C-1277-46C6-BD3E-E94F137EAF58}"/>
-              </a:ext>
-            </a:extLst>
-          </p:cNvPr>
-          <p:cNvSpPr>
-            <a:spLocks xmlns:a="http://schemas.openxmlformats.org/drawingml/2006/main" noGrp="1"/>
-          </p:cNvSpPr>
-          <p:nvPr/>
-        </p:nvSpPr>
-        <p:spPr>
-          <a:xfrm xmlns:a="http://schemas.openxmlformats.org/drawingml/2006/main">
-            <a:off x="8743950" y="2428875"/>
-            <a:ext cx="2152650" cy="1562100"/>
-          </a:xfrm>
-          <a:prstGeom xmlns:a="http://schemas.openxmlformats.org/drawingml/2006/main" prst="rect">
-            <a:avLst/>
-          </a:prstGeom>
-          <a:solidFill xmlns:a="http://schemas.openxmlformats.org/drawingml/2006/main">
-            <a:srgbClr val="1C2330"/>
-          </a:solidFill>
-          <a:ln xmlns:a="http://schemas.openxmlformats.org/drawingml/2006/main" w="19050">
-            <a:solidFill>
-              <a:srgbClr val="B998FF"/>
-            </a:solidFill>
-            <a:prstDash val="solid"/>
-          </a:ln>
-        </p:spPr>
-      </p:sp>
-      <p:sp>
-        <p:nvSpPr>
-          <p:cNvPr id="16" name="">
-            <a:extLst xmlns:a="http://schemas.openxmlformats.org/drawingml/2006/main">
-              <a:ext uri="{FF2B5EF4-FFF2-40B4-BE49-F238E27FC236}">
-                <a16:creationId xmlns:a16="http://schemas.microsoft.com/office/drawing/2014/main" id="{1F3E499A-DA30-44CE-83BF-6818E9FB0197}"/>
-              </a:ext>
-            </a:extLst>
-          </p:cNvPr>
-          <p:cNvSpPr>
-            <a:spLocks xmlns:a="http://schemas.openxmlformats.org/drawingml/2006/main" noGrp="1"/>
-          </p:cNvSpPr>
-          <p:nvPr/>
-        </p:nvSpPr>
-        <p:spPr>
-          <a:xfrm xmlns:a="http://schemas.openxmlformats.org/drawingml/2006/main">
-            <a:off x="8915400" y="2647950"/>
-            <a:ext cx="1809750" cy="266700"/>
-          </a:xfrm>
-          <a:prstGeom xmlns:a="http://schemas.openxmlformats.org/drawingml/2006/main" prst="rect">
-            <a:avLst/>
-          </a:prstGeom>
-          <a:solidFill xmlns:a="http://schemas.openxmlformats.org/drawingml/2006/main">
-            <a:srgbClr val="000000">
-              <a:alpha val="0"/>
-            </a:srgbClr>
-          </a:solidFill>
-          <a:ln xmlns:a="http://schemas.openxmlformats.org/drawingml/2006/main" w="0">
-            <a:solidFill>
-              <a:srgbClr val="000000">
-                <a:alpha val="0"/>
-              </a:srgbClr>
-            </a:solidFill>
-            <a:prstDash val="solid"/>
-          </a:ln>
-        </p:spPr>
-        <p:txBody>
-          <a:bodyPr xmlns:a="http://schemas.openxmlformats.org/drawingml/2006/main" lIns="0" tIns="0" rIns="0" bIns="0" anchor="t"/>
-          <a:lstStyle xmlns:a="http://schemas.openxmlformats.org/drawingml/2006/main"/>
-          <a:p xmlns:a="http://schemas.openxmlformats.org/drawingml/2006/main">
-            <a:pPr algn="ctr">
-              <a:defRPr sz="1800" b="1">
-                <a:solidFill>
-                  <a:srgbClr val="F7F3EA"/>
-                </a:solidFill>
-                <a:latin typeface="Aptos Display"/>
-                <a:ea typeface="Aptos Display"/>
-                <a:cs typeface="Aptos Display"/>
-              </a:defRPr>
-            </a:pPr>
-            <a:r>
-              <a:rPr sz="1800" b="1">
-                <a:solidFill>
-                  <a:srgbClr val="F7F3EA"/>
-                </a:solidFill>
-                <a:latin typeface="Aptos Display"/>
-                <a:ea typeface="Aptos Display"/>
-                <a:cs typeface="Aptos Display"/>
-              </a:rPr>
-              <a:t>Hydragen</a:t>
-            </a:r>
-          </a:p>
-        </p:txBody>
-      </p:sp>
-      <p:sp>
-        <p:nvSpPr>
-          <p:cNvPr id="17" name="">
-            <a:extLst xmlns:a="http://schemas.openxmlformats.org/drawingml/2006/main">
-              <a:ext uri="{FF2B5EF4-FFF2-40B4-BE49-F238E27FC236}">
-                <a16:creationId xmlns:a16="http://schemas.microsoft.com/office/drawing/2014/main" id="{1D2B4CEA-3529-4537-8DC0-E8DF26DA1E7A}"/>
-              </a:ext>
-            </a:extLst>
-          </p:cNvPr>
-          <p:cNvSpPr>
-            <a:spLocks xmlns:a="http://schemas.openxmlformats.org/drawingml/2006/main" noGrp="1"/>
-          </p:cNvSpPr>
-          <p:nvPr/>
-        </p:nvSpPr>
-        <p:spPr>
-          <a:xfrm xmlns:a="http://schemas.openxmlformats.org/drawingml/2006/main">
-            <a:off x="8915400" y="3143250"/>
-            <a:ext cx="1809750" cy="514350"/>
-          </a:xfrm>
-          <a:prstGeom xmlns:a="http://schemas.openxmlformats.org/drawingml/2006/main" prst="rect">
-            <a:avLst/>
-          </a:prstGeom>
-          <a:solidFill xmlns:a="http://schemas.openxmlformats.org/drawingml/2006/main">
-            <a:srgbClr val="000000">
-              <a:alpha val="0"/>
-            </a:srgbClr>
-          </a:solidFill>
-          <a:ln xmlns:a="http://schemas.openxmlformats.org/drawingml/2006/main" w="0">
-            <a:solidFill>
-              <a:srgbClr val="000000">
-                <a:alpha val="0"/>
-              </a:srgbClr>
-            </a:solidFill>
-            <a:prstDash val="solid"/>
-          </a:ln>
-        </p:spPr>
-        <p:txBody>
-          <a:bodyPr xmlns:a="http://schemas.openxmlformats.org/drawingml/2006/main" lIns="0" tIns="0" rIns="0" bIns="0" anchor="t"/>
-          <a:lstStyle xmlns:a="http://schemas.openxmlformats.org/drawingml/2006/main"/>
-          <a:p xmlns:a="http://schemas.openxmlformats.org/drawingml/2006/main">
-            <a:pPr algn="ctr">
-              <a:defRPr sz="1200" b="0">
-                <a:solidFill>
-                  <a:srgbClr val="AEB7C4"/>
-                </a:solidFill>
-                <a:latin typeface="Aptos"/>
-                <a:ea typeface="Aptos"/>
-                <a:cs typeface="Aptos"/>
-              </a:defRPr>
-            </a:pPr>
-            <a:r>
-              <a:rPr sz="1200" b="0">
-                <a:solidFill>
-                  <a:srgbClr val="AEB7C4"/>
-                </a:solidFill>
-                <a:latin typeface="Aptos"/>
-                <a:ea typeface="Aptos"/>
-                <a:cs typeface="Aptos"/>
-              </a:rPr>
-              <a:t>Avoid repeated prefix attention reads</a:t>
-            </a:r>
-          </a:p>
-        </p:txBody>
-      </p:sp>
-      <p:sp>
-        <p:nvSpPr>
-          <p:cNvPr id="18" name="">
-            <a:extLst xmlns:a="http://schemas.openxmlformats.org/drawingml/2006/main">
-              <a:ext uri="{FF2B5EF4-FFF2-40B4-BE49-F238E27FC236}">
-                <a16:creationId xmlns:a16="http://schemas.microsoft.com/office/drawing/2014/main" id="{271599A8-2452-4873-B5F5-BA6EFC06CF84}"/>
-              </a:ext>
-            </a:extLst>
-          </p:cNvPr>
-          <p:cNvSpPr>
-            <a:spLocks xmlns:a="http://schemas.openxmlformats.org/drawingml/2006/main" noGrp="1"/>
-          </p:cNvSpPr>
-          <p:nvPr/>
-        </p:nvSpPr>
-        <p:spPr>
-          <a:xfrm xmlns:a="http://schemas.openxmlformats.org/drawingml/2006/main">
-            <a:off x="1657350" y="4476750"/>
-            <a:ext cx="8858250" cy="876300"/>
-          </a:xfrm>
-          <a:prstGeom xmlns:a="http://schemas.openxmlformats.org/drawingml/2006/main" prst="rect">
-            <a:avLst/>
-          </a:prstGeom>
-          <a:solidFill xmlns:a="http://schemas.openxmlformats.org/drawingml/2006/main">
-            <a:srgbClr val="16251F"/>
-          </a:solidFill>
-          <a:ln xmlns:a="http://schemas.openxmlformats.org/drawingml/2006/main" w="19050">
-            <a:solidFill>
-              <a:srgbClr val="7BD88F"/>
-            </a:solidFill>
-            <a:prstDash val="solid"/>
-          </a:ln>
-        </p:spPr>
-      </p:sp>
-      <p:sp>
-        <p:nvSpPr>
-          <p:cNvPr id="19" name="">
-            <a:extLst xmlns:a="http://schemas.openxmlformats.org/drawingml/2006/main">
-              <a:ext uri="{FF2B5EF4-FFF2-40B4-BE49-F238E27FC236}">
-                <a16:creationId xmlns:a16="http://schemas.microsoft.com/office/drawing/2014/main" id="{BA6886D1-2733-490D-853D-47FFD8D95BD6}"/>
-              </a:ext>
-            </a:extLst>
-          </p:cNvPr>
-          <p:cNvSpPr>
-            <a:spLocks xmlns:a="http://schemas.openxmlformats.org/drawingml/2006/main" noGrp="1"/>
-          </p:cNvSpPr>
-          <p:nvPr/>
-        </p:nvSpPr>
-        <p:spPr>
-          <a:xfrm xmlns:a="http://schemas.openxmlformats.org/drawingml/2006/main">
-            <a:off x="2076450" y="4762500"/>
-            <a:ext cx="8020050" cy="323850"/>
-          </a:xfrm>
-          <a:prstGeom xmlns:a="http://schemas.openxmlformats.org/drawingml/2006/main" prst="rect">
-            <a:avLst/>
-          </a:prstGeom>
-          <a:solidFill xmlns:a="http://schemas.openxmlformats.org/drawingml/2006/main">
-            <a:srgbClr val="000000">
-              <a:alpha val="0"/>
-            </a:srgbClr>
-          </a:solidFill>
-          <a:ln xmlns:a="http://schemas.openxmlformats.org/drawingml/2006/main" w="0">
-            <a:solidFill>
-              <a:srgbClr val="000000">
-                <a:alpha val="0"/>
-              </a:srgbClr>
-            </a:solidFill>
-            <a:prstDash val="solid"/>
-          </a:ln>
-        </p:spPr>
-        <p:txBody>
-          <a:bodyPr xmlns:a="http://schemas.openxmlformats.org/drawingml/2006/main" lIns="0" tIns="0" rIns="0" bIns="0" anchor="t"/>
-          <a:lstStyle xmlns:a="http://schemas.openxmlformats.org/drawingml/2006/main"/>
-          <a:p xmlns:a="http://schemas.openxmlformats.org/drawingml/2006/main">
-            <a:pPr algn="ctr">
-              <a:defRPr sz="1800" b="1">
-                <a:solidFill>
-                  <a:srgbClr val="F7F3EA"/>
-                </a:solidFill>
-                <a:latin typeface="Aptos Display"/>
-                <a:ea typeface="Aptos Display"/>
-                <a:cs typeface="Aptos Display"/>
-              </a:defRPr>
-            </a:pPr>
-            <a:r>
-              <a:rPr sz="1800" b="1">
-                <a:solidFill>
-                  <a:srgbClr val="F7F3EA"/>
-                </a:solidFill>
-                <a:latin typeface="Aptos Display"/>
-                <a:ea typeface="Aptos Display"/>
-                <a:cs typeface="Aptos Display"/>
-              </a:rPr>
-              <a:t>Our gap: choose which requests should run together so prefix reuse actually happens under realistic cache limits.</a:t>
-            </a:r>
-          </a:p>
-        </p:txBody>
-      </p:sp>
-      <p:sp>
-        <p:nvSpPr>
-          <p:cNvPr id="20" name="">
-            <a:extLst xmlns:a="http://schemas.openxmlformats.org/drawingml/2006/main">
-              <a:ext uri="{FF2B5EF4-FFF2-40B4-BE49-F238E27FC236}">
-                <a16:creationId xmlns:a16="http://schemas.microsoft.com/office/drawing/2014/main" id="{F8AD216D-6B0F-4385-90BF-81BCBC057E04}"/>
+          <p:cNvPr id="22" name="">
+            <a:extLst xmlns:a="http://schemas.openxmlformats.org/drawingml/2006/main">
+              <a:ext uri="{FF2B5EF4-FFF2-40B4-BE49-F238E27FC236}">
+                <a16:creationId xmlns:a16="http://schemas.microsoft.com/office/drawing/2014/main" id="{F9CFAE14-2777-4841-89F8-2D25AE5BC78D}"/>
               </a:ext>
             </a:extLst>
           </p:cNvPr>
@@ -7822,7 +7934,7 @@
     </p:spTree>
     <p:extLst>
       <p:ext uri="{BB962C8B-B14F-4D97-AF65-F5344CB8AC3E}">
-        <p14:creationId xmlns:p14="http://schemas.microsoft.com/office/powerpoint/2010/main" val="516908177"/>
+        <p14:creationId xmlns:p14="http://schemas.microsoft.com/office/powerpoint/2010/main" val="1480983022"/>
       </p:ext>
     </p:extLst>
   </p:cSld>
@@ -7846,7 +7958,7 @@
           <p:cNvPr id="1" name="">
             <a:extLst xmlns:a="http://schemas.openxmlformats.org/drawingml/2006/main">
               <a:ext uri="{FF2B5EF4-FFF2-40B4-BE49-F238E27FC236}">
-                <a16:creationId xmlns:a16="http://schemas.microsoft.com/office/drawing/2014/main" id="{F8A117D4-81DC-4F97-B25F-96903657474A}"/>
+                <a16:creationId xmlns:a16="http://schemas.microsoft.com/office/drawing/2014/main" id="{FB044E43-7C44-416E-AEA9-15390D612273}"/>
               </a:ext>
             </a:extLst>
           </p:cNvPr>
@@ -7881,7 +7993,7 @@
           <p:cNvPr id="2" name="">
             <a:extLst xmlns:a="http://schemas.openxmlformats.org/drawingml/2006/main">
               <a:ext uri="{FF2B5EF4-FFF2-40B4-BE49-F238E27FC236}">
-                <a16:creationId xmlns:a16="http://schemas.microsoft.com/office/drawing/2014/main" id="{76F81B41-44A0-4F41-B009-76A54E1DE0B3}"/>
+                <a16:creationId xmlns:a16="http://schemas.microsoft.com/office/drawing/2014/main" id="{7018407D-7DD1-427B-9278-F2C29DD782C2}"/>
               </a:ext>
             </a:extLst>
           </p:cNvPr>
@@ -7945,7 +8057,7 @@
           <p:cNvPr id="3" name="">
             <a:extLst xmlns:a="http://schemas.openxmlformats.org/drawingml/2006/main">
               <a:ext uri="{FF2B5EF4-FFF2-40B4-BE49-F238E27FC236}">
-                <a16:creationId xmlns:a16="http://schemas.microsoft.com/office/drawing/2014/main" id="{1BFAE16A-E8AB-4A59-BABD-78D68F5E1180}"/>
+                <a16:creationId xmlns:a16="http://schemas.microsoft.com/office/drawing/2014/main" id="{D0AF54B1-A659-416A-955D-7F0D9396E9C4}"/>
               </a:ext>
             </a:extLst>
           </p:cNvPr>
@@ -7980,7 +8092,7 @@
           <p:cNvPr id="4" name="">
             <a:extLst xmlns:a="http://schemas.openxmlformats.org/drawingml/2006/main">
               <a:ext uri="{FF2B5EF4-FFF2-40B4-BE49-F238E27FC236}">
-                <a16:creationId xmlns:a16="http://schemas.microsoft.com/office/drawing/2014/main" id="{8FA8EF37-A9B7-42AA-B949-1466B0D264BB}"/>
+                <a16:creationId xmlns:a16="http://schemas.microsoft.com/office/drawing/2014/main" id="{C9C7A95E-20D0-42D5-9331-A88F6AC161FA}"/>
               </a:ext>
             </a:extLst>
           </p:cNvPr>
@@ -8034,7 +8146,7 @@
                 <a:ea typeface="Aptos Display"/>
                 <a:cs typeface="Aptos Display"/>
               </a:rPr>
-              <a:t>Capstone contribution: scheduler + eviction policy</a:t>
+              <a:t>Proposed evaluation boundary</a:t>
             </a:r>
           </a:p>
         </p:txBody>
@@ -8044,7 +8156,7 @@
           <p:cNvPr id="5" name="">
             <a:extLst xmlns:a="http://schemas.openxmlformats.org/drawingml/2006/main">
               <a:ext uri="{FF2B5EF4-FFF2-40B4-BE49-F238E27FC236}">
-                <a16:creationId xmlns:a16="http://schemas.microsoft.com/office/drawing/2014/main" id="{022E86C3-216C-4DAE-B39A-C5F2B10D27AF}"/>
+                <a16:creationId xmlns:a16="http://schemas.microsoft.com/office/drawing/2014/main" id="{4CDB9AB3-E7FC-4D69-951D-BE51DB5C8AE6}"/>
               </a:ext>
             </a:extLst>
           </p:cNvPr>
@@ -8098,7 +8210,7 @@
                 <a:ea typeface="Aptos"/>
                 <a:cs typeface="Aptos"/>
               </a:rPr>
-              <a:t>Keep the implementation realistic: Python benchmark harness, vLLM baseline, prefix-aware grouping, and cache policy ablations.</a:t>
+              <a:t>Specific enough for feedback today; exact configs can be locked during methodology week.</a:t>
             </a:r>
           </a:p>
         </p:txBody>
@@ -8108,33 +8220,29 @@
           <p:cNvPr id="6" name="">
             <a:extLst xmlns:a="http://schemas.openxmlformats.org/drawingml/2006/main">
               <a:ext uri="{FF2B5EF4-FFF2-40B4-BE49-F238E27FC236}">
-                <a16:creationId xmlns:a16="http://schemas.microsoft.com/office/drawing/2014/main" id="{4CD87326-9303-4945-9676-FBA088604327}"/>
-              </a:ext>
-            </a:extLst>
-          </p:cNvPr>
-          <p:cNvSpPr>
-            <a:spLocks xmlns:a="http://schemas.openxmlformats.org/drawingml/2006/main" noGrp="1"/>
-          </p:cNvSpPr>
-          <p:nvPr/>
-        </p:nvSpPr>
-        <p:spPr>
-          <a:xfrm xmlns:a="http://schemas.openxmlformats.org/drawingml/2006/main">
-            <a:off x="742950" y="2628900"/>
-            <a:ext cx="1809750" cy="323850"/>
-          </a:xfrm>
-          <a:prstGeom xmlns:a="http://schemas.openxmlformats.org/drawingml/2006/main" prst="roundRect">
-            <a:avLst>
-              <a:gd name="adj" fmla="val 23529"/>
-            </a:avLst>
-          </a:prstGeom>
-          <a:solidFill xmlns:a="http://schemas.openxmlformats.org/drawingml/2006/main">
-            <a:srgbClr val="F2B84B">
-              <a:alpha val="13333"/>
-            </a:srgbClr>
+                <a16:creationId xmlns:a16="http://schemas.microsoft.com/office/drawing/2014/main" id="{9524C449-B593-466D-B1F1-5D36A6A9F8D4}"/>
+              </a:ext>
+            </a:extLst>
+          </p:cNvPr>
+          <p:cNvSpPr>
+            <a:spLocks xmlns:a="http://schemas.openxmlformats.org/drawingml/2006/main" noGrp="1"/>
+          </p:cNvSpPr>
+          <p:nvPr/>
+        </p:nvSpPr>
+        <p:spPr>
+          <a:xfrm xmlns:a="http://schemas.openxmlformats.org/drawingml/2006/main">
+            <a:off x="990600" y="2305050"/>
+            <a:ext cx="2000250" cy="495300"/>
+          </a:xfrm>
+          <a:prstGeom xmlns:a="http://schemas.openxmlformats.org/drawingml/2006/main" prst="rect">
+            <a:avLst/>
+          </a:prstGeom>
+          <a:solidFill xmlns:a="http://schemas.openxmlformats.org/drawingml/2006/main">
+            <a:srgbClr val="1C2330"/>
           </a:solidFill>
           <a:ln xmlns:a="http://schemas.openxmlformats.org/drawingml/2006/main" w="9525">
             <a:solidFill>
-              <a:srgbClr val="F2B84B"/>
+              <a:srgbClr val="394352"/>
             </a:solidFill>
             <a:prstDash val="solid"/>
           </a:ln>
@@ -8145,19 +8253,54 @@
           <p:cNvPr id="7" name="">
             <a:extLst xmlns:a="http://schemas.openxmlformats.org/drawingml/2006/main">
               <a:ext uri="{FF2B5EF4-FFF2-40B4-BE49-F238E27FC236}">
-                <a16:creationId xmlns:a16="http://schemas.microsoft.com/office/drawing/2014/main" id="{F916F71C-0B65-4AA9-A9B2-D5DA8E89FCC7}"/>
-              </a:ext>
-            </a:extLst>
-          </p:cNvPr>
-          <p:cNvSpPr>
-            <a:spLocks xmlns:a="http://schemas.openxmlformats.org/drawingml/2006/main" noGrp="1"/>
-          </p:cNvSpPr>
-          <p:nvPr/>
-        </p:nvSpPr>
-        <p:spPr>
-          <a:xfrm xmlns:a="http://schemas.openxmlformats.org/drawingml/2006/main">
-            <a:off x="857250" y="2695575"/>
-            <a:ext cx="1581150" cy="171450"/>
+                <a16:creationId xmlns:a16="http://schemas.microsoft.com/office/drawing/2014/main" id="{887B4CB5-BFC3-446E-A2A3-AA8814F9FCC2}"/>
+              </a:ext>
+            </a:extLst>
+          </p:cNvPr>
+          <p:cNvSpPr>
+            <a:spLocks xmlns:a="http://schemas.openxmlformats.org/drawingml/2006/main" noGrp="1"/>
+          </p:cNvSpPr>
+          <p:nvPr/>
+        </p:nvSpPr>
+        <p:spPr>
+          <a:xfrm xmlns:a="http://schemas.openxmlformats.org/drawingml/2006/main">
+            <a:off x="990600" y="2305050"/>
+            <a:ext cx="47625" cy="495300"/>
+          </a:xfrm>
+          <a:prstGeom xmlns:a="http://schemas.openxmlformats.org/drawingml/2006/main" prst="rect">
+            <a:avLst/>
+          </a:prstGeom>
+          <a:solidFill xmlns:a="http://schemas.openxmlformats.org/drawingml/2006/main">
+            <a:srgbClr val="72A7FF"/>
+          </a:solidFill>
+          <a:ln xmlns:a="http://schemas.openxmlformats.org/drawingml/2006/main" w="0">
+            <a:solidFill>
+              <a:srgbClr val="000000">
+                <a:alpha val="0"/>
+              </a:srgbClr>
+            </a:solidFill>
+            <a:prstDash val="solid"/>
+          </a:ln>
+        </p:spPr>
+      </p:sp>
+      <p:sp>
+        <p:nvSpPr>
+          <p:cNvPr id="8" name="">
+            <a:extLst xmlns:a="http://schemas.openxmlformats.org/drawingml/2006/main">
+              <a:ext uri="{FF2B5EF4-FFF2-40B4-BE49-F238E27FC236}">
+                <a16:creationId xmlns:a16="http://schemas.microsoft.com/office/drawing/2014/main" id="{A49A6722-D536-43E1-B683-E3AE7A3A1A7F}"/>
+              </a:ext>
+            </a:extLst>
+          </p:cNvPr>
+          <p:cNvSpPr>
+            <a:spLocks xmlns:a="http://schemas.openxmlformats.org/drawingml/2006/main" noGrp="1"/>
+          </p:cNvSpPr>
+          <p:nvPr/>
+        </p:nvSpPr>
+        <p:spPr>
+          <a:xfrm xmlns:a="http://schemas.openxmlformats.org/drawingml/2006/main">
+            <a:off x="1200150" y="2466975"/>
+            <a:ext cx="1600200" cy="190500"/>
           </a:xfrm>
           <a:prstGeom xmlns:a="http://schemas.openxmlformats.org/drawingml/2006/main" prst="rect">
             <a:avLst/>
@@ -8180,653 +8323,8 @@
           <a:bodyPr xmlns:a="http://schemas.openxmlformats.org/drawingml/2006/main" lIns="0" tIns="0" rIns="0" bIns="0" anchor="t"/>
           <a:lstStyle xmlns:a="http://schemas.openxmlformats.org/drawingml/2006/main"/>
           <a:p xmlns:a="http://schemas.openxmlformats.org/drawingml/2006/main">
-            <a:pPr algn="ctr">
-              <a:defRPr sz="975" b="1">
-                <a:solidFill>
-                  <a:srgbClr val="F2B84B"/>
-                </a:solidFill>
-                <a:latin typeface="Aptos"/>
-                <a:ea typeface="Aptos"/>
-                <a:cs typeface="Aptos"/>
-              </a:defRPr>
-            </a:pPr>
-            <a:r>
-              <a:rPr sz="975" b="1">
-                <a:solidFill>
-                  <a:srgbClr val="F2B84B"/>
-                </a:solidFill>
-                <a:latin typeface="Aptos"/>
-                <a:ea typeface="Aptos"/>
-                <a:cs typeface="Aptos"/>
-              </a:rPr>
-              <a:t>agent-like requests</a:t>
-            </a:r>
-          </a:p>
-        </p:txBody>
-      </p:sp>
-      <p:sp>
-        <p:nvSpPr>
-          <p:cNvPr id="8" name="">
-            <a:extLst xmlns:a="http://schemas.openxmlformats.org/drawingml/2006/main">
-              <a:ext uri="{FF2B5EF4-FFF2-40B4-BE49-F238E27FC236}">
-                <a16:creationId xmlns:a16="http://schemas.microsoft.com/office/drawing/2014/main" id="{E8E08343-C15E-4BE7-BB88-3878BB6CDB9C}"/>
-              </a:ext>
-            </a:extLst>
-          </p:cNvPr>
-          <p:cNvSpPr>
-            <a:spLocks xmlns:a="http://schemas.openxmlformats.org/drawingml/2006/main" noGrp="1"/>
-          </p:cNvSpPr>
-          <p:nvPr/>
-        </p:nvSpPr>
-        <p:spPr>
-          <a:xfrm xmlns:a="http://schemas.openxmlformats.org/drawingml/2006/main">
-            <a:off x="2667000" y="2790825"/>
-            <a:ext cx="619125" cy="28575"/>
-          </a:xfrm>
-          <a:prstGeom xmlns:a="http://schemas.openxmlformats.org/drawingml/2006/main" prst="rect">
-            <a:avLst/>
-          </a:prstGeom>
-          <a:solidFill xmlns:a="http://schemas.openxmlformats.org/drawingml/2006/main">
-            <a:srgbClr val="394352"/>
-          </a:solidFill>
-          <a:ln xmlns:a="http://schemas.openxmlformats.org/drawingml/2006/main" w="0">
-            <a:solidFill>
-              <a:srgbClr val="000000">
-                <a:alpha val="0"/>
-              </a:srgbClr>
-            </a:solidFill>
-            <a:prstDash val="solid"/>
-          </a:ln>
-        </p:spPr>
-      </p:sp>
-      <p:sp>
-        <p:nvSpPr>
-          <p:cNvPr id="9" name="">
-            <a:extLst xmlns:a="http://schemas.openxmlformats.org/drawingml/2006/main">
-              <a:ext uri="{FF2B5EF4-FFF2-40B4-BE49-F238E27FC236}">
-                <a16:creationId xmlns:a16="http://schemas.microsoft.com/office/drawing/2014/main" id="{B96B0A42-43C9-4EBD-AE4C-1F5506C6F7BA}"/>
-              </a:ext>
-            </a:extLst>
-          </p:cNvPr>
-          <p:cNvSpPr>
-            <a:spLocks xmlns:a="http://schemas.openxmlformats.org/drawingml/2006/main" noGrp="1"/>
-          </p:cNvSpPr>
-          <p:nvPr/>
-        </p:nvSpPr>
-        <p:spPr>
-          <a:xfrm xmlns:a="http://schemas.openxmlformats.org/drawingml/2006/main">
-            <a:off x="3200400" y="2724150"/>
-            <a:ext cx="133350" cy="133350"/>
-          </a:xfrm>
-          <a:prstGeom xmlns:a="http://schemas.openxmlformats.org/drawingml/2006/main" prst="triangle">
-            <a:avLst/>
-          </a:prstGeom>
-          <a:solidFill xmlns:a="http://schemas.openxmlformats.org/drawingml/2006/main">
-            <a:srgbClr val="394352"/>
-          </a:solidFill>
-          <a:ln xmlns:a="http://schemas.openxmlformats.org/drawingml/2006/main" w="0">
-            <a:solidFill>
-              <a:srgbClr val="000000">
-                <a:alpha val="0"/>
-              </a:srgbClr>
-            </a:solidFill>
-            <a:prstDash val="solid"/>
-          </a:ln>
-        </p:spPr>
-      </p:sp>
-      <p:sp>
-        <p:nvSpPr>
-          <p:cNvPr id="10" name="">
-            <a:extLst xmlns:a="http://schemas.openxmlformats.org/drawingml/2006/main">
-              <a:ext uri="{FF2B5EF4-FFF2-40B4-BE49-F238E27FC236}">
-                <a16:creationId xmlns:a16="http://schemas.microsoft.com/office/drawing/2014/main" id="{965BC34E-D55D-4B6B-87DF-D49B40ECA9BF}"/>
-              </a:ext>
-            </a:extLst>
-          </p:cNvPr>
-          <p:cNvSpPr>
-            <a:spLocks xmlns:a="http://schemas.openxmlformats.org/drawingml/2006/main" noGrp="1"/>
-          </p:cNvSpPr>
-          <p:nvPr/>
-        </p:nvSpPr>
-        <p:spPr>
-          <a:xfrm xmlns:a="http://schemas.openxmlformats.org/drawingml/2006/main">
-            <a:off x="3429000" y="2628900"/>
-            <a:ext cx="1714500" cy="323850"/>
-          </a:xfrm>
-          <a:prstGeom xmlns:a="http://schemas.openxmlformats.org/drawingml/2006/main" prst="roundRect">
-            <a:avLst>
-              <a:gd name="adj" fmla="val 23529"/>
-            </a:avLst>
-          </a:prstGeom>
-          <a:solidFill xmlns:a="http://schemas.openxmlformats.org/drawingml/2006/main">
-            <a:srgbClr val="72A7FF">
-              <a:alpha val="13333"/>
-            </a:srgbClr>
-          </a:solidFill>
-          <a:ln xmlns:a="http://schemas.openxmlformats.org/drawingml/2006/main" w="9525">
-            <a:solidFill>
-              <a:srgbClr val="72A7FF"/>
-            </a:solidFill>
-            <a:prstDash val="solid"/>
-          </a:ln>
-        </p:spPr>
-      </p:sp>
-      <p:sp>
-        <p:nvSpPr>
-          <p:cNvPr id="11" name="">
-            <a:extLst xmlns:a="http://schemas.openxmlformats.org/drawingml/2006/main">
-              <a:ext uri="{FF2B5EF4-FFF2-40B4-BE49-F238E27FC236}">
-                <a16:creationId xmlns:a16="http://schemas.microsoft.com/office/drawing/2014/main" id="{37AEDA4D-50A8-4948-B409-C04043A95084}"/>
-              </a:ext>
-            </a:extLst>
-          </p:cNvPr>
-          <p:cNvSpPr>
-            <a:spLocks xmlns:a="http://schemas.openxmlformats.org/drawingml/2006/main" noGrp="1"/>
-          </p:cNvSpPr>
-          <p:nvPr/>
-        </p:nvSpPr>
-        <p:spPr>
-          <a:xfrm xmlns:a="http://schemas.openxmlformats.org/drawingml/2006/main">
-            <a:off x="3543300" y="2695575"/>
-            <a:ext cx="1485900" cy="171450"/>
-          </a:xfrm>
-          <a:prstGeom xmlns:a="http://schemas.openxmlformats.org/drawingml/2006/main" prst="rect">
-            <a:avLst/>
-          </a:prstGeom>
-          <a:solidFill xmlns:a="http://schemas.openxmlformats.org/drawingml/2006/main">
-            <a:srgbClr val="000000">
-              <a:alpha val="0"/>
-            </a:srgbClr>
-          </a:solidFill>
-          <a:ln xmlns:a="http://schemas.openxmlformats.org/drawingml/2006/main" w="0">
-            <a:solidFill>
-              <a:srgbClr val="000000">
-                <a:alpha val="0"/>
-              </a:srgbClr>
-            </a:solidFill>
-            <a:prstDash val="solid"/>
-          </a:ln>
-        </p:spPr>
-        <p:txBody>
-          <a:bodyPr xmlns:a="http://schemas.openxmlformats.org/drawingml/2006/main" lIns="0" tIns="0" rIns="0" bIns="0" anchor="t"/>
-          <a:lstStyle xmlns:a="http://schemas.openxmlformats.org/drawingml/2006/main"/>
-          <a:p xmlns:a="http://schemas.openxmlformats.org/drawingml/2006/main">
-            <a:pPr algn="ctr">
-              <a:defRPr sz="975" b="1">
-                <a:solidFill>
-                  <a:srgbClr val="72A7FF"/>
-                </a:solidFill>
-                <a:latin typeface="Aptos"/>
-                <a:ea typeface="Aptos"/>
-                <a:cs typeface="Aptos"/>
-              </a:defRPr>
-            </a:pPr>
-            <a:r>
-              <a:rPr sz="975" b="1">
-                <a:solidFill>
-                  <a:srgbClr val="72A7FF"/>
-                </a:solidFill>
-                <a:latin typeface="Aptos"/>
-                <a:ea typeface="Aptos"/>
-                <a:cs typeface="Aptos"/>
-              </a:rPr>
-              <a:t>prefix grouping</a:t>
-            </a:r>
-          </a:p>
-        </p:txBody>
-      </p:sp>
-      <p:sp>
-        <p:nvSpPr>
-          <p:cNvPr id="12" name="">
-            <a:extLst xmlns:a="http://schemas.openxmlformats.org/drawingml/2006/main">
-              <a:ext uri="{FF2B5EF4-FFF2-40B4-BE49-F238E27FC236}">
-                <a16:creationId xmlns:a16="http://schemas.microsoft.com/office/drawing/2014/main" id="{18A67219-829C-420B-9A8F-28874C2C078B}"/>
-              </a:ext>
-            </a:extLst>
-          </p:cNvPr>
-          <p:cNvSpPr>
-            <a:spLocks xmlns:a="http://schemas.openxmlformats.org/drawingml/2006/main" noGrp="1"/>
-          </p:cNvSpPr>
-          <p:nvPr/>
-        </p:nvSpPr>
-        <p:spPr>
-          <a:xfrm xmlns:a="http://schemas.openxmlformats.org/drawingml/2006/main">
-            <a:off x="5257800" y="2790825"/>
-            <a:ext cx="666750" cy="28575"/>
-          </a:xfrm>
-          <a:prstGeom xmlns:a="http://schemas.openxmlformats.org/drawingml/2006/main" prst="rect">
-            <a:avLst/>
-          </a:prstGeom>
-          <a:solidFill xmlns:a="http://schemas.openxmlformats.org/drawingml/2006/main">
-            <a:srgbClr val="394352"/>
-          </a:solidFill>
-          <a:ln xmlns:a="http://schemas.openxmlformats.org/drawingml/2006/main" w="0">
-            <a:solidFill>
-              <a:srgbClr val="000000">
-                <a:alpha val="0"/>
-              </a:srgbClr>
-            </a:solidFill>
-            <a:prstDash val="solid"/>
-          </a:ln>
-        </p:spPr>
-      </p:sp>
-      <p:sp>
-        <p:nvSpPr>
-          <p:cNvPr id="13" name="">
-            <a:extLst xmlns:a="http://schemas.openxmlformats.org/drawingml/2006/main">
-              <a:ext uri="{FF2B5EF4-FFF2-40B4-BE49-F238E27FC236}">
-                <a16:creationId xmlns:a16="http://schemas.microsoft.com/office/drawing/2014/main" id="{1607E5C1-D429-4572-B378-22035E860A52}"/>
-              </a:ext>
-            </a:extLst>
-          </p:cNvPr>
-          <p:cNvSpPr>
-            <a:spLocks xmlns:a="http://schemas.openxmlformats.org/drawingml/2006/main" noGrp="1"/>
-          </p:cNvSpPr>
-          <p:nvPr/>
-        </p:nvSpPr>
-        <p:spPr>
-          <a:xfrm xmlns:a="http://schemas.openxmlformats.org/drawingml/2006/main">
-            <a:off x="5838825" y="2724150"/>
-            <a:ext cx="133350" cy="133350"/>
-          </a:xfrm>
-          <a:prstGeom xmlns:a="http://schemas.openxmlformats.org/drawingml/2006/main" prst="triangle">
-            <a:avLst/>
-          </a:prstGeom>
-          <a:solidFill xmlns:a="http://schemas.openxmlformats.org/drawingml/2006/main">
-            <a:srgbClr val="394352"/>
-          </a:solidFill>
-          <a:ln xmlns:a="http://schemas.openxmlformats.org/drawingml/2006/main" w="0">
-            <a:solidFill>
-              <a:srgbClr val="000000">
-                <a:alpha val="0"/>
-              </a:srgbClr>
-            </a:solidFill>
-            <a:prstDash val="solid"/>
-          </a:ln>
-        </p:spPr>
-      </p:sp>
-      <p:sp>
-        <p:nvSpPr>
-          <p:cNvPr id="14" name="">
-            <a:extLst xmlns:a="http://schemas.openxmlformats.org/drawingml/2006/main">
-              <a:ext uri="{FF2B5EF4-FFF2-40B4-BE49-F238E27FC236}">
-                <a16:creationId xmlns:a16="http://schemas.microsoft.com/office/drawing/2014/main" id="{34041FB6-C566-401E-9EB0-D7D697079312}"/>
-              </a:ext>
-            </a:extLst>
-          </p:cNvPr>
-          <p:cNvSpPr>
-            <a:spLocks xmlns:a="http://schemas.openxmlformats.org/drawingml/2006/main" noGrp="1"/>
-          </p:cNvSpPr>
-          <p:nvPr/>
-        </p:nvSpPr>
-        <p:spPr>
-          <a:xfrm xmlns:a="http://schemas.openxmlformats.org/drawingml/2006/main">
-            <a:off x="6096000" y="2628900"/>
-            <a:ext cx="1714500" cy="323850"/>
-          </a:xfrm>
-          <a:prstGeom xmlns:a="http://schemas.openxmlformats.org/drawingml/2006/main" prst="roundRect">
-            <a:avLst>
-              <a:gd name="adj" fmla="val 23529"/>
-            </a:avLst>
-          </a:prstGeom>
-          <a:solidFill xmlns:a="http://schemas.openxmlformats.org/drawingml/2006/main">
-            <a:srgbClr val="7BD88F">
-              <a:alpha val="13333"/>
-            </a:srgbClr>
-          </a:solidFill>
-          <a:ln xmlns:a="http://schemas.openxmlformats.org/drawingml/2006/main" w="9525">
-            <a:solidFill>
-              <a:srgbClr val="7BD88F"/>
-            </a:solidFill>
-            <a:prstDash val="solid"/>
-          </a:ln>
-        </p:spPr>
-      </p:sp>
-      <p:sp>
-        <p:nvSpPr>
-          <p:cNvPr id="15" name="">
-            <a:extLst xmlns:a="http://schemas.openxmlformats.org/drawingml/2006/main">
-              <a:ext uri="{FF2B5EF4-FFF2-40B4-BE49-F238E27FC236}">
-                <a16:creationId xmlns:a16="http://schemas.microsoft.com/office/drawing/2014/main" id="{3CC1A4F1-D952-4613-A9ED-6343B8784F08}"/>
-              </a:ext>
-            </a:extLst>
-          </p:cNvPr>
-          <p:cNvSpPr>
-            <a:spLocks xmlns:a="http://schemas.openxmlformats.org/drawingml/2006/main" noGrp="1"/>
-          </p:cNvSpPr>
-          <p:nvPr/>
-        </p:nvSpPr>
-        <p:spPr>
-          <a:xfrm xmlns:a="http://schemas.openxmlformats.org/drawingml/2006/main">
-            <a:off x="6210300" y="2695575"/>
-            <a:ext cx="1485900" cy="171450"/>
-          </a:xfrm>
-          <a:prstGeom xmlns:a="http://schemas.openxmlformats.org/drawingml/2006/main" prst="rect">
-            <a:avLst/>
-          </a:prstGeom>
-          <a:solidFill xmlns:a="http://schemas.openxmlformats.org/drawingml/2006/main">
-            <a:srgbClr val="000000">
-              <a:alpha val="0"/>
-            </a:srgbClr>
-          </a:solidFill>
-          <a:ln xmlns:a="http://schemas.openxmlformats.org/drawingml/2006/main" w="0">
-            <a:solidFill>
-              <a:srgbClr val="000000">
-                <a:alpha val="0"/>
-              </a:srgbClr>
-            </a:solidFill>
-            <a:prstDash val="solid"/>
-          </a:ln>
-        </p:spPr>
-        <p:txBody>
-          <a:bodyPr xmlns:a="http://schemas.openxmlformats.org/drawingml/2006/main" lIns="0" tIns="0" rIns="0" bIns="0" anchor="t"/>
-          <a:lstStyle xmlns:a="http://schemas.openxmlformats.org/drawingml/2006/main"/>
-          <a:p xmlns:a="http://schemas.openxmlformats.org/drawingml/2006/main">
-            <a:pPr algn="ctr">
-              <a:defRPr sz="975" b="1">
-                <a:solidFill>
-                  <a:srgbClr val="7BD88F"/>
-                </a:solidFill>
-                <a:latin typeface="Aptos"/>
-                <a:ea typeface="Aptos"/>
-                <a:cs typeface="Aptos"/>
-              </a:defRPr>
-            </a:pPr>
-            <a:r>
-              <a:rPr sz="975" b="1">
-                <a:solidFill>
-                  <a:srgbClr val="7BD88F"/>
-                </a:solidFill>
-                <a:latin typeface="Aptos"/>
-                <a:ea typeface="Aptos"/>
-                <a:cs typeface="Aptos"/>
-              </a:rPr>
-              <a:t>hybrid LRU/LFU</a:t>
-            </a:r>
-          </a:p>
-        </p:txBody>
-      </p:sp>
-      <p:sp>
-        <p:nvSpPr>
-          <p:cNvPr id="16" name="">
-            <a:extLst xmlns:a="http://schemas.openxmlformats.org/drawingml/2006/main">
-              <a:ext uri="{FF2B5EF4-FFF2-40B4-BE49-F238E27FC236}">
-                <a16:creationId xmlns:a16="http://schemas.microsoft.com/office/drawing/2014/main" id="{17EBB639-7D0C-4AA6-B555-11C5686F17CF}"/>
-              </a:ext>
-            </a:extLst>
-          </p:cNvPr>
-          <p:cNvSpPr>
-            <a:spLocks xmlns:a="http://schemas.openxmlformats.org/drawingml/2006/main" noGrp="1"/>
-          </p:cNvSpPr>
-          <p:nvPr/>
-        </p:nvSpPr>
-        <p:spPr>
-          <a:xfrm xmlns:a="http://schemas.openxmlformats.org/drawingml/2006/main">
-            <a:off x="7924800" y="2790825"/>
-            <a:ext cx="647700" cy="28575"/>
-          </a:xfrm>
-          <a:prstGeom xmlns:a="http://schemas.openxmlformats.org/drawingml/2006/main" prst="rect">
-            <a:avLst/>
-          </a:prstGeom>
-          <a:solidFill xmlns:a="http://schemas.openxmlformats.org/drawingml/2006/main">
-            <a:srgbClr val="394352"/>
-          </a:solidFill>
-          <a:ln xmlns:a="http://schemas.openxmlformats.org/drawingml/2006/main" w="0">
-            <a:solidFill>
-              <a:srgbClr val="000000">
-                <a:alpha val="0"/>
-              </a:srgbClr>
-            </a:solidFill>
-            <a:prstDash val="solid"/>
-          </a:ln>
-        </p:spPr>
-      </p:sp>
-      <p:sp>
-        <p:nvSpPr>
-          <p:cNvPr id="17" name="">
-            <a:extLst xmlns:a="http://schemas.openxmlformats.org/drawingml/2006/main">
-              <a:ext uri="{FF2B5EF4-FFF2-40B4-BE49-F238E27FC236}">
-                <a16:creationId xmlns:a16="http://schemas.microsoft.com/office/drawing/2014/main" id="{FC965C4A-E995-479C-BF93-2703F113A5E0}"/>
-              </a:ext>
-            </a:extLst>
-          </p:cNvPr>
-          <p:cNvSpPr>
-            <a:spLocks xmlns:a="http://schemas.openxmlformats.org/drawingml/2006/main" noGrp="1"/>
-          </p:cNvSpPr>
-          <p:nvPr/>
-        </p:nvSpPr>
-        <p:spPr>
-          <a:xfrm xmlns:a="http://schemas.openxmlformats.org/drawingml/2006/main">
-            <a:off x="8486775" y="2724150"/>
-            <a:ext cx="133350" cy="133350"/>
-          </a:xfrm>
-          <a:prstGeom xmlns:a="http://schemas.openxmlformats.org/drawingml/2006/main" prst="triangle">
-            <a:avLst/>
-          </a:prstGeom>
-          <a:solidFill xmlns:a="http://schemas.openxmlformats.org/drawingml/2006/main">
-            <a:srgbClr val="394352"/>
-          </a:solidFill>
-          <a:ln xmlns:a="http://schemas.openxmlformats.org/drawingml/2006/main" w="0">
-            <a:solidFill>
-              <a:srgbClr val="000000">
-                <a:alpha val="0"/>
-              </a:srgbClr>
-            </a:solidFill>
-            <a:prstDash val="solid"/>
-          </a:ln>
-        </p:spPr>
-      </p:sp>
-      <p:sp>
-        <p:nvSpPr>
-          <p:cNvPr id="18" name="">
-            <a:extLst xmlns:a="http://schemas.openxmlformats.org/drawingml/2006/main">
-              <a:ext uri="{FF2B5EF4-FFF2-40B4-BE49-F238E27FC236}">
-                <a16:creationId xmlns:a16="http://schemas.microsoft.com/office/drawing/2014/main" id="{A40A8CD3-B612-4C8B-A8C9-5F8C88F80C2F}"/>
-              </a:ext>
-            </a:extLst>
-          </p:cNvPr>
-          <p:cNvSpPr>
-            <a:spLocks xmlns:a="http://schemas.openxmlformats.org/drawingml/2006/main" noGrp="1"/>
-          </p:cNvSpPr>
-          <p:nvPr/>
-        </p:nvSpPr>
-        <p:spPr>
-          <a:xfrm xmlns:a="http://schemas.openxmlformats.org/drawingml/2006/main">
-            <a:off x="8743950" y="2628900"/>
-            <a:ext cx="1428750" cy="323850"/>
-          </a:xfrm>
-          <a:prstGeom xmlns:a="http://schemas.openxmlformats.org/drawingml/2006/main" prst="roundRect">
-            <a:avLst>
-              <a:gd name="adj" fmla="val 23529"/>
-            </a:avLst>
-          </a:prstGeom>
-          <a:solidFill xmlns:a="http://schemas.openxmlformats.org/drawingml/2006/main">
-            <a:srgbClr val="B998FF">
-              <a:alpha val="13333"/>
-            </a:srgbClr>
-          </a:solidFill>
-          <a:ln xmlns:a="http://schemas.openxmlformats.org/drawingml/2006/main" w="9525">
-            <a:solidFill>
-              <a:srgbClr val="B998FF"/>
-            </a:solidFill>
-            <a:prstDash val="solid"/>
-          </a:ln>
-        </p:spPr>
-      </p:sp>
-      <p:sp>
-        <p:nvSpPr>
-          <p:cNvPr id="19" name="">
-            <a:extLst xmlns:a="http://schemas.openxmlformats.org/drawingml/2006/main">
-              <a:ext uri="{FF2B5EF4-FFF2-40B4-BE49-F238E27FC236}">
-                <a16:creationId xmlns:a16="http://schemas.microsoft.com/office/drawing/2014/main" id="{4892296A-D069-4BEF-8B60-05713A4CC0C5}"/>
-              </a:ext>
-            </a:extLst>
-          </p:cNvPr>
-          <p:cNvSpPr>
-            <a:spLocks xmlns:a="http://schemas.openxmlformats.org/drawingml/2006/main" noGrp="1"/>
-          </p:cNvSpPr>
-          <p:nvPr/>
-        </p:nvSpPr>
-        <p:spPr>
-          <a:xfrm xmlns:a="http://schemas.openxmlformats.org/drawingml/2006/main">
-            <a:off x="8858250" y="2695575"/>
-            <a:ext cx="1200150" cy="171450"/>
-          </a:xfrm>
-          <a:prstGeom xmlns:a="http://schemas.openxmlformats.org/drawingml/2006/main" prst="rect">
-            <a:avLst/>
-          </a:prstGeom>
-          <a:solidFill xmlns:a="http://schemas.openxmlformats.org/drawingml/2006/main">
-            <a:srgbClr val="000000">
-              <a:alpha val="0"/>
-            </a:srgbClr>
-          </a:solidFill>
-          <a:ln xmlns:a="http://schemas.openxmlformats.org/drawingml/2006/main" w="0">
-            <a:solidFill>
-              <a:srgbClr val="000000">
-                <a:alpha val="0"/>
-              </a:srgbClr>
-            </a:solidFill>
-            <a:prstDash val="solid"/>
-          </a:ln>
-        </p:spPr>
-        <p:txBody>
-          <a:bodyPr xmlns:a="http://schemas.openxmlformats.org/drawingml/2006/main" lIns="0" tIns="0" rIns="0" bIns="0" anchor="t"/>
-          <a:lstStyle xmlns:a="http://schemas.openxmlformats.org/drawingml/2006/main"/>
-          <a:p xmlns:a="http://schemas.openxmlformats.org/drawingml/2006/main">
-            <a:pPr algn="ctr">
-              <a:defRPr sz="975" b="1">
-                <a:solidFill>
-                  <a:srgbClr val="B998FF"/>
-                </a:solidFill>
-                <a:latin typeface="Aptos"/>
-                <a:ea typeface="Aptos"/>
-                <a:cs typeface="Aptos"/>
-              </a:defRPr>
-            </a:pPr>
-            <a:r>
-              <a:rPr sz="975" b="1">
-                <a:solidFill>
-                  <a:srgbClr val="B998FF"/>
-                </a:solidFill>
-                <a:latin typeface="Aptos"/>
-                <a:ea typeface="Aptos"/>
-                <a:cs typeface="Aptos"/>
-              </a:rPr>
-              <a:t>TTFT + p95</a:t>
-            </a:r>
-          </a:p>
-        </p:txBody>
-      </p:sp>
-      <p:sp>
-        <p:nvSpPr>
-          <p:cNvPr id="20" name="">
-            <a:extLst xmlns:a="http://schemas.openxmlformats.org/drawingml/2006/main">
-              <a:ext uri="{FF2B5EF4-FFF2-40B4-BE49-F238E27FC236}">
-                <a16:creationId xmlns:a16="http://schemas.microsoft.com/office/drawing/2014/main" id="{7F08497D-E361-4295-986E-DDD6F5664AE7}"/>
-              </a:ext>
-            </a:extLst>
-          </p:cNvPr>
-          <p:cNvSpPr>
-            <a:spLocks xmlns:a="http://schemas.openxmlformats.org/drawingml/2006/main" noGrp="1"/>
-          </p:cNvSpPr>
-          <p:nvPr/>
-        </p:nvSpPr>
-        <p:spPr>
-          <a:xfrm xmlns:a="http://schemas.openxmlformats.org/drawingml/2006/main">
-            <a:off x="819150" y="3714750"/>
-            <a:ext cx="3048000" cy="1333500"/>
-          </a:xfrm>
-          <a:prstGeom xmlns:a="http://schemas.openxmlformats.org/drawingml/2006/main" prst="rect">
-            <a:avLst/>
-          </a:prstGeom>
-          <a:solidFill xmlns:a="http://schemas.openxmlformats.org/drawingml/2006/main">
-            <a:srgbClr val="1C2330"/>
-          </a:solidFill>
-          <a:ln xmlns:a="http://schemas.openxmlformats.org/drawingml/2006/main" w="9525">
-            <a:solidFill>
-              <a:srgbClr val="394352"/>
-            </a:solidFill>
-            <a:prstDash val="solid"/>
-          </a:ln>
-        </p:spPr>
-      </p:sp>
-      <p:sp>
-        <p:nvSpPr>
-          <p:cNvPr id="21" name="">
-            <a:extLst xmlns:a="http://schemas.openxmlformats.org/drawingml/2006/main">
-              <a:ext uri="{FF2B5EF4-FFF2-40B4-BE49-F238E27FC236}">
-                <a16:creationId xmlns:a16="http://schemas.microsoft.com/office/drawing/2014/main" id="{E9B45A93-550C-495A-9A90-7AB964996873}"/>
-              </a:ext>
-            </a:extLst>
-          </p:cNvPr>
-          <p:cNvSpPr>
-            <a:spLocks xmlns:a="http://schemas.openxmlformats.org/drawingml/2006/main" noGrp="1"/>
-          </p:cNvSpPr>
-          <p:nvPr/>
-        </p:nvSpPr>
-        <p:spPr>
-          <a:xfrm xmlns:a="http://schemas.openxmlformats.org/drawingml/2006/main">
-            <a:off x="819150" y="3714750"/>
-            <a:ext cx="47625" cy="1333500"/>
-          </a:xfrm>
-          <a:prstGeom xmlns:a="http://schemas.openxmlformats.org/drawingml/2006/main" prst="rect">
-            <a:avLst/>
-          </a:prstGeom>
-          <a:solidFill xmlns:a="http://schemas.openxmlformats.org/drawingml/2006/main">
-            <a:srgbClr val="72A7FF"/>
-          </a:solidFill>
-          <a:ln xmlns:a="http://schemas.openxmlformats.org/drawingml/2006/main" w="0">
-            <a:solidFill>
-              <a:srgbClr val="000000">
-                <a:alpha val="0"/>
-              </a:srgbClr>
-            </a:solidFill>
-            <a:prstDash val="solid"/>
-          </a:ln>
-        </p:spPr>
-      </p:sp>
-      <p:sp>
-        <p:nvSpPr>
-          <p:cNvPr id="22" name="">
-            <a:extLst xmlns:a="http://schemas.openxmlformats.org/drawingml/2006/main">
-              <a:ext uri="{FF2B5EF4-FFF2-40B4-BE49-F238E27FC236}">
-                <a16:creationId xmlns:a16="http://schemas.microsoft.com/office/drawing/2014/main" id="{2B4E0B8B-E034-4706-8913-9EB141E0AFD5}"/>
-              </a:ext>
-            </a:extLst>
-          </p:cNvPr>
-          <p:cNvSpPr>
-            <a:spLocks xmlns:a="http://schemas.openxmlformats.org/drawingml/2006/main" noGrp="1"/>
-          </p:cNvSpPr>
-          <p:nvPr/>
-        </p:nvSpPr>
-        <p:spPr>
-          <a:xfrm xmlns:a="http://schemas.openxmlformats.org/drawingml/2006/main">
-            <a:off x="990600" y="3867150"/>
-            <a:ext cx="2705100" cy="247650"/>
-          </a:xfrm>
-          <a:prstGeom xmlns:a="http://schemas.openxmlformats.org/drawingml/2006/main" prst="rect">
-            <a:avLst/>
-          </a:prstGeom>
-          <a:solidFill xmlns:a="http://schemas.openxmlformats.org/drawingml/2006/main">
-            <a:srgbClr val="000000">
-              <a:alpha val="0"/>
-            </a:srgbClr>
-          </a:solidFill>
-          <a:ln xmlns:a="http://schemas.openxmlformats.org/drawingml/2006/main" w="0">
-            <a:solidFill>
-              <a:srgbClr val="000000">
-                <a:alpha val="0"/>
-              </a:srgbClr>
-            </a:solidFill>
-            <a:prstDash val="solid"/>
-          </a:ln>
-        </p:spPr>
-        <p:txBody>
-          <a:bodyPr xmlns:a="http://schemas.openxmlformats.org/drawingml/2006/main" lIns="0" tIns="0" rIns="0" bIns="0" anchor="t"/>
-          <a:lstStyle xmlns:a="http://schemas.openxmlformats.org/drawingml/2006/main"/>
-          <a:p xmlns:a="http://schemas.openxmlformats.org/drawingml/2006/main">
             <a:pPr algn="l">
-              <a:defRPr sz="1425" b="1">
+              <a:defRPr sz="1200" b="1">
                 <a:solidFill>
                   <a:srgbClr val="F7F3EA"/>
                 </a:solidFill>
@@ -8836,7 +8334,694 @@
               </a:defRPr>
             </a:pPr>
             <a:r>
-              <a:rPr sz="1425" b="1">
+              <a:rPr sz="1200" b="1">
+                <a:solidFill>
+                  <a:srgbClr val="F7F3EA"/>
+                </a:solidFill>
+                <a:latin typeface="Aptos Display"/>
+                <a:ea typeface="Aptos Display"/>
+                <a:cs typeface="Aptos Display"/>
+              </a:rPr>
+              <a:t>Model</a:t>
+            </a:r>
+          </a:p>
+        </p:txBody>
+      </p:sp>
+      <p:sp>
+        <p:nvSpPr>
+          <p:cNvPr id="9" name="">
+            <a:extLst xmlns:a="http://schemas.openxmlformats.org/drawingml/2006/main">
+              <a:ext uri="{FF2B5EF4-FFF2-40B4-BE49-F238E27FC236}">
+                <a16:creationId xmlns:a16="http://schemas.microsoft.com/office/drawing/2014/main" id="{E2C803B5-084E-418B-8C57-C62E809AC5B4}"/>
+              </a:ext>
+            </a:extLst>
+          </p:cNvPr>
+          <p:cNvSpPr>
+            <a:spLocks xmlns:a="http://schemas.openxmlformats.org/drawingml/2006/main" noGrp="1"/>
+          </p:cNvSpPr>
+          <p:nvPr/>
+        </p:nvSpPr>
+        <p:spPr>
+          <a:xfrm xmlns:a="http://schemas.openxmlformats.org/drawingml/2006/main">
+            <a:off x="2990850" y="2305050"/>
+            <a:ext cx="8191500" cy="495300"/>
+          </a:xfrm>
+          <a:prstGeom xmlns:a="http://schemas.openxmlformats.org/drawingml/2006/main" prst="rect">
+            <a:avLst/>
+          </a:prstGeom>
+          <a:solidFill xmlns:a="http://schemas.openxmlformats.org/drawingml/2006/main">
+            <a:srgbClr val="171D28"/>
+          </a:solidFill>
+          <a:ln xmlns:a="http://schemas.openxmlformats.org/drawingml/2006/main" w="9525">
+            <a:solidFill>
+              <a:srgbClr val="394352"/>
+            </a:solidFill>
+            <a:prstDash val="solid"/>
+          </a:ln>
+        </p:spPr>
+      </p:sp>
+      <p:sp>
+        <p:nvSpPr>
+          <p:cNvPr id="10" name="">
+            <a:extLst xmlns:a="http://schemas.openxmlformats.org/drawingml/2006/main">
+              <a:ext uri="{FF2B5EF4-FFF2-40B4-BE49-F238E27FC236}">
+                <a16:creationId xmlns:a16="http://schemas.microsoft.com/office/drawing/2014/main" id="{FFDA0043-1476-4513-B55B-CAD8229A647E}"/>
+              </a:ext>
+            </a:extLst>
+          </p:cNvPr>
+          <p:cNvSpPr>
+            <a:spLocks xmlns:a="http://schemas.openxmlformats.org/drawingml/2006/main" noGrp="1"/>
+          </p:cNvSpPr>
+          <p:nvPr/>
+        </p:nvSpPr>
+        <p:spPr>
+          <a:xfrm xmlns:a="http://schemas.openxmlformats.org/drawingml/2006/main">
+            <a:off x="3219450" y="2466975"/>
+            <a:ext cx="7734300" cy="190500"/>
+          </a:xfrm>
+          <a:prstGeom xmlns:a="http://schemas.openxmlformats.org/drawingml/2006/main" prst="rect">
+            <a:avLst/>
+          </a:prstGeom>
+          <a:solidFill xmlns:a="http://schemas.openxmlformats.org/drawingml/2006/main">
+            <a:srgbClr val="000000">
+              <a:alpha val="0"/>
+            </a:srgbClr>
+          </a:solidFill>
+          <a:ln xmlns:a="http://schemas.openxmlformats.org/drawingml/2006/main" w="0">
+            <a:solidFill>
+              <a:srgbClr val="000000">
+                <a:alpha val="0"/>
+              </a:srgbClr>
+            </a:solidFill>
+            <a:prstDash val="solid"/>
+          </a:ln>
+        </p:spPr>
+        <p:txBody>
+          <a:bodyPr xmlns:a="http://schemas.openxmlformats.org/drawingml/2006/main" lIns="0" tIns="0" rIns="0" bIns="0" anchor="t"/>
+          <a:lstStyle xmlns:a="http://schemas.openxmlformats.org/drawingml/2006/main"/>
+          <a:p xmlns:a="http://schemas.openxmlformats.org/drawingml/2006/main">
+            <a:pPr algn="l">
+              <a:defRPr sz="1200" b="0">
+                <a:solidFill>
+                  <a:srgbClr val="AEB7C4"/>
+                </a:solidFill>
+                <a:latin typeface="Aptos"/>
+                <a:ea typeface="Aptos"/>
+                <a:cs typeface="Aptos"/>
+              </a:defRPr>
+            </a:pPr>
+            <a:r>
+              <a:rPr sz="1200" b="0">
+                <a:solidFill>
+                  <a:srgbClr val="AEB7C4"/>
+                </a:solidFill>
+                <a:latin typeface="Aptos"/>
+                <a:ea typeface="Aptos"/>
+                <a:cs typeface="Aptos"/>
+              </a:rPr>
+              <a:t>Llama-3-8B-Instruct on vLLM</a:t>
+            </a:r>
+          </a:p>
+        </p:txBody>
+      </p:sp>
+      <p:sp>
+        <p:nvSpPr>
+          <p:cNvPr id="11" name="">
+            <a:extLst xmlns:a="http://schemas.openxmlformats.org/drawingml/2006/main">
+              <a:ext uri="{FF2B5EF4-FFF2-40B4-BE49-F238E27FC236}">
+                <a16:creationId xmlns:a16="http://schemas.microsoft.com/office/drawing/2014/main" id="{A812D443-7F23-4049-A9BC-1DD102BBE2AE}"/>
+              </a:ext>
+            </a:extLst>
+          </p:cNvPr>
+          <p:cNvSpPr>
+            <a:spLocks xmlns:a="http://schemas.openxmlformats.org/drawingml/2006/main" noGrp="1"/>
+          </p:cNvSpPr>
+          <p:nvPr/>
+        </p:nvSpPr>
+        <p:spPr>
+          <a:xfrm xmlns:a="http://schemas.openxmlformats.org/drawingml/2006/main">
+            <a:off x="990600" y="2857500"/>
+            <a:ext cx="2000250" cy="495300"/>
+          </a:xfrm>
+          <a:prstGeom xmlns:a="http://schemas.openxmlformats.org/drawingml/2006/main" prst="rect">
+            <a:avLst/>
+          </a:prstGeom>
+          <a:solidFill xmlns:a="http://schemas.openxmlformats.org/drawingml/2006/main">
+            <a:srgbClr val="1C2330"/>
+          </a:solidFill>
+          <a:ln xmlns:a="http://schemas.openxmlformats.org/drawingml/2006/main" w="9525">
+            <a:solidFill>
+              <a:srgbClr val="394352"/>
+            </a:solidFill>
+            <a:prstDash val="solid"/>
+          </a:ln>
+        </p:spPr>
+      </p:sp>
+      <p:sp>
+        <p:nvSpPr>
+          <p:cNvPr id="12" name="">
+            <a:extLst xmlns:a="http://schemas.openxmlformats.org/drawingml/2006/main">
+              <a:ext uri="{FF2B5EF4-FFF2-40B4-BE49-F238E27FC236}">
+                <a16:creationId xmlns:a16="http://schemas.microsoft.com/office/drawing/2014/main" id="{BF9BE817-363D-4193-9AB4-A5BDFF0956D0}"/>
+              </a:ext>
+            </a:extLst>
+          </p:cNvPr>
+          <p:cNvSpPr>
+            <a:spLocks xmlns:a="http://schemas.openxmlformats.org/drawingml/2006/main" noGrp="1"/>
+          </p:cNvSpPr>
+          <p:nvPr/>
+        </p:nvSpPr>
+        <p:spPr>
+          <a:xfrm xmlns:a="http://schemas.openxmlformats.org/drawingml/2006/main">
+            <a:off x="990600" y="2857500"/>
+            <a:ext cx="47625" cy="495300"/>
+          </a:xfrm>
+          <a:prstGeom xmlns:a="http://schemas.openxmlformats.org/drawingml/2006/main" prst="rect">
+            <a:avLst/>
+          </a:prstGeom>
+          <a:solidFill xmlns:a="http://schemas.openxmlformats.org/drawingml/2006/main">
+            <a:srgbClr val="7BD88F"/>
+          </a:solidFill>
+          <a:ln xmlns:a="http://schemas.openxmlformats.org/drawingml/2006/main" w="0">
+            <a:solidFill>
+              <a:srgbClr val="000000">
+                <a:alpha val="0"/>
+              </a:srgbClr>
+            </a:solidFill>
+            <a:prstDash val="solid"/>
+          </a:ln>
+        </p:spPr>
+      </p:sp>
+      <p:sp>
+        <p:nvSpPr>
+          <p:cNvPr id="13" name="">
+            <a:extLst xmlns:a="http://schemas.openxmlformats.org/drawingml/2006/main">
+              <a:ext uri="{FF2B5EF4-FFF2-40B4-BE49-F238E27FC236}">
+                <a16:creationId xmlns:a16="http://schemas.microsoft.com/office/drawing/2014/main" id="{F07BE3BC-5B50-457C-AE2C-FDC8FA9828EA}"/>
+              </a:ext>
+            </a:extLst>
+          </p:cNvPr>
+          <p:cNvSpPr>
+            <a:spLocks xmlns:a="http://schemas.openxmlformats.org/drawingml/2006/main" noGrp="1"/>
+          </p:cNvSpPr>
+          <p:nvPr/>
+        </p:nvSpPr>
+        <p:spPr>
+          <a:xfrm xmlns:a="http://schemas.openxmlformats.org/drawingml/2006/main">
+            <a:off x="1200150" y="3019425"/>
+            <a:ext cx="1600200" cy="190500"/>
+          </a:xfrm>
+          <a:prstGeom xmlns:a="http://schemas.openxmlformats.org/drawingml/2006/main" prst="rect">
+            <a:avLst/>
+          </a:prstGeom>
+          <a:solidFill xmlns:a="http://schemas.openxmlformats.org/drawingml/2006/main">
+            <a:srgbClr val="000000">
+              <a:alpha val="0"/>
+            </a:srgbClr>
+          </a:solidFill>
+          <a:ln xmlns:a="http://schemas.openxmlformats.org/drawingml/2006/main" w="0">
+            <a:solidFill>
+              <a:srgbClr val="000000">
+                <a:alpha val="0"/>
+              </a:srgbClr>
+            </a:solidFill>
+            <a:prstDash val="solid"/>
+          </a:ln>
+        </p:spPr>
+        <p:txBody>
+          <a:bodyPr xmlns:a="http://schemas.openxmlformats.org/drawingml/2006/main" lIns="0" tIns="0" rIns="0" bIns="0" anchor="t"/>
+          <a:lstStyle xmlns:a="http://schemas.openxmlformats.org/drawingml/2006/main"/>
+          <a:p xmlns:a="http://schemas.openxmlformats.org/drawingml/2006/main">
+            <a:pPr algn="l">
+              <a:defRPr sz="1200" b="1">
+                <a:solidFill>
+                  <a:srgbClr val="F7F3EA"/>
+                </a:solidFill>
+                <a:latin typeface="Aptos Display"/>
+                <a:ea typeface="Aptos Display"/>
+                <a:cs typeface="Aptos Display"/>
+              </a:defRPr>
+            </a:pPr>
+            <a:r>
+              <a:rPr sz="1200" b="1">
+                <a:solidFill>
+                  <a:srgbClr val="F7F3EA"/>
+                </a:solidFill>
+                <a:latin typeface="Aptos Display"/>
+                <a:ea typeface="Aptos Display"/>
+                <a:cs typeface="Aptos Display"/>
+              </a:rPr>
+              <a:t>Workload</a:t>
+            </a:r>
+          </a:p>
+        </p:txBody>
+      </p:sp>
+      <p:sp>
+        <p:nvSpPr>
+          <p:cNvPr id="14" name="">
+            <a:extLst xmlns:a="http://schemas.openxmlformats.org/drawingml/2006/main">
+              <a:ext uri="{FF2B5EF4-FFF2-40B4-BE49-F238E27FC236}">
+                <a16:creationId xmlns:a16="http://schemas.microsoft.com/office/drawing/2014/main" id="{77466847-3605-42E5-BAE9-E759C4CF3D8D}"/>
+              </a:ext>
+            </a:extLst>
+          </p:cNvPr>
+          <p:cNvSpPr>
+            <a:spLocks xmlns:a="http://schemas.openxmlformats.org/drawingml/2006/main" noGrp="1"/>
+          </p:cNvSpPr>
+          <p:nvPr/>
+        </p:nvSpPr>
+        <p:spPr>
+          <a:xfrm xmlns:a="http://schemas.openxmlformats.org/drawingml/2006/main">
+            <a:off x="2990850" y="2857500"/>
+            <a:ext cx="8191500" cy="495300"/>
+          </a:xfrm>
+          <a:prstGeom xmlns:a="http://schemas.openxmlformats.org/drawingml/2006/main" prst="rect">
+            <a:avLst/>
+          </a:prstGeom>
+          <a:solidFill xmlns:a="http://schemas.openxmlformats.org/drawingml/2006/main">
+            <a:srgbClr val="141923"/>
+          </a:solidFill>
+          <a:ln xmlns:a="http://schemas.openxmlformats.org/drawingml/2006/main" w="9525">
+            <a:solidFill>
+              <a:srgbClr val="394352"/>
+            </a:solidFill>
+            <a:prstDash val="solid"/>
+          </a:ln>
+        </p:spPr>
+      </p:sp>
+      <p:sp>
+        <p:nvSpPr>
+          <p:cNvPr id="15" name="">
+            <a:extLst xmlns:a="http://schemas.openxmlformats.org/drawingml/2006/main">
+              <a:ext uri="{FF2B5EF4-FFF2-40B4-BE49-F238E27FC236}">
+                <a16:creationId xmlns:a16="http://schemas.microsoft.com/office/drawing/2014/main" id="{BF83A4EB-70BA-4874-A1B2-DB5F7D48B9B6}"/>
+              </a:ext>
+            </a:extLst>
+          </p:cNvPr>
+          <p:cNvSpPr>
+            <a:spLocks xmlns:a="http://schemas.openxmlformats.org/drawingml/2006/main" noGrp="1"/>
+          </p:cNvSpPr>
+          <p:nvPr/>
+        </p:nvSpPr>
+        <p:spPr>
+          <a:xfrm xmlns:a="http://schemas.openxmlformats.org/drawingml/2006/main">
+            <a:off x="3219450" y="3019425"/>
+            <a:ext cx="7734300" cy="190500"/>
+          </a:xfrm>
+          <a:prstGeom xmlns:a="http://schemas.openxmlformats.org/drawingml/2006/main" prst="rect">
+            <a:avLst/>
+          </a:prstGeom>
+          <a:solidFill xmlns:a="http://schemas.openxmlformats.org/drawingml/2006/main">
+            <a:srgbClr val="000000">
+              <a:alpha val="0"/>
+            </a:srgbClr>
+          </a:solidFill>
+          <a:ln xmlns:a="http://schemas.openxmlformats.org/drawingml/2006/main" w="0">
+            <a:solidFill>
+              <a:srgbClr val="000000">
+                <a:alpha val="0"/>
+              </a:srgbClr>
+            </a:solidFill>
+            <a:prstDash val="solid"/>
+          </a:ln>
+        </p:spPr>
+        <p:txBody>
+          <a:bodyPr xmlns:a="http://schemas.openxmlformats.org/drawingml/2006/main" lIns="0" tIns="0" rIns="0" bIns="0" anchor="t"/>
+          <a:lstStyle xmlns:a="http://schemas.openxmlformats.org/drawingml/2006/main"/>
+          <a:p xmlns:a="http://schemas.openxmlformats.org/drawingml/2006/main">
+            <a:pPr algn="l">
+              <a:defRPr sz="1200" b="0">
+                <a:solidFill>
+                  <a:srgbClr val="AEB7C4"/>
+                </a:solidFill>
+                <a:latin typeface="Aptos"/>
+                <a:ea typeface="Aptos"/>
+                <a:cs typeface="Aptos"/>
+              </a:defRPr>
+            </a:pPr>
+            <a:r>
+              <a:rPr sz="1200" b="0">
+                <a:solidFill>
+                  <a:srgbClr val="AEB7C4"/>
+                </a:solidFill>
+                <a:latin typeface="Aptos"/>
+                <a:ea typeface="Aptos"/>
+                <a:cs typeface="Aptos"/>
+              </a:rPr>
+              <a:t>Synthetic agent/RAG-style traces with controlled prefix overlap</a:t>
+            </a:r>
+          </a:p>
+        </p:txBody>
+      </p:sp>
+      <p:sp>
+        <p:nvSpPr>
+          <p:cNvPr id="16" name="">
+            <a:extLst xmlns:a="http://schemas.openxmlformats.org/drawingml/2006/main">
+              <a:ext uri="{FF2B5EF4-FFF2-40B4-BE49-F238E27FC236}">
+                <a16:creationId xmlns:a16="http://schemas.microsoft.com/office/drawing/2014/main" id="{9742A7E9-3967-440B-8D4A-AE473BDB3412}"/>
+              </a:ext>
+            </a:extLst>
+          </p:cNvPr>
+          <p:cNvSpPr>
+            <a:spLocks xmlns:a="http://schemas.openxmlformats.org/drawingml/2006/main" noGrp="1"/>
+          </p:cNvSpPr>
+          <p:nvPr/>
+        </p:nvSpPr>
+        <p:spPr>
+          <a:xfrm xmlns:a="http://schemas.openxmlformats.org/drawingml/2006/main">
+            <a:off x="990600" y="3409950"/>
+            <a:ext cx="2000250" cy="495300"/>
+          </a:xfrm>
+          <a:prstGeom xmlns:a="http://schemas.openxmlformats.org/drawingml/2006/main" prst="rect">
+            <a:avLst/>
+          </a:prstGeom>
+          <a:solidFill xmlns:a="http://schemas.openxmlformats.org/drawingml/2006/main">
+            <a:srgbClr val="1C2330"/>
+          </a:solidFill>
+          <a:ln xmlns:a="http://schemas.openxmlformats.org/drawingml/2006/main" w="9525">
+            <a:solidFill>
+              <a:srgbClr val="394352"/>
+            </a:solidFill>
+            <a:prstDash val="solid"/>
+          </a:ln>
+        </p:spPr>
+      </p:sp>
+      <p:sp>
+        <p:nvSpPr>
+          <p:cNvPr id="17" name="">
+            <a:extLst xmlns:a="http://schemas.openxmlformats.org/drawingml/2006/main">
+              <a:ext uri="{FF2B5EF4-FFF2-40B4-BE49-F238E27FC236}">
+                <a16:creationId xmlns:a16="http://schemas.microsoft.com/office/drawing/2014/main" id="{4E55CA29-0CAD-4266-9FCD-86F452948AFD}"/>
+              </a:ext>
+            </a:extLst>
+          </p:cNvPr>
+          <p:cNvSpPr>
+            <a:spLocks xmlns:a="http://schemas.openxmlformats.org/drawingml/2006/main" noGrp="1"/>
+          </p:cNvSpPr>
+          <p:nvPr/>
+        </p:nvSpPr>
+        <p:spPr>
+          <a:xfrm xmlns:a="http://schemas.openxmlformats.org/drawingml/2006/main">
+            <a:off x="990600" y="3409950"/>
+            <a:ext cx="47625" cy="495300"/>
+          </a:xfrm>
+          <a:prstGeom xmlns:a="http://schemas.openxmlformats.org/drawingml/2006/main" prst="rect">
+            <a:avLst/>
+          </a:prstGeom>
+          <a:solidFill xmlns:a="http://schemas.openxmlformats.org/drawingml/2006/main">
+            <a:srgbClr val="F2B84B"/>
+          </a:solidFill>
+          <a:ln xmlns:a="http://schemas.openxmlformats.org/drawingml/2006/main" w="0">
+            <a:solidFill>
+              <a:srgbClr val="000000">
+                <a:alpha val="0"/>
+              </a:srgbClr>
+            </a:solidFill>
+            <a:prstDash val="solid"/>
+          </a:ln>
+        </p:spPr>
+      </p:sp>
+      <p:sp>
+        <p:nvSpPr>
+          <p:cNvPr id="18" name="">
+            <a:extLst xmlns:a="http://schemas.openxmlformats.org/drawingml/2006/main">
+              <a:ext uri="{FF2B5EF4-FFF2-40B4-BE49-F238E27FC236}">
+                <a16:creationId xmlns:a16="http://schemas.microsoft.com/office/drawing/2014/main" id="{CCEC5E6C-6834-4760-AEB2-A2C2556D7C36}"/>
+              </a:ext>
+            </a:extLst>
+          </p:cNvPr>
+          <p:cNvSpPr>
+            <a:spLocks xmlns:a="http://schemas.openxmlformats.org/drawingml/2006/main" noGrp="1"/>
+          </p:cNvSpPr>
+          <p:nvPr/>
+        </p:nvSpPr>
+        <p:spPr>
+          <a:xfrm xmlns:a="http://schemas.openxmlformats.org/drawingml/2006/main">
+            <a:off x="1200150" y="3571875"/>
+            <a:ext cx="1600200" cy="190500"/>
+          </a:xfrm>
+          <a:prstGeom xmlns:a="http://schemas.openxmlformats.org/drawingml/2006/main" prst="rect">
+            <a:avLst/>
+          </a:prstGeom>
+          <a:solidFill xmlns:a="http://schemas.openxmlformats.org/drawingml/2006/main">
+            <a:srgbClr val="000000">
+              <a:alpha val="0"/>
+            </a:srgbClr>
+          </a:solidFill>
+          <a:ln xmlns:a="http://schemas.openxmlformats.org/drawingml/2006/main" w="0">
+            <a:solidFill>
+              <a:srgbClr val="000000">
+                <a:alpha val="0"/>
+              </a:srgbClr>
+            </a:solidFill>
+            <a:prstDash val="solid"/>
+          </a:ln>
+        </p:spPr>
+        <p:txBody>
+          <a:bodyPr xmlns:a="http://schemas.openxmlformats.org/drawingml/2006/main" lIns="0" tIns="0" rIns="0" bIns="0" anchor="t"/>
+          <a:lstStyle xmlns:a="http://schemas.openxmlformats.org/drawingml/2006/main"/>
+          <a:p xmlns:a="http://schemas.openxmlformats.org/drawingml/2006/main">
+            <a:pPr algn="l">
+              <a:defRPr sz="1200" b="1">
+                <a:solidFill>
+                  <a:srgbClr val="F7F3EA"/>
+                </a:solidFill>
+                <a:latin typeface="Aptos Display"/>
+                <a:ea typeface="Aptos Display"/>
+                <a:cs typeface="Aptos Display"/>
+              </a:defRPr>
+            </a:pPr>
+            <a:r>
+              <a:rPr sz="1200" b="1">
+                <a:solidFill>
+                  <a:srgbClr val="F7F3EA"/>
+                </a:solidFill>
+                <a:latin typeface="Aptos Display"/>
+                <a:ea typeface="Aptos Display"/>
+                <a:cs typeface="Aptos Display"/>
+              </a:rPr>
+              <a:t>Hardware</a:t>
+            </a:r>
+          </a:p>
+        </p:txBody>
+      </p:sp>
+      <p:sp>
+        <p:nvSpPr>
+          <p:cNvPr id="19" name="">
+            <a:extLst xmlns:a="http://schemas.openxmlformats.org/drawingml/2006/main">
+              <a:ext uri="{FF2B5EF4-FFF2-40B4-BE49-F238E27FC236}">
+                <a16:creationId xmlns:a16="http://schemas.microsoft.com/office/drawing/2014/main" id="{698E7ED0-37DF-494B-B111-AAA40DB3E193}"/>
+              </a:ext>
+            </a:extLst>
+          </p:cNvPr>
+          <p:cNvSpPr>
+            <a:spLocks xmlns:a="http://schemas.openxmlformats.org/drawingml/2006/main" noGrp="1"/>
+          </p:cNvSpPr>
+          <p:nvPr/>
+        </p:nvSpPr>
+        <p:spPr>
+          <a:xfrm xmlns:a="http://schemas.openxmlformats.org/drawingml/2006/main">
+            <a:off x="2990850" y="3409950"/>
+            <a:ext cx="8191500" cy="495300"/>
+          </a:xfrm>
+          <a:prstGeom xmlns:a="http://schemas.openxmlformats.org/drawingml/2006/main" prst="rect">
+            <a:avLst/>
+          </a:prstGeom>
+          <a:solidFill xmlns:a="http://schemas.openxmlformats.org/drawingml/2006/main">
+            <a:srgbClr val="171D28"/>
+          </a:solidFill>
+          <a:ln xmlns:a="http://schemas.openxmlformats.org/drawingml/2006/main" w="9525">
+            <a:solidFill>
+              <a:srgbClr val="394352"/>
+            </a:solidFill>
+            <a:prstDash val="solid"/>
+          </a:ln>
+        </p:spPr>
+      </p:sp>
+      <p:sp>
+        <p:nvSpPr>
+          <p:cNvPr id="20" name="">
+            <a:extLst xmlns:a="http://schemas.openxmlformats.org/drawingml/2006/main">
+              <a:ext uri="{FF2B5EF4-FFF2-40B4-BE49-F238E27FC236}">
+                <a16:creationId xmlns:a16="http://schemas.microsoft.com/office/drawing/2014/main" id="{9CD7C36A-7FCC-49A4-B312-591F78442B28}"/>
+              </a:ext>
+            </a:extLst>
+          </p:cNvPr>
+          <p:cNvSpPr>
+            <a:spLocks xmlns:a="http://schemas.openxmlformats.org/drawingml/2006/main" noGrp="1"/>
+          </p:cNvSpPr>
+          <p:nvPr/>
+        </p:nvSpPr>
+        <p:spPr>
+          <a:xfrm xmlns:a="http://schemas.openxmlformats.org/drawingml/2006/main">
+            <a:off x="3219450" y="3571875"/>
+            <a:ext cx="7734300" cy="190500"/>
+          </a:xfrm>
+          <a:prstGeom xmlns:a="http://schemas.openxmlformats.org/drawingml/2006/main" prst="rect">
+            <a:avLst/>
+          </a:prstGeom>
+          <a:solidFill xmlns:a="http://schemas.openxmlformats.org/drawingml/2006/main">
+            <a:srgbClr val="000000">
+              <a:alpha val="0"/>
+            </a:srgbClr>
+          </a:solidFill>
+          <a:ln xmlns:a="http://schemas.openxmlformats.org/drawingml/2006/main" w="0">
+            <a:solidFill>
+              <a:srgbClr val="000000">
+                <a:alpha val="0"/>
+              </a:srgbClr>
+            </a:solidFill>
+            <a:prstDash val="solid"/>
+          </a:ln>
+        </p:spPr>
+        <p:txBody>
+          <a:bodyPr xmlns:a="http://schemas.openxmlformats.org/drawingml/2006/main" lIns="0" tIns="0" rIns="0" bIns="0" anchor="t"/>
+          <a:lstStyle xmlns:a="http://schemas.openxmlformats.org/drawingml/2006/main"/>
+          <a:p xmlns:a="http://schemas.openxmlformats.org/drawingml/2006/main">
+            <a:pPr algn="l">
+              <a:defRPr sz="1200" b="0">
+                <a:solidFill>
+                  <a:srgbClr val="AEB7C4"/>
+                </a:solidFill>
+                <a:latin typeface="Aptos"/>
+                <a:ea typeface="Aptos"/>
+                <a:cs typeface="Aptos"/>
+              </a:defRPr>
+            </a:pPr>
+            <a:r>
+              <a:rPr sz="1200" b="0">
+                <a:solidFill>
+                  <a:srgbClr val="AEB7C4"/>
+                </a:solidFill>
+                <a:latin typeface="Aptos"/>
+                <a:ea typeface="Aptos"/>
+                <a:cs typeface="Aptos"/>
+              </a:rPr>
+              <a:t>1 x AMD RX 7900 XTX 24GB with ROCm, if environment setup holds</a:t>
+            </a:r>
+          </a:p>
+        </p:txBody>
+      </p:sp>
+      <p:sp>
+        <p:nvSpPr>
+          <p:cNvPr id="21" name="">
+            <a:extLst xmlns:a="http://schemas.openxmlformats.org/drawingml/2006/main">
+              <a:ext uri="{FF2B5EF4-FFF2-40B4-BE49-F238E27FC236}">
+                <a16:creationId xmlns:a16="http://schemas.microsoft.com/office/drawing/2014/main" id="{29EE97C6-3648-4DEC-9BD2-E3DA50FB9FC8}"/>
+              </a:ext>
+            </a:extLst>
+          </p:cNvPr>
+          <p:cNvSpPr>
+            <a:spLocks xmlns:a="http://schemas.openxmlformats.org/drawingml/2006/main" noGrp="1"/>
+          </p:cNvSpPr>
+          <p:nvPr/>
+        </p:nvSpPr>
+        <p:spPr>
+          <a:xfrm xmlns:a="http://schemas.openxmlformats.org/drawingml/2006/main">
+            <a:off x="990600" y="3962400"/>
+            <a:ext cx="2000250" cy="495300"/>
+          </a:xfrm>
+          <a:prstGeom xmlns:a="http://schemas.openxmlformats.org/drawingml/2006/main" prst="rect">
+            <a:avLst/>
+          </a:prstGeom>
+          <a:solidFill xmlns:a="http://schemas.openxmlformats.org/drawingml/2006/main">
+            <a:srgbClr val="1C2330"/>
+          </a:solidFill>
+          <a:ln xmlns:a="http://schemas.openxmlformats.org/drawingml/2006/main" w="9525">
+            <a:solidFill>
+              <a:srgbClr val="394352"/>
+            </a:solidFill>
+            <a:prstDash val="solid"/>
+          </a:ln>
+        </p:spPr>
+      </p:sp>
+      <p:sp>
+        <p:nvSpPr>
+          <p:cNvPr id="22" name="">
+            <a:extLst xmlns:a="http://schemas.openxmlformats.org/drawingml/2006/main">
+              <a:ext uri="{FF2B5EF4-FFF2-40B4-BE49-F238E27FC236}">
+                <a16:creationId xmlns:a16="http://schemas.microsoft.com/office/drawing/2014/main" id="{2C89B579-A951-4CB0-90A0-C198175B69E7}"/>
+              </a:ext>
+            </a:extLst>
+          </p:cNvPr>
+          <p:cNvSpPr>
+            <a:spLocks xmlns:a="http://schemas.openxmlformats.org/drawingml/2006/main" noGrp="1"/>
+          </p:cNvSpPr>
+          <p:nvPr/>
+        </p:nvSpPr>
+        <p:spPr>
+          <a:xfrm xmlns:a="http://schemas.openxmlformats.org/drawingml/2006/main">
+            <a:off x="990600" y="3962400"/>
+            <a:ext cx="47625" cy="495300"/>
+          </a:xfrm>
+          <a:prstGeom xmlns:a="http://schemas.openxmlformats.org/drawingml/2006/main" prst="rect">
+            <a:avLst/>
+          </a:prstGeom>
+          <a:solidFill xmlns:a="http://schemas.openxmlformats.org/drawingml/2006/main">
+            <a:srgbClr val="B998FF"/>
+          </a:solidFill>
+          <a:ln xmlns:a="http://schemas.openxmlformats.org/drawingml/2006/main" w="0">
+            <a:solidFill>
+              <a:srgbClr val="000000">
+                <a:alpha val="0"/>
+              </a:srgbClr>
+            </a:solidFill>
+            <a:prstDash val="solid"/>
+          </a:ln>
+        </p:spPr>
+      </p:sp>
+      <p:sp>
+        <p:nvSpPr>
+          <p:cNvPr id="23" name="">
+            <a:extLst xmlns:a="http://schemas.openxmlformats.org/drawingml/2006/main">
+              <a:ext uri="{FF2B5EF4-FFF2-40B4-BE49-F238E27FC236}">
+                <a16:creationId xmlns:a16="http://schemas.microsoft.com/office/drawing/2014/main" id="{AA560FB4-3DD8-45C5-AB6B-E6ECB1ACF13F}"/>
+              </a:ext>
+            </a:extLst>
+          </p:cNvPr>
+          <p:cNvSpPr>
+            <a:spLocks xmlns:a="http://schemas.openxmlformats.org/drawingml/2006/main" noGrp="1"/>
+          </p:cNvSpPr>
+          <p:nvPr/>
+        </p:nvSpPr>
+        <p:spPr>
+          <a:xfrm xmlns:a="http://schemas.openxmlformats.org/drawingml/2006/main">
+            <a:off x="1200150" y="4124325"/>
+            <a:ext cx="1600200" cy="190500"/>
+          </a:xfrm>
+          <a:prstGeom xmlns:a="http://schemas.openxmlformats.org/drawingml/2006/main" prst="rect">
+            <a:avLst/>
+          </a:prstGeom>
+          <a:solidFill xmlns:a="http://schemas.openxmlformats.org/drawingml/2006/main">
+            <a:srgbClr val="000000">
+              <a:alpha val="0"/>
+            </a:srgbClr>
+          </a:solidFill>
+          <a:ln xmlns:a="http://schemas.openxmlformats.org/drawingml/2006/main" w="0">
+            <a:solidFill>
+              <a:srgbClr val="000000">
+                <a:alpha val="0"/>
+              </a:srgbClr>
+            </a:solidFill>
+            <a:prstDash val="solid"/>
+          </a:ln>
+        </p:spPr>
+        <p:txBody>
+          <a:bodyPr xmlns:a="http://schemas.openxmlformats.org/drawingml/2006/main" lIns="0" tIns="0" rIns="0" bIns="0" anchor="t"/>
+          <a:lstStyle xmlns:a="http://schemas.openxmlformats.org/drawingml/2006/main"/>
+          <a:p xmlns:a="http://schemas.openxmlformats.org/drawingml/2006/main">
+            <a:pPr algn="l">
+              <a:defRPr sz="1200" b="1">
+                <a:solidFill>
+                  <a:srgbClr val="F7F3EA"/>
+                </a:solidFill>
+                <a:latin typeface="Aptos Display"/>
+                <a:ea typeface="Aptos Display"/>
+                <a:cs typeface="Aptos Display"/>
+              </a:defRPr>
+            </a:pPr>
+            <a:r>
+              <a:rPr sz="1200" b="1">
                 <a:solidFill>
                   <a:srgbClr val="F7F3EA"/>
                 </a:solidFill>
@@ -8851,22 +9036,55 @@
       </p:sp>
       <p:sp>
         <p:nvSpPr>
-          <p:cNvPr id="23" name="">
-            <a:extLst xmlns:a="http://schemas.openxmlformats.org/drawingml/2006/main">
-              <a:ext uri="{FF2B5EF4-FFF2-40B4-BE49-F238E27FC236}">
-                <a16:creationId xmlns:a16="http://schemas.microsoft.com/office/drawing/2014/main" id="{D7A39833-5A42-4A0C-8841-30FC03ED832D}"/>
-              </a:ext>
-            </a:extLst>
-          </p:cNvPr>
-          <p:cNvSpPr>
-            <a:spLocks xmlns:a="http://schemas.openxmlformats.org/drawingml/2006/main" noGrp="1"/>
-          </p:cNvSpPr>
-          <p:nvPr/>
-        </p:nvSpPr>
-        <p:spPr>
-          <a:xfrm xmlns:a="http://schemas.openxmlformats.org/drawingml/2006/main">
-            <a:off x="990600" y="4191000"/>
-            <a:ext cx="2705100" cy="742950"/>
+          <p:cNvPr id="24" name="">
+            <a:extLst xmlns:a="http://schemas.openxmlformats.org/drawingml/2006/main">
+              <a:ext uri="{FF2B5EF4-FFF2-40B4-BE49-F238E27FC236}">
+                <a16:creationId xmlns:a16="http://schemas.microsoft.com/office/drawing/2014/main" id="{B386D711-C6C6-406F-989E-2DC79745A503}"/>
+              </a:ext>
+            </a:extLst>
+          </p:cNvPr>
+          <p:cNvSpPr>
+            <a:spLocks xmlns:a="http://schemas.openxmlformats.org/drawingml/2006/main" noGrp="1"/>
+          </p:cNvSpPr>
+          <p:nvPr/>
+        </p:nvSpPr>
+        <p:spPr>
+          <a:xfrm xmlns:a="http://schemas.openxmlformats.org/drawingml/2006/main">
+            <a:off x="2990850" y="3962400"/>
+            <a:ext cx="8191500" cy="495300"/>
+          </a:xfrm>
+          <a:prstGeom xmlns:a="http://schemas.openxmlformats.org/drawingml/2006/main" prst="rect">
+            <a:avLst/>
+          </a:prstGeom>
+          <a:solidFill xmlns:a="http://schemas.openxmlformats.org/drawingml/2006/main">
+            <a:srgbClr val="141923"/>
+          </a:solidFill>
+          <a:ln xmlns:a="http://schemas.openxmlformats.org/drawingml/2006/main" w="9525">
+            <a:solidFill>
+              <a:srgbClr val="394352"/>
+            </a:solidFill>
+            <a:prstDash val="solid"/>
+          </a:ln>
+        </p:spPr>
+      </p:sp>
+      <p:sp>
+        <p:nvSpPr>
+          <p:cNvPr id="25" name="">
+            <a:extLst xmlns:a="http://schemas.openxmlformats.org/drawingml/2006/main">
+              <a:ext uri="{FF2B5EF4-FFF2-40B4-BE49-F238E27FC236}">
+                <a16:creationId xmlns:a16="http://schemas.microsoft.com/office/drawing/2014/main" id="{1823693E-E815-4AE1-A60D-EE5E9A11A8AB}"/>
+              </a:ext>
+            </a:extLst>
+          </p:cNvPr>
+          <p:cNvSpPr>
+            <a:spLocks xmlns:a="http://schemas.openxmlformats.org/drawingml/2006/main" noGrp="1"/>
+          </p:cNvSpPr>
+          <p:nvPr/>
+        </p:nvSpPr>
+        <p:spPr>
+          <a:xfrm xmlns:a="http://schemas.openxmlformats.org/drawingml/2006/main">
+            <a:off x="3219450" y="4124325"/>
+            <a:ext cx="7734300" cy="190500"/>
           </a:xfrm>
           <a:prstGeom xmlns:a="http://schemas.openxmlformats.org/drawingml/2006/main" prst="rect">
             <a:avLst/>
@@ -8890,7 +9108,7 @@
           <a:lstStyle xmlns:a="http://schemas.openxmlformats.org/drawingml/2006/main"/>
           <a:p xmlns:a="http://schemas.openxmlformats.org/drawingml/2006/main">
             <a:pPr algn="l">
-              <a:defRPr sz="1125" b="0">
+              <a:defRPr sz="1200" b="0">
                 <a:solidFill>
                   <a:srgbClr val="AEB7C4"/>
                 </a:solidFill>
@@ -8900,7 +9118,7 @@
               </a:defRPr>
             </a:pPr>
             <a:r>
-              <a:rPr sz="1125" b="0">
+              <a:rPr sz="1200" b="0">
                 <a:solidFill>
                   <a:srgbClr val="AEB7C4"/>
                 </a:solidFill>
@@ -8908,29 +9126,29 @@
                 <a:ea typeface="Aptos"/>
                 <a:cs typeface="Aptos"/>
               </a:rPr>
-              <a:t>vanilla vLLM + Llama-3-8B-Instruct on shared-prefix synthetic traces</a:t>
+              <a:t>vanilla vLLM first; ask whether SGLang comparison is required</a:t>
             </a:r>
           </a:p>
         </p:txBody>
       </p:sp>
       <p:sp>
         <p:nvSpPr>
-          <p:cNvPr id="24" name="">
-            <a:extLst xmlns:a="http://schemas.openxmlformats.org/drawingml/2006/main">
-              <a:ext uri="{FF2B5EF4-FFF2-40B4-BE49-F238E27FC236}">
-                <a16:creationId xmlns:a16="http://schemas.microsoft.com/office/drawing/2014/main" id="{C016D9BC-8D94-4606-8EE6-9EE1CFAC5D27}"/>
-              </a:ext>
-            </a:extLst>
-          </p:cNvPr>
-          <p:cNvSpPr>
-            <a:spLocks xmlns:a="http://schemas.openxmlformats.org/drawingml/2006/main" noGrp="1"/>
-          </p:cNvSpPr>
-          <p:nvPr/>
-        </p:nvSpPr>
-        <p:spPr>
-          <a:xfrm xmlns:a="http://schemas.openxmlformats.org/drawingml/2006/main">
-            <a:off x="4572000" y="3714750"/>
-            <a:ext cx="3048000" cy="1333500"/>
+          <p:cNvPr id="26" name="">
+            <a:extLst xmlns:a="http://schemas.openxmlformats.org/drawingml/2006/main">
+              <a:ext uri="{FF2B5EF4-FFF2-40B4-BE49-F238E27FC236}">
+                <a16:creationId xmlns:a16="http://schemas.microsoft.com/office/drawing/2014/main" id="{B3971C44-22CF-40AF-89A4-8FC673563FB5}"/>
+              </a:ext>
+            </a:extLst>
+          </p:cNvPr>
+          <p:cNvSpPr>
+            <a:spLocks xmlns:a="http://schemas.openxmlformats.org/drawingml/2006/main" noGrp="1"/>
+          </p:cNvSpPr>
+          <p:nvPr/>
+        </p:nvSpPr>
+        <p:spPr>
+          <a:xfrm xmlns:a="http://schemas.openxmlformats.org/drawingml/2006/main">
+            <a:off x="990600" y="4514850"/>
+            <a:ext cx="2000250" cy="495300"/>
           </a:xfrm>
           <a:prstGeom xmlns:a="http://schemas.openxmlformats.org/drawingml/2006/main" prst="rect">
             <a:avLst/>
@@ -8948,22 +9166,22 @@
       </p:sp>
       <p:sp>
         <p:nvSpPr>
-          <p:cNvPr id="25" name="">
-            <a:extLst xmlns:a="http://schemas.openxmlformats.org/drawingml/2006/main">
-              <a:ext uri="{FF2B5EF4-FFF2-40B4-BE49-F238E27FC236}">
-                <a16:creationId xmlns:a16="http://schemas.microsoft.com/office/drawing/2014/main" id="{ECF26EC4-D169-40C9-86B3-94AC7F6F6241}"/>
-              </a:ext>
-            </a:extLst>
-          </p:cNvPr>
-          <p:cNvSpPr>
-            <a:spLocks xmlns:a="http://schemas.openxmlformats.org/drawingml/2006/main" noGrp="1"/>
-          </p:cNvSpPr>
-          <p:nvPr/>
-        </p:nvSpPr>
-        <p:spPr>
-          <a:xfrm xmlns:a="http://schemas.openxmlformats.org/drawingml/2006/main">
-            <a:off x="4572000" y="3714750"/>
-            <a:ext cx="47625" cy="1333500"/>
+          <p:cNvPr id="27" name="">
+            <a:extLst xmlns:a="http://schemas.openxmlformats.org/drawingml/2006/main">
+              <a:ext uri="{FF2B5EF4-FFF2-40B4-BE49-F238E27FC236}">
+                <a16:creationId xmlns:a16="http://schemas.microsoft.com/office/drawing/2014/main" id="{DEE0E1B5-6744-4CDF-A7D5-99D2D32B8243}"/>
+              </a:ext>
+            </a:extLst>
+          </p:cNvPr>
+          <p:cNvSpPr>
+            <a:spLocks xmlns:a="http://schemas.openxmlformats.org/drawingml/2006/main" noGrp="1"/>
+          </p:cNvSpPr>
+          <p:nvPr/>
+        </p:nvSpPr>
+        <p:spPr>
+          <a:xfrm xmlns:a="http://schemas.openxmlformats.org/drawingml/2006/main">
+            <a:off x="990600" y="4514850"/>
+            <a:ext cx="47625" cy="495300"/>
           </a:xfrm>
           <a:prstGeom xmlns:a="http://schemas.openxmlformats.org/drawingml/2006/main" prst="rect">
             <a:avLst/>
@@ -8983,22 +9201,22 @@
       </p:sp>
       <p:sp>
         <p:nvSpPr>
-          <p:cNvPr id="26" name="">
-            <a:extLst xmlns:a="http://schemas.openxmlformats.org/drawingml/2006/main">
-              <a:ext uri="{FF2B5EF4-FFF2-40B4-BE49-F238E27FC236}">
-                <a16:creationId xmlns:a16="http://schemas.microsoft.com/office/drawing/2014/main" id="{CD7F9291-2CE2-4626-8471-3AB1ED3F6269}"/>
-              </a:ext>
-            </a:extLst>
-          </p:cNvPr>
-          <p:cNvSpPr>
-            <a:spLocks xmlns:a="http://schemas.openxmlformats.org/drawingml/2006/main" noGrp="1"/>
-          </p:cNvSpPr>
-          <p:nvPr/>
-        </p:nvSpPr>
-        <p:spPr>
-          <a:xfrm xmlns:a="http://schemas.openxmlformats.org/drawingml/2006/main">
-            <a:off x="4743450" y="3867150"/>
-            <a:ext cx="2705100" cy="247650"/>
+          <p:cNvPr id="28" name="">
+            <a:extLst xmlns:a="http://schemas.openxmlformats.org/drawingml/2006/main">
+              <a:ext uri="{FF2B5EF4-FFF2-40B4-BE49-F238E27FC236}">
+                <a16:creationId xmlns:a16="http://schemas.microsoft.com/office/drawing/2014/main" id="{B8213E7E-6580-4BA4-8DD9-BC62F0E63407}"/>
+              </a:ext>
+            </a:extLst>
+          </p:cNvPr>
+          <p:cNvSpPr>
+            <a:spLocks xmlns:a="http://schemas.openxmlformats.org/drawingml/2006/main" noGrp="1"/>
+          </p:cNvSpPr>
+          <p:nvPr/>
+        </p:nvSpPr>
+        <p:spPr>
+          <a:xfrm xmlns:a="http://schemas.openxmlformats.org/drawingml/2006/main">
+            <a:off x="1200150" y="4676775"/>
+            <a:ext cx="1600200" cy="190500"/>
           </a:xfrm>
           <a:prstGeom xmlns:a="http://schemas.openxmlformats.org/drawingml/2006/main" prst="rect">
             <a:avLst/>
@@ -9022,7 +9240,7 @@
           <a:lstStyle xmlns:a="http://schemas.openxmlformats.org/drawingml/2006/main"/>
           <a:p xmlns:a="http://schemas.openxmlformats.org/drawingml/2006/main">
             <a:pPr algn="l">
-              <a:defRPr sz="1425" b="1">
+              <a:defRPr sz="1200" b="1">
                 <a:solidFill>
                   <a:srgbClr val="F7F3EA"/>
                 </a:solidFill>
@@ -9032,7 +9250,7 @@
               </a:defRPr>
             </a:pPr>
             <a:r>
-              <a:rPr sz="1425" b="1">
+              <a:rPr sz="1200" b="1">
                 <a:solidFill>
                   <a:srgbClr val="F7F3EA"/>
                 </a:solidFill>
@@ -9047,22 +9265,55 @@
       </p:sp>
       <p:sp>
         <p:nvSpPr>
-          <p:cNvPr id="27" name="">
-            <a:extLst xmlns:a="http://schemas.openxmlformats.org/drawingml/2006/main">
-              <a:ext uri="{FF2B5EF4-FFF2-40B4-BE49-F238E27FC236}">
-                <a16:creationId xmlns:a16="http://schemas.microsoft.com/office/drawing/2014/main" id="{B8D42AD0-52A9-4641-B63C-0058E792B743}"/>
-              </a:ext>
-            </a:extLst>
-          </p:cNvPr>
-          <p:cNvSpPr>
-            <a:spLocks xmlns:a="http://schemas.openxmlformats.org/drawingml/2006/main" noGrp="1"/>
-          </p:cNvSpPr>
-          <p:nvPr/>
-        </p:nvSpPr>
-        <p:spPr>
-          <a:xfrm xmlns:a="http://schemas.openxmlformats.org/drawingml/2006/main">
-            <a:off x="4743450" y="4191000"/>
-            <a:ext cx="2705100" cy="742950"/>
+          <p:cNvPr id="29" name="">
+            <a:extLst xmlns:a="http://schemas.openxmlformats.org/drawingml/2006/main">
+              <a:ext uri="{FF2B5EF4-FFF2-40B4-BE49-F238E27FC236}">
+                <a16:creationId xmlns:a16="http://schemas.microsoft.com/office/drawing/2014/main" id="{530C870F-8B3D-4B1A-A598-418615F3E7E6}"/>
+              </a:ext>
+            </a:extLst>
+          </p:cNvPr>
+          <p:cNvSpPr>
+            <a:spLocks xmlns:a="http://schemas.openxmlformats.org/drawingml/2006/main" noGrp="1"/>
+          </p:cNvSpPr>
+          <p:nvPr/>
+        </p:nvSpPr>
+        <p:spPr>
+          <a:xfrm xmlns:a="http://schemas.openxmlformats.org/drawingml/2006/main">
+            <a:off x="2990850" y="4514850"/>
+            <a:ext cx="8191500" cy="495300"/>
+          </a:xfrm>
+          <a:prstGeom xmlns:a="http://schemas.openxmlformats.org/drawingml/2006/main" prst="rect">
+            <a:avLst/>
+          </a:prstGeom>
+          <a:solidFill xmlns:a="http://schemas.openxmlformats.org/drawingml/2006/main">
+            <a:srgbClr val="171D28"/>
+          </a:solidFill>
+          <a:ln xmlns:a="http://schemas.openxmlformats.org/drawingml/2006/main" w="9525">
+            <a:solidFill>
+              <a:srgbClr val="394352"/>
+            </a:solidFill>
+            <a:prstDash val="solid"/>
+          </a:ln>
+        </p:spPr>
+      </p:sp>
+      <p:sp>
+        <p:nvSpPr>
+          <p:cNvPr id="30" name="">
+            <a:extLst xmlns:a="http://schemas.openxmlformats.org/drawingml/2006/main">
+              <a:ext uri="{FF2B5EF4-FFF2-40B4-BE49-F238E27FC236}">
+                <a16:creationId xmlns:a16="http://schemas.microsoft.com/office/drawing/2014/main" id="{D0D8295E-0A31-45F6-BD5D-A37544691B38}"/>
+              </a:ext>
+            </a:extLst>
+          </p:cNvPr>
+          <p:cNvSpPr>
+            <a:spLocks xmlns:a="http://schemas.openxmlformats.org/drawingml/2006/main" noGrp="1"/>
+          </p:cNvSpPr>
+          <p:nvPr/>
+        </p:nvSpPr>
+        <p:spPr>
+          <a:xfrm xmlns:a="http://schemas.openxmlformats.org/drawingml/2006/main">
+            <a:off x="3219450" y="4676775"/>
+            <a:ext cx="7734300" cy="190500"/>
           </a:xfrm>
           <a:prstGeom xmlns:a="http://schemas.openxmlformats.org/drawingml/2006/main" prst="rect">
             <a:avLst/>
@@ -9086,7 +9337,7 @@
           <a:lstStyle xmlns:a="http://schemas.openxmlformats.org/drawingml/2006/main"/>
           <a:p xmlns:a="http://schemas.openxmlformats.org/drawingml/2006/main">
             <a:pPr algn="l">
-              <a:defRPr sz="1125" b="0">
+              <a:defRPr sz="1200" b="0">
                 <a:solidFill>
                   <a:srgbClr val="AEB7C4"/>
                 </a:solidFill>
@@ -9096,7 +9347,7 @@
               </a:defRPr>
             </a:pPr>
             <a:r>
-              <a:rPr sz="1125" b="0">
+              <a:rPr sz="1200" b="0">
                 <a:solidFill>
                   <a:srgbClr val="AEB7C4"/>
                 </a:solidFill>
@@ -9104,29 +9355,29 @@
                 <a:ea typeface="Aptos"/>
                 <a:cs typeface="Aptos"/>
               </a:rPr>
-              <a:t>group requests by prefix signature and vary cache size, eviction, and prefix threshold</a:t>
+              <a:t>prefix-signature grouping + simple cache-policy ablations</a:t>
             </a:r>
           </a:p>
         </p:txBody>
       </p:sp>
       <p:sp>
         <p:nvSpPr>
-          <p:cNvPr id="28" name="">
-            <a:extLst xmlns:a="http://schemas.openxmlformats.org/drawingml/2006/main">
-              <a:ext uri="{FF2B5EF4-FFF2-40B4-BE49-F238E27FC236}">
-                <a16:creationId xmlns:a16="http://schemas.microsoft.com/office/drawing/2014/main" id="{AB01457A-244C-4151-8AD9-5DFCA6B1AC13}"/>
-              </a:ext>
-            </a:extLst>
-          </p:cNvPr>
-          <p:cNvSpPr>
-            <a:spLocks xmlns:a="http://schemas.openxmlformats.org/drawingml/2006/main" noGrp="1"/>
-          </p:cNvSpPr>
-          <p:nvPr/>
-        </p:nvSpPr>
-        <p:spPr>
-          <a:xfrm xmlns:a="http://schemas.openxmlformats.org/drawingml/2006/main">
-            <a:off x="8324850" y="3714750"/>
-            <a:ext cx="3048000" cy="1333500"/>
+          <p:cNvPr id="31" name="">
+            <a:extLst xmlns:a="http://schemas.openxmlformats.org/drawingml/2006/main">
+              <a:ext uri="{FF2B5EF4-FFF2-40B4-BE49-F238E27FC236}">
+                <a16:creationId xmlns:a16="http://schemas.microsoft.com/office/drawing/2014/main" id="{4A0259F0-2B15-4AF7-9714-58CA3EC5C422}"/>
+              </a:ext>
+            </a:extLst>
+          </p:cNvPr>
+          <p:cNvSpPr>
+            <a:spLocks xmlns:a="http://schemas.openxmlformats.org/drawingml/2006/main" noGrp="1"/>
+          </p:cNvSpPr>
+          <p:nvPr/>
+        </p:nvSpPr>
+        <p:spPr>
+          <a:xfrm xmlns:a="http://schemas.openxmlformats.org/drawingml/2006/main">
+            <a:off x="990600" y="5067300"/>
+            <a:ext cx="2000250" cy="495300"/>
           </a:xfrm>
           <a:prstGeom xmlns:a="http://schemas.openxmlformats.org/drawingml/2006/main" prst="rect">
             <a:avLst/>
@@ -9144,57 +9395,57 @@
       </p:sp>
       <p:sp>
         <p:nvSpPr>
-          <p:cNvPr id="29" name="">
-            <a:extLst xmlns:a="http://schemas.openxmlformats.org/drawingml/2006/main">
-              <a:ext uri="{FF2B5EF4-FFF2-40B4-BE49-F238E27FC236}">
-                <a16:creationId xmlns:a16="http://schemas.microsoft.com/office/drawing/2014/main" id="{5C3A06B1-3DBB-46C1-86DF-22E74753ED59}"/>
-              </a:ext>
-            </a:extLst>
-          </p:cNvPr>
-          <p:cNvSpPr>
-            <a:spLocks xmlns:a="http://schemas.openxmlformats.org/drawingml/2006/main" noGrp="1"/>
-          </p:cNvSpPr>
-          <p:nvPr/>
-        </p:nvSpPr>
-        <p:spPr>
-          <a:xfrm xmlns:a="http://schemas.openxmlformats.org/drawingml/2006/main">
-            <a:off x="8324850" y="3714750"/>
-            <a:ext cx="47625" cy="1333500"/>
-          </a:xfrm>
-          <a:prstGeom xmlns:a="http://schemas.openxmlformats.org/drawingml/2006/main" prst="rect">
-            <a:avLst/>
-          </a:prstGeom>
-          <a:solidFill xmlns:a="http://schemas.openxmlformats.org/drawingml/2006/main">
-            <a:srgbClr val="B998FF"/>
-          </a:solidFill>
-          <a:ln xmlns:a="http://schemas.openxmlformats.org/drawingml/2006/main" w="0">
-            <a:solidFill>
-              <a:srgbClr val="000000">
-                <a:alpha val="0"/>
-              </a:srgbClr>
-            </a:solidFill>
-            <a:prstDash val="solid"/>
-          </a:ln>
-        </p:spPr>
-      </p:sp>
-      <p:sp>
-        <p:nvSpPr>
-          <p:cNvPr id="30" name="">
-            <a:extLst xmlns:a="http://schemas.openxmlformats.org/drawingml/2006/main">
-              <a:ext uri="{FF2B5EF4-FFF2-40B4-BE49-F238E27FC236}">
-                <a16:creationId xmlns:a16="http://schemas.microsoft.com/office/drawing/2014/main" id="{FA816769-CC5E-4415-9F80-0F511BC9A57E}"/>
-              </a:ext>
-            </a:extLst>
-          </p:cNvPr>
-          <p:cNvSpPr>
-            <a:spLocks xmlns:a="http://schemas.openxmlformats.org/drawingml/2006/main" noGrp="1"/>
-          </p:cNvSpPr>
-          <p:nvPr/>
-        </p:nvSpPr>
-        <p:spPr>
-          <a:xfrm xmlns:a="http://schemas.openxmlformats.org/drawingml/2006/main">
-            <a:off x="8496300" y="3867150"/>
-            <a:ext cx="2705100" cy="247650"/>
+          <p:cNvPr id="32" name="">
+            <a:extLst xmlns:a="http://schemas.openxmlformats.org/drawingml/2006/main">
+              <a:ext uri="{FF2B5EF4-FFF2-40B4-BE49-F238E27FC236}">
+                <a16:creationId xmlns:a16="http://schemas.microsoft.com/office/drawing/2014/main" id="{5BE2C065-C7C1-4765-9909-A765FB5B891F}"/>
+              </a:ext>
+            </a:extLst>
+          </p:cNvPr>
+          <p:cNvSpPr>
+            <a:spLocks xmlns:a="http://schemas.openxmlformats.org/drawingml/2006/main" noGrp="1"/>
+          </p:cNvSpPr>
+          <p:nvPr/>
+        </p:nvSpPr>
+        <p:spPr>
+          <a:xfrm xmlns:a="http://schemas.openxmlformats.org/drawingml/2006/main">
+            <a:off x="990600" y="5067300"/>
+            <a:ext cx="47625" cy="495300"/>
+          </a:xfrm>
+          <a:prstGeom xmlns:a="http://schemas.openxmlformats.org/drawingml/2006/main" prst="rect">
+            <a:avLst/>
+          </a:prstGeom>
+          <a:solidFill xmlns:a="http://schemas.openxmlformats.org/drawingml/2006/main">
+            <a:srgbClr val="72A7FF"/>
+          </a:solidFill>
+          <a:ln xmlns:a="http://schemas.openxmlformats.org/drawingml/2006/main" w="0">
+            <a:solidFill>
+              <a:srgbClr val="000000">
+                <a:alpha val="0"/>
+              </a:srgbClr>
+            </a:solidFill>
+            <a:prstDash val="solid"/>
+          </a:ln>
+        </p:spPr>
+      </p:sp>
+      <p:sp>
+        <p:nvSpPr>
+          <p:cNvPr id="33" name="">
+            <a:extLst xmlns:a="http://schemas.openxmlformats.org/drawingml/2006/main">
+              <a:ext uri="{FF2B5EF4-FFF2-40B4-BE49-F238E27FC236}">
+                <a16:creationId xmlns:a16="http://schemas.microsoft.com/office/drawing/2014/main" id="{216C1708-D392-429E-A2FB-7D67161E16CA}"/>
+              </a:ext>
+            </a:extLst>
+          </p:cNvPr>
+          <p:cNvSpPr>
+            <a:spLocks xmlns:a="http://schemas.openxmlformats.org/drawingml/2006/main" noGrp="1"/>
+          </p:cNvSpPr>
+          <p:nvPr/>
+        </p:nvSpPr>
+        <p:spPr>
+          <a:xfrm xmlns:a="http://schemas.openxmlformats.org/drawingml/2006/main">
+            <a:off x="1200150" y="5229225"/>
+            <a:ext cx="1600200" cy="190500"/>
           </a:xfrm>
           <a:prstGeom xmlns:a="http://schemas.openxmlformats.org/drawingml/2006/main" prst="rect">
             <a:avLst/>
@@ -9218,7 +9469,7 @@
           <a:lstStyle xmlns:a="http://schemas.openxmlformats.org/drawingml/2006/main"/>
           <a:p xmlns:a="http://schemas.openxmlformats.org/drawingml/2006/main">
             <a:pPr algn="l">
-              <a:defRPr sz="1425" b="1">
+              <a:defRPr sz="1200" b="1">
                 <a:solidFill>
                   <a:srgbClr val="F7F3EA"/>
                 </a:solidFill>
@@ -9228,7 +9479,7 @@
               </a:defRPr>
             </a:pPr>
             <a:r>
-              <a:rPr sz="1425" b="1">
+              <a:rPr sz="1200" b="1">
                 <a:solidFill>
                   <a:srgbClr val="F7F3EA"/>
                 </a:solidFill>
@@ -9236,29 +9487,62 @@
                 <a:ea typeface="Aptos Display"/>
                 <a:cs typeface="Aptos Display"/>
               </a:rPr>
-              <a:t>Evidence</a:t>
+              <a:t>Metrics</a:t>
             </a:r>
           </a:p>
         </p:txBody>
       </p:sp>
       <p:sp>
         <p:nvSpPr>
-          <p:cNvPr id="31" name="">
-            <a:extLst xmlns:a="http://schemas.openxmlformats.org/drawingml/2006/main">
-              <a:ext uri="{FF2B5EF4-FFF2-40B4-BE49-F238E27FC236}">
-                <a16:creationId xmlns:a16="http://schemas.microsoft.com/office/drawing/2014/main" id="{E3F21359-EEF8-4F65-8AC8-5928F33EA0CB}"/>
-              </a:ext>
-            </a:extLst>
-          </p:cNvPr>
-          <p:cNvSpPr>
-            <a:spLocks xmlns:a="http://schemas.openxmlformats.org/drawingml/2006/main" noGrp="1"/>
-          </p:cNvSpPr>
-          <p:nvPr/>
-        </p:nvSpPr>
-        <p:spPr>
-          <a:xfrm xmlns:a="http://schemas.openxmlformats.org/drawingml/2006/main">
-            <a:off x="8496300" y="4191000"/>
-            <a:ext cx="2705100" cy="742950"/>
+          <p:cNvPr id="34" name="">
+            <a:extLst xmlns:a="http://schemas.openxmlformats.org/drawingml/2006/main">
+              <a:ext uri="{FF2B5EF4-FFF2-40B4-BE49-F238E27FC236}">
+                <a16:creationId xmlns:a16="http://schemas.microsoft.com/office/drawing/2014/main" id="{C321E2B9-82F6-47D8-9460-E92DDF4E9395}"/>
+              </a:ext>
+            </a:extLst>
+          </p:cNvPr>
+          <p:cNvSpPr>
+            <a:spLocks xmlns:a="http://schemas.openxmlformats.org/drawingml/2006/main" noGrp="1"/>
+          </p:cNvSpPr>
+          <p:nvPr/>
+        </p:nvSpPr>
+        <p:spPr>
+          <a:xfrm xmlns:a="http://schemas.openxmlformats.org/drawingml/2006/main">
+            <a:off x="2990850" y="5067300"/>
+            <a:ext cx="8191500" cy="495300"/>
+          </a:xfrm>
+          <a:prstGeom xmlns:a="http://schemas.openxmlformats.org/drawingml/2006/main" prst="rect">
+            <a:avLst/>
+          </a:prstGeom>
+          <a:solidFill xmlns:a="http://schemas.openxmlformats.org/drawingml/2006/main">
+            <a:srgbClr val="141923"/>
+          </a:solidFill>
+          <a:ln xmlns:a="http://schemas.openxmlformats.org/drawingml/2006/main" w="9525">
+            <a:solidFill>
+              <a:srgbClr val="394352"/>
+            </a:solidFill>
+            <a:prstDash val="solid"/>
+          </a:ln>
+        </p:spPr>
+      </p:sp>
+      <p:sp>
+        <p:nvSpPr>
+          <p:cNvPr id="35" name="">
+            <a:extLst xmlns:a="http://schemas.openxmlformats.org/drawingml/2006/main">
+              <a:ext uri="{FF2B5EF4-FFF2-40B4-BE49-F238E27FC236}">
+                <a16:creationId xmlns:a16="http://schemas.microsoft.com/office/drawing/2014/main" id="{335729FE-6596-4B1A-92C5-640C4CD3D1C8}"/>
+              </a:ext>
+            </a:extLst>
+          </p:cNvPr>
+          <p:cNvSpPr>
+            <a:spLocks xmlns:a="http://schemas.openxmlformats.org/drawingml/2006/main" noGrp="1"/>
+          </p:cNvSpPr>
+          <p:nvPr/>
+        </p:nvSpPr>
+        <p:spPr>
+          <a:xfrm xmlns:a="http://schemas.openxmlformats.org/drawingml/2006/main">
+            <a:off x="3219450" y="5229225"/>
+            <a:ext cx="7734300" cy="190500"/>
           </a:xfrm>
           <a:prstGeom xmlns:a="http://schemas.openxmlformats.org/drawingml/2006/main" prst="rect">
             <a:avLst/>
@@ -9282,7 +9566,7 @@
           <a:lstStyle xmlns:a="http://schemas.openxmlformats.org/drawingml/2006/main"/>
           <a:p xmlns:a="http://schemas.openxmlformats.org/drawingml/2006/main">
             <a:pPr algn="l">
-              <a:defRPr sz="1125" b="0">
+              <a:defRPr sz="1200" b="0">
                 <a:solidFill>
                   <a:srgbClr val="AEB7C4"/>
                 </a:solidFill>
@@ -9292,7 +9576,7 @@
               </a:defRPr>
             </a:pPr>
             <a:r>
-              <a:rPr sz="1125" b="0">
+              <a:rPr sz="1200" b="0">
                 <a:solidFill>
                   <a:srgbClr val="AEB7C4"/>
                 </a:solidFill>
@@ -9300,29 +9584,29 @@
                 <a:ea typeface="Aptos"/>
                 <a:cs typeface="Aptos"/>
               </a:rPr>
-              <a:t>TTFT, TPS, p50/p95/p99 latency, GPU memory, cache hit rate</a:t>
+              <a:t>TTFT, p95 latency, throughput, GPU memory, cache hit rate</a:t>
             </a:r>
           </a:p>
         </p:txBody>
       </p:sp>
       <p:sp>
         <p:nvSpPr>
-          <p:cNvPr id="32" name="">
-            <a:extLst xmlns:a="http://schemas.openxmlformats.org/drawingml/2006/main">
-              <a:ext uri="{FF2B5EF4-FFF2-40B4-BE49-F238E27FC236}">
-                <a16:creationId xmlns:a16="http://schemas.microsoft.com/office/drawing/2014/main" id="{06F7EE82-2E58-42D7-8BE1-7928A231466B}"/>
-              </a:ext>
-            </a:extLst>
-          </p:cNvPr>
-          <p:cNvSpPr>
-            <a:spLocks xmlns:a="http://schemas.openxmlformats.org/drawingml/2006/main" noGrp="1"/>
-          </p:cNvSpPr>
-          <p:nvPr/>
-        </p:nvSpPr>
-        <p:spPr>
-          <a:xfrm xmlns:a="http://schemas.openxmlformats.org/drawingml/2006/main">
-            <a:off x="876300" y="5572125"/>
-            <a:ext cx="9906000" cy="323850"/>
+          <p:cNvPr id="36" name="">
+            <a:extLst xmlns:a="http://schemas.openxmlformats.org/drawingml/2006/main">
+              <a:ext uri="{FF2B5EF4-FFF2-40B4-BE49-F238E27FC236}">
+                <a16:creationId xmlns:a16="http://schemas.microsoft.com/office/drawing/2014/main" id="{4C4C2C7C-72AE-4838-8AEE-0418C4DF2E76}"/>
+              </a:ext>
+            </a:extLst>
+          </p:cNvPr>
+          <p:cNvSpPr>
+            <a:spLocks xmlns:a="http://schemas.openxmlformats.org/drawingml/2006/main" noGrp="1"/>
+          </p:cNvSpPr>
+          <p:nvPr/>
+        </p:nvSpPr>
+        <p:spPr>
+          <a:xfrm xmlns:a="http://schemas.openxmlformats.org/drawingml/2006/main">
+            <a:off x="1009650" y="5886450"/>
+            <a:ext cx="9810750" cy="323850"/>
           </a:xfrm>
           <a:prstGeom xmlns:a="http://schemas.openxmlformats.org/drawingml/2006/main" prst="rect">
             <a:avLst/>
@@ -9364,17 +9648,17 @@
                 <a:ea typeface="Aptos"/>
                 <a:cs typeface="Aptos"/>
               </a:rPr>
-              <a:t>This keeps us aligned with the OS/systems track while avoiding a risky low-level kernel implementation.</a:t>
+              <a:t>Ask today: should our comparison be vanilla vLLM only, or also SGLang because it already performs prefix reuse?</a:t>
             </a:r>
           </a:p>
         </p:txBody>
       </p:sp>
       <p:sp>
         <p:nvSpPr>
-          <p:cNvPr id="33" name="">
-            <a:extLst xmlns:a="http://schemas.openxmlformats.org/drawingml/2006/main">
-              <a:ext uri="{FF2B5EF4-FFF2-40B4-BE49-F238E27FC236}">
-                <a16:creationId xmlns:a16="http://schemas.microsoft.com/office/drawing/2014/main" id="{F5818180-119C-4E9D-A328-38943F2FB299}"/>
+          <p:cNvPr id="37" name="">
+            <a:extLst xmlns:a="http://schemas.openxmlformats.org/drawingml/2006/main">
+              <a:ext uri="{FF2B5EF4-FFF2-40B4-BE49-F238E27FC236}">
+                <a16:creationId xmlns:a16="http://schemas.microsoft.com/office/drawing/2014/main" id="{3FF9BBBF-81A6-43C2-80EC-A89AAE898A21}"/>
               </a:ext>
             </a:extLst>
           </p:cNvPr>
@@ -9436,7 +9720,7 @@
     </p:spTree>
     <p:extLst>
       <p:ext uri="{BB962C8B-B14F-4D97-AF65-F5344CB8AC3E}">
-        <p14:creationId xmlns:p14="http://schemas.microsoft.com/office/powerpoint/2010/main" val="509321330"/>
+        <p14:creationId xmlns:p14="http://schemas.microsoft.com/office/powerpoint/2010/main" val="1701652498"/>
       </p:ext>
     </p:extLst>
   </p:cSld>
@@ -9460,7 +9744,7 @@
           <p:cNvPr id="1" name="">
             <a:extLst xmlns:a="http://schemas.openxmlformats.org/drawingml/2006/main">
               <a:ext uri="{FF2B5EF4-FFF2-40B4-BE49-F238E27FC236}">
-                <a16:creationId xmlns:a16="http://schemas.microsoft.com/office/drawing/2014/main" id="{368E61BF-405D-4EB8-A7AB-F4594EA5966F}"/>
+                <a16:creationId xmlns:a16="http://schemas.microsoft.com/office/drawing/2014/main" id="{6134697E-B425-438B-94A0-0AB6CDEDE2D3}"/>
               </a:ext>
             </a:extLst>
           </p:cNvPr>
@@ -9495,7 +9779,7 @@
           <p:cNvPr id="2" name="">
             <a:extLst xmlns:a="http://schemas.openxmlformats.org/drawingml/2006/main">
               <a:ext uri="{FF2B5EF4-FFF2-40B4-BE49-F238E27FC236}">
-                <a16:creationId xmlns:a16="http://schemas.microsoft.com/office/drawing/2014/main" id="{C628A6F6-8810-4EF9-8F57-3C105E070EA4}"/>
+                <a16:creationId xmlns:a16="http://schemas.microsoft.com/office/drawing/2014/main" id="{3B99A76A-B906-4214-AE91-6ED0A134DBDF}"/>
               </a:ext>
             </a:extLst>
           </p:cNvPr>
@@ -9559,7 +9843,7 @@
           <p:cNvPr id="3" name="">
             <a:extLst xmlns:a="http://schemas.openxmlformats.org/drawingml/2006/main">
               <a:ext uri="{FF2B5EF4-FFF2-40B4-BE49-F238E27FC236}">
-                <a16:creationId xmlns:a16="http://schemas.microsoft.com/office/drawing/2014/main" id="{B5069162-8C87-4648-B6DB-4A488C7B6DED}"/>
+                <a16:creationId xmlns:a16="http://schemas.microsoft.com/office/drawing/2014/main" id="{A845CD98-6CD2-4CE5-B308-74A0D82AC802}"/>
               </a:ext>
             </a:extLst>
           </p:cNvPr>
@@ -9594,7 +9878,7 @@
           <p:cNvPr id="4" name="">
             <a:extLst xmlns:a="http://schemas.openxmlformats.org/drawingml/2006/main">
               <a:ext uri="{FF2B5EF4-FFF2-40B4-BE49-F238E27FC236}">
-                <a16:creationId xmlns:a16="http://schemas.microsoft.com/office/drawing/2014/main" id="{53C7C027-DD84-4795-8DD7-110EF82E015B}"/>
+                <a16:creationId xmlns:a16="http://schemas.microsoft.com/office/drawing/2014/main" id="{A8CAFB4D-9CF2-4C7E-9356-5C84EAAA9159}"/>
               </a:ext>
             </a:extLst>
           </p:cNvPr>
@@ -9658,7 +9942,7 @@
           <p:cNvPr id="5" name="">
             <a:extLst xmlns:a="http://schemas.openxmlformats.org/drawingml/2006/main">
               <a:ext uri="{FF2B5EF4-FFF2-40B4-BE49-F238E27FC236}">
-                <a16:creationId xmlns:a16="http://schemas.microsoft.com/office/drawing/2014/main" id="{CBAB2696-ABB5-49F4-A9E5-4DCDF960EA0A}"/>
+                <a16:creationId xmlns:a16="http://schemas.microsoft.com/office/drawing/2014/main" id="{34094E5F-F66C-43C7-B42F-44F050D668AF}"/>
               </a:ext>
             </a:extLst>
           </p:cNvPr>
@@ -9722,7 +10006,7 @@
           <p:cNvPr id="6" name="">
             <a:extLst xmlns:a="http://schemas.openxmlformats.org/drawingml/2006/main">
               <a:ext uri="{FF2B5EF4-FFF2-40B4-BE49-F238E27FC236}">
-                <a16:creationId xmlns:a16="http://schemas.microsoft.com/office/drawing/2014/main" id="{03D6A58F-BE45-433C-A709-28EE91E98026}"/>
+                <a16:creationId xmlns:a16="http://schemas.microsoft.com/office/drawing/2014/main" id="{21448347-A303-463F-B700-D10785E989CC}"/>
               </a:ext>
             </a:extLst>
           </p:cNvPr>
@@ -9755,7 +10039,7 @@
           <p:cNvPr id="7" name="">
             <a:extLst xmlns:a="http://schemas.openxmlformats.org/drawingml/2006/main">
               <a:ext uri="{FF2B5EF4-FFF2-40B4-BE49-F238E27FC236}">
-                <a16:creationId xmlns:a16="http://schemas.microsoft.com/office/drawing/2014/main" id="{63739376-D012-428B-BA63-CBCFDD6F90FB}"/>
+                <a16:creationId xmlns:a16="http://schemas.microsoft.com/office/drawing/2014/main" id="{A53552B8-90C3-4E37-9B89-A0848C7D0069}"/>
               </a:ext>
             </a:extLst>
           </p:cNvPr>
@@ -9819,7 +10103,7 @@
           <p:cNvPr id="8" name="">
             <a:extLst xmlns:a="http://schemas.openxmlformats.org/drawingml/2006/main">
               <a:ext uri="{FF2B5EF4-FFF2-40B4-BE49-F238E27FC236}">
-                <a16:creationId xmlns:a16="http://schemas.microsoft.com/office/drawing/2014/main" id="{B793E8B5-D8CE-4502-9AE9-972803CED312}"/>
+                <a16:creationId xmlns:a16="http://schemas.microsoft.com/office/drawing/2014/main" id="{94737BEC-D45C-43CD-BA43-5F993C825C66}"/>
               </a:ext>
             </a:extLst>
           </p:cNvPr>
@@ -9883,7 +10167,7 @@
           <p:cNvPr id="9" name="">
             <a:extLst xmlns:a="http://schemas.openxmlformats.org/drawingml/2006/main">
               <a:ext uri="{FF2B5EF4-FFF2-40B4-BE49-F238E27FC236}">
-                <a16:creationId xmlns:a16="http://schemas.microsoft.com/office/drawing/2014/main" id="{3721F809-3C84-434A-90F6-695CFD64C26D}"/>
+                <a16:creationId xmlns:a16="http://schemas.microsoft.com/office/drawing/2014/main" id="{A468EA4B-2A21-4E1B-804B-367CB6B8FBFE}"/>
               </a:ext>
             </a:extLst>
           </p:cNvPr>
@@ -9947,7 +10231,7 @@
           <p:cNvPr id="10" name="">
             <a:extLst xmlns:a="http://schemas.openxmlformats.org/drawingml/2006/main">
               <a:ext uri="{FF2B5EF4-FFF2-40B4-BE49-F238E27FC236}">
-                <a16:creationId xmlns:a16="http://schemas.microsoft.com/office/drawing/2014/main" id="{AB923B57-163B-475C-94EB-0563B177B63C}"/>
+                <a16:creationId xmlns:a16="http://schemas.microsoft.com/office/drawing/2014/main" id="{EA6CE520-F3F2-4B02-A13A-F2D8116B5F16}"/>
               </a:ext>
             </a:extLst>
           </p:cNvPr>
@@ -9980,7 +10264,7 @@
           <p:cNvPr id="11" name="">
             <a:extLst xmlns:a="http://schemas.openxmlformats.org/drawingml/2006/main">
               <a:ext uri="{FF2B5EF4-FFF2-40B4-BE49-F238E27FC236}">
-                <a16:creationId xmlns:a16="http://schemas.microsoft.com/office/drawing/2014/main" id="{752AE14E-9804-46EB-B256-6D2F09A1C0C7}"/>
+                <a16:creationId xmlns:a16="http://schemas.microsoft.com/office/drawing/2014/main" id="{AAF3E384-0A77-4CCF-B1CF-F8FE99335741}"/>
               </a:ext>
             </a:extLst>
           </p:cNvPr>
@@ -10044,7 +10328,7 @@
           <p:cNvPr id="12" name="">
             <a:extLst xmlns:a="http://schemas.openxmlformats.org/drawingml/2006/main">
               <a:ext uri="{FF2B5EF4-FFF2-40B4-BE49-F238E27FC236}">
-                <a16:creationId xmlns:a16="http://schemas.microsoft.com/office/drawing/2014/main" id="{56F5ABD9-A72D-4A76-A5E9-F88A6DA73D35}"/>
+                <a16:creationId xmlns:a16="http://schemas.microsoft.com/office/drawing/2014/main" id="{FB892DF6-AC0F-42C5-86F5-8FA3A70FD0A2}"/>
               </a:ext>
             </a:extLst>
           </p:cNvPr>
@@ -10108,7 +10392,7 @@
           <p:cNvPr id="13" name="">
             <a:extLst xmlns:a="http://schemas.openxmlformats.org/drawingml/2006/main">
               <a:ext uri="{FF2B5EF4-FFF2-40B4-BE49-F238E27FC236}">
-                <a16:creationId xmlns:a16="http://schemas.microsoft.com/office/drawing/2014/main" id="{55FB6923-C9BC-4BB1-A915-89CB1D63AAE7}"/>
+                <a16:creationId xmlns:a16="http://schemas.microsoft.com/office/drawing/2014/main" id="{90E88161-5D06-4DE7-9680-53AE28F2802B}"/>
               </a:ext>
             </a:extLst>
           </p:cNvPr>
@@ -10172,7 +10456,7 @@
           <p:cNvPr id="14" name="">
             <a:extLst xmlns:a="http://schemas.openxmlformats.org/drawingml/2006/main">
               <a:ext uri="{FF2B5EF4-FFF2-40B4-BE49-F238E27FC236}">
-                <a16:creationId xmlns:a16="http://schemas.microsoft.com/office/drawing/2014/main" id="{B28F92B0-1F24-4F72-8A1F-04183F744C7C}"/>
+                <a16:creationId xmlns:a16="http://schemas.microsoft.com/office/drawing/2014/main" id="{DC71BE98-316B-461F-9EEC-D837B80B357E}"/>
               </a:ext>
             </a:extLst>
           </p:cNvPr>
@@ -10205,7 +10489,7 @@
           <p:cNvPr id="15" name="">
             <a:extLst xmlns:a="http://schemas.openxmlformats.org/drawingml/2006/main">
               <a:ext uri="{FF2B5EF4-FFF2-40B4-BE49-F238E27FC236}">
-                <a16:creationId xmlns:a16="http://schemas.microsoft.com/office/drawing/2014/main" id="{CFFC100A-41CA-487C-BAE3-38043C1DA2E8}"/>
+                <a16:creationId xmlns:a16="http://schemas.microsoft.com/office/drawing/2014/main" id="{90BBAFFA-B1BC-40D5-85EE-79333F0BF075}"/>
               </a:ext>
             </a:extLst>
           </p:cNvPr>
@@ -10269,7 +10553,7 @@
           <p:cNvPr id="16" name="">
             <a:extLst xmlns:a="http://schemas.openxmlformats.org/drawingml/2006/main">
               <a:ext uri="{FF2B5EF4-FFF2-40B4-BE49-F238E27FC236}">
-                <a16:creationId xmlns:a16="http://schemas.microsoft.com/office/drawing/2014/main" id="{CCC0334F-7483-41BC-A782-6117E70E6456}"/>
+                <a16:creationId xmlns:a16="http://schemas.microsoft.com/office/drawing/2014/main" id="{E716EF9E-A3C0-4F17-92CC-94BAA6FAE17E}"/>
               </a:ext>
             </a:extLst>
           </p:cNvPr>
@@ -10333,7 +10617,7 @@
           <p:cNvPr id="17" name="">
             <a:extLst xmlns:a="http://schemas.openxmlformats.org/drawingml/2006/main">
               <a:ext uri="{FF2B5EF4-FFF2-40B4-BE49-F238E27FC236}">
-                <a16:creationId xmlns:a16="http://schemas.microsoft.com/office/drawing/2014/main" id="{E42F0457-4765-4463-8EA8-4F510834E89C}"/>
+                <a16:creationId xmlns:a16="http://schemas.microsoft.com/office/drawing/2014/main" id="{30BAEE1B-76B1-451C-8B68-43CFF54EE5D6}"/>
               </a:ext>
             </a:extLst>
           </p:cNvPr>
@@ -10397,7 +10681,7 @@
           <p:cNvPr id="18" name="">
             <a:extLst xmlns:a="http://schemas.openxmlformats.org/drawingml/2006/main">
               <a:ext uri="{FF2B5EF4-FFF2-40B4-BE49-F238E27FC236}">
-                <a16:creationId xmlns:a16="http://schemas.microsoft.com/office/drawing/2014/main" id="{167B756D-EF91-4FDC-8045-D031270BCFFD}"/>
+                <a16:creationId xmlns:a16="http://schemas.microsoft.com/office/drawing/2014/main" id="{6C10F33E-D527-4348-B67F-2B29931C70CA}"/>
               </a:ext>
             </a:extLst>
           </p:cNvPr>
@@ -10430,7 +10714,7 @@
           <p:cNvPr id="19" name="">
             <a:extLst xmlns:a="http://schemas.openxmlformats.org/drawingml/2006/main">
               <a:ext uri="{FF2B5EF4-FFF2-40B4-BE49-F238E27FC236}">
-                <a16:creationId xmlns:a16="http://schemas.microsoft.com/office/drawing/2014/main" id="{EFC64183-4473-40C5-A4E3-A21BA7D7FA2D}"/>
+                <a16:creationId xmlns:a16="http://schemas.microsoft.com/office/drawing/2014/main" id="{3E42D637-71F0-44EB-9B65-16C6EDAFA20B}"/>
               </a:ext>
             </a:extLst>
           </p:cNvPr>
@@ -10494,7 +10778,7 @@
           <p:cNvPr id="20" name="">
             <a:extLst xmlns:a="http://schemas.openxmlformats.org/drawingml/2006/main">
               <a:ext uri="{FF2B5EF4-FFF2-40B4-BE49-F238E27FC236}">
-                <a16:creationId xmlns:a16="http://schemas.microsoft.com/office/drawing/2014/main" id="{7EEF174E-406D-4712-AC61-7AC36206FA68}"/>
+                <a16:creationId xmlns:a16="http://schemas.microsoft.com/office/drawing/2014/main" id="{3C470161-3FFE-40BA-8BC0-C68189C2137D}"/>
               </a:ext>
             </a:extLst>
           </p:cNvPr>
@@ -10558,7 +10842,7 @@
           <p:cNvPr id="21" name="">
             <a:extLst xmlns:a="http://schemas.openxmlformats.org/drawingml/2006/main">
               <a:ext uri="{FF2B5EF4-FFF2-40B4-BE49-F238E27FC236}">
-                <a16:creationId xmlns:a16="http://schemas.microsoft.com/office/drawing/2014/main" id="{954770C0-44E2-4A4D-9DEB-12833E27483D}"/>
+                <a16:creationId xmlns:a16="http://schemas.microsoft.com/office/drawing/2014/main" id="{458D0027-0991-495F-A580-6D6049B5F750}"/>
               </a:ext>
             </a:extLst>
           </p:cNvPr>
@@ -10622,7 +10906,7 @@
           <p:cNvPr id="22" name="">
             <a:extLst xmlns:a="http://schemas.openxmlformats.org/drawingml/2006/main">
               <a:ext uri="{FF2B5EF4-FFF2-40B4-BE49-F238E27FC236}">
-                <a16:creationId xmlns:a16="http://schemas.microsoft.com/office/drawing/2014/main" id="{78E65E43-5CB7-48D7-8C90-3CF19A6E01E4}"/>
+                <a16:creationId xmlns:a16="http://schemas.microsoft.com/office/drawing/2014/main" id="{A25B83B1-9463-4CD3-82E2-38DFA087DE06}"/>
               </a:ext>
             </a:extLst>
           </p:cNvPr>
@@ -10655,7 +10939,7 @@
           <p:cNvPr id="23" name="">
             <a:extLst xmlns:a="http://schemas.openxmlformats.org/drawingml/2006/main">
               <a:ext uri="{FF2B5EF4-FFF2-40B4-BE49-F238E27FC236}">
-                <a16:creationId xmlns:a16="http://schemas.microsoft.com/office/drawing/2014/main" id="{B0EAFC7B-1893-4F19-B1B0-2F446EDEE40A}"/>
+                <a16:creationId xmlns:a16="http://schemas.microsoft.com/office/drawing/2014/main" id="{5C056702-18F6-4099-8AE6-4D8A66DA9261}"/>
               </a:ext>
             </a:extLst>
           </p:cNvPr>
@@ -10690,7 +10974,7 @@
           <p:cNvPr id="24" name="">
             <a:extLst xmlns:a="http://schemas.openxmlformats.org/drawingml/2006/main">
               <a:ext uri="{FF2B5EF4-FFF2-40B4-BE49-F238E27FC236}">
-                <a16:creationId xmlns:a16="http://schemas.microsoft.com/office/drawing/2014/main" id="{42047CEC-E82A-481F-8984-FBBDB87BDDE5}"/>
+                <a16:creationId xmlns:a16="http://schemas.microsoft.com/office/drawing/2014/main" id="{6FC38C51-0F71-4DA8-80F9-7B0353B63CEE}"/>
               </a:ext>
             </a:extLst>
           </p:cNvPr>
@@ -10754,7 +11038,7 @@
           <p:cNvPr id="25" name="">
             <a:extLst xmlns:a="http://schemas.openxmlformats.org/drawingml/2006/main">
               <a:ext uri="{FF2B5EF4-FFF2-40B4-BE49-F238E27FC236}">
-                <a16:creationId xmlns:a16="http://schemas.microsoft.com/office/drawing/2014/main" id="{3E89CC36-1FBA-4787-AC09-C0EC222A2E20}"/>
+                <a16:creationId xmlns:a16="http://schemas.microsoft.com/office/drawing/2014/main" id="{04FB5776-335B-4242-B098-AB1DC31BE0BD}"/>
               </a:ext>
             </a:extLst>
           </p:cNvPr>
@@ -10818,7 +11102,7 @@
           <p:cNvPr id="26" name="">
             <a:extLst xmlns:a="http://schemas.openxmlformats.org/drawingml/2006/main">
               <a:ext uri="{FF2B5EF4-FFF2-40B4-BE49-F238E27FC236}">
-                <a16:creationId xmlns:a16="http://schemas.microsoft.com/office/drawing/2014/main" id="{D9899C57-0077-4006-BBE5-AFFD5CE44A6E}"/>
+                <a16:creationId xmlns:a16="http://schemas.microsoft.com/office/drawing/2014/main" id="{A21DE189-C669-48E9-A6EB-E3A417395DD1}"/>
               </a:ext>
             </a:extLst>
           </p:cNvPr>
@@ -10880,7 +11164,7 @@
     </p:spTree>
     <p:extLst>
       <p:ext uri="{BB962C8B-B14F-4D97-AF65-F5344CB8AC3E}">
-        <p14:creationId xmlns:p14="http://schemas.microsoft.com/office/powerpoint/2010/main" val="367484714"/>
+        <p14:creationId xmlns:p14="http://schemas.microsoft.com/office/powerpoint/2010/main" val="1903456919"/>
       </p:ext>
     </p:extLst>
   </p:cSld>
@@ -10904,7 +11188,7 @@
           <p:cNvPr id="1" name="">
             <a:extLst xmlns:a="http://schemas.openxmlformats.org/drawingml/2006/main">
               <a:ext uri="{FF2B5EF4-FFF2-40B4-BE49-F238E27FC236}">
-                <a16:creationId xmlns:a16="http://schemas.microsoft.com/office/drawing/2014/main" id="{6939D2B8-8394-4304-918D-B4D6F68EF3C8}"/>
+                <a16:creationId xmlns:a16="http://schemas.microsoft.com/office/drawing/2014/main" id="{203DA7D8-04B0-474D-8079-A293AB032EE1}"/>
               </a:ext>
             </a:extLst>
           </p:cNvPr>
@@ -10939,7 +11223,7 @@
           <p:cNvPr id="2" name="">
             <a:extLst xmlns:a="http://schemas.openxmlformats.org/drawingml/2006/main">
               <a:ext uri="{FF2B5EF4-FFF2-40B4-BE49-F238E27FC236}">
-                <a16:creationId xmlns:a16="http://schemas.microsoft.com/office/drawing/2014/main" id="{9E646768-605A-4A80-89BA-6D1D5A809066}"/>
+                <a16:creationId xmlns:a16="http://schemas.microsoft.com/office/drawing/2014/main" id="{F0CD7B17-E26E-46F0-B6B3-17F650EF6DCE}"/>
               </a:ext>
             </a:extLst>
           </p:cNvPr>
@@ -11003,7 +11287,7 @@
           <p:cNvPr id="3" name="">
             <a:extLst xmlns:a="http://schemas.openxmlformats.org/drawingml/2006/main">
               <a:ext uri="{FF2B5EF4-FFF2-40B4-BE49-F238E27FC236}">
-                <a16:creationId xmlns:a16="http://schemas.microsoft.com/office/drawing/2014/main" id="{F6781DCC-3EE5-4B72-AC0A-64603FBAD99C}"/>
+                <a16:creationId xmlns:a16="http://schemas.microsoft.com/office/drawing/2014/main" id="{169646EF-3B2C-48FE-9AE3-36DAA51DDB73}"/>
               </a:ext>
             </a:extLst>
           </p:cNvPr>
@@ -11038,7 +11322,7 @@
           <p:cNvPr id="4" name="">
             <a:extLst xmlns:a="http://schemas.openxmlformats.org/drawingml/2006/main">
               <a:ext uri="{FF2B5EF4-FFF2-40B4-BE49-F238E27FC236}">
-                <a16:creationId xmlns:a16="http://schemas.microsoft.com/office/drawing/2014/main" id="{833C5D7A-1CA3-4F05-A7FE-99FF3C43F554}"/>
+                <a16:creationId xmlns:a16="http://schemas.microsoft.com/office/drawing/2014/main" id="{971B1C93-2B15-4F39-BA56-860B874C5992}"/>
               </a:ext>
             </a:extLst>
           </p:cNvPr>
@@ -11102,7 +11386,7 @@
           <p:cNvPr id="5" name="">
             <a:extLst xmlns:a="http://schemas.openxmlformats.org/drawingml/2006/main">
               <a:ext uri="{FF2B5EF4-FFF2-40B4-BE49-F238E27FC236}">
-                <a16:creationId xmlns:a16="http://schemas.microsoft.com/office/drawing/2014/main" id="{BD6E5A05-81F3-4CF8-A01B-C8AC62E3B862}"/>
+                <a16:creationId xmlns:a16="http://schemas.microsoft.com/office/drawing/2014/main" id="{5C1D9E4E-1565-493A-A635-19E09A5C97AE}"/>
               </a:ext>
             </a:extLst>
           </p:cNvPr>
@@ -11166,7 +11450,7 @@
           <p:cNvPr id="6" name="">
             <a:extLst xmlns:a="http://schemas.openxmlformats.org/drawingml/2006/main">
               <a:ext uri="{FF2B5EF4-FFF2-40B4-BE49-F238E27FC236}">
-                <a16:creationId xmlns:a16="http://schemas.microsoft.com/office/drawing/2014/main" id="{EAD021FB-9957-46EA-B52B-C27B3894F201}"/>
+                <a16:creationId xmlns:a16="http://schemas.microsoft.com/office/drawing/2014/main" id="{58902498-0EC4-4E1C-B190-2622592F8BD0}"/>
               </a:ext>
             </a:extLst>
           </p:cNvPr>
@@ -11199,7 +11483,7 @@
           <p:cNvPr id="7" name="">
             <a:extLst xmlns:a="http://schemas.openxmlformats.org/drawingml/2006/main">
               <a:ext uri="{FF2B5EF4-FFF2-40B4-BE49-F238E27FC236}">
-                <a16:creationId xmlns:a16="http://schemas.microsoft.com/office/drawing/2014/main" id="{529FAC84-0CA6-4A1C-A71C-36DC14267A74}"/>
+                <a16:creationId xmlns:a16="http://schemas.microsoft.com/office/drawing/2014/main" id="{ADDB6FAF-E181-4C63-8958-62F0D9C646B5}"/>
               </a:ext>
             </a:extLst>
           </p:cNvPr>
@@ -11234,7 +11518,7 @@
           <p:cNvPr id="8" name="">
             <a:extLst xmlns:a="http://schemas.openxmlformats.org/drawingml/2006/main">
               <a:ext uri="{FF2B5EF4-FFF2-40B4-BE49-F238E27FC236}">
-                <a16:creationId xmlns:a16="http://schemas.microsoft.com/office/drawing/2014/main" id="{0AD56DBB-112B-4082-8327-97C57D337196}"/>
+                <a16:creationId xmlns:a16="http://schemas.microsoft.com/office/drawing/2014/main" id="{49AA8907-8B22-4182-88DA-24A81986920D}"/>
               </a:ext>
             </a:extLst>
           </p:cNvPr>
@@ -11298,7 +11582,7 @@
           <p:cNvPr id="9" name="">
             <a:extLst xmlns:a="http://schemas.openxmlformats.org/drawingml/2006/main">
               <a:ext uri="{FF2B5EF4-FFF2-40B4-BE49-F238E27FC236}">
-                <a16:creationId xmlns:a16="http://schemas.microsoft.com/office/drawing/2014/main" id="{8192B252-BA45-4BFC-82EE-26E859C30929}"/>
+                <a16:creationId xmlns:a16="http://schemas.microsoft.com/office/drawing/2014/main" id="{8D75758F-637F-4F58-B5E2-24EF1AE3E942}"/>
               </a:ext>
             </a:extLst>
           </p:cNvPr>
@@ -11362,7 +11646,7 @@
           <p:cNvPr id="10" name="">
             <a:extLst xmlns:a="http://schemas.openxmlformats.org/drawingml/2006/main">
               <a:ext uri="{FF2B5EF4-FFF2-40B4-BE49-F238E27FC236}">
-                <a16:creationId xmlns:a16="http://schemas.microsoft.com/office/drawing/2014/main" id="{5EDB8591-AB25-4D8D-888D-91A86D9EB5DD}"/>
+                <a16:creationId xmlns:a16="http://schemas.microsoft.com/office/drawing/2014/main" id="{663BA1D9-1EBA-44E9-B50E-9FD2F92DBC8A}"/>
               </a:ext>
             </a:extLst>
           </p:cNvPr>
@@ -11395,7 +11679,7 @@
           <p:cNvPr id="11" name="">
             <a:extLst xmlns:a="http://schemas.openxmlformats.org/drawingml/2006/main">
               <a:ext uri="{FF2B5EF4-FFF2-40B4-BE49-F238E27FC236}">
-                <a16:creationId xmlns:a16="http://schemas.microsoft.com/office/drawing/2014/main" id="{B2825A11-DD3F-43E4-8AB7-A24D468DC191}"/>
+                <a16:creationId xmlns:a16="http://schemas.microsoft.com/office/drawing/2014/main" id="{1729C433-B550-49BF-BDD1-7F0BB71EC721}"/>
               </a:ext>
             </a:extLst>
           </p:cNvPr>
@@ -11430,7 +11714,7 @@
           <p:cNvPr id="12" name="">
             <a:extLst xmlns:a="http://schemas.openxmlformats.org/drawingml/2006/main">
               <a:ext uri="{FF2B5EF4-FFF2-40B4-BE49-F238E27FC236}">
-                <a16:creationId xmlns:a16="http://schemas.microsoft.com/office/drawing/2014/main" id="{26C44786-EBF7-47B1-B5F0-9297B3988322}"/>
+                <a16:creationId xmlns:a16="http://schemas.microsoft.com/office/drawing/2014/main" id="{5DDFEAA2-28D8-492E-A2AF-B6D70F538ED7}"/>
               </a:ext>
             </a:extLst>
           </p:cNvPr>
@@ -11494,7 +11778,7 @@
           <p:cNvPr id="13" name="">
             <a:extLst xmlns:a="http://schemas.openxmlformats.org/drawingml/2006/main">
               <a:ext uri="{FF2B5EF4-FFF2-40B4-BE49-F238E27FC236}">
-                <a16:creationId xmlns:a16="http://schemas.microsoft.com/office/drawing/2014/main" id="{362A8B42-5917-4100-B656-D60B1FBBC610}"/>
+                <a16:creationId xmlns:a16="http://schemas.microsoft.com/office/drawing/2014/main" id="{7FE6DC79-FDCD-41ED-AC61-9D97202E609D}"/>
               </a:ext>
             </a:extLst>
           </p:cNvPr>
@@ -11558,7 +11842,7 @@
           <p:cNvPr id="14" name="">
             <a:extLst xmlns:a="http://schemas.openxmlformats.org/drawingml/2006/main">
               <a:ext uri="{FF2B5EF4-FFF2-40B4-BE49-F238E27FC236}">
-                <a16:creationId xmlns:a16="http://schemas.microsoft.com/office/drawing/2014/main" id="{B6A882CD-A80A-4AFE-889B-82F55B0BF644}"/>
+                <a16:creationId xmlns:a16="http://schemas.microsoft.com/office/drawing/2014/main" id="{E2C62722-6323-4604-B595-6F4BBF72648F}"/>
               </a:ext>
             </a:extLst>
           </p:cNvPr>
@@ -11591,7 +11875,7 @@
           <p:cNvPr id="15" name="">
             <a:extLst xmlns:a="http://schemas.openxmlformats.org/drawingml/2006/main">
               <a:ext uri="{FF2B5EF4-FFF2-40B4-BE49-F238E27FC236}">
-                <a16:creationId xmlns:a16="http://schemas.microsoft.com/office/drawing/2014/main" id="{B1846B7B-05B1-4F76-813A-C14015962732}"/>
+                <a16:creationId xmlns:a16="http://schemas.microsoft.com/office/drawing/2014/main" id="{34D40D21-2C20-4DE0-B63A-9C1AAD1370F5}"/>
               </a:ext>
             </a:extLst>
           </p:cNvPr>
@@ -11626,7 +11910,7 @@
           <p:cNvPr id="16" name="">
             <a:extLst xmlns:a="http://schemas.openxmlformats.org/drawingml/2006/main">
               <a:ext uri="{FF2B5EF4-FFF2-40B4-BE49-F238E27FC236}">
-                <a16:creationId xmlns:a16="http://schemas.microsoft.com/office/drawing/2014/main" id="{BCC93FB4-26D5-4FA8-BB6D-A92B5D66B64A}"/>
+                <a16:creationId xmlns:a16="http://schemas.microsoft.com/office/drawing/2014/main" id="{4A3CE694-E3EC-43DB-80CC-13C9D05D16BC}"/>
               </a:ext>
             </a:extLst>
           </p:cNvPr>
@@ -11690,7 +11974,7 @@
           <p:cNvPr id="17" name="">
             <a:extLst xmlns:a="http://schemas.openxmlformats.org/drawingml/2006/main">
               <a:ext uri="{FF2B5EF4-FFF2-40B4-BE49-F238E27FC236}">
-                <a16:creationId xmlns:a16="http://schemas.microsoft.com/office/drawing/2014/main" id="{EBEC433B-F698-4901-8F22-54CEE8AA342B}"/>
+                <a16:creationId xmlns:a16="http://schemas.microsoft.com/office/drawing/2014/main" id="{A76DF2A9-4F90-45C6-8AE0-D24B3342B066}"/>
               </a:ext>
             </a:extLst>
           </p:cNvPr>
@@ -11754,7 +12038,7 @@
           <p:cNvPr id="18" name="">
             <a:extLst xmlns:a="http://schemas.openxmlformats.org/drawingml/2006/main">
               <a:ext uri="{FF2B5EF4-FFF2-40B4-BE49-F238E27FC236}">
-                <a16:creationId xmlns:a16="http://schemas.microsoft.com/office/drawing/2014/main" id="{E84F4BDF-ED55-4DA7-8AD9-5DD1D59D2F97}"/>
+                <a16:creationId xmlns:a16="http://schemas.microsoft.com/office/drawing/2014/main" id="{F76168CD-37D9-4A5E-9C3A-B48DEE94CDF0}"/>
               </a:ext>
             </a:extLst>
           </p:cNvPr>
@@ -11787,7 +12071,7 @@
           <p:cNvPr id="19" name="">
             <a:extLst xmlns:a="http://schemas.openxmlformats.org/drawingml/2006/main">
               <a:ext uri="{FF2B5EF4-FFF2-40B4-BE49-F238E27FC236}">
-                <a16:creationId xmlns:a16="http://schemas.microsoft.com/office/drawing/2014/main" id="{A4943AEA-8DAA-4D45-9F1F-984EFF29F6D3}"/>
+                <a16:creationId xmlns:a16="http://schemas.microsoft.com/office/drawing/2014/main" id="{AE0C4949-C6EB-4E63-8A75-0F57A5946A5B}"/>
               </a:ext>
             </a:extLst>
           </p:cNvPr>
@@ -11822,7 +12106,7 @@
           <p:cNvPr id="20" name="">
             <a:extLst xmlns:a="http://schemas.openxmlformats.org/drawingml/2006/main">
               <a:ext uri="{FF2B5EF4-FFF2-40B4-BE49-F238E27FC236}">
-                <a16:creationId xmlns:a16="http://schemas.microsoft.com/office/drawing/2014/main" id="{5FE4B5AD-8733-4C06-A0CE-45523A39724A}"/>
+                <a16:creationId xmlns:a16="http://schemas.microsoft.com/office/drawing/2014/main" id="{AD5AF45F-1DE2-464C-BD1E-56459297C694}"/>
               </a:ext>
             </a:extLst>
           </p:cNvPr>
@@ -11886,7 +12170,7 @@
           <p:cNvPr id="21" name="">
             <a:extLst xmlns:a="http://schemas.openxmlformats.org/drawingml/2006/main">
               <a:ext uri="{FF2B5EF4-FFF2-40B4-BE49-F238E27FC236}">
-                <a16:creationId xmlns:a16="http://schemas.microsoft.com/office/drawing/2014/main" id="{41BBE0BC-DA3D-422F-8BF4-730D339CB1FA}"/>
+                <a16:creationId xmlns:a16="http://schemas.microsoft.com/office/drawing/2014/main" id="{8DBD7DB1-7C8A-49FB-A4FD-A70B1C609E81}"/>
               </a:ext>
             </a:extLst>
           </p:cNvPr>
@@ -11950,7 +12234,7 @@
           <p:cNvPr id="22" name="">
             <a:extLst xmlns:a="http://schemas.openxmlformats.org/drawingml/2006/main">
               <a:ext uri="{FF2B5EF4-FFF2-40B4-BE49-F238E27FC236}">
-                <a16:creationId xmlns:a16="http://schemas.microsoft.com/office/drawing/2014/main" id="{A94D669A-9FEC-4805-8E9A-0268BC174784}"/>
+                <a16:creationId xmlns:a16="http://schemas.microsoft.com/office/drawing/2014/main" id="{268D9BA7-A262-40D5-8A31-6EC8FB5672B1}"/>
               </a:ext>
             </a:extLst>
           </p:cNvPr>
@@ -12012,7 +12296,7 @@
     </p:spTree>
     <p:extLst>
       <p:ext uri="{BB962C8B-B14F-4D97-AF65-F5344CB8AC3E}">
-        <p14:creationId xmlns:p14="http://schemas.microsoft.com/office/powerpoint/2010/main" val="882012286"/>
+        <p14:creationId xmlns:p14="http://schemas.microsoft.com/office/powerpoint/2010/main" val="1093066477"/>
       </p:ext>
     </p:extLst>
   </p:cSld>
@@ -12036,7 +12320,7 @@
           <p:cNvPr id="1" name="">
             <a:extLst xmlns:a="http://schemas.openxmlformats.org/drawingml/2006/main">
               <a:ext uri="{FF2B5EF4-FFF2-40B4-BE49-F238E27FC236}">
-                <a16:creationId xmlns:a16="http://schemas.microsoft.com/office/drawing/2014/main" id="{E2B83D6A-9331-40FA-83FA-B7CFD8256989}"/>
+                <a16:creationId xmlns:a16="http://schemas.microsoft.com/office/drawing/2014/main" id="{816A3C7E-10C1-44E5-8D35-A05911C5B1F2}"/>
               </a:ext>
             </a:extLst>
           </p:cNvPr>
@@ -12071,7 +12355,7 @@
           <p:cNvPr id="2" name="">
             <a:extLst xmlns:a="http://schemas.openxmlformats.org/drawingml/2006/main">
               <a:ext uri="{FF2B5EF4-FFF2-40B4-BE49-F238E27FC236}">
-                <a16:creationId xmlns:a16="http://schemas.microsoft.com/office/drawing/2014/main" id="{7DC853E1-8B66-4C57-B509-3CA45AA6A5DF}"/>
+                <a16:creationId xmlns:a16="http://schemas.microsoft.com/office/drawing/2014/main" id="{E6B4ACB3-6FED-4B03-9F21-5A9973177A09}"/>
               </a:ext>
             </a:extLst>
           </p:cNvPr>
@@ -12135,7 +12419,7 @@
           <p:cNvPr id="3" name="">
             <a:extLst xmlns:a="http://schemas.openxmlformats.org/drawingml/2006/main">
               <a:ext uri="{FF2B5EF4-FFF2-40B4-BE49-F238E27FC236}">
-                <a16:creationId xmlns:a16="http://schemas.microsoft.com/office/drawing/2014/main" id="{08699708-2C1E-4FEC-8E18-FAA81350F069}"/>
+                <a16:creationId xmlns:a16="http://schemas.microsoft.com/office/drawing/2014/main" id="{8A60E4EC-E429-4C05-908D-F28EAAC16801}"/>
               </a:ext>
             </a:extLst>
           </p:cNvPr>
@@ -12170,7 +12454,7 @@
           <p:cNvPr id="4" name="">
             <a:extLst xmlns:a="http://schemas.openxmlformats.org/drawingml/2006/main">
               <a:ext uri="{FF2B5EF4-FFF2-40B4-BE49-F238E27FC236}">
-                <a16:creationId xmlns:a16="http://schemas.microsoft.com/office/drawing/2014/main" id="{1429C38D-5D08-4CAD-B9CF-6B105E90B031}"/>
+                <a16:creationId xmlns:a16="http://schemas.microsoft.com/office/drawing/2014/main" id="{2F58AF94-40E9-41A3-9133-549FDCED28CA}"/>
               </a:ext>
             </a:extLst>
           </p:cNvPr>
@@ -12234,7 +12518,7 @@
           <p:cNvPr id="5" name="">
             <a:extLst xmlns:a="http://schemas.openxmlformats.org/drawingml/2006/main">
               <a:ext uri="{FF2B5EF4-FFF2-40B4-BE49-F238E27FC236}">
-                <a16:creationId xmlns:a16="http://schemas.microsoft.com/office/drawing/2014/main" id="{B4628F12-FC25-4FC2-ACC8-F44FEFB4D010}"/>
+                <a16:creationId xmlns:a16="http://schemas.microsoft.com/office/drawing/2014/main" id="{E3CA451A-7433-4AB0-8D92-AC466BF23D8F}"/>
               </a:ext>
             </a:extLst>
           </p:cNvPr>
@@ -12298,7 +12582,7 @@
           <p:cNvPr id="6" name="">
             <a:extLst xmlns:a="http://schemas.openxmlformats.org/drawingml/2006/main">
               <a:ext uri="{FF2B5EF4-FFF2-40B4-BE49-F238E27FC236}">
-                <a16:creationId xmlns:a16="http://schemas.microsoft.com/office/drawing/2014/main" id="{E1714739-445C-4FEE-9B5E-356663C1CCFF}"/>
+                <a16:creationId xmlns:a16="http://schemas.microsoft.com/office/drawing/2014/main" id="{B923C7A8-C820-44A2-B465-B98F4F36733A}"/>
               </a:ext>
             </a:extLst>
           </p:cNvPr>
@@ -12331,7 +12615,7 @@
           <p:cNvPr id="7" name="">
             <a:extLst xmlns:a="http://schemas.openxmlformats.org/drawingml/2006/main">
               <a:ext uri="{FF2B5EF4-FFF2-40B4-BE49-F238E27FC236}">
-                <a16:creationId xmlns:a16="http://schemas.microsoft.com/office/drawing/2014/main" id="{4FCBDE84-500A-4440-B387-0F00F345FCC6}"/>
+                <a16:creationId xmlns:a16="http://schemas.microsoft.com/office/drawing/2014/main" id="{D65CC0DD-9576-4E33-A84D-84E0CEFE5021}"/>
               </a:ext>
             </a:extLst>
           </p:cNvPr>
@@ -12395,7 +12679,7 @@
           <p:cNvPr id="8" name="">
             <a:extLst xmlns:a="http://schemas.openxmlformats.org/drawingml/2006/main">
               <a:ext uri="{FF2B5EF4-FFF2-40B4-BE49-F238E27FC236}">
-                <a16:creationId xmlns:a16="http://schemas.microsoft.com/office/drawing/2014/main" id="{3ED13B14-9E3F-43BF-8B37-A82AC7DD7C19}"/>
+                <a16:creationId xmlns:a16="http://schemas.microsoft.com/office/drawing/2014/main" id="{CA6884BE-D34E-4A2A-A331-299857FA3788}"/>
               </a:ext>
             </a:extLst>
           </p:cNvPr>
@@ -12459,7 +12743,7 @@
           <p:cNvPr id="9" name="">
             <a:extLst xmlns:a="http://schemas.openxmlformats.org/drawingml/2006/main">
               <a:ext uri="{FF2B5EF4-FFF2-40B4-BE49-F238E27FC236}">
-                <a16:creationId xmlns:a16="http://schemas.microsoft.com/office/drawing/2014/main" id="{77C7DAB0-F881-4C44-B1FE-75C31F9C227E}"/>
+                <a16:creationId xmlns:a16="http://schemas.microsoft.com/office/drawing/2014/main" id="{32703291-ED60-4685-8924-C1016347F80E}"/>
               </a:ext>
             </a:extLst>
           </p:cNvPr>
@@ -12494,7 +12778,7 @@
           <p:cNvPr id="10" name="">
             <a:extLst xmlns:a="http://schemas.openxmlformats.org/drawingml/2006/main">
               <a:ext uri="{FF2B5EF4-FFF2-40B4-BE49-F238E27FC236}">
-                <a16:creationId xmlns:a16="http://schemas.microsoft.com/office/drawing/2014/main" id="{FDD832A9-4970-4ACC-8D39-B814EDE9947C}"/>
+                <a16:creationId xmlns:a16="http://schemas.microsoft.com/office/drawing/2014/main" id="{7CBCD770-BD41-4910-8B1E-637F237EA9DE}"/>
               </a:ext>
             </a:extLst>
           </p:cNvPr>
@@ -12529,7 +12813,7 @@
           <p:cNvPr id="11" name="">
             <a:extLst xmlns:a="http://schemas.openxmlformats.org/drawingml/2006/main">
               <a:ext uri="{FF2B5EF4-FFF2-40B4-BE49-F238E27FC236}">
-                <a16:creationId xmlns:a16="http://schemas.microsoft.com/office/drawing/2014/main" id="{0012E5F4-9488-4DDE-AD6E-BFAAA03E0CA1}"/>
+                <a16:creationId xmlns:a16="http://schemas.microsoft.com/office/drawing/2014/main" id="{A9182B07-8C2E-460E-A79B-55C5E7A1484A}"/>
               </a:ext>
             </a:extLst>
           </p:cNvPr>
@@ -12562,7 +12846,7 @@
           <p:cNvPr id="12" name="">
             <a:extLst xmlns:a="http://schemas.openxmlformats.org/drawingml/2006/main">
               <a:ext uri="{FF2B5EF4-FFF2-40B4-BE49-F238E27FC236}">
-                <a16:creationId xmlns:a16="http://schemas.microsoft.com/office/drawing/2014/main" id="{0889AEB3-13EF-47DE-B290-207000AA098C}"/>
+                <a16:creationId xmlns:a16="http://schemas.microsoft.com/office/drawing/2014/main" id="{94E95C64-5455-44C4-97AE-F3483A874033}"/>
               </a:ext>
             </a:extLst>
           </p:cNvPr>
@@ -12626,7 +12910,7 @@
           <p:cNvPr id="13" name="">
             <a:extLst xmlns:a="http://schemas.openxmlformats.org/drawingml/2006/main">
               <a:ext uri="{FF2B5EF4-FFF2-40B4-BE49-F238E27FC236}">
-                <a16:creationId xmlns:a16="http://schemas.microsoft.com/office/drawing/2014/main" id="{DC173B65-FFF0-45FE-818A-4C0B56E7B1D3}"/>
+                <a16:creationId xmlns:a16="http://schemas.microsoft.com/office/drawing/2014/main" id="{091C5CA6-3BFF-417E-9739-EF24835E506B}"/>
               </a:ext>
             </a:extLst>
           </p:cNvPr>
@@ -12690,7 +12974,7 @@
           <p:cNvPr id="14" name="">
             <a:extLst xmlns:a="http://schemas.openxmlformats.org/drawingml/2006/main">
               <a:ext uri="{FF2B5EF4-FFF2-40B4-BE49-F238E27FC236}">
-                <a16:creationId xmlns:a16="http://schemas.microsoft.com/office/drawing/2014/main" id="{0EE97E00-3964-436F-ACA3-81EB07E4B07F}"/>
+                <a16:creationId xmlns:a16="http://schemas.microsoft.com/office/drawing/2014/main" id="{FFC57338-F624-411A-BCF7-B7EC727EB53D}"/>
               </a:ext>
             </a:extLst>
           </p:cNvPr>
@@ -12725,7 +13009,7 @@
           <p:cNvPr id="15" name="">
             <a:extLst xmlns:a="http://schemas.openxmlformats.org/drawingml/2006/main">
               <a:ext uri="{FF2B5EF4-FFF2-40B4-BE49-F238E27FC236}">
-                <a16:creationId xmlns:a16="http://schemas.microsoft.com/office/drawing/2014/main" id="{0062B0E7-FAAD-418D-96B6-D1CEBE427D35}"/>
+                <a16:creationId xmlns:a16="http://schemas.microsoft.com/office/drawing/2014/main" id="{D4E34294-D06C-44B0-A06E-DDB2DD8FBE4B}"/>
               </a:ext>
             </a:extLst>
           </p:cNvPr>
@@ -12760,7 +13044,7 @@
           <p:cNvPr id="16" name="">
             <a:extLst xmlns:a="http://schemas.openxmlformats.org/drawingml/2006/main">
               <a:ext uri="{FF2B5EF4-FFF2-40B4-BE49-F238E27FC236}">
-                <a16:creationId xmlns:a16="http://schemas.microsoft.com/office/drawing/2014/main" id="{3C352584-74EF-4858-89CE-4DD399D96661}"/>
+                <a16:creationId xmlns:a16="http://schemas.microsoft.com/office/drawing/2014/main" id="{2860C803-2C88-4EC9-9510-A9A7A1A95BDF}"/>
               </a:ext>
             </a:extLst>
           </p:cNvPr>
@@ -12793,7 +13077,7 @@
           <p:cNvPr id="17" name="">
             <a:extLst xmlns:a="http://schemas.openxmlformats.org/drawingml/2006/main">
               <a:ext uri="{FF2B5EF4-FFF2-40B4-BE49-F238E27FC236}">
-                <a16:creationId xmlns:a16="http://schemas.microsoft.com/office/drawing/2014/main" id="{1D4C912B-8D9D-4322-BD3D-7AAAC8FD1F4E}"/>
+                <a16:creationId xmlns:a16="http://schemas.microsoft.com/office/drawing/2014/main" id="{F50CE291-CD21-41B1-951D-52C5B98A342A}"/>
               </a:ext>
             </a:extLst>
           </p:cNvPr>
@@ -12857,7 +13141,7 @@
           <p:cNvPr id="18" name="">
             <a:extLst xmlns:a="http://schemas.openxmlformats.org/drawingml/2006/main">
               <a:ext uri="{FF2B5EF4-FFF2-40B4-BE49-F238E27FC236}">
-                <a16:creationId xmlns:a16="http://schemas.microsoft.com/office/drawing/2014/main" id="{0074523C-242D-421A-885A-022707A9524A}"/>
+                <a16:creationId xmlns:a16="http://schemas.microsoft.com/office/drawing/2014/main" id="{D8186643-0BC9-426E-98FC-D5D342A94503}"/>
               </a:ext>
             </a:extLst>
           </p:cNvPr>
@@ -12921,7 +13205,7 @@
           <p:cNvPr id="19" name="">
             <a:extLst xmlns:a="http://schemas.openxmlformats.org/drawingml/2006/main">
               <a:ext uri="{FF2B5EF4-FFF2-40B4-BE49-F238E27FC236}">
-                <a16:creationId xmlns:a16="http://schemas.microsoft.com/office/drawing/2014/main" id="{89B331D4-C3B1-494D-8F8F-D5B8E9543D5D}"/>
+                <a16:creationId xmlns:a16="http://schemas.microsoft.com/office/drawing/2014/main" id="{C447FEA5-2011-40A3-8D60-BC256FD2D628}"/>
               </a:ext>
             </a:extLst>
           </p:cNvPr>
@@ -12956,7 +13240,7 @@
           <p:cNvPr id="20" name="">
             <a:extLst xmlns:a="http://schemas.openxmlformats.org/drawingml/2006/main">
               <a:ext uri="{FF2B5EF4-FFF2-40B4-BE49-F238E27FC236}">
-                <a16:creationId xmlns:a16="http://schemas.microsoft.com/office/drawing/2014/main" id="{53E68CDD-9BB9-4BA9-AAC2-BC815E6B88DB}"/>
+                <a16:creationId xmlns:a16="http://schemas.microsoft.com/office/drawing/2014/main" id="{6F198F21-528E-4D87-B918-B9353C19B96D}"/>
               </a:ext>
             </a:extLst>
           </p:cNvPr>
@@ -12991,7 +13275,7 @@
           <p:cNvPr id="21" name="">
             <a:extLst xmlns:a="http://schemas.openxmlformats.org/drawingml/2006/main">
               <a:ext uri="{FF2B5EF4-FFF2-40B4-BE49-F238E27FC236}">
-                <a16:creationId xmlns:a16="http://schemas.microsoft.com/office/drawing/2014/main" id="{063BB609-88D4-4759-AA64-E401A6B648B5}"/>
+                <a16:creationId xmlns:a16="http://schemas.microsoft.com/office/drawing/2014/main" id="{43B14417-CD30-48FE-86B0-DBD5F6EC3A76}"/>
               </a:ext>
             </a:extLst>
           </p:cNvPr>
@@ -13024,7 +13308,7 @@
           <p:cNvPr id="22" name="">
             <a:extLst xmlns:a="http://schemas.openxmlformats.org/drawingml/2006/main">
               <a:ext uri="{FF2B5EF4-FFF2-40B4-BE49-F238E27FC236}">
-                <a16:creationId xmlns:a16="http://schemas.microsoft.com/office/drawing/2014/main" id="{1941FB3B-0ECC-4FA0-B431-73E5F74B1E63}"/>
+                <a16:creationId xmlns:a16="http://schemas.microsoft.com/office/drawing/2014/main" id="{D6876CEB-27A0-40F8-B388-1223C508818C}"/>
               </a:ext>
             </a:extLst>
           </p:cNvPr>
@@ -13088,7 +13372,7 @@
           <p:cNvPr id="23" name="">
             <a:extLst xmlns:a="http://schemas.openxmlformats.org/drawingml/2006/main">
               <a:ext uri="{FF2B5EF4-FFF2-40B4-BE49-F238E27FC236}">
-                <a16:creationId xmlns:a16="http://schemas.microsoft.com/office/drawing/2014/main" id="{A7AEE761-BB4B-40BF-B7B5-3DF89F4113E8}"/>
+                <a16:creationId xmlns:a16="http://schemas.microsoft.com/office/drawing/2014/main" id="{299E5746-5B23-4988-8A8A-1306B7995096}"/>
               </a:ext>
             </a:extLst>
           </p:cNvPr>
@@ -13152,7 +13436,7 @@
           <p:cNvPr id="24" name="">
             <a:extLst xmlns:a="http://schemas.openxmlformats.org/drawingml/2006/main">
               <a:ext uri="{FF2B5EF4-FFF2-40B4-BE49-F238E27FC236}">
-                <a16:creationId xmlns:a16="http://schemas.microsoft.com/office/drawing/2014/main" id="{A75DDB64-B438-4BEA-B979-8810A566F3C9}"/>
+                <a16:creationId xmlns:a16="http://schemas.microsoft.com/office/drawing/2014/main" id="{C82C7CE4-7173-403B-AC6A-6BF831EBEC93}"/>
               </a:ext>
             </a:extLst>
           </p:cNvPr>
@@ -13189,7 +13473,7 @@
           <p:cNvPr id="25" name="">
             <a:extLst xmlns:a="http://schemas.openxmlformats.org/drawingml/2006/main">
               <a:ext uri="{FF2B5EF4-FFF2-40B4-BE49-F238E27FC236}">
-                <a16:creationId xmlns:a16="http://schemas.microsoft.com/office/drawing/2014/main" id="{F9174093-766F-4876-9DDE-1895934E2EFE}"/>
+                <a16:creationId xmlns:a16="http://schemas.microsoft.com/office/drawing/2014/main" id="{7EDB90F5-658C-44AC-A6FF-F51EA5901509}"/>
               </a:ext>
             </a:extLst>
           </p:cNvPr>
@@ -13253,7 +13537,7 @@
           <p:cNvPr id="26" name="">
             <a:extLst xmlns:a="http://schemas.openxmlformats.org/drawingml/2006/main">
               <a:ext uri="{FF2B5EF4-FFF2-40B4-BE49-F238E27FC236}">
-                <a16:creationId xmlns:a16="http://schemas.microsoft.com/office/drawing/2014/main" id="{FAA83456-519A-4072-B16F-AA63CFD8B48B}"/>
+                <a16:creationId xmlns:a16="http://schemas.microsoft.com/office/drawing/2014/main" id="{4CA17BBB-0323-423B-B85C-E450B8D09401}"/>
               </a:ext>
             </a:extLst>
           </p:cNvPr>
@@ -13290,7 +13574,7 @@
           <p:cNvPr id="27" name="">
             <a:extLst xmlns:a="http://schemas.openxmlformats.org/drawingml/2006/main">
               <a:ext uri="{FF2B5EF4-FFF2-40B4-BE49-F238E27FC236}">
-                <a16:creationId xmlns:a16="http://schemas.microsoft.com/office/drawing/2014/main" id="{6ABFB2BC-275C-4215-9573-6DCA9E51D823}"/>
+                <a16:creationId xmlns:a16="http://schemas.microsoft.com/office/drawing/2014/main" id="{B4E7678B-8513-46FB-A238-DFDE55C8AB98}"/>
               </a:ext>
             </a:extLst>
           </p:cNvPr>
@@ -13354,7 +13638,7 @@
           <p:cNvPr id="28" name="">
             <a:extLst xmlns:a="http://schemas.openxmlformats.org/drawingml/2006/main">
               <a:ext uri="{FF2B5EF4-FFF2-40B4-BE49-F238E27FC236}">
-                <a16:creationId xmlns:a16="http://schemas.microsoft.com/office/drawing/2014/main" id="{9EB2CC38-66D4-4D3B-AA50-5737E3CB6D91}"/>
+                <a16:creationId xmlns:a16="http://schemas.microsoft.com/office/drawing/2014/main" id="{221E48D1-8020-4165-B7CC-C09E4734CB94}"/>
               </a:ext>
             </a:extLst>
           </p:cNvPr>
@@ -13391,7 +13675,7 @@
           <p:cNvPr id="29" name="">
             <a:extLst xmlns:a="http://schemas.openxmlformats.org/drawingml/2006/main">
               <a:ext uri="{FF2B5EF4-FFF2-40B4-BE49-F238E27FC236}">
-                <a16:creationId xmlns:a16="http://schemas.microsoft.com/office/drawing/2014/main" id="{A919E877-F5E9-417A-94F9-EB1D572A6261}"/>
+                <a16:creationId xmlns:a16="http://schemas.microsoft.com/office/drawing/2014/main" id="{D9F16102-8A56-4F65-8732-6311ED2DA21F}"/>
               </a:ext>
             </a:extLst>
           </p:cNvPr>
@@ -13455,7 +13739,7 @@
           <p:cNvPr id="30" name="">
             <a:extLst xmlns:a="http://schemas.openxmlformats.org/drawingml/2006/main">
               <a:ext uri="{FF2B5EF4-FFF2-40B4-BE49-F238E27FC236}">
-                <a16:creationId xmlns:a16="http://schemas.microsoft.com/office/drawing/2014/main" id="{449AB574-59A4-49A7-BF76-7B168908B7CE}"/>
+                <a16:creationId xmlns:a16="http://schemas.microsoft.com/office/drawing/2014/main" id="{75D62A92-BDD1-45C9-8EBD-0F4B270F8D4D}"/>
               </a:ext>
             </a:extLst>
           </p:cNvPr>
@@ -13492,7 +13776,7 @@
           <p:cNvPr id="31" name="">
             <a:extLst xmlns:a="http://schemas.openxmlformats.org/drawingml/2006/main">
               <a:ext uri="{FF2B5EF4-FFF2-40B4-BE49-F238E27FC236}">
-                <a16:creationId xmlns:a16="http://schemas.microsoft.com/office/drawing/2014/main" id="{21CB8E6B-0EFD-4912-AB5C-0B72417A1EEF}"/>
+                <a16:creationId xmlns:a16="http://schemas.microsoft.com/office/drawing/2014/main" id="{0252FF7C-3A45-4EF9-9FD5-732DC2B24630}"/>
               </a:ext>
             </a:extLst>
           </p:cNvPr>
@@ -13556,7 +13840,7 @@
           <p:cNvPr id="32" name="">
             <a:extLst xmlns:a="http://schemas.openxmlformats.org/drawingml/2006/main">
               <a:ext uri="{FF2B5EF4-FFF2-40B4-BE49-F238E27FC236}">
-                <a16:creationId xmlns:a16="http://schemas.microsoft.com/office/drawing/2014/main" id="{5A49B2F2-5831-4C0E-A155-99D7E270B2F5}"/>
+                <a16:creationId xmlns:a16="http://schemas.microsoft.com/office/drawing/2014/main" id="{9F1E69D4-9616-45ED-86D9-8181448BF7D4}"/>
               </a:ext>
             </a:extLst>
           </p:cNvPr>
@@ -13620,7 +13904,7 @@
           <p:cNvPr id="33" name="">
             <a:extLst xmlns:a="http://schemas.openxmlformats.org/drawingml/2006/main">
               <a:ext uri="{FF2B5EF4-FFF2-40B4-BE49-F238E27FC236}">
-                <a16:creationId xmlns:a16="http://schemas.microsoft.com/office/drawing/2014/main" id="{17525673-F677-40BC-9A2B-5D405FE12B1F}"/>
+                <a16:creationId xmlns:a16="http://schemas.microsoft.com/office/drawing/2014/main" id="{278F1D43-5E1A-4F62-B09B-540283613143}"/>
               </a:ext>
             </a:extLst>
           </p:cNvPr>
@@ -13684,7 +13968,7 @@
           <p:cNvPr id="34" name="">
             <a:extLst xmlns:a="http://schemas.openxmlformats.org/drawingml/2006/main">
               <a:ext uri="{FF2B5EF4-FFF2-40B4-BE49-F238E27FC236}">
-                <a16:creationId xmlns:a16="http://schemas.microsoft.com/office/drawing/2014/main" id="{F0646475-C7EA-4AED-9015-5E0C599613FB}"/>
+                <a16:creationId xmlns:a16="http://schemas.microsoft.com/office/drawing/2014/main" id="{84E2138E-1635-4E81-ACB9-EC2342D7EB6E}"/>
               </a:ext>
             </a:extLst>
           </p:cNvPr>
@@ -13746,7 +14030,7 @@
     </p:spTree>
     <p:extLst>
       <p:ext uri="{BB962C8B-B14F-4D97-AF65-F5344CB8AC3E}">
-        <p14:creationId xmlns:p14="http://schemas.microsoft.com/office/powerpoint/2010/main" val="1843025121"/>
+        <p14:creationId xmlns:p14="http://schemas.microsoft.com/office/powerpoint/2010/main" val="593374135"/>
       </p:ext>
     </p:extLst>
   </p:cSld>
@@ -13770,7 +14054,7 @@
           <p:cNvPr id="1" name="">
             <a:extLst xmlns:a="http://schemas.openxmlformats.org/drawingml/2006/main">
               <a:ext uri="{FF2B5EF4-FFF2-40B4-BE49-F238E27FC236}">
-                <a16:creationId xmlns:a16="http://schemas.microsoft.com/office/drawing/2014/main" id="{1AD07ED9-544A-4B1A-AED1-F6BDE3029DB4}"/>
+                <a16:creationId xmlns:a16="http://schemas.microsoft.com/office/drawing/2014/main" id="{D44FA16C-FEC6-405A-9E95-1679CCDF95AF}"/>
               </a:ext>
             </a:extLst>
           </p:cNvPr>
@@ -13805,7 +14089,7 @@
           <p:cNvPr id="2" name="">
             <a:extLst xmlns:a="http://schemas.openxmlformats.org/drawingml/2006/main">
               <a:ext uri="{FF2B5EF4-FFF2-40B4-BE49-F238E27FC236}">
-                <a16:creationId xmlns:a16="http://schemas.microsoft.com/office/drawing/2014/main" id="{B35834CB-2E56-40E2-884D-C092BAD303A7}"/>
+                <a16:creationId xmlns:a16="http://schemas.microsoft.com/office/drawing/2014/main" id="{166BFA17-A6FF-43D7-B347-92C4A2CCD8EC}"/>
               </a:ext>
             </a:extLst>
           </p:cNvPr>
@@ -13869,7 +14153,7 @@
           <p:cNvPr id="3" name="">
             <a:extLst xmlns:a="http://schemas.openxmlformats.org/drawingml/2006/main">
               <a:ext uri="{FF2B5EF4-FFF2-40B4-BE49-F238E27FC236}">
-                <a16:creationId xmlns:a16="http://schemas.microsoft.com/office/drawing/2014/main" id="{50F5081B-51F2-40F0-92CC-D4C1AA0DA24D}"/>
+                <a16:creationId xmlns:a16="http://schemas.microsoft.com/office/drawing/2014/main" id="{EC3CB5B9-1ADC-4AC5-AA5F-A7644717FB9B}"/>
               </a:ext>
             </a:extLst>
           </p:cNvPr>
@@ -13904,7 +14188,7 @@
           <p:cNvPr id="4" name="">
             <a:extLst xmlns:a="http://schemas.openxmlformats.org/drawingml/2006/main">
               <a:ext uri="{FF2B5EF4-FFF2-40B4-BE49-F238E27FC236}">
-                <a16:creationId xmlns:a16="http://schemas.microsoft.com/office/drawing/2014/main" id="{E55A34C8-0CFC-4B89-B946-A03533575B2A}"/>
+                <a16:creationId xmlns:a16="http://schemas.microsoft.com/office/drawing/2014/main" id="{67C58FC9-07EA-4C65-89FC-9D138E865C92}"/>
               </a:ext>
             </a:extLst>
           </p:cNvPr>
@@ -13968,7 +14252,7 @@
           <p:cNvPr id="5" name="">
             <a:extLst xmlns:a="http://schemas.openxmlformats.org/drawingml/2006/main">
               <a:ext uri="{FF2B5EF4-FFF2-40B4-BE49-F238E27FC236}">
-                <a16:creationId xmlns:a16="http://schemas.microsoft.com/office/drawing/2014/main" id="{519BA8D1-C6AB-446F-8018-614E97051633}"/>
+                <a16:creationId xmlns:a16="http://schemas.microsoft.com/office/drawing/2014/main" id="{0B0456E1-6225-4DDD-8BF1-2FBE0B17FF8E}"/>
               </a:ext>
             </a:extLst>
           </p:cNvPr>
@@ -14032,7 +14316,7 @@
           <p:cNvPr id="6" name="">
             <a:extLst xmlns:a="http://schemas.openxmlformats.org/drawingml/2006/main">
               <a:ext uri="{FF2B5EF4-FFF2-40B4-BE49-F238E27FC236}">
-                <a16:creationId xmlns:a16="http://schemas.microsoft.com/office/drawing/2014/main" id="{D2669CB5-B89C-4054-9C1B-64B47EE1BF11}"/>
+                <a16:creationId xmlns:a16="http://schemas.microsoft.com/office/drawing/2014/main" id="{1BE8BC89-E8C9-4E12-ADB9-14A8210C63FB}"/>
               </a:ext>
             </a:extLst>
           </p:cNvPr>
@@ -14065,7 +14349,7 @@
           <p:cNvPr id="7" name="">
             <a:extLst xmlns:a="http://schemas.openxmlformats.org/drawingml/2006/main">
               <a:ext uri="{FF2B5EF4-FFF2-40B4-BE49-F238E27FC236}">
-                <a16:creationId xmlns:a16="http://schemas.microsoft.com/office/drawing/2014/main" id="{323BBDEA-FFDD-4E06-9DB8-9EA8A5AC5D7D}"/>
+                <a16:creationId xmlns:a16="http://schemas.microsoft.com/office/drawing/2014/main" id="{74452532-A2B4-4484-9F64-3EED23E993F7}"/>
               </a:ext>
             </a:extLst>
           </p:cNvPr>
@@ -14129,7 +14413,7 @@
           <p:cNvPr id="8" name="">
             <a:extLst xmlns:a="http://schemas.openxmlformats.org/drawingml/2006/main">
               <a:ext uri="{FF2B5EF4-FFF2-40B4-BE49-F238E27FC236}">
-                <a16:creationId xmlns:a16="http://schemas.microsoft.com/office/drawing/2014/main" id="{C02C1662-4BF6-44EF-BB60-A0A47BD7871D}"/>
+                <a16:creationId xmlns:a16="http://schemas.microsoft.com/office/drawing/2014/main" id="{66671B61-C086-4548-B24F-B1B73A34D8F6}"/>
               </a:ext>
             </a:extLst>
           </p:cNvPr>
@@ -14162,7 +14446,7 @@
           <p:cNvPr id="9" name="">
             <a:extLst xmlns:a="http://schemas.openxmlformats.org/drawingml/2006/main">
               <a:ext uri="{FF2B5EF4-FFF2-40B4-BE49-F238E27FC236}">
-                <a16:creationId xmlns:a16="http://schemas.microsoft.com/office/drawing/2014/main" id="{15DB7725-B960-44D2-B2A2-D9E901751177}"/>
+                <a16:creationId xmlns:a16="http://schemas.microsoft.com/office/drawing/2014/main" id="{6C158F2A-CACB-4B40-9CF3-D121E7E7F801}"/>
               </a:ext>
             </a:extLst>
           </p:cNvPr>
@@ -14226,7 +14510,7 @@
           <p:cNvPr id="10" name="">
             <a:extLst xmlns:a="http://schemas.openxmlformats.org/drawingml/2006/main">
               <a:ext uri="{FF2B5EF4-FFF2-40B4-BE49-F238E27FC236}">
-                <a16:creationId xmlns:a16="http://schemas.microsoft.com/office/drawing/2014/main" id="{9C0E0243-B1BD-43CA-BC64-78B05471FC30}"/>
+                <a16:creationId xmlns:a16="http://schemas.microsoft.com/office/drawing/2014/main" id="{095EE775-B780-40AB-90A8-04D78E55DC8B}"/>
               </a:ext>
             </a:extLst>
           </p:cNvPr>
@@ -14259,7 +14543,7 @@
           <p:cNvPr id="11" name="">
             <a:extLst xmlns:a="http://schemas.openxmlformats.org/drawingml/2006/main">
               <a:ext uri="{FF2B5EF4-FFF2-40B4-BE49-F238E27FC236}">
-                <a16:creationId xmlns:a16="http://schemas.microsoft.com/office/drawing/2014/main" id="{93B53132-DC31-46D7-9BC6-FD585AE020F4}"/>
+                <a16:creationId xmlns:a16="http://schemas.microsoft.com/office/drawing/2014/main" id="{E90DC828-A8E6-4271-B112-1CEECA20030A}"/>
               </a:ext>
             </a:extLst>
           </p:cNvPr>
@@ -14323,7 +14607,7 @@
           <p:cNvPr id="12" name="">
             <a:extLst xmlns:a="http://schemas.openxmlformats.org/drawingml/2006/main">
               <a:ext uri="{FF2B5EF4-FFF2-40B4-BE49-F238E27FC236}">
-                <a16:creationId xmlns:a16="http://schemas.microsoft.com/office/drawing/2014/main" id="{6B339E29-0824-444C-8D2C-F46E84377350}"/>
+                <a16:creationId xmlns:a16="http://schemas.microsoft.com/office/drawing/2014/main" id="{C9D88576-E1C0-427D-AB9D-80489FC5D5A1}"/>
               </a:ext>
             </a:extLst>
           </p:cNvPr>
@@ -14356,7 +14640,7 @@
           <p:cNvPr id="13" name="">
             <a:extLst xmlns:a="http://schemas.openxmlformats.org/drawingml/2006/main">
               <a:ext uri="{FF2B5EF4-FFF2-40B4-BE49-F238E27FC236}">
-                <a16:creationId xmlns:a16="http://schemas.microsoft.com/office/drawing/2014/main" id="{C6F716EC-38AD-47C9-8892-4E44D37AC80B}"/>
+                <a16:creationId xmlns:a16="http://schemas.microsoft.com/office/drawing/2014/main" id="{795AEB98-BF05-45FF-8F6D-0FC47A8F0FF0}"/>
               </a:ext>
             </a:extLst>
           </p:cNvPr>
@@ -14420,7 +14704,7 @@
           <p:cNvPr id="14" name="">
             <a:extLst xmlns:a="http://schemas.openxmlformats.org/drawingml/2006/main">
               <a:ext uri="{FF2B5EF4-FFF2-40B4-BE49-F238E27FC236}">
-                <a16:creationId xmlns:a16="http://schemas.microsoft.com/office/drawing/2014/main" id="{AF1D0873-7E5F-4C37-B5DB-7F44E37E54A4}"/>
+                <a16:creationId xmlns:a16="http://schemas.microsoft.com/office/drawing/2014/main" id="{DFD03D16-CB77-4742-8AA6-AC308CFAABA8}"/>
               </a:ext>
             </a:extLst>
           </p:cNvPr>
@@ -14453,7 +14737,7 @@
           <p:cNvPr id="15" name="">
             <a:extLst xmlns:a="http://schemas.openxmlformats.org/drawingml/2006/main">
               <a:ext uri="{FF2B5EF4-FFF2-40B4-BE49-F238E27FC236}">
-                <a16:creationId xmlns:a16="http://schemas.microsoft.com/office/drawing/2014/main" id="{625018DB-CA26-41F3-8159-39A7AB6168EB}"/>
+                <a16:creationId xmlns:a16="http://schemas.microsoft.com/office/drawing/2014/main" id="{06AE4F18-403E-44AA-8071-360CE67A5DD3}"/>
               </a:ext>
             </a:extLst>
           </p:cNvPr>
@@ -14517,7 +14801,7 @@
           <p:cNvPr id="16" name="">
             <a:extLst xmlns:a="http://schemas.openxmlformats.org/drawingml/2006/main">
               <a:ext uri="{FF2B5EF4-FFF2-40B4-BE49-F238E27FC236}">
-                <a16:creationId xmlns:a16="http://schemas.microsoft.com/office/drawing/2014/main" id="{EF2FE938-73D4-4D8E-943E-07F8B2885F36}"/>
+                <a16:creationId xmlns:a16="http://schemas.microsoft.com/office/drawing/2014/main" id="{3D8AC601-5786-400D-850C-0367AF44BB6F}"/>
               </a:ext>
             </a:extLst>
           </p:cNvPr>
@@ -14550,7 +14834,7 @@
           <p:cNvPr id="17" name="">
             <a:extLst xmlns:a="http://schemas.openxmlformats.org/drawingml/2006/main">
               <a:ext uri="{FF2B5EF4-FFF2-40B4-BE49-F238E27FC236}">
-                <a16:creationId xmlns:a16="http://schemas.microsoft.com/office/drawing/2014/main" id="{877BB075-9CDB-4AF0-BF27-D40735711E8B}"/>
+                <a16:creationId xmlns:a16="http://schemas.microsoft.com/office/drawing/2014/main" id="{E1D11918-1AAC-45D3-8D3B-718101D8F7EE}"/>
               </a:ext>
             </a:extLst>
           </p:cNvPr>
@@ -14614,7 +14898,7 @@
           <p:cNvPr id="18" name="">
             <a:extLst xmlns:a="http://schemas.openxmlformats.org/drawingml/2006/main">
               <a:ext uri="{FF2B5EF4-FFF2-40B4-BE49-F238E27FC236}">
-                <a16:creationId xmlns:a16="http://schemas.microsoft.com/office/drawing/2014/main" id="{760C87D0-FAE5-464F-BF30-E30CEEB74CAA}"/>
+                <a16:creationId xmlns:a16="http://schemas.microsoft.com/office/drawing/2014/main" id="{D83AA74E-84B2-4FDF-8D74-3823983FEDF8}"/>
               </a:ext>
             </a:extLst>
           </p:cNvPr>
@@ -14647,7 +14931,7 @@
           <p:cNvPr id="19" name="">
             <a:extLst xmlns:a="http://schemas.openxmlformats.org/drawingml/2006/main">
               <a:ext uri="{FF2B5EF4-FFF2-40B4-BE49-F238E27FC236}">
-                <a16:creationId xmlns:a16="http://schemas.microsoft.com/office/drawing/2014/main" id="{EDECEB4F-47C8-4E49-8AE2-7627AC2B9E3F}"/>
+                <a16:creationId xmlns:a16="http://schemas.microsoft.com/office/drawing/2014/main" id="{717C7C54-E1F1-49AA-BC72-441DA08B8287}"/>
               </a:ext>
             </a:extLst>
           </p:cNvPr>
@@ -14711,7 +14995,7 @@
           <p:cNvPr id="20" name="">
             <a:extLst xmlns:a="http://schemas.openxmlformats.org/drawingml/2006/main">
               <a:ext uri="{FF2B5EF4-FFF2-40B4-BE49-F238E27FC236}">
-                <a16:creationId xmlns:a16="http://schemas.microsoft.com/office/drawing/2014/main" id="{21C4A199-5411-47BB-B021-F714B40069ED}"/>
+                <a16:creationId xmlns:a16="http://schemas.microsoft.com/office/drawing/2014/main" id="{B8B9F00D-4569-43CB-8BE5-80A6FBEACDC0}"/>
               </a:ext>
             </a:extLst>
           </p:cNvPr>
@@ -14744,7 +15028,7 @@
           <p:cNvPr id="21" name="">
             <a:extLst xmlns:a="http://schemas.openxmlformats.org/drawingml/2006/main">
               <a:ext uri="{FF2B5EF4-FFF2-40B4-BE49-F238E27FC236}">
-                <a16:creationId xmlns:a16="http://schemas.microsoft.com/office/drawing/2014/main" id="{328F389C-8C6C-4C5C-B1BB-1BBF3890AEC9}"/>
+                <a16:creationId xmlns:a16="http://schemas.microsoft.com/office/drawing/2014/main" id="{6A9A2FA0-90C8-4688-B09A-08DC14D76D43}"/>
               </a:ext>
             </a:extLst>
           </p:cNvPr>
@@ -14808,7 +15092,7 @@
           <p:cNvPr id="22" name="">
             <a:extLst xmlns:a="http://schemas.openxmlformats.org/drawingml/2006/main">
               <a:ext uri="{FF2B5EF4-FFF2-40B4-BE49-F238E27FC236}">
-                <a16:creationId xmlns:a16="http://schemas.microsoft.com/office/drawing/2014/main" id="{96583F21-CFAE-4801-AB82-52B01255CEC3}"/>
+                <a16:creationId xmlns:a16="http://schemas.microsoft.com/office/drawing/2014/main" id="{65B33DFC-0EF2-4477-A985-EA78EC8BAB81}"/>
               </a:ext>
             </a:extLst>
           </p:cNvPr>
@@ -14841,7 +15125,7 @@
           <p:cNvPr id="23" name="">
             <a:extLst xmlns:a="http://schemas.openxmlformats.org/drawingml/2006/main">
               <a:ext uri="{FF2B5EF4-FFF2-40B4-BE49-F238E27FC236}">
-                <a16:creationId xmlns:a16="http://schemas.microsoft.com/office/drawing/2014/main" id="{265E92F3-32FF-4E09-B102-8272E5AEDB2E}"/>
+                <a16:creationId xmlns:a16="http://schemas.microsoft.com/office/drawing/2014/main" id="{BD40D73E-24E6-457E-94AB-70B076BC4215}"/>
               </a:ext>
             </a:extLst>
           </p:cNvPr>
@@ -14905,7 +15189,7 @@
           <p:cNvPr id="24" name="">
             <a:extLst xmlns:a="http://schemas.openxmlformats.org/drawingml/2006/main">
               <a:ext uri="{FF2B5EF4-FFF2-40B4-BE49-F238E27FC236}">
-                <a16:creationId xmlns:a16="http://schemas.microsoft.com/office/drawing/2014/main" id="{6B65EE89-4A90-4FAD-9C08-CEFAD50D04C6}"/>
+                <a16:creationId xmlns:a16="http://schemas.microsoft.com/office/drawing/2014/main" id="{B8E8BAEF-0AE9-469D-8120-B7042FC907B5}"/>
               </a:ext>
             </a:extLst>
           </p:cNvPr>
@@ -14938,7 +15222,7 @@
           <p:cNvPr id="25" name="">
             <a:extLst xmlns:a="http://schemas.openxmlformats.org/drawingml/2006/main">
               <a:ext uri="{FF2B5EF4-FFF2-40B4-BE49-F238E27FC236}">
-                <a16:creationId xmlns:a16="http://schemas.microsoft.com/office/drawing/2014/main" id="{7F729D66-1546-4014-B203-2D298C8C88B8}"/>
+                <a16:creationId xmlns:a16="http://schemas.microsoft.com/office/drawing/2014/main" id="{B4BB447E-6208-4B82-9D69-6B586CC78111}"/>
               </a:ext>
             </a:extLst>
           </p:cNvPr>
@@ -15002,7 +15286,7 @@
           <p:cNvPr id="26" name="">
             <a:extLst xmlns:a="http://schemas.openxmlformats.org/drawingml/2006/main">
               <a:ext uri="{FF2B5EF4-FFF2-40B4-BE49-F238E27FC236}">
-                <a16:creationId xmlns:a16="http://schemas.microsoft.com/office/drawing/2014/main" id="{45CF7F78-DA46-461D-AD39-ED56C44921A0}"/>
+                <a16:creationId xmlns:a16="http://schemas.microsoft.com/office/drawing/2014/main" id="{3551D888-03E5-47D8-A537-B63C8D2E1AE4}"/>
               </a:ext>
             </a:extLst>
           </p:cNvPr>
@@ -15035,7 +15319,7 @@
           <p:cNvPr id="27" name="">
             <a:extLst xmlns:a="http://schemas.openxmlformats.org/drawingml/2006/main">
               <a:ext uri="{FF2B5EF4-FFF2-40B4-BE49-F238E27FC236}">
-                <a16:creationId xmlns:a16="http://schemas.microsoft.com/office/drawing/2014/main" id="{AF34B21A-6659-4E50-A872-90CE2407040B}"/>
+                <a16:creationId xmlns:a16="http://schemas.microsoft.com/office/drawing/2014/main" id="{1D625AAD-D1E6-475D-B11B-5B598A7A2ED2}"/>
               </a:ext>
             </a:extLst>
           </p:cNvPr>
@@ -15099,7 +15383,7 @@
           <p:cNvPr id="28" name="">
             <a:extLst xmlns:a="http://schemas.openxmlformats.org/drawingml/2006/main">
               <a:ext uri="{FF2B5EF4-FFF2-40B4-BE49-F238E27FC236}">
-                <a16:creationId xmlns:a16="http://schemas.microsoft.com/office/drawing/2014/main" id="{8AC1384E-59E5-4DD4-9156-328AA9D0EAD1}"/>
+                <a16:creationId xmlns:a16="http://schemas.microsoft.com/office/drawing/2014/main" id="{26C8979A-4673-4F0E-913E-F0E9EB446820}"/>
               </a:ext>
             </a:extLst>
           </p:cNvPr>
@@ -15132,7 +15416,7 @@
           <p:cNvPr id="29" name="">
             <a:extLst xmlns:a="http://schemas.openxmlformats.org/drawingml/2006/main">
               <a:ext uri="{FF2B5EF4-FFF2-40B4-BE49-F238E27FC236}">
-                <a16:creationId xmlns:a16="http://schemas.microsoft.com/office/drawing/2014/main" id="{9384952E-FD8B-4C90-B855-43DC04739481}"/>
+                <a16:creationId xmlns:a16="http://schemas.microsoft.com/office/drawing/2014/main" id="{112008FA-78E8-4A81-B853-7C971DF57E04}"/>
               </a:ext>
             </a:extLst>
           </p:cNvPr>
@@ -15196,7 +15480,7 @@
           <p:cNvPr id="30" name="">
             <a:extLst xmlns:a="http://schemas.openxmlformats.org/drawingml/2006/main">
               <a:ext uri="{FF2B5EF4-FFF2-40B4-BE49-F238E27FC236}">
-                <a16:creationId xmlns:a16="http://schemas.microsoft.com/office/drawing/2014/main" id="{35025CBF-3FD0-4C49-827D-637050803F8C}"/>
+                <a16:creationId xmlns:a16="http://schemas.microsoft.com/office/drawing/2014/main" id="{6B8B1BB8-401D-49D4-AC2B-0D21A0A83C6A}"/>
               </a:ext>
             </a:extLst>
           </p:cNvPr>
@@ -15229,7 +15513,7 @@
           <p:cNvPr id="31" name="">
             <a:extLst xmlns:a="http://schemas.openxmlformats.org/drawingml/2006/main">
               <a:ext uri="{FF2B5EF4-FFF2-40B4-BE49-F238E27FC236}">
-                <a16:creationId xmlns:a16="http://schemas.microsoft.com/office/drawing/2014/main" id="{195055A1-79F4-4825-BD8F-83FD3F0C9FC1}"/>
+                <a16:creationId xmlns:a16="http://schemas.microsoft.com/office/drawing/2014/main" id="{3022703E-C9F4-4C0E-906D-FF34411A5AB3}"/>
               </a:ext>
             </a:extLst>
           </p:cNvPr>
@@ -15293,7 +15577,7 @@
           <p:cNvPr id="32" name="">
             <a:extLst xmlns:a="http://schemas.openxmlformats.org/drawingml/2006/main">
               <a:ext uri="{FF2B5EF4-FFF2-40B4-BE49-F238E27FC236}">
-                <a16:creationId xmlns:a16="http://schemas.microsoft.com/office/drawing/2014/main" id="{7D57D42B-B916-40B9-9749-314606A1533C}"/>
+                <a16:creationId xmlns:a16="http://schemas.microsoft.com/office/drawing/2014/main" id="{EAED7A9A-45A4-4EA7-96C7-7B748C38935E}"/>
               </a:ext>
             </a:extLst>
           </p:cNvPr>
@@ -15326,7 +15610,7 @@
           <p:cNvPr id="33" name="">
             <a:extLst xmlns:a="http://schemas.openxmlformats.org/drawingml/2006/main">
               <a:ext uri="{FF2B5EF4-FFF2-40B4-BE49-F238E27FC236}">
-                <a16:creationId xmlns:a16="http://schemas.microsoft.com/office/drawing/2014/main" id="{8CD66563-506A-4635-B570-12FFB6084067}"/>
+                <a16:creationId xmlns:a16="http://schemas.microsoft.com/office/drawing/2014/main" id="{29F85BB4-0C7C-4001-9CFF-550A96EBE4BC}"/>
               </a:ext>
             </a:extLst>
           </p:cNvPr>
@@ -15390,7 +15674,7 @@
           <p:cNvPr id="34" name="">
             <a:extLst xmlns:a="http://schemas.openxmlformats.org/drawingml/2006/main">
               <a:ext uri="{FF2B5EF4-FFF2-40B4-BE49-F238E27FC236}">
-                <a16:creationId xmlns:a16="http://schemas.microsoft.com/office/drawing/2014/main" id="{BE1B2BD5-99CB-4CA8-BAE7-87CADEEA1312}"/>
+                <a16:creationId xmlns:a16="http://schemas.microsoft.com/office/drawing/2014/main" id="{BC358896-DA10-49CB-A044-1364233D58BC}"/>
               </a:ext>
             </a:extLst>
           </p:cNvPr>
@@ -15423,7 +15707,7 @@
           <p:cNvPr id="35" name="">
             <a:extLst xmlns:a="http://schemas.openxmlformats.org/drawingml/2006/main">
               <a:ext uri="{FF2B5EF4-FFF2-40B4-BE49-F238E27FC236}">
-                <a16:creationId xmlns:a16="http://schemas.microsoft.com/office/drawing/2014/main" id="{B974CE0E-C2B0-420F-8108-7B7AC9E4277E}"/>
+                <a16:creationId xmlns:a16="http://schemas.microsoft.com/office/drawing/2014/main" id="{F39CDD9E-4A68-4C1D-B235-FC2336B81F0C}"/>
               </a:ext>
             </a:extLst>
           </p:cNvPr>
@@ -15487,7 +15771,7 @@
           <p:cNvPr id="36" name="">
             <a:extLst xmlns:a="http://schemas.openxmlformats.org/drawingml/2006/main">
               <a:ext uri="{FF2B5EF4-FFF2-40B4-BE49-F238E27FC236}">
-                <a16:creationId xmlns:a16="http://schemas.microsoft.com/office/drawing/2014/main" id="{F3AEAA09-0B48-48AF-A9C1-6C3FC3813888}"/>
+                <a16:creationId xmlns:a16="http://schemas.microsoft.com/office/drawing/2014/main" id="{61CD2153-5047-4A79-B173-FDE5DA0EB4F2}"/>
               </a:ext>
             </a:extLst>
           </p:cNvPr>
@@ -15520,7 +15804,7 @@
           <p:cNvPr id="37" name="">
             <a:extLst xmlns:a="http://schemas.openxmlformats.org/drawingml/2006/main">
               <a:ext uri="{FF2B5EF4-FFF2-40B4-BE49-F238E27FC236}">
-                <a16:creationId xmlns:a16="http://schemas.microsoft.com/office/drawing/2014/main" id="{44F34F70-ADEB-49FE-B8C6-7FF86F1427DF}"/>
+                <a16:creationId xmlns:a16="http://schemas.microsoft.com/office/drawing/2014/main" id="{261053B4-5EB7-4522-B4C9-123AE06AAD01}"/>
               </a:ext>
             </a:extLst>
           </p:cNvPr>
@@ -15584,7 +15868,7 @@
           <p:cNvPr id="38" name="">
             <a:extLst xmlns:a="http://schemas.openxmlformats.org/drawingml/2006/main">
               <a:ext uri="{FF2B5EF4-FFF2-40B4-BE49-F238E27FC236}">
-                <a16:creationId xmlns:a16="http://schemas.microsoft.com/office/drawing/2014/main" id="{F115A7C8-25D5-4DC8-90B3-2C741C2D29F4}"/>
+                <a16:creationId xmlns:a16="http://schemas.microsoft.com/office/drawing/2014/main" id="{D20DFE40-45D2-414D-A26B-8A75A1F7F5BE}"/>
               </a:ext>
             </a:extLst>
           </p:cNvPr>
@@ -15617,7 +15901,7 @@
           <p:cNvPr id="39" name="">
             <a:extLst xmlns:a="http://schemas.openxmlformats.org/drawingml/2006/main">
               <a:ext uri="{FF2B5EF4-FFF2-40B4-BE49-F238E27FC236}">
-                <a16:creationId xmlns:a16="http://schemas.microsoft.com/office/drawing/2014/main" id="{32756968-CDE5-48FE-ACDB-EB2D7EDC61CA}"/>
+                <a16:creationId xmlns:a16="http://schemas.microsoft.com/office/drawing/2014/main" id="{2C3C2FFE-50FD-430D-9AB2-B040D1D11200}"/>
               </a:ext>
             </a:extLst>
           </p:cNvPr>
@@ -15681,7 +15965,7 @@
           <p:cNvPr id="40" name="">
             <a:extLst xmlns:a="http://schemas.openxmlformats.org/drawingml/2006/main">
               <a:ext uri="{FF2B5EF4-FFF2-40B4-BE49-F238E27FC236}">
-                <a16:creationId xmlns:a16="http://schemas.microsoft.com/office/drawing/2014/main" id="{B5EE13CD-815F-4E38-B7EA-1367F6AC959B}"/>
+                <a16:creationId xmlns:a16="http://schemas.microsoft.com/office/drawing/2014/main" id="{4530F42E-15BF-4262-BE6B-70243ECC9878}"/>
               </a:ext>
             </a:extLst>
           </p:cNvPr>
@@ -15714,7 +15998,7 @@
           <p:cNvPr id="41" name="">
             <a:extLst xmlns:a="http://schemas.openxmlformats.org/drawingml/2006/main">
               <a:ext uri="{FF2B5EF4-FFF2-40B4-BE49-F238E27FC236}">
-                <a16:creationId xmlns:a16="http://schemas.microsoft.com/office/drawing/2014/main" id="{8FF28A6B-B98D-4E09-9EC8-DE59346B7B3D}"/>
+                <a16:creationId xmlns:a16="http://schemas.microsoft.com/office/drawing/2014/main" id="{013C72D8-6131-46A8-A062-A04710EC1AEF}"/>
               </a:ext>
             </a:extLst>
           </p:cNvPr>
@@ -15778,7 +16062,7 @@
           <p:cNvPr id="42" name="">
             <a:extLst xmlns:a="http://schemas.openxmlformats.org/drawingml/2006/main">
               <a:ext uri="{FF2B5EF4-FFF2-40B4-BE49-F238E27FC236}">
-                <a16:creationId xmlns:a16="http://schemas.microsoft.com/office/drawing/2014/main" id="{7020A674-5263-480C-A915-8F011E0EFB71}"/>
+                <a16:creationId xmlns:a16="http://schemas.microsoft.com/office/drawing/2014/main" id="{22F6AF9D-BD00-40FD-B79B-8D2E61C607FA}"/>
               </a:ext>
             </a:extLst>
           </p:cNvPr>
@@ -15811,7 +16095,7 @@
           <p:cNvPr id="43" name="">
             <a:extLst xmlns:a="http://schemas.openxmlformats.org/drawingml/2006/main">
               <a:ext uri="{FF2B5EF4-FFF2-40B4-BE49-F238E27FC236}">
-                <a16:creationId xmlns:a16="http://schemas.microsoft.com/office/drawing/2014/main" id="{33279933-5447-497C-A90F-71B96609A4FB}"/>
+                <a16:creationId xmlns:a16="http://schemas.microsoft.com/office/drawing/2014/main" id="{E054787A-5AAD-475D-93E8-B3EE1D253E18}"/>
               </a:ext>
             </a:extLst>
           </p:cNvPr>
@@ -15875,7 +16159,7 @@
           <p:cNvPr id="44" name="">
             <a:extLst xmlns:a="http://schemas.openxmlformats.org/drawingml/2006/main">
               <a:ext uri="{FF2B5EF4-FFF2-40B4-BE49-F238E27FC236}">
-                <a16:creationId xmlns:a16="http://schemas.microsoft.com/office/drawing/2014/main" id="{63FA22E3-A5F7-410B-86A8-4C0A7A47FF94}"/>
+                <a16:creationId xmlns:a16="http://schemas.microsoft.com/office/drawing/2014/main" id="{5AB43F1A-AB02-47A5-A737-9219A22E634C}"/>
               </a:ext>
             </a:extLst>
           </p:cNvPr>
@@ -15908,7 +16192,7 @@
           <p:cNvPr id="45" name="">
             <a:extLst xmlns:a="http://schemas.openxmlformats.org/drawingml/2006/main">
               <a:ext uri="{FF2B5EF4-FFF2-40B4-BE49-F238E27FC236}">
-                <a16:creationId xmlns:a16="http://schemas.microsoft.com/office/drawing/2014/main" id="{668684A2-FEA4-4827-A4D7-D532518AEA54}"/>
+                <a16:creationId xmlns:a16="http://schemas.microsoft.com/office/drawing/2014/main" id="{3148BD91-8A61-48C0-8CC9-F88F1D15BD76}"/>
               </a:ext>
             </a:extLst>
           </p:cNvPr>
@@ -15972,7 +16256,7 @@
           <p:cNvPr id="46" name="">
             <a:extLst xmlns:a="http://schemas.openxmlformats.org/drawingml/2006/main">
               <a:ext uri="{FF2B5EF4-FFF2-40B4-BE49-F238E27FC236}">
-                <a16:creationId xmlns:a16="http://schemas.microsoft.com/office/drawing/2014/main" id="{6445719A-178B-4FEC-A13E-5144D884397C}"/>
+                <a16:creationId xmlns:a16="http://schemas.microsoft.com/office/drawing/2014/main" id="{BDFA67ED-C2B0-41A3-BC05-E123A4588C01}"/>
               </a:ext>
             </a:extLst>
           </p:cNvPr>
@@ -16034,7 +16318,7 @@
     </p:spTree>
     <p:extLst>
       <p:ext uri="{BB962C8B-B14F-4D97-AF65-F5344CB8AC3E}">
-        <p14:creationId xmlns:p14="http://schemas.microsoft.com/office/powerpoint/2010/main" val="1894394450"/>
+        <p14:creationId xmlns:p14="http://schemas.microsoft.com/office/powerpoint/2010/main" val="1074144324"/>
       </p:ext>
     </p:extLst>
   </p:cSld>
@@ -16058,7 +16342,7 @@
           <p:cNvPr id="1" name="">
             <a:extLst xmlns:a="http://schemas.openxmlformats.org/drawingml/2006/main">
               <a:ext uri="{FF2B5EF4-FFF2-40B4-BE49-F238E27FC236}">
-                <a16:creationId xmlns:a16="http://schemas.microsoft.com/office/drawing/2014/main" id="{1B917C52-9CC8-40D5-A86E-9001D04ABFF9}"/>
+                <a16:creationId xmlns:a16="http://schemas.microsoft.com/office/drawing/2014/main" id="{6630102B-1C1B-4AB5-97BF-CFDE51E7067E}"/>
               </a:ext>
             </a:extLst>
           </p:cNvPr>
@@ -16093,7 +16377,7 @@
           <p:cNvPr id="2" name="">
             <a:extLst xmlns:a="http://schemas.openxmlformats.org/drawingml/2006/main">
               <a:ext uri="{FF2B5EF4-FFF2-40B4-BE49-F238E27FC236}">
-                <a16:creationId xmlns:a16="http://schemas.microsoft.com/office/drawing/2014/main" id="{9F6853D0-8E40-4F93-930A-B66F4A7A7E65}"/>
+                <a16:creationId xmlns:a16="http://schemas.microsoft.com/office/drawing/2014/main" id="{E1B77B04-667A-4BCC-8EE9-CB15EE7FD63A}"/>
               </a:ext>
             </a:extLst>
           </p:cNvPr>
@@ -16157,7 +16441,7 @@
           <p:cNvPr id="3" name="">
             <a:extLst xmlns:a="http://schemas.openxmlformats.org/drawingml/2006/main">
               <a:ext uri="{FF2B5EF4-FFF2-40B4-BE49-F238E27FC236}">
-                <a16:creationId xmlns:a16="http://schemas.microsoft.com/office/drawing/2014/main" id="{F7B522F5-6F3C-4E21-852D-E2CA8E6412B4}"/>
+                <a16:creationId xmlns:a16="http://schemas.microsoft.com/office/drawing/2014/main" id="{E78F1851-AEB8-4178-A755-32EADD0BC427}"/>
               </a:ext>
             </a:extLst>
           </p:cNvPr>
@@ -16192,7 +16476,7 @@
           <p:cNvPr id="4" name="">
             <a:extLst xmlns:a="http://schemas.openxmlformats.org/drawingml/2006/main">
               <a:ext uri="{FF2B5EF4-FFF2-40B4-BE49-F238E27FC236}">
-                <a16:creationId xmlns:a16="http://schemas.microsoft.com/office/drawing/2014/main" id="{9A4BC12C-F5CC-4503-AD61-208F131A8A48}"/>
+                <a16:creationId xmlns:a16="http://schemas.microsoft.com/office/drawing/2014/main" id="{52BB4351-4290-41E0-927E-A7FA1EBFF9E0}"/>
               </a:ext>
             </a:extLst>
           </p:cNvPr>
@@ -16256,7 +16540,7 @@
           <p:cNvPr id="5" name="">
             <a:extLst xmlns:a="http://schemas.openxmlformats.org/drawingml/2006/main">
               <a:ext uri="{FF2B5EF4-FFF2-40B4-BE49-F238E27FC236}">
-                <a16:creationId xmlns:a16="http://schemas.microsoft.com/office/drawing/2014/main" id="{9AFC1C31-8408-4922-8D35-11C4E99EF9C9}"/>
+                <a16:creationId xmlns:a16="http://schemas.microsoft.com/office/drawing/2014/main" id="{6896A059-F7FD-4257-9656-B785EE37897B}"/>
               </a:ext>
             </a:extLst>
           </p:cNvPr>
@@ -16320,7 +16604,7 @@
           <p:cNvPr id="6" name="">
             <a:extLst xmlns:a="http://schemas.openxmlformats.org/drawingml/2006/main">
               <a:ext uri="{FF2B5EF4-FFF2-40B4-BE49-F238E27FC236}">
-                <a16:creationId xmlns:a16="http://schemas.microsoft.com/office/drawing/2014/main" id="{4C98244D-FB55-458E-B9D8-9FD4CA8DADB6}"/>
+                <a16:creationId xmlns:a16="http://schemas.microsoft.com/office/drawing/2014/main" id="{8B090089-D85F-4507-BBCC-CF844B72F96B}"/>
               </a:ext>
             </a:extLst>
           </p:cNvPr>
@@ -16353,7 +16637,7 @@
           <p:cNvPr id="7" name="">
             <a:extLst xmlns:a="http://schemas.openxmlformats.org/drawingml/2006/main">
               <a:ext uri="{FF2B5EF4-FFF2-40B4-BE49-F238E27FC236}">
-                <a16:creationId xmlns:a16="http://schemas.microsoft.com/office/drawing/2014/main" id="{423237DA-FB3E-4D51-8E62-2392D7987688}"/>
+                <a16:creationId xmlns:a16="http://schemas.microsoft.com/office/drawing/2014/main" id="{10C66F81-5793-4C22-A61F-DC7E43E22E3E}"/>
               </a:ext>
             </a:extLst>
           </p:cNvPr>
@@ -16388,7 +16672,7 @@
           <p:cNvPr id="8" name="">
             <a:extLst xmlns:a="http://schemas.openxmlformats.org/drawingml/2006/main">
               <a:ext uri="{FF2B5EF4-FFF2-40B4-BE49-F238E27FC236}">
-                <a16:creationId xmlns:a16="http://schemas.microsoft.com/office/drawing/2014/main" id="{7A91379F-0D5A-4FC4-8B31-7582BC3CFBA1}"/>
+                <a16:creationId xmlns:a16="http://schemas.microsoft.com/office/drawing/2014/main" id="{3323D7CD-CCB3-4A46-B599-28E869364032}"/>
               </a:ext>
             </a:extLst>
           </p:cNvPr>
@@ -16452,7 +16736,7 @@
           <p:cNvPr id="9" name="">
             <a:extLst xmlns:a="http://schemas.openxmlformats.org/drawingml/2006/main">
               <a:ext uri="{FF2B5EF4-FFF2-40B4-BE49-F238E27FC236}">
-                <a16:creationId xmlns:a16="http://schemas.microsoft.com/office/drawing/2014/main" id="{6BEFC9B6-3E0E-482C-B6BC-D0D14B759625}"/>
+                <a16:creationId xmlns:a16="http://schemas.microsoft.com/office/drawing/2014/main" id="{ACF6A59B-DE2A-4E98-B7EE-69B3622F9BC0}"/>
               </a:ext>
             </a:extLst>
           </p:cNvPr>
@@ -16516,7 +16800,7 @@
           <p:cNvPr id="10" name="">
             <a:extLst xmlns:a="http://schemas.openxmlformats.org/drawingml/2006/main">
               <a:ext uri="{FF2B5EF4-FFF2-40B4-BE49-F238E27FC236}">
-                <a16:creationId xmlns:a16="http://schemas.microsoft.com/office/drawing/2014/main" id="{9A342E66-DB41-4013-91B3-A6FD9E582B77}"/>
+                <a16:creationId xmlns:a16="http://schemas.microsoft.com/office/drawing/2014/main" id="{6FFBB3BC-876B-4254-9B5F-A6FF974F9D46}"/>
               </a:ext>
             </a:extLst>
           </p:cNvPr>
@@ -16580,7 +16864,7 @@
           <p:cNvPr id="11" name="">
             <a:extLst xmlns:a="http://schemas.openxmlformats.org/drawingml/2006/main">
               <a:ext uri="{FF2B5EF4-FFF2-40B4-BE49-F238E27FC236}">
-                <a16:creationId xmlns:a16="http://schemas.microsoft.com/office/drawing/2014/main" id="{C726A4BE-B552-479D-B877-51060F31FBBA}"/>
+                <a16:creationId xmlns:a16="http://schemas.microsoft.com/office/drawing/2014/main" id="{0693D912-81D1-4E47-A895-12FD98B00166}"/>
               </a:ext>
             </a:extLst>
           </p:cNvPr>
@@ -16613,7 +16897,7 @@
           <p:cNvPr id="12" name="">
             <a:extLst xmlns:a="http://schemas.openxmlformats.org/drawingml/2006/main">
               <a:ext uri="{FF2B5EF4-FFF2-40B4-BE49-F238E27FC236}">
-                <a16:creationId xmlns:a16="http://schemas.microsoft.com/office/drawing/2014/main" id="{2CB16922-F0B2-4B3E-8DE2-98CD6655E47C}"/>
+                <a16:creationId xmlns:a16="http://schemas.microsoft.com/office/drawing/2014/main" id="{F5B2A030-2FFA-43AB-9D7F-D71DF230839A}"/>
               </a:ext>
             </a:extLst>
           </p:cNvPr>
@@ -16677,7 +16961,7 @@
           <p:cNvPr id="13" name="">
             <a:extLst xmlns:a="http://schemas.openxmlformats.org/drawingml/2006/main">
               <a:ext uri="{FF2B5EF4-FFF2-40B4-BE49-F238E27FC236}">
-                <a16:creationId xmlns:a16="http://schemas.microsoft.com/office/drawing/2014/main" id="{1C2C73DE-FB65-4A8E-9A88-C06ADEF41893}"/>
+                <a16:creationId xmlns:a16="http://schemas.microsoft.com/office/drawing/2014/main" id="{0259B8C0-4C8B-4C54-9682-4E647AB1730C}"/>
               </a:ext>
             </a:extLst>
           </p:cNvPr>
@@ -16710,7 +16994,7 @@
           <p:cNvPr id="14" name="">
             <a:extLst xmlns:a="http://schemas.openxmlformats.org/drawingml/2006/main">
               <a:ext uri="{FF2B5EF4-FFF2-40B4-BE49-F238E27FC236}">
-                <a16:creationId xmlns:a16="http://schemas.microsoft.com/office/drawing/2014/main" id="{25E79FAC-C14E-4EB8-A459-E5CDFD41F017}"/>
+                <a16:creationId xmlns:a16="http://schemas.microsoft.com/office/drawing/2014/main" id="{2D77EFAA-6B6F-40C5-92AA-950AB31D8EFA}"/>
               </a:ext>
             </a:extLst>
           </p:cNvPr>
@@ -16774,7 +17058,7 @@
           <p:cNvPr id="15" name="">
             <a:extLst xmlns:a="http://schemas.openxmlformats.org/drawingml/2006/main">
               <a:ext uri="{FF2B5EF4-FFF2-40B4-BE49-F238E27FC236}">
-                <a16:creationId xmlns:a16="http://schemas.microsoft.com/office/drawing/2014/main" id="{8884D4C0-EB45-435C-8EFE-429E7D40EE72}"/>
+                <a16:creationId xmlns:a16="http://schemas.microsoft.com/office/drawing/2014/main" id="{ADD8BCAD-84DA-4AA2-84B6-AF7430782689}"/>
               </a:ext>
             </a:extLst>
           </p:cNvPr>
@@ -16807,7 +17091,7 @@
           <p:cNvPr id="16" name="">
             <a:extLst xmlns:a="http://schemas.openxmlformats.org/drawingml/2006/main">
               <a:ext uri="{FF2B5EF4-FFF2-40B4-BE49-F238E27FC236}">
-                <a16:creationId xmlns:a16="http://schemas.microsoft.com/office/drawing/2014/main" id="{7ABC4BCB-111A-4BDB-B273-8408E42EAEDC}"/>
+                <a16:creationId xmlns:a16="http://schemas.microsoft.com/office/drawing/2014/main" id="{34EE25A6-83F8-4C42-A79D-02D63E60509A}"/>
               </a:ext>
             </a:extLst>
           </p:cNvPr>
@@ -16871,7 +17155,7 @@
           <p:cNvPr id="17" name="">
             <a:extLst xmlns:a="http://schemas.openxmlformats.org/drawingml/2006/main">
               <a:ext uri="{FF2B5EF4-FFF2-40B4-BE49-F238E27FC236}">
-                <a16:creationId xmlns:a16="http://schemas.microsoft.com/office/drawing/2014/main" id="{1965F6A9-2BF9-44AD-AB96-C2D2CA94E807}"/>
+                <a16:creationId xmlns:a16="http://schemas.microsoft.com/office/drawing/2014/main" id="{261FD1A0-111D-4873-83C4-CAF755A18F23}"/>
               </a:ext>
             </a:extLst>
           </p:cNvPr>
@@ -16904,7 +17188,7 @@
           <p:cNvPr id="18" name="">
             <a:extLst xmlns:a="http://schemas.openxmlformats.org/drawingml/2006/main">
               <a:ext uri="{FF2B5EF4-FFF2-40B4-BE49-F238E27FC236}">
-                <a16:creationId xmlns:a16="http://schemas.microsoft.com/office/drawing/2014/main" id="{95BB6FD5-8004-4C1B-8A88-BD8A910CC4DC}"/>
+                <a16:creationId xmlns:a16="http://schemas.microsoft.com/office/drawing/2014/main" id="{09118C5D-03FE-4DE0-AE80-656E70C54C4E}"/>
               </a:ext>
             </a:extLst>
           </p:cNvPr>
@@ -16968,7 +17252,7 @@
           <p:cNvPr id="19" name="">
             <a:extLst xmlns:a="http://schemas.openxmlformats.org/drawingml/2006/main">
               <a:ext uri="{FF2B5EF4-FFF2-40B4-BE49-F238E27FC236}">
-                <a16:creationId xmlns:a16="http://schemas.microsoft.com/office/drawing/2014/main" id="{CADA1160-E63A-4339-B3AF-AE2A9531F2F3}"/>
+                <a16:creationId xmlns:a16="http://schemas.microsoft.com/office/drawing/2014/main" id="{639193A9-055D-4D41-9F0B-B489C9109485}"/>
               </a:ext>
             </a:extLst>
           </p:cNvPr>
@@ -17001,7 +17285,7 @@
           <p:cNvPr id="20" name="">
             <a:extLst xmlns:a="http://schemas.openxmlformats.org/drawingml/2006/main">
               <a:ext uri="{FF2B5EF4-FFF2-40B4-BE49-F238E27FC236}">
-                <a16:creationId xmlns:a16="http://schemas.microsoft.com/office/drawing/2014/main" id="{C0253B18-243C-479A-BB4E-EA6E6B4A00EC}"/>
+                <a16:creationId xmlns:a16="http://schemas.microsoft.com/office/drawing/2014/main" id="{49365B94-E83A-4A63-B24D-7B795FB3FB71}"/>
               </a:ext>
             </a:extLst>
           </p:cNvPr>
@@ -17065,7 +17349,7 @@
           <p:cNvPr id="21" name="">
             <a:extLst xmlns:a="http://schemas.openxmlformats.org/drawingml/2006/main">
               <a:ext uri="{FF2B5EF4-FFF2-40B4-BE49-F238E27FC236}">
-                <a16:creationId xmlns:a16="http://schemas.microsoft.com/office/drawing/2014/main" id="{F1D2921D-7D6D-4014-AACB-7CF086A96C73}"/>
+                <a16:creationId xmlns:a16="http://schemas.microsoft.com/office/drawing/2014/main" id="{C59CA519-530A-47B2-89A5-7705FCAE8D24}"/>
               </a:ext>
             </a:extLst>
           </p:cNvPr>
@@ -17129,7 +17413,7 @@
           <p:cNvPr id="22" name="">
             <a:extLst xmlns:a="http://schemas.openxmlformats.org/drawingml/2006/main">
               <a:ext uri="{FF2B5EF4-FFF2-40B4-BE49-F238E27FC236}">
-                <a16:creationId xmlns:a16="http://schemas.microsoft.com/office/drawing/2014/main" id="{6B798DFC-28C1-4BBC-A95E-C76C9E371038}"/>
+                <a16:creationId xmlns:a16="http://schemas.microsoft.com/office/drawing/2014/main" id="{21FC6E7F-89D9-465E-9D48-BBECB61F9BDA}"/>
               </a:ext>
             </a:extLst>
           </p:cNvPr>
@@ -17162,7 +17446,7 @@
           <p:cNvPr id="23" name="">
             <a:extLst xmlns:a="http://schemas.openxmlformats.org/drawingml/2006/main">
               <a:ext uri="{FF2B5EF4-FFF2-40B4-BE49-F238E27FC236}">
-                <a16:creationId xmlns:a16="http://schemas.microsoft.com/office/drawing/2014/main" id="{A0465B53-276A-4AD0-A91C-DDCA6DBFDA15}"/>
+                <a16:creationId xmlns:a16="http://schemas.microsoft.com/office/drawing/2014/main" id="{B61CF6DC-BDC6-4670-8D80-35F28973EE92}"/>
               </a:ext>
             </a:extLst>
           </p:cNvPr>
@@ -17226,7 +17510,7 @@
           <p:cNvPr id="24" name="">
             <a:extLst xmlns:a="http://schemas.openxmlformats.org/drawingml/2006/main">
               <a:ext uri="{FF2B5EF4-FFF2-40B4-BE49-F238E27FC236}">
-                <a16:creationId xmlns:a16="http://schemas.microsoft.com/office/drawing/2014/main" id="{B2926062-4067-4422-B557-99581DE62C49}"/>
+                <a16:creationId xmlns:a16="http://schemas.microsoft.com/office/drawing/2014/main" id="{95AC5795-DA77-4006-9DE1-EAF9C7592EEF}"/>
               </a:ext>
             </a:extLst>
           </p:cNvPr>
@@ -17259,7 +17543,7 @@
           <p:cNvPr id="25" name="">
             <a:extLst xmlns:a="http://schemas.openxmlformats.org/drawingml/2006/main">
               <a:ext uri="{FF2B5EF4-FFF2-40B4-BE49-F238E27FC236}">
-                <a16:creationId xmlns:a16="http://schemas.microsoft.com/office/drawing/2014/main" id="{7A9B726E-85A8-4A66-8BF0-10909939FA4E}"/>
+                <a16:creationId xmlns:a16="http://schemas.microsoft.com/office/drawing/2014/main" id="{5F435D8B-D858-41A5-908F-D0001900901D}"/>
               </a:ext>
             </a:extLst>
           </p:cNvPr>
@@ -17323,7 +17607,7 @@
           <p:cNvPr id="26" name="">
             <a:extLst xmlns:a="http://schemas.openxmlformats.org/drawingml/2006/main">
               <a:ext uri="{FF2B5EF4-FFF2-40B4-BE49-F238E27FC236}">
-                <a16:creationId xmlns:a16="http://schemas.microsoft.com/office/drawing/2014/main" id="{AD5237C8-2059-4129-805B-78678B5B477B}"/>
+                <a16:creationId xmlns:a16="http://schemas.microsoft.com/office/drawing/2014/main" id="{B3A245BB-BDD5-4AA3-BB86-E39F4A1A8D7D}"/>
               </a:ext>
             </a:extLst>
           </p:cNvPr>
@@ -17356,7 +17640,7 @@
           <p:cNvPr id="27" name="">
             <a:extLst xmlns:a="http://schemas.openxmlformats.org/drawingml/2006/main">
               <a:ext uri="{FF2B5EF4-FFF2-40B4-BE49-F238E27FC236}">
-                <a16:creationId xmlns:a16="http://schemas.microsoft.com/office/drawing/2014/main" id="{9C0EA55A-0AFC-43FD-8891-A8B5666993DB}"/>
+                <a16:creationId xmlns:a16="http://schemas.microsoft.com/office/drawing/2014/main" id="{2EC482FA-9C4B-49CD-984B-B7F850E00FF2}"/>
               </a:ext>
             </a:extLst>
           </p:cNvPr>
@@ -17420,7 +17704,7 @@
           <p:cNvPr id="28" name="">
             <a:extLst xmlns:a="http://schemas.openxmlformats.org/drawingml/2006/main">
               <a:ext uri="{FF2B5EF4-FFF2-40B4-BE49-F238E27FC236}">
-                <a16:creationId xmlns:a16="http://schemas.microsoft.com/office/drawing/2014/main" id="{555EB3E8-1282-44A5-B0CF-E72910237C15}"/>
+                <a16:creationId xmlns:a16="http://schemas.microsoft.com/office/drawing/2014/main" id="{87B53A58-D656-4167-8F48-8B97C8AB0B42}"/>
               </a:ext>
             </a:extLst>
           </p:cNvPr>
@@ -17453,7 +17737,7 @@
           <p:cNvPr id="29" name="">
             <a:extLst xmlns:a="http://schemas.openxmlformats.org/drawingml/2006/main">
               <a:ext uri="{FF2B5EF4-FFF2-40B4-BE49-F238E27FC236}">
-                <a16:creationId xmlns:a16="http://schemas.microsoft.com/office/drawing/2014/main" id="{7BBE5169-3231-4DBA-992D-64C2B14C7801}"/>
+                <a16:creationId xmlns:a16="http://schemas.microsoft.com/office/drawing/2014/main" id="{EA1A69FE-7723-4CFC-A7E8-AFC45AF214C5}"/>
               </a:ext>
             </a:extLst>
           </p:cNvPr>
@@ -17517,7 +17801,7 @@
           <p:cNvPr id="30" name="">
             <a:extLst xmlns:a="http://schemas.openxmlformats.org/drawingml/2006/main">
               <a:ext uri="{FF2B5EF4-FFF2-40B4-BE49-F238E27FC236}">
-                <a16:creationId xmlns:a16="http://schemas.microsoft.com/office/drawing/2014/main" id="{C061DA76-6574-41D9-8E55-1301E031A5DD}"/>
+                <a16:creationId xmlns:a16="http://schemas.microsoft.com/office/drawing/2014/main" id="{55937E30-9F53-4ECE-BFA2-7F6A3500D134}"/>
               </a:ext>
             </a:extLst>
           </p:cNvPr>
@@ -17550,7 +17834,7 @@
           <p:cNvPr id="31" name="">
             <a:extLst xmlns:a="http://schemas.openxmlformats.org/drawingml/2006/main">
               <a:ext uri="{FF2B5EF4-FFF2-40B4-BE49-F238E27FC236}">
-                <a16:creationId xmlns:a16="http://schemas.microsoft.com/office/drawing/2014/main" id="{5C5B1286-03B6-41CF-9D0E-D908509E258C}"/>
+                <a16:creationId xmlns:a16="http://schemas.microsoft.com/office/drawing/2014/main" id="{D78FCF55-556B-4C9A-80D6-ACC764541C1F}"/>
               </a:ext>
             </a:extLst>
           </p:cNvPr>
@@ -17614,7 +17898,7 @@
           <p:cNvPr id="32" name="">
             <a:extLst xmlns:a="http://schemas.openxmlformats.org/drawingml/2006/main">
               <a:ext uri="{FF2B5EF4-FFF2-40B4-BE49-F238E27FC236}">
-                <a16:creationId xmlns:a16="http://schemas.microsoft.com/office/drawing/2014/main" id="{5343C6A5-35DB-4A69-A129-4BF0A45D2B9F}"/>
+                <a16:creationId xmlns:a16="http://schemas.microsoft.com/office/drawing/2014/main" id="{D333B475-C0FF-4C4A-A055-4E8F653531AC}"/>
               </a:ext>
             </a:extLst>
           </p:cNvPr>
@@ -17678,7 +17962,7 @@
           <p:cNvPr id="33" name="">
             <a:extLst xmlns:a="http://schemas.openxmlformats.org/drawingml/2006/main">
               <a:ext uri="{FF2B5EF4-FFF2-40B4-BE49-F238E27FC236}">
-                <a16:creationId xmlns:a16="http://schemas.microsoft.com/office/drawing/2014/main" id="{E9F61CF3-C416-4EDB-8E71-53D81801C47B}"/>
+                <a16:creationId xmlns:a16="http://schemas.microsoft.com/office/drawing/2014/main" id="{FC527E2B-620F-448B-987F-AF71F79EF1E1}"/>
               </a:ext>
             </a:extLst>
           </p:cNvPr>
@@ -17740,7 +18024,7 @@
     </p:spTree>
     <p:extLst>
       <p:ext uri="{BB962C8B-B14F-4D97-AF65-F5344CB8AC3E}">
-        <p14:creationId xmlns:p14="http://schemas.microsoft.com/office/powerpoint/2010/main" val="896545616"/>
+        <p14:creationId xmlns:p14="http://schemas.microsoft.com/office/powerpoint/2010/main" val="578561666"/>
       </p:ext>
     </p:extLst>
   </p:cSld>
@@ -17764,7 +18048,7 @@
           <p:cNvPr id="1" name="">
             <a:extLst xmlns:a="http://schemas.openxmlformats.org/drawingml/2006/main">
               <a:ext uri="{FF2B5EF4-FFF2-40B4-BE49-F238E27FC236}">
-                <a16:creationId xmlns:a16="http://schemas.microsoft.com/office/drawing/2014/main" id="{213845A4-DC32-4510-9790-52726EC50485}"/>
+                <a16:creationId xmlns:a16="http://schemas.microsoft.com/office/drawing/2014/main" id="{8C293AE1-07ED-495B-9211-A00B0EF91936}"/>
               </a:ext>
             </a:extLst>
           </p:cNvPr>
@@ -17799,7 +18083,7 @@
           <p:cNvPr id="2" name="">
             <a:extLst xmlns:a="http://schemas.openxmlformats.org/drawingml/2006/main">
               <a:ext uri="{FF2B5EF4-FFF2-40B4-BE49-F238E27FC236}">
-                <a16:creationId xmlns:a16="http://schemas.microsoft.com/office/drawing/2014/main" id="{61E66DB5-05DD-47D1-B1CD-B971C7605CFE}"/>
+                <a16:creationId xmlns:a16="http://schemas.microsoft.com/office/drawing/2014/main" id="{3DF62627-A890-4A34-9FF9-52282FBB8ED1}"/>
               </a:ext>
             </a:extLst>
           </p:cNvPr>
@@ -17863,7 +18147,7 @@
           <p:cNvPr id="3" name="">
             <a:extLst xmlns:a="http://schemas.openxmlformats.org/drawingml/2006/main">
               <a:ext uri="{FF2B5EF4-FFF2-40B4-BE49-F238E27FC236}">
-                <a16:creationId xmlns:a16="http://schemas.microsoft.com/office/drawing/2014/main" id="{791956E8-BC88-48AA-A168-DFF2A0A0FB66}"/>
+                <a16:creationId xmlns:a16="http://schemas.microsoft.com/office/drawing/2014/main" id="{23F76DD2-BAC6-441B-BA7F-C623A0DEAA85}"/>
               </a:ext>
             </a:extLst>
           </p:cNvPr>
@@ -17898,7 +18182,7 @@
           <p:cNvPr id="4" name="">
             <a:extLst xmlns:a="http://schemas.openxmlformats.org/drawingml/2006/main">
               <a:ext uri="{FF2B5EF4-FFF2-40B4-BE49-F238E27FC236}">
-                <a16:creationId xmlns:a16="http://schemas.microsoft.com/office/drawing/2014/main" id="{1A307803-C132-4ADE-9684-8963D810C17C}"/>
+                <a16:creationId xmlns:a16="http://schemas.microsoft.com/office/drawing/2014/main" id="{F9412141-549F-4214-A178-F4F9411E4F7B}"/>
               </a:ext>
             </a:extLst>
           </p:cNvPr>
@@ -17962,7 +18246,7 @@
           <p:cNvPr id="5" name="">
             <a:extLst xmlns:a="http://schemas.openxmlformats.org/drawingml/2006/main">
               <a:ext uri="{FF2B5EF4-FFF2-40B4-BE49-F238E27FC236}">
-                <a16:creationId xmlns:a16="http://schemas.microsoft.com/office/drawing/2014/main" id="{B6FF3C95-B2CB-4789-8D58-14B1374B4888}"/>
+                <a16:creationId xmlns:a16="http://schemas.microsoft.com/office/drawing/2014/main" id="{69FF791B-65AC-4F22-8FB3-3BE4A68E08F6}"/>
               </a:ext>
             </a:extLst>
           </p:cNvPr>
@@ -18026,7 +18310,7 @@
           <p:cNvPr id="6" name="">
             <a:extLst xmlns:a="http://schemas.openxmlformats.org/drawingml/2006/main">
               <a:ext uri="{FF2B5EF4-FFF2-40B4-BE49-F238E27FC236}">
-                <a16:creationId xmlns:a16="http://schemas.microsoft.com/office/drawing/2014/main" id="{73FA4AF7-B21A-4C6C-ACE9-997936B50475}"/>
+                <a16:creationId xmlns:a16="http://schemas.microsoft.com/office/drawing/2014/main" id="{C131B6B0-434A-41EA-9ECC-0826A45A09BF}"/>
               </a:ext>
             </a:extLst>
           </p:cNvPr>
@@ -18090,7 +18374,7 @@
           <p:cNvPr id="7" name="">
             <a:extLst xmlns:a="http://schemas.openxmlformats.org/drawingml/2006/main">
               <a:ext uri="{FF2B5EF4-FFF2-40B4-BE49-F238E27FC236}">
-                <a16:creationId xmlns:a16="http://schemas.microsoft.com/office/drawing/2014/main" id="{8F439E6B-47C8-443B-A55D-A96D37D8CFF0}"/>
+                <a16:creationId xmlns:a16="http://schemas.microsoft.com/office/drawing/2014/main" id="{1623288E-91F7-4474-A342-5964B919E7D1}"/>
               </a:ext>
             </a:extLst>
           </p:cNvPr>
@@ -18154,7 +18438,7 @@
           <p:cNvPr id="8" name="">
             <a:extLst xmlns:a="http://schemas.openxmlformats.org/drawingml/2006/main">
               <a:ext uri="{FF2B5EF4-FFF2-40B4-BE49-F238E27FC236}">
-                <a16:creationId xmlns:a16="http://schemas.microsoft.com/office/drawing/2014/main" id="{F3C1C0B3-027E-437D-816B-8A6E50E8209F}"/>
+                <a16:creationId xmlns:a16="http://schemas.microsoft.com/office/drawing/2014/main" id="{533D3E26-5AF1-4DE7-9AE0-310CE8E70791}"/>
               </a:ext>
             </a:extLst>
           </p:cNvPr>
@@ -18189,7 +18473,7 @@
           <p:cNvPr id="9" name="">
             <a:extLst xmlns:a="http://schemas.openxmlformats.org/drawingml/2006/main">
               <a:ext uri="{FF2B5EF4-FFF2-40B4-BE49-F238E27FC236}">
-                <a16:creationId xmlns:a16="http://schemas.microsoft.com/office/drawing/2014/main" id="{36120F47-D055-4AB2-80E2-4DEF1D44A6C6}"/>
+                <a16:creationId xmlns:a16="http://schemas.microsoft.com/office/drawing/2014/main" id="{49C7DF6E-132D-4D67-B004-B98738A6E8FA}"/>
               </a:ext>
             </a:extLst>
           </p:cNvPr>
@@ -18224,7 +18508,7 @@
           <p:cNvPr id="10" name="">
             <a:extLst xmlns:a="http://schemas.openxmlformats.org/drawingml/2006/main">
               <a:ext uri="{FF2B5EF4-FFF2-40B4-BE49-F238E27FC236}">
-                <a16:creationId xmlns:a16="http://schemas.microsoft.com/office/drawing/2014/main" id="{57C44F1D-D433-4983-8593-80F085361271}"/>
+                <a16:creationId xmlns:a16="http://schemas.microsoft.com/office/drawing/2014/main" id="{97283918-A78F-4CD8-A6B1-1E0BF67B6F89}"/>
               </a:ext>
             </a:extLst>
           </p:cNvPr>
@@ -18288,7 +18572,7 @@
           <p:cNvPr id="11" name="">
             <a:extLst xmlns:a="http://schemas.openxmlformats.org/drawingml/2006/main">
               <a:ext uri="{FF2B5EF4-FFF2-40B4-BE49-F238E27FC236}">
-                <a16:creationId xmlns:a16="http://schemas.microsoft.com/office/drawing/2014/main" id="{77C5D112-4F93-4BD3-B827-419FCC1B0554}"/>
+                <a16:creationId xmlns:a16="http://schemas.microsoft.com/office/drawing/2014/main" id="{21715B27-3ED8-4F9F-8980-51D044F93ED9}"/>
               </a:ext>
             </a:extLst>
           </p:cNvPr>
@@ -18352,7 +18636,7 @@
           <p:cNvPr id="12" name="">
             <a:extLst xmlns:a="http://schemas.openxmlformats.org/drawingml/2006/main">
               <a:ext uri="{FF2B5EF4-FFF2-40B4-BE49-F238E27FC236}">
-                <a16:creationId xmlns:a16="http://schemas.microsoft.com/office/drawing/2014/main" id="{F273B19C-BB72-43EB-A713-257D476BC403}"/>
+                <a16:creationId xmlns:a16="http://schemas.microsoft.com/office/drawing/2014/main" id="{F6CEF7B1-B02F-4FCF-AFA9-8E8CA515796C}"/>
               </a:ext>
             </a:extLst>
           </p:cNvPr>
@@ -18387,7 +18671,7 @@
           <p:cNvPr id="13" name="">
             <a:extLst xmlns:a="http://schemas.openxmlformats.org/drawingml/2006/main">
               <a:ext uri="{FF2B5EF4-FFF2-40B4-BE49-F238E27FC236}">
-                <a16:creationId xmlns:a16="http://schemas.microsoft.com/office/drawing/2014/main" id="{D729F23D-2B2F-4073-9F83-3D4A1880811C}"/>
+                <a16:creationId xmlns:a16="http://schemas.microsoft.com/office/drawing/2014/main" id="{323E94A0-4B2A-426B-8471-0A29906758DD}"/>
               </a:ext>
             </a:extLst>
           </p:cNvPr>
@@ -18422,7 +18706,7 @@
           <p:cNvPr id="14" name="">
             <a:extLst xmlns:a="http://schemas.openxmlformats.org/drawingml/2006/main">
               <a:ext uri="{FF2B5EF4-FFF2-40B4-BE49-F238E27FC236}">
-                <a16:creationId xmlns:a16="http://schemas.microsoft.com/office/drawing/2014/main" id="{9B145CA6-5A69-4F90-849C-BCD159984E80}"/>
+                <a16:creationId xmlns:a16="http://schemas.microsoft.com/office/drawing/2014/main" id="{ABCE9FB8-260A-4CC0-BC4C-3F6A66C2E899}"/>
               </a:ext>
             </a:extLst>
           </p:cNvPr>
@@ -18486,7 +18770,7 @@
           <p:cNvPr id="15" name="">
             <a:extLst xmlns:a="http://schemas.openxmlformats.org/drawingml/2006/main">
               <a:ext uri="{FF2B5EF4-FFF2-40B4-BE49-F238E27FC236}">
-                <a16:creationId xmlns:a16="http://schemas.microsoft.com/office/drawing/2014/main" id="{1126CB6F-7180-479B-B23A-CE11FC5927F6}"/>
+                <a16:creationId xmlns:a16="http://schemas.microsoft.com/office/drawing/2014/main" id="{AB615409-813C-44E9-83BB-7C25A7207EC8}"/>
               </a:ext>
             </a:extLst>
           </p:cNvPr>
@@ -18550,7 +18834,7 @@
           <p:cNvPr id="16" name="">
             <a:extLst xmlns:a="http://schemas.openxmlformats.org/drawingml/2006/main">
               <a:ext uri="{FF2B5EF4-FFF2-40B4-BE49-F238E27FC236}">
-                <a16:creationId xmlns:a16="http://schemas.microsoft.com/office/drawing/2014/main" id="{DEF539B7-F752-44FB-8A9E-2A7C35B62FB0}"/>
+                <a16:creationId xmlns:a16="http://schemas.microsoft.com/office/drawing/2014/main" id="{3442EFE1-8B84-4FE0-8093-EEAC487D34EB}"/>
               </a:ext>
             </a:extLst>
           </p:cNvPr>
@@ -18585,7 +18869,7 @@
           <p:cNvPr id="17" name="">
             <a:extLst xmlns:a="http://schemas.openxmlformats.org/drawingml/2006/main">
               <a:ext uri="{FF2B5EF4-FFF2-40B4-BE49-F238E27FC236}">
-                <a16:creationId xmlns:a16="http://schemas.microsoft.com/office/drawing/2014/main" id="{3E80DB63-9BA5-4B7D-A17F-8B090A9EBA2C}"/>
+                <a16:creationId xmlns:a16="http://schemas.microsoft.com/office/drawing/2014/main" id="{8981F8E2-2C90-421D-AFC1-B9DAC0E50BD7}"/>
               </a:ext>
             </a:extLst>
           </p:cNvPr>
@@ -18620,7 +18904,7 @@
           <p:cNvPr id="18" name="">
             <a:extLst xmlns:a="http://schemas.openxmlformats.org/drawingml/2006/main">
               <a:ext uri="{FF2B5EF4-FFF2-40B4-BE49-F238E27FC236}">
-                <a16:creationId xmlns:a16="http://schemas.microsoft.com/office/drawing/2014/main" id="{3B674765-9844-4F6E-B15C-AA819DBED474}"/>
+                <a16:creationId xmlns:a16="http://schemas.microsoft.com/office/drawing/2014/main" id="{74CF0034-50ED-4E2B-8867-74F7B7066A98}"/>
               </a:ext>
             </a:extLst>
           </p:cNvPr>
@@ -18653,7 +18937,7 @@
           <p:cNvPr id="19" name="">
             <a:extLst xmlns:a="http://schemas.openxmlformats.org/drawingml/2006/main">
               <a:ext uri="{FF2B5EF4-FFF2-40B4-BE49-F238E27FC236}">
-                <a16:creationId xmlns:a16="http://schemas.microsoft.com/office/drawing/2014/main" id="{FBE8DEE6-7069-4F85-BC7D-E8507ECAB66C}"/>
+                <a16:creationId xmlns:a16="http://schemas.microsoft.com/office/drawing/2014/main" id="{ED9D0EDF-1FE7-4D83-8ABB-14C44768E782}"/>
               </a:ext>
             </a:extLst>
           </p:cNvPr>
@@ -18688,7 +18972,7 @@
           <p:cNvPr id="20" name="">
             <a:extLst xmlns:a="http://schemas.openxmlformats.org/drawingml/2006/main">
               <a:ext uri="{FF2B5EF4-FFF2-40B4-BE49-F238E27FC236}">
-                <a16:creationId xmlns:a16="http://schemas.microsoft.com/office/drawing/2014/main" id="{B8B90C91-68E7-4B25-B658-708F6FD86835}"/>
+                <a16:creationId xmlns:a16="http://schemas.microsoft.com/office/drawing/2014/main" id="{7A2DC826-698D-40B5-A2F8-D5A239945272}"/>
               </a:ext>
             </a:extLst>
           </p:cNvPr>
@@ -18752,7 +19036,7 @@
           <p:cNvPr id="21" name="">
             <a:extLst xmlns:a="http://schemas.openxmlformats.org/drawingml/2006/main">
               <a:ext uri="{FF2B5EF4-FFF2-40B4-BE49-F238E27FC236}">
-                <a16:creationId xmlns:a16="http://schemas.microsoft.com/office/drawing/2014/main" id="{F1668810-4586-4D29-B7B3-E2FDF9A7CD6A}"/>
+                <a16:creationId xmlns:a16="http://schemas.microsoft.com/office/drawing/2014/main" id="{BF98C85D-D0D4-49B8-ACA4-F318C31AB7A8}"/>
               </a:ext>
             </a:extLst>
           </p:cNvPr>
@@ -18816,7 +19100,7 @@
           <p:cNvPr id="22" name="">
             <a:extLst xmlns:a="http://schemas.openxmlformats.org/drawingml/2006/main">
               <a:ext uri="{FF2B5EF4-FFF2-40B4-BE49-F238E27FC236}">
-                <a16:creationId xmlns:a16="http://schemas.microsoft.com/office/drawing/2014/main" id="{1FEC5D44-D620-4333-95F4-EC0C74A0A7CC}"/>
+                <a16:creationId xmlns:a16="http://schemas.microsoft.com/office/drawing/2014/main" id="{060DA9A5-058D-43AA-895A-FD069AA5AF7A}"/>
               </a:ext>
             </a:extLst>
           </p:cNvPr>
@@ -18849,7 +19133,7 @@
           <p:cNvPr id="23" name="">
             <a:extLst xmlns:a="http://schemas.openxmlformats.org/drawingml/2006/main">
               <a:ext uri="{FF2B5EF4-FFF2-40B4-BE49-F238E27FC236}">
-                <a16:creationId xmlns:a16="http://schemas.microsoft.com/office/drawing/2014/main" id="{3AE83778-22F3-4069-BF88-1A54B5E87A67}"/>
+                <a16:creationId xmlns:a16="http://schemas.microsoft.com/office/drawing/2014/main" id="{676D649A-C0A4-4380-A80D-9157E6F816D7}"/>
               </a:ext>
             </a:extLst>
           </p:cNvPr>
@@ -18884,7 +19168,7 @@
           <p:cNvPr id="24" name="">
             <a:extLst xmlns:a="http://schemas.openxmlformats.org/drawingml/2006/main">
               <a:ext uri="{FF2B5EF4-FFF2-40B4-BE49-F238E27FC236}">
-                <a16:creationId xmlns:a16="http://schemas.microsoft.com/office/drawing/2014/main" id="{8A3969B1-A547-4EB5-AAE3-528AF2289411}"/>
+                <a16:creationId xmlns:a16="http://schemas.microsoft.com/office/drawing/2014/main" id="{FCAB7E37-D91F-422F-BCDC-A5058B6FCCE5}"/>
               </a:ext>
             </a:extLst>
           </p:cNvPr>
@@ -18948,7 +19232,7 @@
           <p:cNvPr id="25" name="">
             <a:extLst xmlns:a="http://schemas.openxmlformats.org/drawingml/2006/main">
               <a:ext uri="{FF2B5EF4-FFF2-40B4-BE49-F238E27FC236}">
-                <a16:creationId xmlns:a16="http://schemas.microsoft.com/office/drawing/2014/main" id="{72653A09-1972-427F-8878-5E75FDD22016}"/>
+                <a16:creationId xmlns:a16="http://schemas.microsoft.com/office/drawing/2014/main" id="{D823CF7C-E940-4FA1-B293-160C4F543DAF}"/>
               </a:ext>
             </a:extLst>
           </p:cNvPr>
@@ -19012,7 +19296,7 @@
           <p:cNvPr id="26" name="">
             <a:extLst xmlns:a="http://schemas.openxmlformats.org/drawingml/2006/main">
               <a:ext uri="{FF2B5EF4-FFF2-40B4-BE49-F238E27FC236}">
-                <a16:creationId xmlns:a16="http://schemas.microsoft.com/office/drawing/2014/main" id="{639C8936-9102-4651-AA54-AFABFB1C783F}"/>
+                <a16:creationId xmlns:a16="http://schemas.microsoft.com/office/drawing/2014/main" id="{E53761E5-252C-4921-9C42-F7C1754B2AA9}"/>
               </a:ext>
             </a:extLst>
           </p:cNvPr>
@@ -19074,7 +19358,7 @@
     </p:spTree>
     <p:extLst>
       <p:ext uri="{BB962C8B-B14F-4D97-AF65-F5344CB8AC3E}">
-        <p14:creationId xmlns:p14="http://schemas.microsoft.com/office/powerpoint/2010/main" val="1805266011"/>
+        <p14:creationId xmlns:p14="http://schemas.microsoft.com/office/powerpoint/2010/main" val="1712665352"/>
       </p:ext>
     </p:extLst>
   </p:cSld>
@@ -19098,7 +19382,7 @@
           <p:cNvPr id="1" name="">
             <a:extLst xmlns:a="http://schemas.openxmlformats.org/drawingml/2006/main">
               <a:ext uri="{FF2B5EF4-FFF2-40B4-BE49-F238E27FC236}">
-                <a16:creationId xmlns:a16="http://schemas.microsoft.com/office/drawing/2014/main" id="{0D28029E-C646-46EE-9CB4-D23167F868A7}"/>
+                <a16:creationId xmlns:a16="http://schemas.microsoft.com/office/drawing/2014/main" id="{4C7768BB-01F4-45C3-B596-EEC359CA4710}"/>
               </a:ext>
             </a:extLst>
           </p:cNvPr>
@@ -19133,7 +19417,7 @@
           <p:cNvPr id="2" name="">
             <a:extLst xmlns:a="http://schemas.openxmlformats.org/drawingml/2006/main">
               <a:ext uri="{FF2B5EF4-FFF2-40B4-BE49-F238E27FC236}">
-                <a16:creationId xmlns:a16="http://schemas.microsoft.com/office/drawing/2014/main" id="{D6A93A8A-82CD-44D5-B224-4D56899C1E76}"/>
+                <a16:creationId xmlns:a16="http://schemas.microsoft.com/office/drawing/2014/main" id="{72DA89B3-0AF5-4976-A42D-FDA680C07E8A}"/>
               </a:ext>
             </a:extLst>
           </p:cNvPr>
@@ -19197,7 +19481,7 @@
           <p:cNvPr id="3" name="">
             <a:extLst xmlns:a="http://schemas.openxmlformats.org/drawingml/2006/main">
               <a:ext uri="{FF2B5EF4-FFF2-40B4-BE49-F238E27FC236}">
-                <a16:creationId xmlns:a16="http://schemas.microsoft.com/office/drawing/2014/main" id="{3CCAC53A-3C79-4D13-9B5D-6406C312100F}"/>
+                <a16:creationId xmlns:a16="http://schemas.microsoft.com/office/drawing/2014/main" id="{8E674DB1-3E04-4D97-B019-440F8219F856}"/>
               </a:ext>
             </a:extLst>
           </p:cNvPr>
@@ -19232,7 +19516,7 @@
           <p:cNvPr id="4" name="">
             <a:extLst xmlns:a="http://schemas.openxmlformats.org/drawingml/2006/main">
               <a:ext uri="{FF2B5EF4-FFF2-40B4-BE49-F238E27FC236}">
-                <a16:creationId xmlns:a16="http://schemas.microsoft.com/office/drawing/2014/main" id="{0AD4AB55-CE8C-4927-896F-367CE4701DE6}"/>
+                <a16:creationId xmlns:a16="http://schemas.microsoft.com/office/drawing/2014/main" id="{E4C3A7B9-6D45-43CA-A2B1-A19DA04C0EAF}"/>
               </a:ext>
             </a:extLst>
           </p:cNvPr>
@@ -19296,7 +19580,7 @@
           <p:cNvPr id="5" name="">
             <a:extLst xmlns:a="http://schemas.openxmlformats.org/drawingml/2006/main">
               <a:ext uri="{FF2B5EF4-FFF2-40B4-BE49-F238E27FC236}">
-                <a16:creationId xmlns:a16="http://schemas.microsoft.com/office/drawing/2014/main" id="{CE4117B7-03E5-492A-84F9-6B480B617E73}"/>
+                <a16:creationId xmlns:a16="http://schemas.microsoft.com/office/drawing/2014/main" id="{CA971F5B-7F88-48FF-A31F-1A291EEC3174}"/>
               </a:ext>
             </a:extLst>
           </p:cNvPr>
@@ -19360,7 +19644,7 @@
           <p:cNvPr id="6" name="">
             <a:extLst xmlns:a="http://schemas.openxmlformats.org/drawingml/2006/main">
               <a:ext uri="{FF2B5EF4-FFF2-40B4-BE49-F238E27FC236}">
-                <a16:creationId xmlns:a16="http://schemas.microsoft.com/office/drawing/2014/main" id="{AE2AD7FC-8390-4804-8A82-34C27E12098B}"/>
+                <a16:creationId xmlns:a16="http://schemas.microsoft.com/office/drawing/2014/main" id="{FFF98DEE-1BE3-45AE-AE67-27F832053ED2}"/>
               </a:ext>
             </a:extLst>
           </p:cNvPr>
@@ -19393,7 +19677,7 @@
           <p:cNvPr id="7" name="">
             <a:extLst xmlns:a="http://schemas.openxmlformats.org/drawingml/2006/main">
               <a:ext uri="{FF2B5EF4-FFF2-40B4-BE49-F238E27FC236}">
-                <a16:creationId xmlns:a16="http://schemas.microsoft.com/office/drawing/2014/main" id="{A2510172-4C1C-4BF8-948D-331685C73A5B}"/>
+                <a16:creationId xmlns:a16="http://schemas.microsoft.com/office/drawing/2014/main" id="{119800D3-9604-4271-A9E5-B863734EA3B3}"/>
               </a:ext>
             </a:extLst>
           </p:cNvPr>
@@ -19428,7 +19712,7 @@
           <p:cNvPr id="8" name="">
             <a:extLst xmlns:a="http://schemas.openxmlformats.org/drawingml/2006/main">
               <a:ext uri="{FF2B5EF4-FFF2-40B4-BE49-F238E27FC236}">
-                <a16:creationId xmlns:a16="http://schemas.microsoft.com/office/drawing/2014/main" id="{E30C7FE1-A864-45FF-A3EC-BAEB8B42BE61}"/>
+                <a16:creationId xmlns:a16="http://schemas.microsoft.com/office/drawing/2014/main" id="{1D2B4DC1-BD57-4A7C-9CBB-9B1D471E37EB}"/>
               </a:ext>
             </a:extLst>
           </p:cNvPr>
@@ -19492,7 +19776,7 @@
           <p:cNvPr id="9" name="">
             <a:extLst xmlns:a="http://schemas.openxmlformats.org/drawingml/2006/main">
               <a:ext uri="{FF2B5EF4-FFF2-40B4-BE49-F238E27FC236}">
-                <a16:creationId xmlns:a16="http://schemas.microsoft.com/office/drawing/2014/main" id="{717D7527-E7DB-4777-97A9-62CB2052C506}"/>
+                <a16:creationId xmlns:a16="http://schemas.microsoft.com/office/drawing/2014/main" id="{26C34E23-BCB7-4E21-B873-0921857F2491}"/>
               </a:ext>
             </a:extLst>
           </p:cNvPr>
@@ -19556,7 +19840,7 @@
           <p:cNvPr id="10" name="">
             <a:extLst xmlns:a="http://schemas.openxmlformats.org/drawingml/2006/main">
               <a:ext uri="{FF2B5EF4-FFF2-40B4-BE49-F238E27FC236}">
-                <a16:creationId xmlns:a16="http://schemas.microsoft.com/office/drawing/2014/main" id="{30557CF8-A6CB-4066-B4DD-19167295ABD6}"/>
+                <a16:creationId xmlns:a16="http://schemas.microsoft.com/office/drawing/2014/main" id="{E8105222-BBC2-45D8-957A-501F196B4488}"/>
               </a:ext>
             </a:extLst>
           </p:cNvPr>
@@ -19620,7 +19904,7 @@
           <p:cNvPr id="11" name="">
             <a:extLst xmlns:a="http://schemas.openxmlformats.org/drawingml/2006/main">
               <a:ext uri="{FF2B5EF4-FFF2-40B4-BE49-F238E27FC236}">
-                <a16:creationId xmlns:a16="http://schemas.microsoft.com/office/drawing/2014/main" id="{34A74479-B9FB-4E38-B359-3A54FC012F8E}"/>
+                <a16:creationId xmlns:a16="http://schemas.microsoft.com/office/drawing/2014/main" id="{4DE62641-93DD-4712-B81C-7B35BB463B0C}"/>
               </a:ext>
             </a:extLst>
           </p:cNvPr>
@@ -19655,7 +19939,7 @@
           <p:cNvPr id="12" name="">
             <a:extLst xmlns:a="http://schemas.openxmlformats.org/drawingml/2006/main">
               <a:ext uri="{FF2B5EF4-FFF2-40B4-BE49-F238E27FC236}">
-                <a16:creationId xmlns:a16="http://schemas.microsoft.com/office/drawing/2014/main" id="{4E949EC6-0AF9-4694-BD73-0334BF904DF0}"/>
+                <a16:creationId xmlns:a16="http://schemas.microsoft.com/office/drawing/2014/main" id="{637A5482-CA90-458C-9E20-C256877A2042}"/>
               </a:ext>
             </a:extLst>
           </p:cNvPr>
@@ -19719,7 +20003,7 @@
           <p:cNvPr id="13" name="">
             <a:extLst xmlns:a="http://schemas.openxmlformats.org/drawingml/2006/main">
               <a:ext uri="{FF2B5EF4-FFF2-40B4-BE49-F238E27FC236}">
-                <a16:creationId xmlns:a16="http://schemas.microsoft.com/office/drawing/2014/main" id="{6C005DB5-BE1B-4C98-9AED-BCD54F13B84F}"/>
+                <a16:creationId xmlns:a16="http://schemas.microsoft.com/office/drawing/2014/main" id="{C899E950-7B11-41CE-A241-C2DE2F274DDB}"/>
               </a:ext>
             </a:extLst>
           </p:cNvPr>
@@ -19754,7 +20038,7 @@
           <p:cNvPr id="14" name="">
             <a:extLst xmlns:a="http://schemas.openxmlformats.org/drawingml/2006/main">
               <a:ext uri="{FF2B5EF4-FFF2-40B4-BE49-F238E27FC236}">
-                <a16:creationId xmlns:a16="http://schemas.microsoft.com/office/drawing/2014/main" id="{D5FAE5A7-2870-45E1-9C70-037F7015FE80}"/>
+                <a16:creationId xmlns:a16="http://schemas.microsoft.com/office/drawing/2014/main" id="{136D9B33-277A-4B50-A0EF-B7869736BE9C}"/>
               </a:ext>
             </a:extLst>
           </p:cNvPr>
@@ -19818,7 +20102,7 @@
           <p:cNvPr id="15" name="">
             <a:extLst xmlns:a="http://schemas.openxmlformats.org/drawingml/2006/main">
               <a:ext uri="{FF2B5EF4-FFF2-40B4-BE49-F238E27FC236}">
-                <a16:creationId xmlns:a16="http://schemas.microsoft.com/office/drawing/2014/main" id="{4F8FC771-38FB-4802-8BB7-2581395225E8}"/>
+                <a16:creationId xmlns:a16="http://schemas.microsoft.com/office/drawing/2014/main" id="{8093109A-776E-4EF3-A035-E3BABC7AC4E9}"/>
               </a:ext>
             </a:extLst>
           </p:cNvPr>
@@ -19853,7 +20137,7 @@
           <p:cNvPr id="16" name="">
             <a:extLst xmlns:a="http://schemas.openxmlformats.org/drawingml/2006/main">
               <a:ext uri="{FF2B5EF4-FFF2-40B4-BE49-F238E27FC236}">
-                <a16:creationId xmlns:a16="http://schemas.microsoft.com/office/drawing/2014/main" id="{F2A2164E-3398-454D-8353-A707AF04959F}"/>
+                <a16:creationId xmlns:a16="http://schemas.microsoft.com/office/drawing/2014/main" id="{B9AAC941-6C4B-4CEF-A40B-9CED7D9B82E5}"/>
               </a:ext>
             </a:extLst>
           </p:cNvPr>
@@ -19917,7 +20201,7 @@
           <p:cNvPr id="17" name="">
             <a:extLst xmlns:a="http://schemas.openxmlformats.org/drawingml/2006/main">
               <a:ext uri="{FF2B5EF4-FFF2-40B4-BE49-F238E27FC236}">
-                <a16:creationId xmlns:a16="http://schemas.microsoft.com/office/drawing/2014/main" id="{F58BA008-0CD0-4B6F-B98F-2C7CB3F46FC0}"/>
+                <a16:creationId xmlns:a16="http://schemas.microsoft.com/office/drawing/2014/main" id="{77B08394-892E-4175-A60E-6A1E279B4D47}"/>
               </a:ext>
             </a:extLst>
           </p:cNvPr>
@@ -19952,7 +20236,7 @@
           <p:cNvPr id="18" name="">
             <a:extLst xmlns:a="http://schemas.openxmlformats.org/drawingml/2006/main">
               <a:ext uri="{FF2B5EF4-FFF2-40B4-BE49-F238E27FC236}">
-                <a16:creationId xmlns:a16="http://schemas.microsoft.com/office/drawing/2014/main" id="{BE69A9B7-CB4A-4430-A8E0-99921D493DE1}"/>
+                <a16:creationId xmlns:a16="http://schemas.microsoft.com/office/drawing/2014/main" id="{3ED7E64E-622E-478C-BB0D-5D4562644270}"/>
               </a:ext>
             </a:extLst>
           </p:cNvPr>
@@ -20016,7 +20300,7 @@
           <p:cNvPr id="19" name="">
             <a:extLst xmlns:a="http://schemas.openxmlformats.org/drawingml/2006/main">
               <a:ext uri="{FF2B5EF4-FFF2-40B4-BE49-F238E27FC236}">
-                <a16:creationId xmlns:a16="http://schemas.microsoft.com/office/drawing/2014/main" id="{74983401-7C47-4131-9E62-CC48BB569CB9}"/>
+                <a16:creationId xmlns:a16="http://schemas.microsoft.com/office/drawing/2014/main" id="{2436BE43-39F5-46DD-A608-E370B8D603F8}"/>
               </a:ext>
             </a:extLst>
           </p:cNvPr>
@@ -20051,7 +20335,7 @@
           <p:cNvPr id="20" name="">
             <a:extLst xmlns:a="http://schemas.openxmlformats.org/drawingml/2006/main">
               <a:ext uri="{FF2B5EF4-FFF2-40B4-BE49-F238E27FC236}">
-                <a16:creationId xmlns:a16="http://schemas.microsoft.com/office/drawing/2014/main" id="{2A7A7828-CBFF-4ABD-A8B9-6F6439CD4E3C}"/>
+                <a16:creationId xmlns:a16="http://schemas.microsoft.com/office/drawing/2014/main" id="{5C7EAAF9-7697-4402-BE34-313525F70843}"/>
               </a:ext>
             </a:extLst>
           </p:cNvPr>
@@ -20115,7 +20399,7 @@
           <p:cNvPr id="21" name="">
             <a:extLst xmlns:a="http://schemas.openxmlformats.org/drawingml/2006/main">
               <a:ext uri="{FF2B5EF4-FFF2-40B4-BE49-F238E27FC236}">
-                <a16:creationId xmlns:a16="http://schemas.microsoft.com/office/drawing/2014/main" id="{E01EF331-1A71-408B-8440-0D947CD1E697}"/>
+                <a16:creationId xmlns:a16="http://schemas.microsoft.com/office/drawing/2014/main" id="{6EE39DD7-3EA0-4191-985D-14B76E991B23}"/>
               </a:ext>
             </a:extLst>
           </p:cNvPr>
@@ -20150,7 +20434,7 @@
           <p:cNvPr id="22" name="">
             <a:extLst xmlns:a="http://schemas.openxmlformats.org/drawingml/2006/main">
               <a:ext uri="{FF2B5EF4-FFF2-40B4-BE49-F238E27FC236}">
-                <a16:creationId xmlns:a16="http://schemas.microsoft.com/office/drawing/2014/main" id="{2DEFB4FA-3A3A-4462-B91F-718B22E3D6D5}"/>
+                <a16:creationId xmlns:a16="http://schemas.microsoft.com/office/drawing/2014/main" id="{6933BB03-7336-4D3F-9879-655E1851E712}"/>
               </a:ext>
             </a:extLst>
           </p:cNvPr>
@@ -20214,7 +20498,7 @@
           <p:cNvPr id="23" name="">
             <a:extLst xmlns:a="http://schemas.openxmlformats.org/drawingml/2006/main">
               <a:ext uri="{FF2B5EF4-FFF2-40B4-BE49-F238E27FC236}">
-                <a16:creationId xmlns:a16="http://schemas.microsoft.com/office/drawing/2014/main" id="{5ED86891-D649-48AB-9997-59EF3BA8812F}"/>
+                <a16:creationId xmlns:a16="http://schemas.microsoft.com/office/drawing/2014/main" id="{FE7B9EF9-0BA3-4E51-9B50-E90468A688EE}"/>
               </a:ext>
             </a:extLst>
           </p:cNvPr>
@@ -20249,7 +20533,7 @@
           <p:cNvPr id="24" name="">
             <a:extLst xmlns:a="http://schemas.openxmlformats.org/drawingml/2006/main">
               <a:ext uri="{FF2B5EF4-FFF2-40B4-BE49-F238E27FC236}">
-                <a16:creationId xmlns:a16="http://schemas.microsoft.com/office/drawing/2014/main" id="{F2A0EAC9-A6B0-4FE1-B4BB-C28BC5B6C3F4}"/>
+                <a16:creationId xmlns:a16="http://schemas.microsoft.com/office/drawing/2014/main" id="{7394CAEF-B2DE-44BC-86EF-65B3F859DC3E}"/>
               </a:ext>
             </a:extLst>
           </p:cNvPr>
@@ -20284,7 +20568,7 @@
           <p:cNvPr id="25" name="">
             <a:extLst xmlns:a="http://schemas.openxmlformats.org/drawingml/2006/main">
               <a:ext uri="{FF2B5EF4-FFF2-40B4-BE49-F238E27FC236}">
-                <a16:creationId xmlns:a16="http://schemas.microsoft.com/office/drawing/2014/main" id="{C313A80C-E4A4-435A-A7AD-ABFF951F4197}"/>
+                <a16:creationId xmlns:a16="http://schemas.microsoft.com/office/drawing/2014/main" id="{FE22305F-D67E-4182-9883-86C0AA6F2CA0}"/>
               </a:ext>
             </a:extLst>
           </p:cNvPr>
@@ -20319,7 +20603,7 @@
           <p:cNvPr id="26" name="">
             <a:extLst xmlns:a="http://schemas.openxmlformats.org/drawingml/2006/main">
               <a:ext uri="{FF2B5EF4-FFF2-40B4-BE49-F238E27FC236}">
-                <a16:creationId xmlns:a16="http://schemas.microsoft.com/office/drawing/2014/main" id="{15FD8AF8-C6A9-48DE-9F19-AA5AFDA51D85}"/>
+                <a16:creationId xmlns:a16="http://schemas.microsoft.com/office/drawing/2014/main" id="{D340AA24-8107-45A9-AAC9-AA2106D6B9F4}"/>
               </a:ext>
             </a:extLst>
           </p:cNvPr>
@@ -20354,7 +20638,7 @@
           <p:cNvPr id="27" name="">
             <a:extLst xmlns:a="http://schemas.openxmlformats.org/drawingml/2006/main">
               <a:ext uri="{FF2B5EF4-FFF2-40B4-BE49-F238E27FC236}">
-                <a16:creationId xmlns:a16="http://schemas.microsoft.com/office/drawing/2014/main" id="{B7FDA4A7-862A-436F-9C06-D04F8C633EB6}"/>
+                <a16:creationId xmlns:a16="http://schemas.microsoft.com/office/drawing/2014/main" id="{98F62E05-AAD1-41F2-A40C-1A98AE5FCC4E}"/>
               </a:ext>
             </a:extLst>
           </p:cNvPr>
@@ -20418,7 +20702,7 @@
           <p:cNvPr id="28" name="">
             <a:extLst xmlns:a="http://schemas.openxmlformats.org/drawingml/2006/main">
               <a:ext uri="{FF2B5EF4-FFF2-40B4-BE49-F238E27FC236}">
-                <a16:creationId xmlns:a16="http://schemas.microsoft.com/office/drawing/2014/main" id="{57C7F173-9106-4568-84B1-E3AB07F2E5A1}"/>
+                <a16:creationId xmlns:a16="http://schemas.microsoft.com/office/drawing/2014/main" id="{638B399B-FCC7-450A-A4D3-07A11608AE72}"/>
               </a:ext>
             </a:extLst>
           </p:cNvPr>
@@ -20480,7 +20764,7 @@
     </p:spTree>
     <p:extLst>
       <p:ext uri="{BB962C8B-B14F-4D97-AF65-F5344CB8AC3E}">
-        <p14:creationId xmlns:p14="http://schemas.microsoft.com/office/powerpoint/2010/main" val="943208909"/>
+        <p14:creationId xmlns:p14="http://schemas.microsoft.com/office/powerpoint/2010/main" val="1299800081"/>
       </p:ext>
     </p:extLst>
   </p:cSld>
@@ -20504,7 +20788,7 @@
           <p:cNvPr id="1" name="">
             <a:extLst xmlns:a="http://schemas.openxmlformats.org/drawingml/2006/main">
               <a:ext uri="{FF2B5EF4-FFF2-40B4-BE49-F238E27FC236}">
-                <a16:creationId xmlns:a16="http://schemas.microsoft.com/office/drawing/2014/main" id="{774B7E52-4784-4020-A359-FA279D50D9F7}"/>
+                <a16:creationId xmlns:a16="http://schemas.microsoft.com/office/drawing/2014/main" id="{39EB3608-C9F9-479F-8126-F955FB67F70F}"/>
               </a:ext>
             </a:extLst>
           </p:cNvPr>
@@ -20539,7 +20823,7 @@
           <p:cNvPr id="2" name="">
             <a:extLst xmlns:a="http://schemas.openxmlformats.org/drawingml/2006/main">
               <a:ext uri="{FF2B5EF4-FFF2-40B4-BE49-F238E27FC236}">
-                <a16:creationId xmlns:a16="http://schemas.microsoft.com/office/drawing/2014/main" id="{6D660DE0-ACA7-450E-8481-9C527B38EC97}"/>
+                <a16:creationId xmlns:a16="http://schemas.microsoft.com/office/drawing/2014/main" id="{E28A4363-010E-4BB2-9B5E-83047C047610}"/>
               </a:ext>
             </a:extLst>
           </p:cNvPr>
@@ -20603,7 +20887,7 @@
           <p:cNvPr id="3" name="">
             <a:extLst xmlns:a="http://schemas.openxmlformats.org/drawingml/2006/main">
               <a:ext uri="{FF2B5EF4-FFF2-40B4-BE49-F238E27FC236}">
-                <a16:creationId xmlns:a16="http://schemas.microsoft.com/office/drawing/2014/main" id="{9E17DB36-1C5A-4192-B72E-C530885D7FE2}"/>
+                <a16:creationId xmlns:a16="http://schemas.microsoft.com/office/drawing/2014/main" id="{E42D6519-DB32-46FE-84C8-893AA3EBE4AC}"/>
               </a:ext>
             </a:extLst>
           </p:cNvPr>
@@ -20638,7 +20922,7 @@
           <p:cNvPr id="4" name="">
             <a:extLst xmlns:a="http://schemas.openxmlformats.org/drawingml/2006/main">
               <a:ext uri="{FF2B5EF4-FFF2-40B4-BE49-F238E27FC236}">
-                <a16:creationId xmlns:a16="http://schemas.microsoft.com/office/drawing/2014/main" id="{B6DC0704-9121-4C8D-8ED1-148E6F9270E1}"/>
+                <a16:creationId xmlns:a16="http://schemas.microsoft.com/office/drawing/2014/main" id="{ED003F19-DEF6-46A8-AED2-708E2B70977E}"/>
               </a:ext>
             </a:extLst>
           </p:cNvPr>
@@ -20702,7 +20986,7 @@
           <p:cNvPr id="5" name="">
             <a:extLst xmlns:a="http://schemas.openxmlformats.org/drawingml/2006/main">
               <a:ext uri="{FF2B5EF4-FFF2-40B4-BE49-F238E27FC236}">
-                <a16:creationId xmlns:a16="http://schemas.microsoft.com/office/drawing/2014/main" id="{B5FD3039-37E8-441F-93BE-8B176A75F0A7}"/>
+                <a16:creationId xmlns:a16="http://schemas.microsoft.com/office/drawing/2014/main" id="{481FAC06-FAB8-44CF-A740-E81296B8C315}"/>
               </a:ext>
             </a:extLst>
           </p:cNvPr>
@@ -20766,7 +21050,7 @@
           <p:cNvPr id="6" name="">
             <a:extLst xmlns:a="http://schemas.openxmlformats.org/drawingml/2006/main">
               <a:ext uri="{FF2B5EF4-FFF2-40B4-BE49-F238E27FC236}">
-                <a16:creationId xmlns:a16="http://schemas.microsoft.com/office/drawing/2014/main" id="{5EAE6E91-AFDA-47B7-AE7E-CB0ED8A3EFB8}"/>
+                <a16:creationId xmlns:a16="http://schemas.microsoft.com/office/drawing/2014/main" id="{F34A4C9A-A3DD-4F77-B9AF-FC03725CFA55}"/>
               </a:ext>
             </a:extLst>
           </p:cNvPr>
@@ -20830,7 +21114,7 @@
           <p:cNvPr id="7" name="">
             <a:extLst xmlns:a="http://schemas.openxmlformats.org/drawingml/2006/main">
               <a:ext uri="{FF2B5EF4-FFF2-40B4-BE49-F238E27FC236}">
-                <a16:creationId xmlns:a16="http://schemas.microsoft.com/office/drawing/2014/main" id="{4E014A1A-D119-44BA-8B04-07E27426E120}"/>
+                <a16:creationId xmlns:a16="http://schemas.microsoft.com/office/drawing/2014/main" id="{D7661C3C-DB07-4D77-AD26-9759F1D104F7}"/>
               </a:ext>
             </a:extLst>
           </p:cNvPr>
@@ -20894,7 +21178,7 @@
           <p:cNvPr id="8" name="">
             <a:extLst xmlns:a="http://schemas.openxmlformats.org/drawingml/2006/main">
               <a:ext uri="{FF2B5EF4-FFF2-40B4-BE49-F238E27FC236}">
-                <a16:creationId xmlns:a16="http://schemas.microsoft.com/office/drawing/2014/main" id="{C62809B9-6D64-4F0C-BCA3-1E51DA711189}"/>
+                <a16:creationId xmlns:a16="http://schemas.microsoft.com/office/drawing/2014/main" id="{09814326-CD44-4582-9293-29D36DD10E3A}"/>
               </a:ext>
             </a:extLst>
           </p:cNvPr>
@@ -20929,7 +21213,7 @@
           <p:cNvPr id="9" name="">
             <a:extLst xmlns:a="http://schemas.openxmlformats.org/drawingml/2006/main">
               <a:ext uri="{FF2B5EF4-FFF2-40B4-BE49-F238E27FC236}">
-                <a16:creationId xmlns:a16="http://schemas.microsoft.com/office/drawing/2014/main" id="{DA7FA1C3-EB0E-4893-A367-FC5F5C58105E}"/>
+                <a16:creationId xmlns:a16="http://schemas.microsoft.com/office/drawing/2014/main" id="{0CBA14B8-26E0-4C31-8FE7-BA58029494FF}"/>
               </a:ext>
             </a:extLst>
           </p:cNvPr>
@@ -20964,7 +21248,7 @@
           <p:cNvPr id="10" name="">
             <a:extLst xmlns:a="http://schemas.openxmlformats.org/drawingml/2006/main">
               <a:ext uri="{FF2B5EF4-FFF2-40B4-BE49-F238E27FC236}">
-                <a16:creationId xmlns:a16="http://schemas.microsoft.com/office/drawing/2014/main" id="{85378FE2-3744-4303-95C3-C991502D0415}"/>
+                <a16:creationId xmlns:a16="http://schemas.microsoft.com/office/drawing/2014/main" id="{A31E2A99-758F-4BD5-A663-E77104F19FC0}"/>
               </a:ext>
             </a:extLst>
           </p:cNvPr>
@@ -21028,7 +21312,7 @@
           <p:cNvPr id="11" name="">
             <a:extLst xmlns:a="http://schemas.openxmlformats.org/drawingml/2006/main">
               <a:ext uri="{FF2B5EF4-FFF2-40B4-BE49-F238E27FC236}">
-                <a16:creationId xmlns:a16="http://schemas.microsoft.com/office/drawing/2014/main" id="{CB282642-984F-4A90-8184-94616C64DA7F}"/>
+                <a16:creationId xmlns:a16="http://schemas.microsoft.com/office/drawing/2014/main" id="{7F87D662-AE59-4E4B-A15E-F13CC515D678}"/>
               </a:ext>
             </a:extLst>
           </p:cNvPr>
@@ -21092,7 +21376,7 @@
           <p:cNvPr id="12" name="">
             <a:extLst xmlns:a="http://schemas.openxmlformats.org/drawingml/2006/main">
               <a:ext uri="{FF2B5EF4-FFF2-40B4-BE49-F238E27FC236}">
-                <a16:creationId xmlns:a16="http://schemas.microsoft.com/office/drawing/2014/main" id="{22626FA3-EC99-424F-A51F-A37A381063DD}"/>
+                <a16:creationId xmlns:a16="http://schemas.microsoft.com/office/drawing/2014/main" id="{D9EF2AC5-03A8-46F1-A4DC-9C759964F96C}"/>
               </a:ext>
             </a:extLst>
           </p:cNvPr>
@@ -21127,7 +21411,7 @@
           <p:cNvPr id="13" name="">
             <a:extLst xmlns:a="http://schemas.openxmlformats.org/drawingml/2006/main">
               <a:ext uri="{FF2B5EF4-FFF2-40B4-BE49-F238E27FC236}">
-                <a16:creationId xmlns:a16="http://schemas.microsoft.com/office/drawing/2014/main" id="{62277DF7-0714-4F96-940A-44E1A4ABA907}"/>
+                <a16:creationId xmlns:a16="http://schemas.microsoft.com/office/drawing/2014/main" id="{CF2369DA-4772-4A61-BACB-A346BAF33EF5}"/>
               </a:ext>
             </a:extLst>
           </p:cNvPr>
@@ -21162,7 +21446,7 @@
           <p:cNvPr id="14" name="">
             <a:extLst xmlns:a="http://schemas.openxmlformats.org/drawingml/2006/main">
               <a:ext uri="{FF2B5EF4-FFF2-40B4-BE49-F238E27FC236}">
-                <a16:creationId xmlns:a16="http://schemas.microsoft.com/office/drawing/2014/main" id="{776B98B1-EC22-4DF6-BEBE-F74D39ED4760}"/>
+                <a16:creationId xmlns:a16="http://schemas.microsoft.com/office/drawing/2014/main" id="{54A65E95-DC3C-4AD2-8B80-9CD98F5E1681}"/>
               </a:ext>
             </a:extLst>
           </p:cNvPr>
@@ -21226,7 +21510,7 @@
           <p:cNvPr id="15" name="">
             <a:extLst xmlns:a="http://schemas.openxmlformats.org/drawingml/2006/main">
               <a:ext uri="{FF2B5EF4-FFF2-40B4-BE49-F238E27FC236}">
-                <a16:creationId xmlns:a16="http://schemas.microsoft.com/office/drawing/2014/main" id="{1D364FA6-1969-4790-9DE5-F1668143FC61}"/>
+                <a16:creationId xmlns:a16="http://schemas.microsoft.com/office/drawing/2014/main" id="{1206A0D2-DA18-4D9E-93EE-67D2DF499D83}"/>
               </a:ext>
             </a:extLst>
           </p:cNvPr>
@@ -21290,7 +21574,7 @@
           <p:cNvPr id="16" name="">
             <a:extLst xmlns:a="http://schemas.openxmlformats.org/drawingml/2006/main">
               <a:ext uri="{FF2B5EF4-FFF2-40B4-BE49-F238E27FC236}">
-                <a16:creationId xmlns:a16="http://schemas.microsoft.com/office/drawing/2014/main" id="{D436041A-1277-45C4-A51A-A3A64EE3FE1D}"/>
+                <a16:creationId xmlns:a16="http://schemas.microsoft.com/office/drawing/2014/main" id="{5A66CE53-E5CA-4BC5-A52D-BA7424782874}"/>
               </a:ext>
             </a:extLst>
           </p:cNvPr>
@@ -21325,7 +21609,7 @@
           <p:cNvPr id="17" name="">
             <a:extLst xmlns:a="http://schemas.openxmlformats.org/drawingml/2006/main">
               <a:ext uri="{FF2B5EF4-FFF2-40B4-BE49-F238E27FC236}">
-                <a16:creationId xmlns:a16="http://schemas.microsoft.com/office/drawing/2014/main" id="{4E3926A8-6C38-4FFD-941E-544D6BEC585A}"/>
+                <a16:creationId xmlns:a16="http://schemas.microsoft.com/office/drawing/2014/main" id="{434FF29D-3B8C-40CA-9B1D-4FB4303D67FE}"/>
               </a:ext>
             </a:extLst>
           </p:cNvPr>
@@ -21360,7 +21644,7 @@
           <p:cNvPr id="18" name="">
             <a:extLst xmlns:a="http://schemas.openxmlformats.org/drawingml/2006/main">
               <a:ext uri="{FF2B5EF4-FFF2-40B4-BE49-F238E27FC236}">
-                <a16:creationId xmlns:a16="http://schemas.microsoft.com/office/drawing/2014/main" id="{E6E7252E-FAF8-4CA9-8B90-07A4464C592B}"/>
+                <a16:creationId xmlns:a16="http://schemas.microsoft.com/office/drawing/2014/main" id="{8F244906-5C79-487E-BF4C-DA6C870D4C12}"/>
               </a:ext>
             </a:extLst>
           </p:cNvPr>
@@ -21393,7 +21677,7 @@
           <p:cNvPr id="19" name="">
             <a:extLst xmlns:a="http://schemas.openxmlformats.org/drawingml/2006/main">
               <a:ext uri="{FF2B5EF4-FFF2-40B4-BE49-F238E27FC236}">
-                <a16:creationId xmlns:a16="http://schemas.microsoft.com/office/drawing/2014/main" id="{D2E8534C-C824-4F5D-A7BC-E1DAACF98BA6}"/>
+                <a16:creationId xmlns:a16="http://schemas.microsoft.com/office/drawing/2014/main" id="{0443567B-10C8-433D-9537-222EB0F3790F}"/>
               </a:ext>
             </a:extLst>
           </p:cNvPr>
@@ -21428,7 +21712,7 @@
           <p:cNvPr id="20" name="">
             <a:extLst xmlns:a="http://schemas.openxmlformats.org/drawingml/2006/main">
               <a:ext uri="{FF2B5EF4-FFF2-40B4-BE49-F238E27FC236}">
-                <a16:creationId xmlns:a16="http://schemas.microsoft.com/office/drawing/2014/main" id="{EE0D74B9-C596-45C6-ADAF-8426F7BA5772}"/>
+                <a16:creationId xmlns:a16="http://schemas.microsoft.com/office/drawing/2014/main" id="{48E4C0FD-2685-4D40-B959-2070EA0F9ABC}"/>
               </a:ext>
             </a:extLst>
           </p:cNvPr>
@@ -21492,7 +21776,7 @@
           <p:cNvPr id="21" name="">
             <a:extLst xmlns:a="http://schemas.openxmlformats.org/drawingml/2006/main">
               <a:ext uri="{FF2B5EF4-FFF2-40B4-BE49-F238E27FC236}">
-                <a16:creationId xmlns:a16="http://schemas.microsoft.com/office/drawing/2014/main" id="{BDFC361D-BAF4-4684-8251-89C81AFA7B6A}"/>
+                <a16:creationId xmlns:a16="http://schemas.microsoft.com/office/drawing/2014/main" id="{36670AC7-6125-43DB-8331-62D9D30EC5E6}"/>
               </a:ext>
             </a:extLst>
           </p:cNvPr>
@@ -21556,7 +21840,7 @@
           <p:cNvPr id="22" name="">
             <a:extLst xmlns:a="http://schemas.openxmlformats.org/drawingml/2006/main">
               <a:ext uri="{FF2B5EF4-FFF2-40B4-BE49-F238E27FC236}">
-                <a16:creationId xmlns:a16="http://schemas.microsoft.com/office/drawing/2014/main" id="{ECE8E6E5-49BC-464B-B5D2-4C494A8CD07D}"/>
+                <a16:creationId xmlns:a16="http://schemas.microsoft.com/office/drawing/2014/main" id="{0559F171-F487-4E43-8A77-679ADCA16CDF}"/>
               </a:ext>
             </a:extLst>
           </p:cNvPr>
@@ -21589,7 +21873,7 @@
           <p:cNvPr id="23" name="">
             <a:extLst xmlns:a="http://schemas.openxmlformats.org/drawingml/2006/main">
               <a:ext uri="{FF2B5EF4-FFF2-40B4-BE49-F238E27FC236}">
-                <a16:creationId xmlns:a16="http://schemas.microsoft.com/office/drawing/2014/main" id="{C741A906-182B-4532-A69A-8EEB078F10C6}"/>
+                <a16:creationId xmlns:a16="http://schemas.microsoft.com/office/drawing/2014/main" id="{3A178953-5D32-455F-A08D-096BB68CD042}"/>
               </a:ext>
             </a:extLst>
           </p:cNvPr>
@@ -21624,7 +21908,7 @@
           <p:cNvPr id="24" name="">
             <a:extLst xmlns:a="http://schemas.openxmlformats.org/drawingml/2006/main">
               <a:ext uri="{FF2B5EF4-FFF2-40B4-BE49-F238E27FC236}">
-                <a16:creationId xmlns:a16="http://schemas.microsoft.com/office/drawing/2014/main" id="{EA970AC6-B86F-48C3-860F-34107AD7A158}"/>
+                <a16:creationId xmlns:a16="http://schemas.microsoft.com/office/drawing/2014/main" id="{6C6D21AE-59DA-4400-BC96-2CA520BC0CD6}"/>
               </a:ext>
             </a:extLst>
           </p:cNvPr>
@@ -21688,7 +21972,7 @@
           <p:cNvPr id="25" name="">
             <a:extLst xmlns:a="http://schemas.openxmlformats.org/drawingml/2006/main">
               <a:ext uri="{FF2B5EF4-FFF2-40B4-BE49-F238E27FC236}">
-                <a16:creationId xmlns:a16="http://schemas.microsoft.com/office/drawing/2014/main" id="{DA5079D9-AE14-47E6-972D-3ACBB303C98B}"/>
+                <a16:creationId xmlns:a16="http://schemas.microsoft.com/office/drawing/2014/main" id="{EB98F0E8-F6E7-41A8-B931-5781EB1BBD0F}"/>
               </a:ext>
             </a:extLst>
           </p:cNvPr>
@@ -21752,7 +22036,7 @@
           <p:cNvPr id="26" name="">
             <a:extLst xmlns:a="http://schemas.openxmlformats.org/drawingml/2006/main">
               <a:ext uri="{FF2B5EF4-FFF2-40B4-BE49-F238E27FC236}">
-                <a16:creationId xmlns:a16="http://schemas.microsoft.com/office/drawing/2014/main" id="{D18E721F-1182-4C7F-930D-C5522B6A2B03}"/>
+                <a16:creationId xmlns:a16="http://schemas.microsoft.com/office/drawing/2014/main" id="{7D8EA2E9-533A-4F0A-8BA3-59918BF21D7D}"/>
               </a:ext>
             </a:extLst>
           </p:cNvPr>
@@ -21814,7 +22098,7 @@
     </p:spTree>
     <p:extLst>
       <p:ext uri="{BB962C8B-B14F-4D97-AF65-F5344CB8AC3E}">
-        <p14:creationId xmlns:p14="http://schemas.microsoft.com/office/powerpoint/2010/main" val="638539499"/>
+        <p14:creationId xmlns:p14="http://schemas.microsoft.com/office/powerpoint/2010/main" val="584593939"/>
       </p:ext>
     </p:extLst>
   </p:cSld>
@@ -21838,7 +22122,7 @@
           <p:cNvPr id="1" name="">
             <a:extLst xmlns:a="http://schemas.openxmlformats.org/drawingml/2006/main">
               <a:ext uri="{FF2B5EF4-FFF2-40B4-BE49-F238E27FC236}">
-                <a16:creationId xmlns:a16="http://schemas.microsoft.com/office/drawing/2014/main" id="{97A76001-028B-4AC1-BC33-55C068975200}"/>
+                <a16:creationId xmlns:a16="http://schemas.microsoft.com/office/drawing/2014/main" id="{995A92CB-831A-4794-9E0B-9E54DC7C92EC}"/>
               </a:ext>
             </a:extLst>
           </p:cNvPr>
@@ -21873,7 +22157,7 @@
           <p:cNvPr id="2" name="">
             <a:extLst xmlns:a="http://schemas.openxmlformats.org/drawingml/2006/main">
               <a:ext uri="{FF2B5EF4-FFF2-40B4-BE49-F238E27FC236}">
-                <a16:creationId xmlns:a16="http://schemas.microsoft.com/office/drawing/2014/main" id="{E80968E5-E63E-419A-B659-3FCB21A284B1}"/>
+                <a16:creationId xmlns:a16="http://schemas.microsoft.com/office/drawing/2014/main" id="{86B71CE4-ECFE-42B6-830F-BFA5ED4CCF09}"/>
               </a:ext>
             </a:extLst>
           </p:cNvPr>
@@ -21937,7 +22221,7 @@
           <p:cNvPr id="3" name="">
             <a:extLst xmlns:a="http://schemas.openxmlformats.org/drawingml/2006/main">
               <a:ext uri="{FF2B5EF4-FFF2-40B4-BE49-F238E27FC236}">
-                <a16:creationId xmlns:a16="http://schemas.microsoft.com/office/drawing/2014/main" id="{3F63C4E0-08C3-4623-A68E-C159081F62C7}"/>
+                <a16:creationId xmlns:a16="http://schemas.microsoft.com/office/drawing/2014/main" id="{21D95C83-80EB-449D-8C81-86938D5506BF}"/>
               </a:ext>
             </a:extLst>
           </p:cNvPr>
@@ -21972,7 +22256,7 @@
           <p:cNvPr id="4" name="">
             <a:extLst xmlns:a="http://schemas.openxmlformats.org/drawingml/2006/main">
               <a:ext uri="{FF2B5EF4-FFF2-40B4-BE49-F238E27FC236}">
-                <a16:creationId xmlns:a16="http://schemas.microsoft.com/office/drawing/2014/main" id="{83F2BDCB-355F-4E29-B75A-61C811E1D9A9}"/>
+                <a16:creationId xmlns:a16="http://schemas.microsoft.com/office/drawing/2014/main" id="{186D4508-5054-4D6B-AAAF-6F820018E199}"/>
               </a:ext>
             </a:extLst>
           </p:cNvPr>
@@ -22036,7 +22320,7 @@
           <p:cNvPr id="5" name="">
             <a:extLst xmlns:a="http://schemas.openxmlformats.org/drawingml/2006/main">
               <a:ext uri="{FF2B5EF4-FFF2-40B4-BE49-F238E27FC236}">
-                <a16:creationId xmlns:a16="http://schemas.microsoft.com/office/drawing/2014/main" id="{30F7F2CD-0386-48B1-97EA-AEFBF4816B2B}"/>
+                <a16:creationId xmlns:a16="http://schemas.microsoft.com/office/drawing/2014/main" id="{66F5C6C0-0200-45E6-B091-C6012C96AFEA}"/>
               </a:ext>
             </a:extLst>
           </p:cNvPr>
@@ -22100,7 +22384,7 @@
           <p:cNvPr id="6" name="">
             <a:extLst xmlns:a="http://schemas.openxmlformats.org/drawingml/2006/main">
               <a:ext uri="{FF2B5EF4-FFF2-40B4-BE49-F238E27FC236}">
-                <a16:creationId xmlns:a16="http://schemas.microsoft.com/office/drawing/2014/main" id="{3F02CE5D-8CDC-499F-88AD-120BF3212E20}"/>
+                <a16:creationId xmlns:a16="http://schemas.microsoft.com/office/drawing/2014/main" id="{7C66E03B-707F-4D3A-A91E-FB83C167D4A8}"/>
               </a:ext>
             </a:extLst>
           </p:cNvPr>
@@ -22133,7 +22417,7 @@
           <p:cNvPr id="7" name="">
             <a:extLst xmlns:a="http://schemas.openxmlformats.org/drawingml/2006/main">
               <a:ext uri="{FF2B5EF4-FFF2-40B4-BE49-F238E27FC236}">
-                <a16:creationId xmlns:a16="http://schemas.microsoft.com/office/drawing/2014/main" id="{1FF007DC-181C-484D-BAA4-7053DA2983D2}"/>
+                <a16:creationId xmlns:a16="http://schemas.microsoft.com/office/drawing/2014/main" id="{20570743-FF32-4DB9-89D6-1DA3635A6DCA}"/>
               </a:ext>
             </a:extLst>
           </p:cNvPr>
@@ -22168,7 +22452,7 @@
           <p:cNvPr id="8" name="">
             <a:extLst xmlns:a="http://schemas.openxmlformats.org/drawingml/2006/main">
               <a:ext uri="{FF2B5EF4-FFF2-40B4-BE49-F238E27FC236}">
-                <a16:creationId xmlns:a16="http://schemas.microsoft.com/office/drawing/2014/main" id="{2B9AB104-8762-45EC-A5A3-FB5FFC29A018}"/>
+                <a16:creationId xmlns:a16="http://schemas.microsoft.com/office/drawing/2014/main" id="{F6CB1F17-5D1F-4BA7-8103-DB8A7C0E8E8B}"/>
               </a:ext>
             </a:extLst>
           </p:cNvPr>
@@ -22232,7 +22516,7 @@
           <p:cNvPr id="9" name="">
             <a:extLst xmlns:a="http://schemas.openxmlformats.org/drawingml/2006/main">
               <a:ext uri="{FF2B5EF4-FFF2-40B4-BE49-F238E27FC236}">
-                <a16:creationId xmlns:a16="http://schemas.microsoft.com/office/drawing/2014/main" id="{05D667CD-0481-4667-BA52-7C55BA31C9AC}"/>
+                <a16:creationId xmlns:a16="http://schemas.microsoft.com/office/drawing/2014/main" id="{E1279BD0-8078-4709-B4BA-74830938907C}"/>
               </a:ext>
             </a:extLst>
           </p:cNvPr>
@@ -22296,7 +22580,7 @@
           <p:cNvPr id="10" name="">
             <a:extLst xmlns:a="http://schemas.openxmlformats.org/drawingml/2006/main">
               <a:ext uri="{FF2B5EF4-FFF2-40B4-BE49-F238E27FC236}">
-                <a16:creationId xmlns:a16="http://schemas.microsoft.com/office/drawing/2014/main" id="{D621A28B-B916-4466-86AF-E835B9A00751}"/>
+                <a16:creationId xmlns:a16="http://schemas.microsoft.com/office/drawing/2014/main" id="{B7CE5FFF-B773-459D-A85F-9B9F42291152}"/>
               </a:ext>
             </a:extLst>
           </p:cNvPr>
@@ -22360,7 +22644,7 @@
           <p:cNvPr id="11" name="">
             <a:extLst xmlns:a="http://schemas.openxmlformats.org/drawingml/2006/main">
               <a:ext uri="{FF2B5EF4-FFF2-40B4-BE49-F238E27FC236}">
-                <a16:creationId xmlns:a16="http://schemas.microsoft.com/office/drawing/2014/main" id="{016093AC-1B86-4646-A91A-697842A31D7F}"/>
+                <a16:creationId xmlns:a16="http://schemas.microsoft.com/office/drawing/2014/main" id="{C71E9BEB-1194-4896-AE95-690ED2D2DD81}"/>
               </a:ext>
             </a:extLst>
           </p:cNvPr>
@@ -22395,7 +22679,7 @@
           <p:cNvPr id="12" name="">
             <a:extLst xmlns:a="http://schemas.openxmlformats.org/drawingml/2006/main">
               <a:ext uri="{FF2B5EF4-FFF2-40B4-BE49-F238E27FC236}">
-                <a16:creationId xmlns:a16="http://schemas.microsoft.com/office/drawing/2014/main" id="{E6D74F76-7C2D-44D7-9ECC-D64D8C590182}"/>
+                <a16:creationId xmlns:a16="http://schemas.microsoft.com/office/drawing/2014/main" id="{71B43D1F-FE34-4BFE-BE8E-288263F656F9}"/>
               </a:ext>
             </a:extLst>
           </p:cNvPr>
@@ -22459,7 +22743,7 @@
           <p:cNvPr id="13" name="">
             <a:extLst xmlns:a="http://schemas.openxmlformats.org/drawingml/2006/main">
               <a:ext uri="{FF2B5EF4-FFF2-40B4-BE49-F238E27FC236}">
-                <a16:creationId xmlns:a16="http://schemas.microsoft.com/office/drawing/2014/main" id="{BC9D2DFB-F7E4-476D-A8C4-8EB3B9D0C22B}"/>
+                <a16:creationId xmlns:a16="http://schemas.microsoft.com/office/drawing/2014/main" id="{32A57D37-A61C-4263-ABB7-988351E74BE2}"/>
               </a:ext>
             </a:extLst>
           </p:cNvPr>
@@ -22494,7 +22778,7 @@
           <p:cNvPr id="14" name="">
             <a:extLst xmlns:a="http://schemas.openxmlformats.org/drawingml/2006/main">
               <a:ext uri="{FF2B5EF4-FFF2-40B4-BE49-F238E27FC236}">
-                <a16:creationId xmlns:a16="http://schemas.microsoft.com/office/drawing/2014/main" id="{748C3D4C-8D37-4050-8D21-623F56FAC61A}"/>
+                <a16:creationId xmlns:a16="http://schemas.microsoft.com/office/drawing/2014/main" id="{9245360E-4239-4933-8197-6DF63CC8FFE2}"/>
               </a:ext>
             </a:extLst>
           </p:cNvPr>
@@ -22558,7 +22842,7 @@
           <p:cNvPr id="15" name="">
             <a:extLst xmlns:a="http://schemas.openxmlformats.org/drawingml/2006/main">
               <a:ext uri="{FF2B5EF4-FFF2-40B4-BE49-F238E27FC236}">
-                <a16:creationId xmlns:a16="http://schemas.microsoft.com/office/drawing/2014/main" id="{1F1147D7-9170-49CD-A9CB-E9A63C910742}"/>
+                <a16:creationId xmlns:a16="http://schemas.microsoft.com/office/drawing/2014/main" id="{4866A86D-381E-46AD-9980-46E8D9108634}"/>
               </a:ext>
             </a:extLst>
           </p:cNvPr>
@@ -22593,7 +22877,7 @@
           <p:cNvPr id="16" name="">
             <a:extLst xmlns:a="http://schemas.openxmlformats.org/drawingml/2006/main">
               <a:ext uri="{FF2B5EF4-FFF2-40B4-BE49-F238E27FC236}">
-                <a16:creationId xmlns:a16="http://schemas.microsoft.com/office/drawing/2014/main" id="{05D6A544-66C3-4DD0-B458-9F61F14B095E}"/>
+                <a16:creationId xmlns:a16="http://schemas.microsoft.com/office/drawing/2014/main" id="{332D0DB5-229A-424E-8FDA-00597DD91B6B}"/>
               </a:ext>
             </a:extLst>
           </p:cNvPr>
@@ -22657,7 +22941,7 @@
           <p:cNvPr id="17" name="">
             <a:extLst xmlns:a="http://schemas.openxmlformats.org/drawingml/2006/main">
               <a:ext uri="{FF2B5EF4-FFF2-40B4-BE49-F238E27FC236}">
-                <a16:creationId xmlns:a16="http://schemas.microsoft.com/office/drawing/2014/main" id="{0861F5EA-4937-44FC-8C45-443DDBC7C332}"/>
+                <a16:creationId xmlns:a16="http://schemas.microsoft.com/office/drawing/2014/main" id="{6E1D2A45-7BA2-4E7F-AC51-0B2D28988AC9}"/>
               </a:ext>
             </a:extLst>
           </p:cNvPr>
@@ -22692,7 +22976,7 @@
           <p:cNvPr id="18" name="">
             <a:extLst xmlns:a="http://schemas.openxmlformats.org/drawingml/2006/main">
               <a:ext uri="{FF2B5EF4-FFF2-40B4-BE49-F238E27FC236}">
-                <a16:creationId xmlns:a16="http://schemas.microsoft.com/office/drawing/2014/main" id="{01864444-922F-4C34-9806-D011941662A8}"/>
+                <a16:creationId xmlns:a16="http://schemas.microsoft.com/office/drawing/2014/main" id="{022A8461-0426-4AC5-955F-076308A50E0E}"/>
               </a:ext>
             </a:extLst>
           </p:cNvPr>
@@ -22756,7 +23040,7 @@
           <p:cNvPr id="19" name="">
             <a:extLst xmlns:a="http://schemas.openxmlformats.org/drawingml/2006/main">
               <a:ext uri="{FF2B5EF4-FFF2-40B4-BE49-F238E27FC236}">
-                <a16:creationId xmlns:a16="http://schemas.microsoft.com/office/drawing/2014/main" id="{325ED997-0A76-428B-A008-956497E55CDE}"/>
+                <a16:creationId xmlns:a16="http://schemas.microsoft.com/office/drawing/2014/main" id="{2A95DC29-98D2-4CC7-9116-FE84972CAFFE}"/>
               </a:ext>
             </a:extLst>
           </p:cNvPr>
@@ -22791,7 +23075,7 @@
           <p:cNvPr id="20" name="">
             <a:extLst xmlns:a="http://schemas.openxmlformats.org/drawingml/2006/main">
               <a:ext uri="{FF2B5EF4-FFF2-40B4-BE49-F238E27FC236}">
-                <a16:creationId xmlns:a16="http://schemas.microsoft.com/office/drawing/2014/main" id="{2491E3CD-3533-4A3F-96C2-AB58610D1BE1}"/>
+                <a16:creationId xmlns:a16="http://schemas.microsoft.com/office/drawing/2014/main" id="{39331131-BA78-4930-AE8E-9E2E0674414A}"/>
               </a:ext>
             </a:extLst>
           </p:cNvPr>
@@ -22826,7 +23110,7 @@
           <p:cNvPr id="21" name="">
             <a:extLst xmlns:a="http://schemas.openxmlformats.org/drawingml/2006/main">
               <a:ext uri="{FF2B5EF4-FFF2-40B4-BE49-F238E27FC236}">
-                <a16:creationId xmlns:a16="http://schemas.microsoft.com/office/drawing/2014/main" id="{9393FAFB-E220-4F8F-8A7B-49DAAB09D9F4}"/>
+                <a16:creationId xmlns:a16="http://schemas.microsoft.com/office/drawing/2014/main" id="{D692067C-47B8-4E93-8275-2ADE35D25848}"/>
               </a:ext>
             </a:extLst>
           </p:cNvPr>
@@ -22859,7 +23143,7 @@
           <p:cNvPr id="22" name="">
             <a:extLst xmlns:a="http://schemas.openxmlformats.org/drawingml/2006/main">
               <a:ext uri="{FF2B5EF4-FFF2-40B4-BE49-F238E27FC236}">
-                <a16:creationId xmlns:a16="http://schemas.microsoft.com/office/drawing/2014/main" id="{EE363488-3ED3-4550-A96A-12C1310FED91}"/>
+                <a16:creationId xmlns:a16="http://schemas.microsoft.com/office/drawing/2014/main" id="{1C4E2258-3350-42DA-A11B-AE450268436B}"/>
               </a:ext>
             </a:extLst>
           </p:cNvPr>
@@ -22923,7 +23207,7 @@
           <p:cNvPr id="23" name="">
             <a:extLst xmlns:a="http://schemas.openxmlformats.org/drawingml/2006/main">
               <a:ext uri="{FF2B5EF4-FFF2-40B4-BE49-F238E27FC236}">
-                <a16:creationId xmlns:a16="http://schemas.microsoft.com/office/drawing/2014/main" id="{646A7570-977B-48F5-B636-09F583F0BD05}"/>
+                <a16:creationId xmlns:a16="http://schemas.microsoft.com/office/drawing/2014/main" id="{D3EE2CE3-1C15-4E62-BDB8-CB4E335CDEFE}"/>
               </a:ext>
             </a:extLst>
           </p:cNvPr>
@@ -22987,7 +23271,7 @@
           <p:cNvPr id="24" name="">
             <a:extLst xmlns:a="http://schemas.openxmlformats.org/drawingml/2006/main">
               <a:ext uri="{FF2B5EF4-FFF2-40B4-BE49-F238E27FC236}">
-                <a16:creationId xmlns:a16="http://schemas.microsoft.com/office/drawing/2014/main" id="{FD647A1D-69D8-4026-B9FF-C5307B1AE222}"/>
+                <a16:creationId xmlns:a16="http://schemas.microsoft.com/office/drawing/2014/main" id="{894CE97B-DE21-4585-A014-134ED5287D9D}"/>
               </a:ext>
             </a:extLst>
           </p:cNvPr>
@@ -23049,7 +23333,7 @@
     </p:spTree>
     <p:extLst>
       <p:ext uri="{BB962C8B-B14F-4D97-AF65-F5344CB8AC3E}">
-        <p14:creationId xmlns:p14="http://schemas.microsoft.com/office/powerpoint/2010/main" val="1994327248"/>
+        <p14:creationId xmlns:p14="http://schemas.microsoft.com/office/powerpoint/2010/main" val="117757649"/>
       </p:ext>
     </p:extLst>
   </p:cSld>
